--- a/slides/Lecture_Chapter08.pptx
+++ b/slides/Lecture_Chapter08.pptx
@@ -316,7 +316,7 @@
           <a:p>
             <a:fld id="{3E22BF2E-04DA-469E-97C5-BB68A0368813}" type="datetimeFigureOut">
               <a:rPr lang="en-US" smtClean="0"/>
-              <a:t>11/6/2025</a:t>
+              <a:t>11/29/2025</a:t>
             </a:fld>
             <a:endParaRPr lang="en-US"/>
           </a:p>
@@ -514,7 +514,7 @@
           <a:p>
             <a:fld id="{3E22BF2E-04DA-469E-97C5-BB68A0368813}" type="datetimeFigureOut">
               <a:rPr lang="en-US" smtClean="0"/>
-              <a:t>11/6/2025</a:t>
+              <a:t>11/29/2025</a:t>
             </a:fld>
             <a:endParaRPr lang="en-US"/>
           </a:p>
@@ -722,7 +722,7 @@
           <a:p>
             <a:fld id="{3E22BF2E-04DA-469E-97C5-BB68A0368813}" type="datetimeFigureOut">
               <a:rPr lang="en-US" smtClean="0"/>
-              <a:t>11/6/2025</a:t>
+              <a:t>11/29/2025</a:t>
             </a:fld>
             <a:endParaRPr lang="en-US"/>
           </a:p>
@@ -930,7 +930,7 @@
           <a:p>
             <a:fld id="{3E22BF2E-04DA-469E-97C5-BB68A0368813}" type="datetimeFigureOut">
               <a:rPr lang="en-US" smtClean="0"/>
-              <a:t>11/6/2025</a:t>
+              <a:t>11/29/2025</a:t>
             </a:fld>
             <a:endParaRPr lang="en-US"/>
           </a:p>
@@ -1205,7 +1205,7 @@
           <a:p>
             <a:fld id="{3E22BF2E-04DA-469E-97C5-BB68A0368813}" type="datetimeFigureOut">
               <a:rPr lang="en-US" smtClean="0"/>
-              <a:t>11/6/2025</a:t>
+              <a:t>11/29/2025</a:t>
             </a:fld>
             <a:endParaRPr lang="en-US"/>
           </a:p>
@@ -1470,7 +1470,7 @@
           <a:p>
             <a:fld id="{3E22BF2E-04DA-469E-97C5-BB68A0368813}" type="datetimeFigureOut">
               <a:rPr lang="en-US" smtClean="0"/>
-              <a:t>11/6/2025</a:t>
+              <a:t>11/29/2025</a:t>
             </a:fld>
             <a:endParaRPr lang="en-US"/>
           </a:p>
@@ -1882,7 +1882,7 @@
           <a:p>
             <a:fld id="{3E22BF2E-04DA-469E-97C5-BB68A0368813}" type="datetimeFigureOut">
               <a:rPr lang="en-US" smtClean="0"/>
-              <a:t>11/6/2025</a:t>
+              <a:t>11/29/2025</a:t>
             </a:fld>
             <a:endParaRPr lang="en-US"/>
           </a:p>
@@ -2023,7 +2023,7 @@
           <a:p>
             <a:fld id="{3E22BF2E-04DA-469E-97C5-BB68A0368813}" type="datetimeFigureOut">
               <a:rPr lang="en-US" smtClean="0"/>
-              <a:t>11/6/2025</a:t>
+              <a:t>11/29/2025</a:t>
             </a:fld>
             <a:endParaRPr lang="en-US"/>
           </a:p>
@@ -2136,7 +2136,7 @@
           <a:p>
             <a:fld id="{3E22BF2E-04DA-469E-97C5-BB68A0368813}" type="datetimeFigureOut">
               <a:rPr lang="en-US" smtClean="0"/>
-              <a:t>11/6/2025</a:t>
+              <a:t>11/29/2025</a:t>
             </a:fld>
             <a:endParaRPr lang="en-US"/>
           </a:p>
@@ -2447,7 +2447,7 @@
           <a:p>
             <a:fld id="{3E22BF2E-04DA-469E-97C5-BB68A0368813}" type="datetimeFigureOut">
               <a:rPr lang="en-US" smtClean="0"/>
-              <a:t>11/6/2025</a:t>
+              <a:t>11/29/2025</a:t>
             </a:fld>
             <a:endParaRPr lang="en-US"/>
           </a:p>
@@ -2735,7 +2735,7 @@
           <a:p>
             <a:fld id="{3E22BF2E-04DA-469E-97C5-BB68A0368813}" type="datetimeFigureOut">
               <a:rPr lang="en-US" smtClean="0"/>
-              <a:t>11/6/2025</a:t>
+              <a:t>11/29/2025</a:t>
             </a:fld>
             <a:endParaRPr lang="en-US"/>
           </a:p>
@@ -2976,7 +2976,7 @@
           <a:p>
             <a:fld id="{3E22BF2E-04DA-469E-97C5-BB68A0368813}" type="datetimeFigureOut">
               <a:rPr lang="en-US" smtClean="0"/>
-              <a:t>11/6/2025</a:t>
+              <a:t>11/29/2025</a:t>
             </a:fld>
             <a:endParaRPr lang="en-US"/>
           </a:p>
@@ -3493,7 +3493,7 @@
         </p:blipFill>
         <p:spPr bwMode="auto">
           <a:xfrm>
-            <a:off x="3653200" y="-18278"/>
+            <a:off x="3523485" y="0"/>
             <a:ext cx="8668512" cy="6857990"/>
           </a:xfrm>
           <a:prstGeom prst="rect">
@@ -3951,6 +3951,53 @@
           <a:prstGeom prst="rect">
             <a:avLst/>
           </a:prstGeom>
+        </p:spPr>
+      </p:pic>
+      <p:pic>
+        <p:nvPicPr>
+          <p:cNvPr id="6" name="Picture 5">
+            <a:extLst>
+              <a:ext uri="{FF2B5EF4-FFF2-40B4-BE49-F238E27FC236}">
+                <a16:creationId xmlns:a16="http://schemas.microsoft.com/office/drawing/2014/main" id="{8AD28C7D-14A3-CFEB-3DEC-2E01272844F2}"/>
+              </a:ext>
+            </a:extLst>
+          </p:cNvPr>
+          <p:cNvPicPr>
+            <a:picLocks noChangeAspect="1" noChangeArrowheads="1"/>
+          </p:cNvPicPr>
+          <p:nvPr/>
+        </p:nvPicPr>
+        <p:blipFill>
+          <a:blip r:embed="rId5">
+            <a:extLst>
+              <a:ext uri="{28A0092B-C50C-407E-A947-70E740481C1C}">
+                <a14:useLocalDpi xmlns:a14="http://schemas.microsoft.com/office/drawing/2010/main" val="0"/>
+              </a:ext>
+            </a:extLst>
+          </a:blip>
+          <a:srcRect/>
+          <a:stretch>
+            <a:fillRect/>
+          </a:stretch>
+        </p:blipFill>
+        <p:spPr bwMode="auto">
+          <a:xfrm>
+            <a:off x="7857741" y="125210"/>
+            <a:ext cx="4182403" cy="1000945"/>
+          </a:xfrm>
+          <a:prstGeom prst="rect">
+            <a:avLst/>
+          </a:prstGeom>
+          <a:noFill/>
+          <a:extLst>
+            <a:ext uri="{909E8E84-426E-40DD-AFC4-6F175D3DCCD1}">
+              <a14:hiddenFill xmlns:a14="http://schemas.microsoft.com/office/drawing/2010/main">
+                <a:solidFill>
+                  <a:srgbClr val="FFFFFF"/>
+                </a:solidFill>
+              </a14:hiddenFill>
+            </a:ext>
+          </a:extLst>
         </p:spPr>
       </p:pic>
     </p:spTree>
@@ -5172,8 +5219,8 @@
           </a:p>
         </p:txBody>
       </p:sp>
-      <mc:AlternateContent xmlns:mc="http://schemas.openxmlformats.org/markup-compatibility/2006">
-        <mc:Choice xmlns:a14="http://schemas.microsoft.com/office/drawing/2010/main" Requires="a14">
+      <mc:AlternateContent xmlns:mc="http://schemas.openxmlformats.org/markup-compatibility/2006" xmlns:a14="http://schemas.microsoft.com/office/drawing/2010/main">
+        <mc:Choice Requires="a14">
           <p:sp>
             <p:nvSpPr>
               <p:cNvPr id="3" name="Content Placeholder 2">
@@ -5302,7 +5349,7 @@
             </p:txBody>
           </p:sp>
         </mc:Choice>
-        <mc:Fallback>
+        <mc:Fallback xmlns="">
           <p:sp>
             <p:nvSpPr>
               <p:cNvPr id="3" name="Content Placeholder 2">
@@ -5828,8 +5875,8 @@
           </a:p>
         </p:txBody>
       </p:sp>
-      <mc:AlternateContent xmlns:mc="http://schemas.openxmlformats.org/markup-compatibility/2006">
-        <mc:Choice xmlns:a14="http://schemas.microsoft.com/office/drawing/2010/main" Requires="a14">
+      <mc:AlternateContent xmlns:mc="http://schemas.openxmlformats.org/markup-compatibility/2006" xmlns:a14="http://schemas.microsoft.com/office/drawing/2010/main">
+        <mc:Choice Requires="a14">
           <p:sp>
             <p:nvSpPr>
               <p:cNvPr id="3" name="Content Placeholder 2">
@@ -6119,7 +6166,7 @@
             </p:txBody>
           </p:sp>
         </mc:Choice>
-        <mc:Fallback>
+        <mc:Fallback xmlns="">
           <p:sp>
             <p:nvSpPr>
               <p:cNvPr id="3" name="Content Placeholder 2">
@@ -6323,8 +6370,8 @@
           </a:p>
         </p:txBody>
       </p:sp>
-      <mc:AlternateContent xmlns:mc="http://schemas.openxmlformats.org/markup-compatibility/2006">
-        <mc:Choice xmlns:a14="http://schemas.microsoft.com/office/drawing/2010/main" Requires="a14">
+      <mc:AlternateContent xmlns:mc="http://schemas.openxmlformats.org/markup-compatibility/2006" xmlns:a14="http://schemas.microsoft.com/office/drawing/2010/main">
+        <mc:Choice Requires="a14">
           <p:sp>
             <p:nvSpPr>
               <p:cNvPr id="8" name="Speech Bubble: Rectangle with Corners Rounded 7">
@@ -6423,7 +6470,7 @@
             </p:txBody>
           </p:sp>
         </mc:Choice>
-        <mc:Fallback>
+        <mc:Fallback xmlns="">
           <p:sp>
             <p:nvSpPr>
               <p:cNvPr id="8" name="Speech Bubble: Rectangle with Corners Rounded 7">
@@ -10663,8 +10710,8 @@
           </a:p>
         </p:txBody>
       </p:sp>
-      <mc:AlternateContent xmlns:mc="http://schemas.openxmlformats.org/markup-compatibility/2006">
-        <mc:Choice xmlns:a14="http://schemas.microsoft.com/office/drawing/2010/main" Requires="a14">
+      <mc:AlternateContent xmlns:mc="http://schemas.openxmlformats.org/markup-compatibility/2006" xmlns:a14="http://schemas.microsoft.com/office/drawing/2010/main">
+        <mc:Choice Requires="a14">
           <p:sp>
             <p:nvSpPr>
               <p:cNvPr id="3" name="Content Placeholder 2">
@@ -10888,7 +10935,7 @@
             </p:txBody>
           </p:sp>
         </mc:Choice>
-        <mc:Fallback>
+        <mc:Fallback xmlns="">
           <p:sp>
             <p:nvSpPr>
               <p:cNvPr id="3" name="Content Placeholder 2">

--- a/slides/Lecture_Chapter08.pptx
+++ b/slides/Lecture_Chapter08.pptx
@@ -6,27 +6,28 @@
   </p:sldMasterIdLst>
   <p:sldIdLst>
     <p:sldId id="256" r:id="rId2"/>
-    <p:sldId id="478" r:id="rId3"/>
-    <p:sldId id="393" r:id="rId4"/>
-    <p:sldId id="385" r:id="rId5"/>
-    <p:sldId id="386" r:id="rId6"/>
-    <p:sldId id="392" r:id="rId7"/>
-    <p:sldId id="388" r:id="rId8"/>
-    <p:sldId id="389" r:id="rId9"/>
-    <p:sldId id="390" r:id="rId10"/>
-    <p:sldId id="394" r:id="rId11"/>
-    <p:sldId id="391" r:id="rId12"/>
-    <p:sldId id="396" r:id="rId13"/>
-    <p:sldId id="398" r:id="rId14"/>
-    <p:sldId id="399" r:id="rId15"/>
-    <p:sldId id="400" r:id="rId16"/>
-    <p:sldId id="402" r:id="rId17"/>
-    <p:sldId id="403" r:id="rId18"/>
-    <p:sldId id="404" r:id="rId19"/>
-    <p:sldId id="405" r:id="rId20"/>
-    <p:sldId id="406" r:id="rId21"/>
-    <p:sldId id="407" r:id="rId22"/>
-    <p:sldId id="408" r:id="rId23"/>
+    <p:sldId id="313" r:id="rId3"/>
+    <p:sldId id="478" r:id="rId4"/>
+    <p:sldId id="393" r:id="rId5"/>
+    <p:sldId id="385" r:id="rId6"/>
+    <p:sldId id="386" r:id="rId7"/>
+    <p:sldId id="392" r:id="rId8"/>
+    <p:sldId id="388" r:id="rId9"/>
+    <p:sldId id="389" r:id="rId10"/>
+    <p:sldId id="390" r:id="rId11"/>
+    <p:sldId id="394" r:id="rId12"/>
+    <p:sldId id="391" r:id="rId13"/>
+    <p:sldId id="396" r:id="rId14"/>
+    <p:sldId id="398" r:id="rId15"/>
+    <p:sldId id="399" r:id="rId16"/>
+    <p:sldId id="400" r:id="rId17"/>
+    <p:sldId id="402" r:id="rId18"/>
+    <p:sldId id="403" r:id="rId19"/>
+    <p:sldId id="404" r:id="rId20"/>
+    <p:sldId id="405" r:id="rId21"/>
+    <p:sldId id="406" r:id="rId22"/>
+    <p:sldId id="407" r:id="rId23"/>
+    <p:sldId id="408" r:id="rId24"/>
   </p:sldIdLst>
   <p:sldSz cx="12192000" cy="6858000"/>
   <p:notesSz cx="6858000" cy="9144000"/>
@@ -131,6 +132,7 @@
         <p14:section name="Default Section" id="{83286E67-F0F0-421C-8F74-7B93ABA17FBF}">
           <p14:sldIdLst>
             <p14:sldId id="256"/>
+            <p14:sldId id="313"/>
             <p14:sldId id="478"/>
           </p14:sldIdLst>
         </p14:section>
@@ -326,7 +328,7 @@
           <a:p>
             <a:fld id="{3E22BF2E-04DA-469E-97C5-BB68A0368813}" type="datetimeFigureOut">
               <a:rPr lang="en-US" smtClean="0"/>
-              <a:t>2/5/2026</a:t>
+              <a:t>2/6/2026</a:t>
             </a:fld>
             <a:endParaRPr lang="en-US"/>
           </a:p>
@@ -524,7 +526,7 @@
           <a:p>
             <a:fld id="{3E22BF2E-04DA-469E-97C5-BB68A0368813}" type="datetimeFigureOut">
               <a:rPr lang="en-US" smtClean="0"/>
-              <a:t>2/5/2026</a:t>
+              <a:t>2/6/2026</a:t>
             </a:fld>
             <a:endParaRPr lang="en-US"/>
           </a:p>
@@ -732,7 +734,7 @@
           <a:p>
             <a:fld id="{3E22BF2E-04DA-469E-97C5-BB68A0368813}" type="datetimeFigureOut">
               <a:rPr lang="en-US" smtClean="0"/>
-              <a:t>2/5/2026</a:t>
+              <a:t>2/6/2026</a:t>
             </a:fld>
             <a:endParaRPr lang="en-US"/>
           </a:p>
@@ -940,7 +942,7 @@
           <a:p>
             <a:fld id="{3E22BF2E-04DA-469E-97C5-BB68A0368813}" type="datetimeFigureOut">
               <a:rPr lang="en-US" smtClean="0"/>
-              <a:t>2/5/2026</a:t>
+              <a:t>2/6/2026</a:t>
             </a:fld>
             <a:endParaRPr lang="en-US"/>
           </a:p>
@@ -1215,7 +1217,7 @@
           <a:p>
             <a:fld id="{3E22BF2E-04DA-469E-97C5-BB68A0368813}" type="datetimeFigureOut">
               <a:rPr lang="en-US" smtClean="0"/>
-              <a:t>2/5/2026</a:t>
+              <a:t>2/6/2026</a:t>
             </a:fld>
             <a:endParaRPr lang="en-US"/>
           </a:p>
@@ -1480,7 +1482,7 @@
           <a:p>
             <a:fld id="{3E22BF2E-04DA-469E-97C5-BB68A0368813}" type="datetimeFigureOut">
               <a:rPr lang="en-US" smtClean="0"/>
-              <a:t>2/5/2026</a:t>
+              <a:t>2/6/2026</a:t>
             </a:fld>
             <a:endParaRPr lang="en-US"/>
           </a:p>
@@ -1892,7 +1894,7 @@
           <a:p>
             <a:fld id="{3E22BF2E-04DA-469E-97C5-BB68A0368813}" type="datetimeFigureOut">
               <a:rPr lang="en-US" smtClean="0"/>
-              <a:t>2/5/2026</a:t>
+              <a:t>2/6/2026</a:t>
             </a:fld>
             <a:endParaRPr lang="en-US"/>
           </a:p>
@@ -2033,7 +2035,7 @@
           <a:p>
             <a:fld id="{3E22BF2E-04DA-469E-97C5-BB68A0368813}" type="datetimeFigureOut">
               <a:rPr lang="en-US" smtClean="0"/>
-              <a:t>2/5/2026</a:t>
+              <a:t>2/6/2026</a:t>
             </a:fld>
             <a:endParaRPr lang="en-US"/>
           </a:p>
@@ -2146,7 +2148,7 @@
           <a:p>
             <a:fld id="{3E22BF2E-04DA-469E-97C5-BB68A0368813}" type="datetimeFigureOut">
               <a:rPr lang="en-US" smtClean="0"/>
-              <a:t>2/5/2026</a:t>
+              <a:t>2/6/2026</a:t>
             </a:fld>
             <a:endParaRPr lang="en-US"/>
           </a:p>
@@ -2457,7 +2459,7 @@
           <a:p>
             <a:fld id="{3E22BF2E-04DA-469E-97C5-BB68A0368813}" type="datetimeFigureOut">
               <a:rPr lang="en-US" smtClean="0"/>
-              <a:t>2/5/2026</a:t>
+              <a:t>2/6/2026</a:t>
             </a:fld>
             <a:endParaRPr lang="en-US"/>
           </a:p>
@@ -2745,7 +2747,7 @@
           <a:p>
             <a:fld id="{3E22BF2E-04DA-469E-97C5-BB68A0368813}" type="datetimeFigureOut">
               <a:rPr lang="en-US" smtClean="0"/>
-              <a:t>2/5/2026</a:t>
+              <a:t>2/6/2026</a:t>
             </a:fld>
             <a:endParaRPr lang="en-US"/>
           </a:p>
@@ -2986,7 +2988,7 @@
           <a:p>
             <a:fld id="{3E22BF2E-04DA-469E-97C5-BB68A0368813}" type="datetimeFigureOut">
               <a:rPr lang="en-US" smtClean="0"/>
-              <a:t>2/5/2026</a:t>
+              <a:t>2/6/2026</a:t>
             </a:fld>
             <a:endParaRPr lang="en-US"/>
           </a:p>
@@ -4024,6 +4026,201 @@
 </file>
 
 <file path=ppt/slides/slide10.xml><?xml version="1.0" encoding="utf-8"?>
+<p:sld xmlns:a="http://schemas.openxmlformats.org/drawingml/2006/main" xmlns:r="http://schemas.openxmlformats.org/officeDocument/2006/relationships" xmlns:p="http://schemas.openxmlformats.org/presentationml/2006/main">
+  <p:cSld>
+    <p:spTree>
+      <p:nvGrpSpPr>
+        <p:cNvPr id="1" name=""/>
+        <p:cNvGrpSpPr/>
+        <p:nvPr/>
+      </p:nvGrpSpPr>
+      <p:grpSpPr>
+        <a:xfrm>
+          <a:off x="0" y="0"/>
+          <a:ext cx="0" cy="0"/>
+          <a:chOff x="0" y="0"/>
+          <a:chExt cx="0" cy="0"/>
+        </a:xfrm>
+      </p:grpSpPr>
+      <p:sp>
+        <p:nvSpPr>
+          <p:cNvPr id="5" name="Title 4">
+            <a:extLst>
+              <a:ext uri="{FF2B5EF4-FFF2-40B4-BE49-F238E27FC236}">
+                <a16:creationId xmlns:a16="http://schemas.microsoft.com/office/drawing/2014/main" id="{A5C8AC25-EC4C-3842-F311-7347DBC1A71C}"/>
+              </a:ext>
+            </a:extLst>
+          </p:cNvPr>
+          <p:cNvSpPr>
+            <a:spLocks noGrp="1"/>
+          </p:cNvSpPr>
+          <p:nvPr>
+            <p:ph type="title"/>
+          </p:nvPr>
+        </p:nvSpPr>
+        <p:spPr>
+          <a:xfrm>
+            <a:off x="838200" y="365126"/>
+            <a:ext cx="10776774" cy="759072"/>
+          </a:xfrm>
+        </p:spPr>
+        <p:txBody>
+          <a:bodyPr/>
+          <a:lstStyle/>
+          <a:p>
+            <a:r>
+              <a:rPr lang="en-US" dirty="0"/>
+              <a:t>The Effect of Planning</a:t>
+            </a:r>
+          </a:p>
+        </p:txBody>
+      </p:sp>
+      <p:pic>
+        <p:nvPicPr>
+          <p:cNvPr id="4" name="Picture 3">
+            <a:extLst>
+              <a:ext uri="{FF2B5EF4-FFF2-40B4-BE49-F238E27FC236}">
+                <a16:creationId xmlns:a16="http://schemas.microsoft.com/office/drawing/2014/main" id="{25CE6196-0C58-18A7-BA50-D3B376B607E3}"/>
+              </a:ext>
+            </a:extLst>
+          </p:cNvPr>
+          <p:cNvPicPr>
+            <a:picLocks noChangeAspect="1"/>
+          </p:cNvPicPr>
+          <p:nvPr/>
+        </p:nvPicPr>
+        <p:blipFill>
+          <a:blip r:embed="rId2"/>
+          <a:stretch>
+            <a:fillRect/>
+          </a:stretch>
+        </p:blipFill>
+        <p:spPr>
+          <a:xfrm>
+            <a:off x="-408370" y="1660797"/>
+            <a:ext cx="7086022" cy="4108300"/>
+          </a:xfrm>
+          <a:prstGeom prst="rect">
+            <a:avLst/>
+          </a:prstGeom>
+        </p:spPr>
+      </p:pic>
+      <p:sp>
+        <p:nvSpPr>
+          <p:cNvPr id="6" name="Content Placeholder 5">
+            <a:extLst>
+              <a:ext uri="{FF2B5EF4-FFF2-40B4-BE49-F238E27FC236}">
+                <a16:creationId xmlns:a16="http://schemas.microsoft.com/office/drawing/2014/main" id="{5C0268D5-3842-005A-9D87-7A037B2EC858}"/>
+              </a:ext>
+            </a:extLst>
+          </p:cNvPr>
+          <p:cNvSpPr>
+            <a:spLocks noGrp="1"/>
+          </p:cNvSpPr>
+          <p:nvPr>
+            <p:ph idx="1"/>
+          </p:nvPr>
+        </p:nvSpPr>
+        <p:spPr>
+          <a:xfrm>
+            <a:off x="6096000" y="1396030"/>
+            <a:ext cx="5623420" cy="4870545"/>
+          </a:xfrm>
+        </p:spPr>
+        <p:txBody>
+          <a:bodyPr>
+            <a:normAutofit fontScale="77500" lnSpcReduction="20000"/>
+          </a:bodyPr>
+          <a:lstStyle/>
+          <a:p>
+            <a:r>
+              <a:rPr lang="en-US" b="1" dirty="0"/>
+              <a:t>Benefit</a:t>
+            </a:r>
+            <a:r>
+              <a:rPr lang="en-US" dirty="0"/>
+              <a:t>: Adding planning speeds learning by reusing sampled experience.</a:t>
+            </a:r>
+          </a:p>
+          <a:p>
+            <a:endParaRPr lang="en-US" dirty="0"/>
+          </a:p>
+          <a:p>
+            <a:r>
+              <a:rPr lang="en-US" b="1" dirty="0"/>
+              <a:t>Issues</a:t>
+            </a:r>
+            <a:r>
+              <a:rPr lang="en-US" dirty="0"/>
+              <a:t>: Planning is a problem if the model is wrong:</a:t>
+            </a:r>
+          </a:p>
+          <a:p>
+            <a:pPr lvl="1"/>
+            <a:r>
+              <a:rPr lang="en-US" dirty="0"/>
+              <a:t>Based on an insufficient number of samples.</a:t>
+            </a:r>
+          </a:p>
+          <a:p>
+            <a:pPr lvl="1"/>
+            <a:r>
+              <a:rPr lang="en-US" dirty="0"/>
+              <a:t>Function approximation not great.</a:t>
+            </a:r>
+          </a:p>
+          <a:p>
+            <a:pPr lvl="1"/>
+            <a:r>
+              <a:rPr lang="en-US" dirty="0"/>
+              <a:t>Environment changes</a:t>
+            </a:r>
+          </a:p>
+          <a:p>
+            <a:r>
+              <a:rPr lang="en-US" dirty="0"/>
+              <a:t>Dyna quickly corrects too optimistic predictions since they will be selected for the next real action.</a:t>
+            </a:r>
+          </a:p>
+          <a:p>
+            <a:endParaRPr lang="en-US" dirty="0"/>
+          </a:p>
+          <a:p>
+            <a:r>
+              <a:rPr lang="en-US" dirty="0"/>
+              <a:t>For changing environments:</a:t>
+            </a:r>
+          </a:p>
+          <a:p>
+            <a:pPr lvl="1"/>
+            <a:r>
+              <a:rPr lang="en-US" dirty="0"/>
+              <a:t>Keep exploring.</a:t>
+            </a:r>
+          </a:p>
+          <a:p>
+            <a:pPr lvl="1"/>
+            <a:r>
+              <a:rPr lang="en-US" dirty="0"/>
+              <a:t>Keep track of long action/state combinations that were not tried.</a:t>
+            </a:r>
+          </a:p>
+        </p:txBody>
+      </p:sp>
+    </p:spTree>
+    <p:extLst>
+      <p:ext uri="{BB962C8B-B14F-4D97-AF65-F5344CB8AC3E}">
+        <p14:creationId xmlns:p14="http://schemas.microsoft.com/office/powerpoint/2010/main" val="3636997415"/>
+      </p:ext>
+    </p:extLst>
+  </p:cSld>
+  <p:clrMapOvr>
+    <a:masterClrMapping/>
+  </p:clrMapOvr>
+</p:sld>
+</file>
+
+<file path=ppt/slides/slide11.xml><?xml version="1.0" encoding="utf-8"?>
 <p:sld xmlns:a="http://schemas.openxmlformats.org/drawingml/2006/main" xmlns:r="http://schemas.openxmlformats.org/officeDocument/2006/relationships" xmlns:p="http://schemas.openxmlformats.org/presentationml/2006/main" show="0">
   <p:cSld>
     <p:spTree>
@@ -4115,7 +4312,7 @@
 </p:sld>
 </file>
 
-<file path=ppt/slides/slide11.xml><?xml version="1.0" encoding="utf-8"?>
+<file path=ppt/slides/slide12.xml><?xml version="1.0" encoding="utf-8"?>
 <p:sld xmlns:a="http://schemas.openxmlformats.org/drawingml/2006/main" xmlns:r="http://schemas.openxmlformats.org/officeDocument/2006/relationships" xmlns:p="http://schemas.openxmlformats.org/presentationml/2006/main" show="0">
   <p:cSld>
     <p:spTree>
@@ -4197,8 +4394,8 @@
           </a:prstGeom>
         </p:spPr>
       </p:pic>
-      <mc:AlternateContent xmlns:mc="http://schemas.openxmlformats.org/markup-compatibility/2006">
-        <mc:Choice xmlns:a14="http://schemas.microsoft.com/office/drawing/2010/main" Requires="a14">
+      <mc:AlternateContent xmlns:mc="http://schemas.openxmlformats.org/markup-compatibility/2006" xmlns:a14="http://schemas.microsoft.com/office/drawing/2010/main">
+        <mc:Choice Requires="a14">
           <p:sp>
             <p:nvSpPr>
               <p:cNvPr id="3" name="Content Placeholder 2">
@@ -4875,7 +5072,7 @@
             </p:txBody>
           </p:sp>
         </mc:Choice>
-        <mc:Fallback>
+        <mc:Fallback xmlns="">
           <p:sp>
             <p:nvSpPr>
               <p:cNvPr id="3" name="Content Placeholder 2">
@@ -4932,7 +5129,7 @@
 </p:sld>
 </file>
 
-<file path=ppt/slides/slide12.xml><?xml version="1.0" encoding="utf-8"?>
+<file path=ppt/slides/slide13.xml><?xml version="1.0" encoding="utf-8"?>
 <p:sld xmlns:a="http://schemas.openxmlformats.org/drawingml/2006/main" xmlns:r="http://schemas.openxmlformats.org/officeDocument/2006/relationships" xmlns:p="http://schemas.openxmlformats.org/presentationml/2006/main">
   <p:cSld>
     <p:spTree>
@@ -5025,7 +5222,7 @@
 </p:sld>
 </file>
 
-<file path=ppt/slides/slide13.xml><?xml version="1.0" encoding="utf-8"?>
+<file path=ppt/slides/slide14.xml><?xml version="1.0" encoding="utf-8"?>
 <p:sld xmlns:a="http://schemas.openxmlformats.org/drawingml/2006/main" xmlns:r="http://schemas.openxmlformats.org/officeDocument/2006/relationships" xmlns:p="http://schemas.openxmlformats.org/presentationml/2006/main">
   <p:cSld>
     <p:spTree>
@@ -5100,8 +5297,8 @@
           </a:p>
         </p:txBody>
       </p:sp>
-      <mc:AlternateContent xmlns:mc="http://schemas.openxmlformats.org/markup-compatibility/2006">
-        <mc:Choice xmlns:a14="http://schemas.microsoft.com/office/drawing/2010/main" Requires="a14">
+      <mc:AlternateContent xmlns:mc="http://schemas.openxmlformats.org/markup-compatibility/2006" xmlns:a14="http://schemas.microsoft.com/office/drawing/2010/main">
+        <mc:Choice Requires="a14">
           <p:sp>
             <p:nvSpPr>
               <p:cNvPr id="5" name="Content Placeholder 4">
@@ -5230,7 +5427,7 @@
             </p:txBody>
           </p:sp>
         </mc:Choice>
-        <mc:Fallback>
+        <mc:Fallback xmlns="">
           <p:sp>
             <p:nvSpPr>
               <p:cNvPr id="5" name="Content Placeholder 4">
@@ -5497,7 +5694,7 @@
 </p:sld>
 </file>
 
-<file path=ppt/slides/slide14.xml><?xml version="1.0" encoding="utf-8"?>
+<file path=ppt/slides/slide15.xml><?xml version="1.0" encoding="utf-8"?>
 <p:sld xmlns:a="http://schemas.openxmlformats.org/drawingml/2006/main" xmlns:r="http://schemas.openxmlformats.org/officeDocument/2006/relationships" xmlns:p="http://schemas.openxmlformats.org/presentationml/2006/main">
   <p:cSld>
     <p:spTree>
@@ -5544,8 +5741,8 @@
           </a:p>
         </p:txBody>
       </p:sp>
-      <mc:AlternateContent xmlns:mc="http://schemas.openxmlformats.org/markup-compatibility/2006">
-        <mc:Choice xmlns:a14="http://schemas.microsoft.com/office/drawing/2010/main" Requires="a14">
+      <mc:AlternateContent xmlns:mc="http://schemas.openxmlformats.org/markup-compatibility/2006" xmlns:a14="http://schemas.microsoft.com/office/drawing/2010/main">
+        <mc:Choice Requires="a14">
           <p:sp>
             <p:nvSpPr>
               <p:cNvPr id="3" name="Content Placeholder 2">
@@ -5749,16 +5946,7 @@
                               <a:rPr lang="en-US" b="0" i="0" smtClean="0">
                                 <a:latin typeface="Cambria Math" panose="02040503050406030204" pitchFamily="18" charset="0"/>
                               </a:rPr>
-                              <m:t>arg</m:t>
-                            </m:r>
-                            <m:r>
-                              <m:rPr>
-                                <m:sty m:val="p"/>
-                              </m:rPr>
-                              <a:rPr lang="en-US" b="0" i="0" smtClean="0">
-                                <a:latin typeface="Cambria Math" panose="02040503050406030204" pitchFamily="18" charset="0"/>
-                              </a:rPr>
-                              <m:t>max</m:t>
+                              <m:t>argmax</m:t>
                             </m:r>
                           </m:e>
                           <m:lim>
@@ -5898,7 +6086,7 @@
             </p:txBody>
           </p:sp>
         </mc:Choice>
-        <mc:Fallback>
+        <mc:Fallback xmlns="">
           <p:sp>
             <p:nvSpPr>
               <p:cNvPr id="3" name="Content Placeholder 2">
@@ -5951,7 +6139,7 @@
 </p:sld>
 </file>
 
-<file path=ppt/slides/slide15.xml><?xml version="1.0" encoding="utf-8"?>
+<file path=ppt/slides/slide16.xml><?xml version="1.0" encoding="utf-8"?>
 <p:sld xmlns:a="http://schemas.openxmlformats.org/drawingml/2006/main" xmlns:r="http://schemas.openxmlformats.org/officeDocument/2006/relationships" xmlns:p="http://schemas.openxmlformats.org/presentationml/2006/main">
   <p:cSld>
     <p:spTree>
@@ -6333,7 +6521,7 @@
 </p:sld>
 </file>
 
-<file path=ppt/slides/slide16.xml><?xml version="1.0" encoding="utf-8"?>
+<file path=ppt/slides/slide17.xml><?xml version="1.0" encoding="utf-8"?>
 <p:sld xmlns:a="http://schemas.openxmlformats.org/drawingml/2006/main" xmlns:r="http://schemas.openxmlformats.org/officeDocument/2006/relationships" xmlns:p="http://schemas.openxmlformats.org/presentationml/2006/main">
   <p:cSld>
     <p:bg>
@@ -6665,7 +6853,7 @@
 </p:sld>
 </file>
 
-<file path=ppt/slides/slide17.xml><?xml version="1.0" encoding="utf-8"?>
+<file path=ppt/slides/slide18.xml><?xml version="1.0" encoding="utf-8"?>
 <p:sld xmlns:a="http://schemas.openxmlformats.org/drawingml/2006/main" xmlns:r="http://schemas.openxmlformats.org/officeDocument/2006/relationships" xmlns:p="http://schemas.openxmlformats.org/presentationml/2006/main">
   <p:cSld>
     <p:spTree>
@@ -6755,7 +6943,7 @@
 </p:sld>
 </file>
 
-<file path=ppt/slides/slide18.xml><?xml version="1.0" encoding="utf-8"?>
+<file path=ppt/slides/slide19.xml><?xml version="1.0" encoding="utf-8"?>
 <p:sld xmlns:a="http://schemas.openxmlformats.org/drawingml/2006/main" xmlns:r="http://schemas.openxmlformats.org/officeDocument/2006/relationships" xmlns:p="http://schemas.openxmlformats.org/presentationml/2006/main">
   <p:cSld>
     <p:spTree>
@@ -6963,7 +7151,189 @@
 </p:sld>
 </file>
 
-<file path=ppt/slides/slide19.xml><?xml version="1.0" encoding="utf-8"?>
+<file path=ppt/slides/slide2.xml><?xml version="1.0" encoding="utf-8"?>
+<p:sld xmlns:a="http://schemas.openxmlformats.org/drawingml/2006/main" xmlns:r="http://schemas.openxmlformats.org/officeDocument/2006/relationships" xmlns:p="http://schemas.openxmlformats.org/presentationml/2006/main">
+  <p:cSld>
+    <p:spTree>
+      <p:nvGrpSpPr>
+        <p:cNvPr id="1" name=""/>
+        <p:cNvGrpSpPr/>
+        <p:nvPr/>
+      </p:nvGrpSpPr>
+      <p:grpSpPr>
+        <a:xfrm>
+          <a:off x="0" y="0"/>
+          <a:ext cx="0" cy="0"/>
+          <a:chOff x="0" y="0"/>
+          <a:chExt cx="0" cy="0"/>
+        </a:xfrm>
+      </p:grpSpPr>
+      <p:sp>
+        <p:nvSpPr>
+          <p:cNvPr id="2" name="Title 1">
+            <a:extLst>
+              <a:ext uri="{FF2B5EF4-FFF2-40B4-BE49-F238E27FC236}">
+                <a16:creationId xmlns:a16="http://schemas.microsoft.com/office/drawing/2014/main" id="{9E7A3493-2ED6-DF09-F569-7F3DCA81AB18}"/>
+              </a:ext>
+            </a:extLst>
+          </p:cNvPr>
+          <p:cNvSpPr>
+            <a:spLocks noGrp="1"/>
+          </p:cNvSpPr>
+          <p:nvPr>
+            <p:ph type="title"/>
+          </p:nvPr>
+        </p:nvSpPr>
+        <p:spPr/>
+        <p:txBody>
+          <a:bodyPr/>
+          <a:lstStyle/>
+          <a:p>
+            <a:r>
+              <a:rPr lang="en-US" dirty="0"/>
+              <a:t>Topics of this Course</a:t>
+            </a:r>
+          </a:p>
+        </p:txBody>
+      </p:sp>
+      <p:sp>
+        <p:nvSpPr>
+          <p:cNvPr id="3" name="Content Placeholder 2">
+            <a:extLst>
+              <a:ext uri="{FF2B5EF4-FFF2-40B4-BE49-F238E27FC236}">
+                <a16:creationId xmlns:a16="http://schemas.microsoft.com/office/drawing/2014/main" id="{8F95E019-92A5-79AC-D777-59B4926F61AA}"/>
+              </a:ext>
+            </a:extLst>
+          </p:cNvPr>
+          <p:cNvSpPr>
+            <a:spLocks noGrp="1"/>
+          </p:cNvSpPr>
+          <p:nvPr>
+            <p:ph idx="1"/>
+          </p:nvPr>
+        </p:nvSpPr>
+        <p:spPr/>
+        <p:txBody>
+          <a:bodyPr>
+            <a:normAutofit fontScale="85000" lnSpcReduction="20000"/>
+          </a:bodyPr>
+          <a:lstStyle/>
+          <a:p>
+            <a:r>
+              <a:rPr lang="en-US" dirty="0"/>
+              <a:t>Introduction to reinforcement learning</a:t>
+            </a:r>
+          </a:p>
+          <a:p>
+            <a:r>
+              <a:rPr lang="en-US" dirty="0"/>
+              <a:t>Markov decision processes</a:t>
+            </a:r>
+          </a:p>
+          <a:p>
+            <a:r>
+              <a:rPr lang="en-US" b="1" dirty="0"/>
+              <a:t>Part I: Tabular Methods</a:t>
+            </a:r>
+          </a:p>
+          <a:p>
+            <a:pPr lvl="1"/>
+            <a:r>
+              <a:rPr lang="en-US" dirty="0"/>
+              <a:t>Dynamic programming</a:t>
+            </a:r>
+          </a:p>
+          <a:p>
+            <a:pPr lvl="1"/>
+            <a:r>
+              <a:rPr lang="en-US" dirty="0"/>
+              <a:t>Monte Carlo methods</a:t>
+            </a:r>
+          </a:p>
+          <a:p>
+            <a:pPr lvl="1"/>
+            <a:r>
+              <a:rPr lang="en-US" dirty="0"/>
+              <a:t>Temporal-difference learning</a:t>
+            </a:r>
+          </a:p>
+          <a:p>
+            <a:pPr lvl="1"/>
+            <a:r>
+              <a:rPr lang="en-US" dirty="0"/>
+              <a:t>Multi-step bootstrapping</a:t>
+            </a:r>
+          </a:p>
+          <a:p>
+            <a:pPr lvl="1"/>
+            <a:r>
+              <a:rPr lang="en-US" b="1" dirty="0"/>
+              <a:t>Planning and learning with tabular methods</a:t>
+            </a:r>
+          </a:p>
+          <a:p>
+            <a:r>
+              <a:rPr lang="en-US" dirty="0"/>
+              <a:t>Part II: Approximate Solution Methods</a:t>
+            </a:r>
+          </a:p>
+          <a:p>
+            <a:pPr lvl="1"/>
+            <a:r>
+              <a:rPr lang="en-US" dirty="0"/>
+              <a:t>Prediction and Control using Approximation</a:t>
+            </a:r>
+          </a:p>
+          <a:p>
+            <a:pPr lvl="1"/>
+            <a:r>
+              <a:rPr lang="en-US" dirty="0"/>
+              <a:t>Eligibility Traces</a:t>
+            </a:r>
+          </a:p>
+          <a:p>
+            <a:pPr lvl="1"/>
+            <a:r>
+              <a:rPr lang="en-US" dirty="0"/>
+              <a:t>Policy Gradient Methods</a:t>
+            </a:r>
+          </a:p>
+          <a:p>
+            <a:r>
+              <a:rPr lang="en-US" dirty="0"/>
+              <a:t>Part III: Modern RL Methods</a:t>
+            </a:r>
+          </a:p>
+          <a:p>
+            <a:pPr lvl="1"/>
+            <a:r>
+              <a:rPr lang="en-US" dirty="0"/>
+              <a:t>Deep Reinforcement Learning</a:t>
+            </a:r>
+          </a:p>
+          <a:p>
+            <a:pPr lvl="1"/>
+            <a:r>
+              <a:rPr lang="en-US" dirty="0"/>
+              <a:t>Current Applications</a:t>
+            </a:r>
+          </a:p>
+        </p:txBody>
+      </p:sp>
+    </p:spTree>
+    <p:extLst>
+      <p:ext uri="{BB962C8B-B14F-4D97-AF65-F5344CB8AC3E}">
+        <p14:creationId xmlns:p14="http://schemas.microsoft.com/office/powerpoint/2010/main" val="3653367536"/>
+      </p:ext>
+    </p:extLst>
+  </p:cSld>
+  <p:clrMapOvr>
+    <a:masterClrMapping/>
+  </p:clrMapOvr>
+</p:sld>
+</file>
+
+<file path=ppt/slides/slide20.xml><?xml version="1.0" encoding="utf-8"?>
 <p:sld xmlns:a="http://schemas.openxmlformats.org/drawingml/2006/main" xmlns:r="http://schemas.openxmlformats.org/officeDocument/2006/relationships" xmlns:p="http://schemas.openxmlformats.org/presentationml/2006/main">
   <p:cSld>
     <p:spTree>
@@ -7536,7 +7906,682 @@
 </p:sld>
 </file>
 
-<file path=ppt/slides/slide2.xml><?xml version="1.0" encoding="utf-8"?>
+<file path=ppt/slides/slide21.xml><?xml version="1.0" encoding="utf-8"?>
+<p:sld xmlns:a="http://schemas.openxmlformats.org/drawingml/2006/main" xmlns:r="http://schemas.openxmlformats.org/officeDocument/2006/relationships" xmlns:p="http://schemas.openxmlformats.org/presentationml/2006/main">
+  <p:cSld>
+    <p:spTree>
+      <p:nvGrpSpPr>
+        <p:cNvPr id="1" name=""/>
+        <p:cNvGrpSpPr/>
+        <p:nvPr/>
+      </p:nvGrpSpPr>
+      <p:grpSpPr>
+        <a:xfrm>
+          <a:off x="0" y="0"/>
+          <a:ext cx="0" cy="0"/>
+          <a:chOff x="0" y="0"/>
+          <a:chExt cx="0" cy="0"/>
+        </a:xfrm>
+      </p:grpSpPr>
+      <p:sp>
+        <p:nvSpPr>
+          <p:cNvPr id="2" name="Title 1">
+            <a:extLst>
+              <a:ext uri="{FF2B5EF4-FFF2-40B4-BE49-F238E27FC236}">
+                <a16:creationId xmlns:a16="http://schemas.microsoft.com/office/drawing/2014/main" id="{199CFAD6-8953-D14F-C853-F13F480B14C5}"/>
+              </a:ext>
+            </a:extLst>
+          </p:cNvPr>
+          <p:cNvSpPr>
+            <a:spLocks noGrp="1"/>
+          </p:cNvSpPr>
+          <p:nvPr>
+            <p:ph type="title"/>
+          </p:nvPr>
+        </p:nvSpPr>
+        <p:spPr/>
+        <p:txBody>
+          <a:bodyPr/>
+          <a:lstStyle/>
+          <a:p>
+            <a:r>
+              <a:rPr lang="en-US" dirty="0"/>
+              <a:t>On-Policy vs. Off-Policy</a:t>
+            </a:r>
+          </a:p>
+        </p:txBody>
+      </p:sp>
+      <p:sp>
+        <p:nvSpPr>
+          <p:cNvPr id="3" name="Content Placeholder 2">
+            <a:extLst>
+              <a:ext uri="{FF2B5EF4-FFF2-40B4-BE49-F238E27FC236}">
+                <a16:creationId xmlns:a16="http://schemas.microsoft.com/office/drawing/2014/main" id="{A921F75A-ED78-4D7C-E025-9485BB9284FB}"/>
+              </a:ext>
+            </a:extLst>
+          </p:cNvPr>
+          <p:cNvSpPr>
+            <a:spLocks noGrp="1"/>
+          </p:cNvSpPr>
+          <p:nvPr>
+            <p:ph idx="1"/>
+          </p:nvPr>
+        </p:nvSpPr>
+        <p:spPr/>
+        <p:txBody>
+          <a:bodyPr>
+            <a:normAutofit fontScale="85000" lnSpcReduction="20000"/>
+          </a:bodyPr>
+          <a:lstStyle/>
+          <a:p>
+            <a:pPr marL="0" indent="0">
+              <a:buNone/>
+            </a:pPr>
+            <a:r>
+              <a:rPr lang="en-US" b="1" dirty="0"/>
+              <a:t>On-Policy</a:t>
+            </a:r>
+            <a:r>
+              <a:rPr lang="en-US" dirty="0"/>
+              <a:t>: Learn the policy the agent is following.</a:t>
+            </a:r>
+          </a:p>
+          <a:p>
+            <a:endParaRPr lang="en-US" dirty="0"/>
+          </a:p>
+          <a:p>
+            <a:pPr marL="0" indent="0">
+              <a:buNone/>
+            </a:pPr>
+            <a:r>
+              <a:rPr lang="en-US" b="1" dirty="0"/>
+              <a:t>Off-Policy</a:t>
+            </a:r>
+            <a:r>
+              <a:rPr lang="en-US" dirty="0"/>
+              <a:t>: Learn a target policy that is different from the followed behavior policy.</a:t>
+            </a:r>
+          </a:p>
+          <a:p>
+            <a:endParaRPr lang="en-US" dirty="0"/>
+          </a:p>
+          <a:p>
+            <a:endParaRPr lang="en-US" dirty="0"/>
+          </a:p>
+          <a:p>
+            <a:pPr marL="0" indent="0">
+              <a:buNone/>
+            </a:pPr>
+            <a:r>
+              <a:rPr lang="en-US" b="1" dirty="0"/>
+              <a:t>Off-Policy is useful because</a:t>
+            </a:r>
+            <a:r>
+              <a:rPr lang="en-US" dirty="0"/>
+              <a:t>:</a:t>
+            </a:r>
+          </a:p>
+          <a:p>
+            <a:pPr lvl="1"/>
+            <a:r>
+              <a:rPr lang="en-US" dirty="0"/>
+              <a:t>Learn optimal policies while exploring</a:t>
+            </a:r>
+          </a:p>
+          <a:p>
+            <a:pPr lvl="1"/>
+            <a:r>
+              <a:rPr lang="en-US" dirty="0"/>
+              <a:t>Reuse of data: sample efficiency, offline, and batch RL</a:t>
+            </a:r>
+          </a:p>
+          <a:p>
+            <a:pPr lvl="1"/>
+            <a:r>
+              <a:rPr lang="en-US" dirty="0"/>
+              <a:t>Safe learning and exploration</a:t>
+            </a:r>
+          </a:p>
+          <a:p>
+            <a:pPr marL="0" indent="0">
+              <a:buNone/>
+            </a:pPr>
+            <a:r>
+              <a:rPr lang="en-US" b="1" dirty="0"/>
+              <a:t>Off-Policy learning is harder because:</a:t>
+            </a:r>
+          </a:p>
+          <a:p>
+            <a:pPr lvl="1"/>
+            <a:r>
+              <a:rPr lang="en-US" dirty="0"/>
+              <a:t>Requires distributional correction: E.g., importance sampling</a:t>
+            </a:r>
+          </a:p>
+          <a:p>
+            <a:pPr lvl="1"/>
+            <a:r>
+              <a:rPr lang="en-US" dirty="0"/>
+              <a:t>May suffer from high variance (due to importance sampling)</a:t>
+            </a:r>
+          </a:p>
+          <a:p>
+            <a:pPr lvl="1"/>
+            <a:r>
+              <a:rPr lang="en-US" dirty="0"/>
+              <a:t>Instability with non-linear function approximation (deep RL)</a:t>
+            </a:r>
+          </a:p>
+        </p:txBody>
+      </p:sp>
+    </p:spTree>
+    <p:extLst>
+      <p:ext uri="{BB962C8B-B14F-4D97-AF65-F5344CB8AC3E}">
+        <p14:creationId xmlns:p14="http://schemas.microsoft.com/office/powerpoint/2010/main" val="3868939227"/>
+      </p:ext>
+    </p:extLst>
+  </p:cSld>
+  <p:clrMapOvr>
+    <a:masterClrMapping/>
+  </p:clrMapOvr>
+</p:sld>
+</file>
+
+<file path=ppt/slides/slide22.xml><?xml version="1.0" encoding="utf-8"?>
+<p:sld xmlns:a="http://schemas.openxmlformats.org/drawingml/2006/main" xmlns:r="http://schemas.openxmlformats.org/officeDocument/2006/relationships" xmlns:p="http://schemas.openxmlformats.org/presentationml/2006/main">
+  <p:cSld>
+    <p:spTree>
+      <p:nvGrpSpPr>
+        <p:cNvPr id="1" name=""/>
+        <p:cNvGrpSpPr/>
+        <p:nvPr/>
+      </p:nvGrpSpPr>
+      <p:grpSpPr>
+        <a:xfrm>
+          <a:off x="0" y="0"/>
+          <a:ext cx="0" cy="0"/>
+          <a:chOff x="0" y="0"/>
+          <a:chExt cx="0" cy="0"/>
+        </a:xfrm>
+      </p:grpSpPr>
+      <p:sp>
+        <p:nvSpPr>
+          <p:cNvPr id="2" name="Title 1">
+            <a:extLst>
+              <a:ext uri="{FF2B5EF4-FFF2-40B4-BE49-F238E27FC236}">
+                <a16:creationId xmlns:a16="http://schemas.microsoft.com/office/drawing/2014/main" id="{CCF6C101-39C4-5534-A3ED-9D36AB8B7A7D}"/>
+              </a:ext>
+            </a:extLst>
+          </p:cNvPr>
+          <p:cNvSpPr>
+            <a:spLocks noGrp="1"/>
+          </p:cNvSpPr>
+          <p:nvPr>
+            <p:ph type="title"/>
+          </p:nvPr>
+        </p:nvSpPr>
+        <p:spPr/>
+        <p:txBody>
+          <a:bodyPr/>
+          <a:lstStyle/>
+          <a:p>
+            <a:r>
+              <a:rPr lang="en-US" dirty="0"/>
+              <a:t>Other Dimensions</a:t>
+            </a:r>
+          </a:p>
+        </p:txBody>
+      </p:sp>
+      <p:sp>
+        <p:nvSpPr>
+          <p:cNvPr id="3" name="Content Placeholder 2">
+            <a:extLst>
+              <a:ext uri="{FF2B5EF4-FFF2-40B4-BE49-F238E27FC236}">
+                <a16:creationId xmlns:a16="http://schemas.microsoft.com/office/drawing/2014/main" id="{8CB60D31-9CD5-1596-21BF-AD897227AFBE}"/>
+              </a:ext>
+            </a:extLst>
+          </p:cNvPr>
+          <p:cNvSpPr>
+            <a:spLocks noGrp="1"/>
+          </p:cNvSpPr>
+          <p:nvPr>
+            <p:ph idx="1"/>
+          </p:nvPr>
+        </p:nvSpPr>
+        <p:spPr/>
+        <p:txBody>
+          <a:bodyPr>
+            <a:normAutofit/>
+          </a:bodyPr>
+          <a:lstStyle/>
+          <a:p>
+            <a:r>
+              <a:rPr lang="en-US" b="1" dirty="0"/>
+              <a:t>Definition of return</a:t>
+            </a:r>
+            <a:r>
+              <a:rPr lang="en-US" dirty="0"/>
+              <a:t>: Episodic vs. continuing task; discounted vs. undiscounted.</a:t>
+            </a:r>
+          </a:p>
+          <a:p>
+            <a:r>
+              <a:rPr lang="en-US" b="1" dirty="0"/>
+              <a:t>Action values vs. state values</a:t>
+            </a:r>
+          </a:p>
+          <a:p>
+            <a:r>
+              <a:rPr lang="en-US" b="1" dirty="0"/>
+              <a:t>Exploration vs Exploitation</a:t>
+            </a:r>
+            <a:r>
+              <a:rPr lang="en-US" dirty="0"/>
+              <a:t>: This is a trade-off. Many methods need exploration for convergence.</a:t>
+            </a:r>
+          </a:p>
+          <a:p>
+            <a:r>
+              <a:rPr lang="en-US" b="1" dirty="0"/>
+              <a:t>Synchronous vs. Asynchronous</a:t>
+            </a:r>
+            <a:r>
+              <a:rPr lang="en-US" dirty="0"/>
+              <a:t>: Are all states updated at once or one by one in some order?</a:t>
+            </a:r>
+          </a:p>
+          <a:p>
+            <a:r>
+              <a:rPr lang="en-US" b="1" dirty="0"/>
+              <a:t>Real vs. Simulated</a:t>
+            </a:r>
+            <a:r>
+              <a:rPr lang="en-US" dirty="0"/>
+              <a:t>: Are real experiences, simulations, or both used for updates?</a:t>
+            </a:r>
+          </a:p>
+          <a:p>
+            <a:endParaRPr lang="en-US" dirty="0"/>
+          </a:p>
+          <a:p>
+            <a:endParaRPr lang="en-US" dirty="0"/>
+          </a:p>
+        </p:txBody>
+      </p:sp>
+    </p:spTree>
+    <p:extLst>
+      <p:ext uri="{BB962C8B-B14F-4D97-AF65-F5344CB8AC3E}">
+        <p14:creationId xmlns:p14="http://schemas.microsoft.com/office/powerpoint/2010/main" val="3047710047"/>
+      </p:ext>
+    </p:extLst>
+  </p:cSld>
+  <p:clrMapOvr>
+    <a:masterClrMapping/>
+  </p:clrMapOvr>
+</p:sld>
+</file>
+
+<file path=ppt/slides/slide23.xml><?xml version="1.0" encoding="utf-8"?>
+<p:sld xmlns:a="http://schemas.openxmlformats.org/drawingml/2006/main" xmlns:r="http://schemas.openxmlformats.org/officeDocument/2006/relationships" xmlns:p="http://schemas.openxmlformats.org/presentationml/2006/main">
+  <p:cSld>
+    <p:spTree>
+      <p:nvGrpSpPr>
+        <p:cNvPr id="1" name=""/>
+        <p:cNvGrpSpPr/>
+        <p:nvPr/>
+      </p:nvGrpSpPr>
+      <p:grpSpPr>
+        <a:xfrm>
+          <a:off x="0" y="0"/>
+          <a:ext cx="0" cy="0"/>
+          <a:chOff x="0" y="0"/>
+          <a:chExt cx="0" cy="0"/>
+        </a:xfrm>
+      </p:grpSpPr>
+      <p:sp>
+        <p:nvSpPr>
+          <p:cNvPr id="2" name="Title 1">
+            <a:extLst>
+              <a:ext uri="{FF2B5EF4-FFF2-40B4-BE49-F238E27FC236}">
+                <a16:creationId xmlns:a16="http://schemas.microsoft.com/office/drawing/2014/main" id="{3F0A6DFC-1DF7-340A-8A49-67E7A508EC3C}"/>
+              </a:ext>
+            </a:extLst>
+          </p:cNvPr>
+          <p:cNvSpPr>
+            <a:spLocks noGrp="1"/>
+          </p:cNvSpPr>
+          <p:nvPr>
+            <p:ph type="title"/>
+          </p:nvPr>
+        </p:nvSpPr>
+        <p:spPr/>
+        <p:txBody>
+          <a:bodyPr/>
+          <a:lstStyle/>
+          <a:p>
+            <a:r>
+              <a:rPr lang="en-US" dirty="0"/>
+              <a:t>Issues with Tabular Methods</a:t>
+            </a:r>
+          </a:p>
+        </p:txBody>
+      </p:sp>
+      <mc:AlternateContent xmlns:mc="http://schemas.openxmlformats.org/markup-compatibility/2006" xmlns:a14="http://schemas.microsoft.com/office/drawing/2010/main">
+        <mc:Choice Requires="a14">
+          <p:sp>
+            <p:nvSpPr>
+              <p:cNvPr id="3" name="Content Placeholder 2">
+                <a:extLst>
+                  <a:ext uri="{FF2B5EF4-FFF2-40B4-BE49-F238E27FC236}">
+                    <a16:creationId xmlns:a16="http://schemas.microsoft.com/office/drawing/2014/main" id="{60A46212-D3F8-9478-4414-6401E13D0EB2}"/>
+                  </a:ext>
+                </a:extLst>
+              </p:cNvPr>
+              <p:cNvSpPr>
+                <a:spLocks noGrp="1"/>
+              </p:cNvSpPr>
+              <p:nvPr>
+                <p:ph idx="1"/>
+              </p:nvPr>
+            </p:nvSpPr>
+            <p:spPr/>
+            <p:txBody>
+              <a:bodyPr>
+                <a:normAutofit fontScale="92500" lnSpcReduction="10000"/>
+              </a:bodyPr>
+              <a:lstStyle/>
+              <a:p>
+                <a:pPr marL="514350" indent="-514350">
+                  <a:spcBef>
+                    <a:spcPts val="0"/>
+                  </a:spcBef>
+                  <a:buFont typeface="+mj-lt"/>
+                  <a:buAutoNum type="arabicPeriod"/>
+                </a:pPr>
+                <a:r>
+                  <a:rPr lang="en-US" dirty="0"/>
+                  <a:t>Tables need much </a:t>
+                </a:r>
+                <a:r>
+                  <a:rPr lang="en-US" b="1" dirty="0"/>
+                  <a:t>space</a:t>
+                </a:r>
+                <a:r>
+                  <a:rPr lang="en-US" dirty="0"/>
+                  <a:t>. A complete table with </a:t>
+                </a:r>
+                <a14:m>
+                  <m:oMath xmlns:m="http://schemas.openxmlformats.org/officeDocument/2006/math">
+                    <m:r>
+                      <a:rPr lang="en-US" i="1" dirty="0" smtClean="0">
+                        <a:latin typeface="Cambria Math" panose="02040503050406030204" pitchFamily="18" charset="0"/>
+                      </a:rPr>
+                      <m:t>𝑞</m:t>
+                    </m:r>
+                  </m:oMath>
+                </a14:m>
+                <a:r>
+                  <a:rPr lang="en-US" dirty="0"/>
+                  <a:t>-values has size</a:t>
+                </a:r>
+                <a:br>
+                  <a:rPr lang="en-US" dirty="0"/>
+                </a:br>
+                <a14:m>
+                  <m:oMath xmlns:m="http://schemas.openxmlformats.org/officeDocument/2006/math">
+                    <m:r>
+                      <a:rPr lang="en-US" b="0" i="1" smtClean="0">
+                        <a:latin typeface="Cambria Math" panose="02040503050406030204" pitchFamily="18" charset="0"/>
+                      </a:rPr>
+                      <m:t>𝑂</m:t>
+                    </m:r>
+                    <m:d>
+                      <m:dPr>
+                        <m:ctrlPr>
+                          <a:rPr lang="en-US" b="0" i="1" smtClean="0">
+                            <a:latin typeface="Cambria Math" panose="02040503050406030204" pitchFamily="18" charset="0"/>
+                          </a:rPr>
+                        </m:ctrlPr>
+                      </m:dPr>
+                      <m:e>
+                        <m:d>
+                          <m:dPr>
+                            <m:begChr m:val="|"/>
+                            <m:endChr m:val="|"/>
+                            <m:ctrlPr>
+                              <a:rPr lang="en-US" b="0" i="1" smtClean="0">
+                                <a:latin typeface="Cambria Math" panose="02040503050406030204" pitchFamily="18" charset="0"/>
+                              </a:rPr>
+                            </m:ctrlPr>
+                          </m:dPr>
+                          <m:e>
+                            <m:r>
+                              <a:rPr lang="en-US" i="1" dirty="0">
+                                <a:latin typeface="Cambria Math" panose="02040503050406030204" pitchFamily="18" charset="0"/>
+                                <a:ea typeface="Cambria Math" panose="02040503050406030204" pitchFamily="18" charset="0"/>
+                              </a:rPr>
+                              <m:t>𝒮</m:t>
+                            </m:r>
+                          </m:e>
+                        </m:d>
+                        <m:r>
+                          <m:rPr>
+                            <m:nor/>
+                          </m:rPr>
+                          <a:rPr lang="en-US" dirty="0"/>
+                          <m:t> 	</m:t>
+                        </m:r>
+                        <m:r>
+                          <a:rPr lang="en-US" b="0" i="1" dirty="0" smtClean="0">
+                            <a:latin typeface="Cambria Math" panose="02040503050406030204" pitchFamily="18" charset="0"/>
+                          </a:rPr>
+                          <m:t>×</m:t>
+                        </m:r>
+                        <m:d>
+                          <m:dPr>
+                            <m:begChr m:val="|"/>
+                            <m:endChr m:val="|"/>
+                            <m:ctrlPr>
+                              <a:rPr lang="en-US" b="0" i="1" dirty="0" smtClean="0">
+                                <a:latin typeface="Cambria Math" panose="02040503050406030204" pitchFamily="18" charset="0"/>
+                              </a:rPr>
+                            </m:ctrlPr>
+                          </m:dPr>
+                          <m:e>
+                            <m:r>
+                              <a:rPr lang="en-US" i="1" dirty="0">
+                                <a:latin typeface="Cambria Math" panose="02040503050406030204" pitchFamily="18" charset="0"/>
+                                <a:ea typeface="Cambria Math" panose="02040503050406030204" pitchFamily="18" charset="0"/>
+                              </a:rPr>
+                              <m:t>𝒜</m:t>
+                            </m:r>
+                          </m:e>
+                        </m:d>
+                      </m:e>
+                    </m:d>
+                  </m:oMath>
+                </a14:m>
+                <a:br>
+                  <a:rPr lang="en-US" dirty="0"/>
+                </a:br>
+                <a:r>
+                  <a:rPr lang="en-US" dirty="0"/>
+                  <a:t>The state space is typically extremely large, or even infinite, in continuous spaces.</a:t>
+                </a:r>
+              </a:p>
+              <a:p>
+                <a:pPr marL="514350" indent="-514350">
+                  <a:spcBef>
+                    <a:spcPts val="0"/>
+                  </a:spcBef>
+                  <a:buFont typeface="+mj-lt"/>
+                  <a:buAutoNum type="arabicPeriod"/>
+                </a:pPr>
+                <a:endParaRPr lang="en-US" dirty="0"/>
+              </a:p>
+              <a:p>
+                <a:pPr marL="514350" indent="-514350">
+                  <a:spcBef>
+                    <a:spcPts val="0"/>
+                  </a:spcBef>
+                  <a:buFont typeface="+mj-lt"/>
+                  <a:buAutoNum type="arabicPeriod"/>
+                </a:pPr>
+                <a:r>
+                  <a:rPr lang="en-US" dirty="0"/>
+                  <a:t>We need a lot of </a:t>
+                </a:r>
+                <a:r>
+                  <a:rPr lang="en-US" b="1" dirty="0"/>
+                  <a:t>data </a:t>
+                </a:r>
+                <a:r>
+                  <a:rPr lang="en-US" dirty="0"/>
+                  <a:t>to estimate all entries.</a:t>
+                </a:r>
+              </a:p>
+              <a:p>
+                <a:pPr marL="514350" indent="-514350">
+                  <a:spcBef>
+                    <a:spcPts val="0"/>
+                  </a:spcBef>
+                  <a:buFont typeface="+mj-lt"/>
+                  <a:buAutoNum type="arabicPeriod"/>
+                </a:pPr>
+                <a:endParaRPr lang="en-US" dirty="0"/>
+              </a:p>
+              <a:p>
+                <a:pPr marL="514350" indent="-514350">
+                  <a:spcBef>
+                    <a:spcPts val="0"/>
+                  </a:spcBef>
+                  <a:buFont typeface="+mj-lt"/>
+                  <a:buAutoNum type="arabicPeriod"/>
+                </a:pPr>
+                <a:r>
+                  <a:rPr lang="en-US" dirty="0"/>
+                  <a:t>Two states may be very similar and therefore should have similar </a:t>
+                </a:r>
+                <a14:m>
+                  <m:oMath xmlns:m="http://schemas.openxmlformats.org/officeDocument/2006/math">
+                    <m:r>
+                      <a:rPr lang="en-US" i="1" dirty="0">
+                        <a:latin typeface="Cambria Math" panose="02040503050406030204" pitchFamily="18" charset="0"/>
+                      </a:rPr>
+                      <m:t>𝑞</m:t>
+                    </m:r>
+                  </m:oMath>
+                </a14:m>
+                <a:r>
+                  <a:rPr lang="en-US" dirty="0"/>
+                  <a:t>-values. Tabular methods </a:t>
+                </a:r>
+                <a:r>
+                  <a:rPr lang="en-US" b="1" dirty="0"/>
+                  <a:t>cannot generalize across states</a:t>
+                </a:r>
+                <a:r>
+                  <a:rPr lang="en-US" dirty="0"/>
+                  <a:t>.</a:t>
+                </a:r>
+              </a:p>
+              <a:p>
+                <a:pPr marL="514350" indent="-514350">
+                  <a:spcBef>
+                    <a:spcPts val="0"/>
+                  </a:spcBef>
+                  <a:buFont typeface="+mj-lt"/>
+                  <a:buAutoNum type="arabicPeriod"/>
+                </a:pPr>
+                <a:endParaRPr lang="en-US" dirty="0"/>
+              </a:p>
+              <a:p>
+                <a:pPr marL="514350" indent="-514350">
+                  <a:spcBef>
+                    <a:spcPts val="0"/>
+                  </a:spcBef>
+                  <a:buFont typeface="+mj-lt"/>
+                  <a:buAutoNum type="arabicPeriod"/>
+                </a:pPr>
+                <a:endParaRPr lang="en-US" dirty="0"/>
+              </a:p>
+              <a:p>
+                <a:pPr marL="0" indent="0">
+                  <a:spcBef>
+                    <a:spcPts val="0"/>
+                  </a:spcBef>
+                  <a:buNone/>
+                </a:pPr>
+                <a:r>
+                  <a:rPr lang="en-US" dirty="0"/>
+                  <a:t>Next, we will talk about </a:t>
+                </a:r>
+                <a:r>
+                  <a:rPr lang="en-US" b="1" dirty="0"/>
+                  <a:t>approximate solution methods </a:t>
+                </a:r>
+                <a:r>
+                  <a:rPr lang="en-US" dirty="0"/>
+                  <a:t>to deal with these issues.</a:t>
+                </a:r>
+              </a:p>
+            </p:txBody>
+          </p:sp>
+        </mc:Choice>
+        <mc:Fallback xmlns="">
+          <p:sp>
+            <p:nvSpPr>
+              <p:cNvPr id="3" name="Content Placeholder 2">
+                <a:extLst>
+                  <a:ext uri="{FF2B5EF4-FFF2-40B4-BE49-F238E27FC236}">
+                    <a16:creationId xmlns:a16="http://schemas.microsoft.com/office/drawing/2014/main" id="{60A46212-D3F8-9478-4414-6401E13D0EB2}"/>
+                  </a:ext>
+                </a:extLst>
+              </p:cNvPr>
+              <p:cNvSpPr>
+                <a:spLocks noGrp="1" noRot="1" noChangeAspect="1" noMove="1" noResize="1" noEditPoints="1" noAdjustHandles="1" noChangeArrowheads="1" noChangeShapeType="1" noTextEdit="1"/>
+              </p:cNvSpPr>
+              <p:nvPr>
+                <p:ph idx="1"/>
+              </p:nvPr>
+            </p:nvSpPr>
+            <p:spPr>
+              <a:blipFill>
+                <a:blip r:embed="rId2"/>
+                <a:stretch>
+                  <a:fillRect l="-1101" t="-2679"/>
+                </a:stretch>
+              </a:blipFill>
+            </p:spPr>
+            <p:txBody>
+              <a:bodyPr/>
+              <a:lstStyle/>
+              <a:p>
+                <a:r>
+                  <a:rPr lang="en-US">
+                    <a:noFill/>
+                  </a:rPr>
+                  <a:t> </a:t>
+                </a:r>
+              </a:p>
+            </p:txBody>
+          </p:sp>
+        </mc:Fallback>
+      </mc:AlternateContent>
+    </p:spTree>
+    <p:extLst>
+      <p:ext uri="{BB962C8B-B14F-4D97-AF65-F5344CB8AC3E}">
+        <p14:creationId xmlns:p14="http://schemas.microsoft.com/office/powerpoint/2010/main" val="1894962668"/>
+      </p:ext>
+    </p:extLst>
+  </p:cSld>
+  <p:clrMapOvr>
+    <a:masterClrMapping/>
+  </p:clrMapOvr>
+</p:sld>
+</file>
+
+<file path=ppt/slides/slide3.xml><?xml version="1.0" encoding="utf-8"?>
 <p:sld xmlns:a="http://schemas.openxmlformats.org/drawingml/2006/main" xmlns:r="http://schemas.openxmlformats.org/officeDocument/2006/relationships" xmlns:p="http://schemas.openxmlformats.org/presentationml/2006/main">
   <p:cSld>
     <p:spTree>
@@ -10680,682 +11725,7 @@
 </p:sld>
 </file>
 
-<file path=ppt/slides/slide20.xml><?xml version="1.0" encoding="utf-8"?>
-<p:sld xmlns:a="http://schemas.openxmlformats.org/drawingml/2006/main" xmlns:r="http://schemas.openxmlformats.org/officeDocument/2006/relationships" xmlns:p="http://schemas.openxmlformats.org/presentationml/2006/main">
-  <p:cSld>
-    <p:spTree>
-      <p:nvGrpSpPr>
-        <p:cNvPr id="1" name=""/>
-        <p:cNvGrpSpPr/>
-        <p:nvPr/>
-      </p:nvGrpSpPr>
-      <p:grpSpPr>
-        <a:xfrm>
-          <a:off x="0" y="0"/>
-          <a:ext cx="0" cy="0"/>
-          <a:chOff x="0" y="0"/>
-          <a:chExt cx="0" cy="0"/>
-        </a:xfrm>
-      </p:grpSpPr>
-      <p:sp>
-        <p:nvSpPr>
-          <p:cNvPr id="2" name="Title 1">
-            <a:extLst>
-              <a:ext uri="{FF2B5EF4-FFF2-40B4-BE49-F238E27FC236}">
-                <a16:creationId xmlns:a16="http://schemas.microsoft.com/office/drawing/2014/main" id="{199CFAD6-8953-D14F-C853-F13F480B14C5}"/>
-              </a:ext>
-            </a:extLst>
-          </p:cNvPr>
-          <p:cNvSpPr>
-            <a:spLocks noGrp="1"/>
-          </p:cNvSpPr>
-          <p:nvPr>
-            <p:ph type="title"/>
-          </p:nvPr>
-        </p:nvSpPr>
-        <p:spPr/>
-        <p:txBody>
-          <a:bodyPr/>
-          <a:lstStyle/>
-          <a:p>
-            <a:r>
-              <a:rPr lang="en-US" dirty="0"/>
-              <a:t>On-Policy vs. Off-Policy</a:t>
-            </a:r>
-          </a:p>
-        </p:txBody>
-      </p:sp>
-      <p:sp>
-        <p:nvSpPr>
-          <p:cNvPr id="3" name="Content Placeholder 2">
-            <a:extLst>
-              <a:ext uri="{FF2B5EF4-FFF2-40B4-BE49-F238E27FC236}">
-                <a16:creationId xmlns:a16="http://schemas.microsoft.com/office/drawing/2014/main" id="{A921F75A-ED78-4D7C-E025-9485BB9284FB}"/>
-              </a:ext>
-            </a:extLst>
-          </p:cNvPr>
-          <p:cNvSpPr>
-            <a:spLocks noGrp="1"/>
-          </p:cNvSpPr>
-          <p:nvPr>
-            <p:ph idx="1"/>
-          </p:nvPr>
-        </p:nvSpPr>
-        <p:spPr/>
-        <p:txBody>
-          <a:bodyPr>
-            <a:normAutofit fontScale="85000" lnSpcReduction="20000"/>
-          </a:bodyPr>
-          <a:lstStyle/>
-          <a:p>
-            <a:pPr marL="0" indent="0">
-              <a:buNone/>
-            </a:pPr>
-            <a:r>
-              <a:rPr lang="en-US" b="1" dirty="0"/>
-              <a:t>On-Policy</a:t>
-            </a:r>
-            <a:r>
-              <a:rPr lang="en-US" dirty="0"/>
-              <a:t>: Learn the policy the agent is following.</a:t>
-            </a:r>
-          </a:p>
-          <a:p>
-            <a:endParaRPr lang="en-US" dirty="0"/>
-          </a:p>
-          <a:p>
-            <a:pPr marL="0" indent="0">
-              <a:buNone/>
-            </a:pPr>
-            <a:r>
-              <a:rPr lang="en-US" b="1" dirty="0"/>
-              <a:t>Off-Policy</a:t>
-            </a:r>
-            <a:r>
-              <a:rPr lang="en-US" dirty="0"/>
-              <a:t>: Learn a target policy that is different from the followed behavior policy.</a:t>
-            </a:r>
-          </a:p>
-          <a:p>
-            <a:endParaRPr lang="en-US" dirty="0"/>
-          </a:p>
-          <a:p>
-            <a:endParaRPr lang="en-US" dirty="0"/>
-          </a:p>
-          <a:p>
-            <a:pPr marL="0" indent="0">
-              <a:buNone/>
-            </a:pPr>
-            <a:r>
-              <a:rPr lang="en-US" b="1" dirty="0"/>
-              <a:t>Off-Policy is useful because</a:t>
-            </a:r>
-            <a:r>
-              <a:rPr lang="en-US" dirty="0"/>
-              <a:t>:</a:t>
-            </a:r>
-          </a:p>
-          <a:p>
-            <a:pPr lvl="1"/>
-            <a:r>
-              <a:rPr lang="en-US" dirty="0"/>
-              <a:t>Learn optimal policies while exploring</a:t>
-            </a:r>
-          </a:p>
-          <a:p>
-            <a:pPr lvl="1"/>
-            <a:r>
-              <a:rPr lang="en-US" dirty="0"/>
-              <a:t>Reuse of data: sample efficiency, offline, and batch RL</a:t>
-            </a:r>
-          </a:p>
-          <a:p>
-            <a:pPr lvl="1"/>
-            <a:r>
-              <a:rPr lang="en-US" dirty="0"/>
-              <a:t>Safe learning and exploration</a:t>
-            </a:r>
-          </a:p>
-          <a:p>
-            <a:pPr marL="0" indent="0">
-              <a:buNone/>
-            </a:pPr>
-            <a:r>
-              <a:rPr lang="en-US" b="1" dirty="0"/>
-              <a:t>Off-Policy learning is harder because:</a:t>
-            </a:r>
-          </a:p>
-          <a:p>
-            <a:pPr lvl="1"/>
-            <a:r>
-              <a:rPr lang="en-US" dirty="0"/>
-              <a:t>Requires distributional correction: E.g., importance sampling</a:t>
-            </a:r>
-          </a:p>
-          <a:p>
-            <a:pPr lvl="1"/>
-            <a:r>
-              <a:rPr lang="en-US" dirty="0"/>
-              <a:t>May suffer from high variance (due to importance sampling)</a:t>
-            </a:r>
-          </a:p>
-          <a:p>
-            <a:pPr lvl="1"/>
-            <a:r>
-              <a:rPr lang="en-US" dirty="0"/>
-              <a:t>Instability with non-linear function approximation (deep RL)</a:t>
-            </a:r>
-          </a:p>
-        </p:txBody>
-      </p:sp>
-    </p:spTree>
-    <p:extLst>
-      <p:ext uri="{BB962C8B-B14F-4D97-AF65-F5344CB8AC3E}">
-        <p14:creationId xmlns:p14="http://schemas.microsoft.com/office/powerpoint/2010/main" val="3868939227"/>
-      </p:ext>
-    </p:extLst>
-  </p:cSld>
-  <p:clrMapOvr>
-    <a:masterClrMapping/>
-  </p:clrMapOvr>
-</p:sld>
-</file>
-
-<file path=ppt/slides/slide21.xml><?xml version="1.0" encoding="utf-8"?>
-<p:sld xmlns:a="http://schemas.openxmlformats.org/drawingml/2006/main" xmlns:r="http://schemas.openxmlformats.org/officeDocument/2006/relationships" xmlns:p="http://schemas.openxmlformats.org/presentationml/2006/main">
-  <p:cSld>
-    <p:spTree>
-      <p:nvGrpSpPr>
-        <p:cNvPr id="1" name=""/>
-        <p:cNvGrpSpPr/>
-        <p:nvPr/>
-      </p:nvGrpSpPr>
-      <p:grpSpPr>
-        <a:xfrm>
-          <a:off x="0" y="0"/>
-          <a:ext cx="0" cy="0"/>
-          <a:chOff x="0" y="0"/>
-          <a:chExt cx="0" cy="0"/>
-        </a:xfrm>
-      </p:grpSpPr>
-      <p:sp>
-        <p:nvSpPr>
-          <p:cNvPr id="2" name="Title 1">
-            <a:extLst>
-              <a:ext uri="{FF2B5EF4-FFF2-40B4-BE49-F238E27FC236}">
-                <a16:creationId xmlns:a16="http://schemas.microsoft.com/office/drawing/2014/main" id="{CCF6C101-39C4-5534-A3ED-9D36AB8B7A7D}"/>
-              </a:ext>
-            </a:extLst>
-          </p:cNvPr>
-          <p:cNvSpPr>
-            <a:spLocks noGrp="1"/>
-          </p:cNvSpPr>
-          <p:nvPr>
-            <p:ph type="title"/>
-          </p:nvPr>
-        </p:nvSpPr>
-        <p:spPr/>
-        <p:txBody>
-          <a:bodyPr/>
-          <a:lstStyle/>
-          <a:p>
-            <a:r>
-              <a:rPr lang="en-US" dirty="0"/>
-              <a:t>Other Dimensions</a:t>
-            </a:r>
-          </a:p>
-        </p:txBody>
-      </p:sp>
-      <p:sp>
-        <p:nvSpPr>
-          <p:cNvPr id="3" name="Content Placeholder 2">
-            <a:extLst>
-              <a:ext uri="{FF2B5EF4-FFF2-40B4-BE49-F238E27FC236}">
-                <a16:creationId xmlns:a16="http://schemas.microsoft.com/office/drawing/2014/main" id="{8CB60D31-9CD5-1596-21BF-AD897227AFBE}"/>
-              </a:ext>
-            </a:extLst>
-          </p:cNvPr>
-          <p:cNvSpPr>
-            <a:spLocks noGrp="1"/>
-          </p:cNvSpPr>
-          <p:nvPr>
-            <p:ph idx="1"/>
-          </p:nvPr>
-        </p:nvSpPr>
-        <p:spPr/>
-        <p:txBody>
-          <a:bodyPr>
-            <a:normAutofit/>
-          </a:bodyPr>
-          <a:lstStyle/>
-          <a:p>
-            <a:r>
-              <a:rPr lang="en-US" b="1" dirty="0"/>
-              <a:t>Definition of return</a:t>
-            </a:r>
-            <a:r>
-              <a:rPr lang="en-US" dirty="0"/>
-              <a:t>: Episodic vs. continuing task; discounted vs. undiscounted.</a:t>
-            </a:r>
-          </a:p>
-          <a:p>
-            <a:r>
-              <a:rPr lang="en-US" b="1" dirty="0"/>
-              <a:t>Action values vs. state values</a:t>
-            </a:r>
-          </a:p>
-          <a:p>
-            <a:r>
-              <a:rPr lang="en-US" b="1" dirty="0"/>
-              <a:t>Exploration vs Exploitation</a:t>
-            </a:r>
-            <a:r>
-              <a:rPr lang="en-US" dirty="0"/>
-              <a:t>: This is a trade-off. Many methods need exploration for convergence.</a:t>
-            </a:r>
-          </a:p>
-          <a:p>
-            <a:r>
-              <a:rPr lang="en-US" b="1" dirty="0"/>
-              <a:t>Synchronous vs. Asynchronous</a:t>
-            </a:r>
-            <a:r>
-              <a:rPr lang="en-US" dirty="0"/>
-              <a:t>: Are all states updated at once or one by one in some order?</a:t>
-            </a:r>
-          </a:p>
-          <a:p>
-            <a:r>
-              <a:rPr lang="en-US" b="1" dirty="0"/>
-              <a:t>Real vs. Simulated</a:t>
-            </a:r>
-            <a:r>
-              <a:rPr lang="en-US" dirty="0"/>
-              <a:t>: Are real experiences, simulations, or both used for updates?</a:t>
-            </a:r>
-          </a:p>
-          <a:p>
-            <a:endParaRPr lang="en-US" dirty="0"/>
-          </a:p>
-          <a:p>
-            <a:endParaRPr lang="en-US" dirty="0"/>
-          </a:p>
-        </p:txBody>
-      </p:sp>
-    </p:spTree>
-    <p:extLst>
-      <p:ext uri="{BB962C8B-B14F-4D97-AF65-F5344CB8AC3E}">
-        <p14:creationId xmlns:p14="http://schemas.microsoft.com/office/powerpoint/2010/main" val="3047710047"/>
-      </p:ext>
-    </p:extLst>
-  </p:cSld>
-  <p:clrMapOvr>
-    <a:masterClrMapping/>
-  </p:clrMapOvr>
-</p:sld>
-</file>
-
-<file path=ppt/slides/slide22.xml><?xml version="1.0" encoding="utf-8"?>
-<p:sld xmlns:a="http://schemas.openxmlformats.org/drawingml/2006/main" xmlns:r="http://schemas.openxmlformats.org/officeDocument/2006/relationships" xmlns:p="http://schemas.openxmlformats.org/presentationml/2006/main">
-  <p:cSld>
-    <p:spTree>
-      <p:nvGrpSpPr>
-        <p:cNvPr id="1" name=""/>
-        <p:cNvGrpSpPr/>
-        <p:nvPr/>
-      </p:nvGrpSpPr>
-      <p:grpSpPr>
-        <a:xfrm>
-          <a:off x="0" y="0"/>
-          <a:ext cx="0" cy="0"/>
-          <a:chOff x="0" y="0"/>
-          <a:chExt cx="0" cy="0"/>
-        </a:xfrm>
-      </p:grpSpPr>
-      <p:sp>
-        <p:nvSpPr>
-          <p:cNvPr id="2" name="Title 1">
-            <a:extLst>
-              <a:ext uri="{FF2B5EF4-FFF2-40B4-BE49-F238E27FC236}">
-                <a16:creationId xmlns:a16="http://schemas.microsoft.com/office/drawing/2014/main" id="{3F0A6DFC-1DF7-340A-8A49-67E7A508EC3C}"/>
-              </a:ext>
-            </a:extLst>
-          </p:cNvPr>
-          <p:cNvSpPr>
-            <a:spLocks noGrp="1"/>
-          </p:cNvSpPr>
-          <p:nvPr>
-            <p:ph type="title"/>
-          </p:nvPr>
-        </p:nvSpPr>
-        <p:spPr/>
-        <p:txBody>
-          <a:bodyPr/>
-          <a:lstStyle/>
-          <a:p>
-            <a:r>
-              <a:rPr lang="en-US" dirty="0"/>
-              <a:t>Issues with Tabular Methods</a:t>
-            </a:r>
-          </a:p>
-        </p:txBody>
-      </p:sp>
-      <mc:AlternateContent xmlns:mc="http://schemas.openxmlformats.org/markup-compatibility/2006">
-        <mc:Choice xmlns:a14="http://schemas.microsoft.com/office/drawing/2010/main" Requires="a14">
-          <p:sp>
-            <p:nvSpPr>
-              <p:cNvPr id="3" name="Content Placeholder 2">
-                <a:extLst>
-                  <a:ext uri="{FF2B5EF4-FFF2-40B4-BE49-F238E27FC236}">
-                    <a16:creationId xmlns:a16="http://schemas.microsoft.com/office/drawing/2014/main" id="{60A46212-D3F8-9478-4414-6401E13D0EB2}"/>
-                  </a:ext>
-                </a:extLst>
-              </p:cNvPr>
-              <p:cNvSpPr>
-                <a:spLocks noGrp="1"/>
-              </p:cNvSpPr>
-              <p:nvPr>
-                <p:ph idx="1"/>
-              </p:nvPr>
-            </p:nvSpPr>
-            <p:spPr/>
-            <p:txBody>
-              <a:bodyPr>
-                <a:normAutofit fontScale="92500" lnSpcReduction="10000"/>
-              </a:bodyPr>
-              <a:lstStyle/>
-              <a:p>
-                <a:pPr marL="514350" indent="-514350">
-                  <a:spcBef>
-                    <a:spcPts val="0"/>
-                  </a:spcBef>
-                  <a:buFont typeface="+mj-lt"/>
-                  <a:buAutoNum type="arabicPeriod"/>
-                </a:pPr>
-                <a:r>
-                  <a:rPr lang="en-US" dirty="0"/>
-                  <a:t>Tables need much </a:t>
-                </a:r>
-                <a:r>
-                  <a:rPr lang="en-US" b="1" dirty="0"/>
-                  <a:t>space</a:t>
-                </a:r>
-                <a:r>
-                  <a:rPr lang="en-US" dirty="0"/>
-                  <a:t>. A complete table with </a:t>
-                </a:r>
-                <a14:m>
-                  <m:oMath xmlns:m="http://schemas.openxmlformats.org/officeDocument/2006/math">
-                    <m:r>
-                      <a:rPr lang="en-US" i="1" dirty="0" smtClean="0">
-                        <a:latin typeface="Cambria Math" panose="02040503050406030204" pitchFamily="18" charset="0"/>
-                      </a:rPr>
-                      <m:t>𝑞</m:t>
-                    </m:r>
-                  </m:oMath>
-                </a14:m>
-                <a:r>
-                  <a:rPr lang="en-US" dirty="0"/>
-                  <a:t>-values has size</a:t>
-                </a:r>
-                <a:br>
-                  <a:rPr lang="en-US" dirty="0"/>
-                </a:br>
-                <a14:m>
-                  <m:oMath xmlns:m="http://schemas.openxmlformats.org/officeDocument/2006/math">
-                    <m:r>
-                      <a:rPr lang="en-US" b="0" i="1" smtClean="0">
-                        <a:latin typeface="Cambria Math" panose="02040503050406030204" pitchFamily="18" charset="0"/>
-                      </a:rPr>
-                      <m:t>𝑂</m:t>
-                    </m:r>
-                    <m:d>
-                      <m:dPr>
-                        <m:ctrlPr>
-                          <a:rPr lang="en-US" b="0" i="1" smtClean="0">
-                            <a:latin typeface="Cambria Math" panose="02040503050406030204" pitchFamily="18" charset="0"/>
-                          </a:rPr>
-                        </m:ctrlPr>
-                      </m:dPr>
-                      <m:e>
-                        <m:d>
-                          <m:dPr>
-                            <m:begChr m:val="|"/>
-                            <m:endChr m:val="|"/>
-                            <m:ctrlPr>
-                              <a:rPr lang="en-US" b="0" i="1" smtClean="0">
-                                <a:latin typeface="Cambria Math" panose="02040503050406030204" pitchFamily="18" charset="0"/>
-                              </a:rPr>
-                            </m:ctrlPr>
-                          </m:dPr>
-                          <m:e>
-                            <m:r>
-                              <a:rPr lang="en-US" i="1" dirty="0">
-                                <a:latin typeface="Cambria Math" panose="02040503050406030204" pitchFamily="18" charset="0"/>
-                                <a:ea typeface="Cambria Math" panose="02040503050406030204" pitchFamily="18" charset="0"/>
-                              </a:rPr>
-                              <m:t>𝒮</m:t>
-                            </m:r>
-                          </m:e>
-                        </m:d>
-                        <m:r>
-                          <m:rPr>
-                            <m:nor/>
-                          </m:rPr>
-                          <a:rPr lang="en-US" dirty="0"/>
-                          <m:t> 	</m:t>
-                        </m:r>
-                        <m:r>
-                          <a:rPr lang="en-US" b="0" i="1" dirty="0" smtClean="0">
-                            <a:latin typeface="Cambria Math" panose="02040503050406030204" pitchFamily="18" charset="0"/>
-                          </a:rPr>
-                          <m:t>×</m:t>
-                        </m:r>
-                        <m:d>
-                          <m:dPr>
-                            <m:begChr m:val="|"/>
-                            <m:endChr m:val="|"/>
-                            <m:ctrlPr>
-                              <a:rPr lang="en-US" b="0" i="1" dirty="0" smtClean="0">
-                                <a:latin typeface="Cambria Math" panose="02040503050406030204" pitchFamily="18" charset="0"/>
-                              </a:rPr>
-                            </m:ctrlPr>
-                          </m:dPr>
-                          <m:e>
-                            <m:r>
-                              <a:rPr lang="en-US" i="1" dirty="0">
-                                <a:latin typeface="Cambria Math" panose="02040503050406030204" pitchFamily="18" charset="0"/>
-                                <a:ea typeface="Cambria Math" panose="02040503050406030204" pitchFamily="18" charset="0"/>
-                              </a:rPr>
-                              <m:t>𝒜</m:t>
-                            </m:r>
-                          </m:e>
-                        </m:d>
-                      </m:e>
-                    </m:d>
-                  </m:oMath>
-                </a14:m>
-                <a:br>
-                  <a:rPr lang="en-US" dirty="0"/>
-                </a:br>
-                <a:r>
-                  <a:rPr lang="en-US" dirty="0"/>
-                  <a:t>The state space is typically extremely large, or even infinite, in continuous spaces.</a:t>
-                </a:r>
-              </a:p>
-              <a:p>
-                <a:pPr marL="514350" indent="-514350">
-                  <a:spcBef>
-                    <a:spcPts val="0"/>
-                  </a:spcBef>
-                  <a:buFont typeface="+mj-lt"/>
-                  <a:buAutoNum type="arabicPeriod"/>
-                </a:pPr>
-                <a:endParaRPr lang="en-US" dirty="0"/>
-              </a:p>
-              <a:p>
-                <a:pPr marL="514350" indent="-514350">
-                  <a:spcBef>
-                    <a:spcPts val="0"/>
-                  </a:spcBef>
-                  <a:buFont typeface="+mj-lt"/>
-                  <a:buAutoNum type="arabicPeriod"/>
-                </a:pPr>
-                <a:r>
-                  <a:rPr lang="en-US" dirty="0"/>
-                  <a:t>We need a lot of </a:t>
-                </a:r>
-                <a:r>
-                  <a:rPr lang="en-US" b="1" dirty="0"/>
-                  <a:t>data </a:t>
-                </a:r>
-                <a:r>
-                  <a:rPr lang="en-US" dirty="0"/>
-                  <a:t>to estimate all entries.</a:t>
-                </a:r>
-              </a:p>
-              <a:p>
-                <a:pPr marL="514350" indent="-514350">
-                  <a:spcBef>
-                    <a:spcPts val="0"/>
-                  </a:spcBef>
-                  <a:buFont typeface="+mj-lt"/>
-                  <a:buAutoNum type="arabicPeriod"/>
-                </a:pPr>
-                <a:endParaRPr lang="en-US" dirty="0"/>
-              </a:p>
-              <a:p>
-                <a:pPr marL="514350" indent="-514350">
-                  <a:spcBef>
-                    <a:spcPts val="0"/>
-                  </a:spcBef>
-                  <a:buFont typeface="+mj-lt"/>
-                  <a:buAutoNum type="arabicPeriod"/>
-                </a:pPr>
-                <a:r>
-                  <a:rPr lang="en-US" dirty="0"/>
-                  <a:t>Two states may be very similar and therefore should have similar </a:t>
-                </a:r>
-                <a14:m>
-                  <m:oMath xmlns:m="http://schemas.openxmlformats.org/officeDocument/2006/math">
-                    <m:r>
-                      <a:rPr lang="en-US" i="1" dirty="0">
-                        <a:latin typeface="Cambria Math" panose="02040503050406030204" pitchFamily="18" charset="0"/>
-                      </a:rPr>
-                      <m:t>𝑞</m:t>
-                    </m:r>
-                  </m:oMath>
-                </a14:m>
-                <a:r>
-                  <a:rPr lang="en-US" dirty="0"/>
-                  <a:t>-values. Tabular methods </a:t>
-                </a:r>
-                <a:r>
-                  <a:rPr lang="en-US" b="1" dirty="0"/>
-                  <a:t>cannot generalize across states</a:t>
-                </a:r>
-                <a:r>
-                  <a:rPr lang="en-US" dirty="0"/>
-                  <a:t>.</a:t>
-                </a:r>
-              </a:p>
-              <a:p>
-                <a:pPr marL="514350" indent="-514350">
-                  <a:spcBef>
-                    <a:spcPts val="0"/>
-                  </a:spcBef>
-                  <a:buFont typeface="+mj-lt"/>
-                  <a:buAutoNum type="arabicPeriod"/>
-                </a:pPr>
-                <a:endParaRPr lang="en-US" dirty="0"/>
-              </a:p>
-              <a:p>
-                <a:pPr marL="514350" indent="-514350">
-                  <a:spcBef>
-                    <a:spcPts val="0"/>
-                  </a:spcBef>
-                  <a:buFont typeface="+mj-lt"/>
-                  <a:buAutoNum type="arabicPeriod"/>
-                </a:pPr>
-                <a:endParaRPr lang="en-US" dirty="0"/>
-              </a:p>
-              <a:p>
-                <a:pPr marL="0" indent="0">
-                  <a:spcBef>
-                    <a:spcPts val="0"/>
-                  </a:spcBef>
-                  <a:buNone/>
-                </a:pPr>
-                <a:r>
-                  <a:rPr lang="en-US" dirty="0"/>
-                  <a:t>Next, we will talk about </a:t>
-                </a:r>
-                <a:r>
-                  <a:rPr lang="en-US" b="1" dirty="0"/>
-                  <a:t>approximate solution methods </a:t>
-                </a:r>
-                <a:r>
-                  <a:rPr lang="en-US" dirty="0"/>
-                  <a:t>to deal with these issues.</a:t>
-                </a:r>
-              </a:p>
-            </p:txBody>
-          </p:sp>
-        </mc:Choice>
-        <mc:Fallback>
-          <p:sp>
-            <p:nvSpPr>
-              <p:cNvPr id="3" name="Content Placeholder 2">
-                <a:extLst>
-                  <a:ext uri="{FF2B5EF4-FFF2-40B4-BE49-F238E27FC236}">
-                    <a16:creationId xmlns:a16="http://schemas.microsoft.com/office/drawing/2014/main" id="{60A46212-D3F8-9478-4414-6401E13D0EB2}"/>
-                  </a:ext>
-                </a:extLst>
-              </p:cNvPr>
-              <p:cNvSpPr>
-                <a:spLocks noGrp="1" noRot="1" noChangeAspect="1" noMove="1" noResize="1" noEditPoints="1" noAdjustHandles="1" noChangeArrowheads="1" noChangeShapeType="1" noTextEdit="1"/>
-              </p:cNvSpPr>
-              <p:nvPr>
-                <p:ph idx="1"/>
-              </p:nvPr>
-            </p:nvSpPr>
-            <p:spPr>
-              <a:blipFill>
-                <a:blip r:embed="rId2"/>
-                <a:stretch>
-                  <a:fillRect l="-1101" t="-2679"/>
-                </a:stretch>
-              </a:blipFill>
-            </p:spPr>
-            <p:txBody>
-              <a:bodyPr/>
-              <a:lstStyle/>
-              <a:p>
-                <a:r>
-                  <a:rPr lang="en-US">
-                    <a:noFill/>
-                  </a:rPr>
-                  <a:t> </a:t>
-                </a:r>
-              </a:p>
-            </p:txBody>
-          </p:sp>
-        </mc:Fallback>
-      </mc:AlternateContent>
-    </p:spTree>
-    <p:extLst>
-      <p:ext uri="{BB962C8B-B14F-4D97-AF65-F5344CB8AC3E}">
-        <p14:creationId xmlns:p14="http://schemas.microsoft.com/office/powerpoint/2010/main" val="1894962668"/>
-      </p:ext>
-    </p:extLst>
-  </p:cSld>
-  <p:clrMapOvr>
-    <a:masterClrMapping/>
-  </p:clrMapOvr>
-</p:sld>
-</file>
-
-<file path=ppt/slides/slide3.xml><?xml version="1.0" encoding="utf-8"?>
+<file path=ppt/slides/slide4.xml><?xml version="1.0" encoding="utf-8"?>
 <p:sld xmlns:a="http://schemas.openxmlformats.org/drawingml/2006/main" xmlns:r="http://schemas.openxmlformats.org/officeDocument/2006/relationships" xmlns:p="http://schemas.openxmlformats.org/presentationml/2006/main">
   <p:cSld>
     <p:spTree>
@@ -11444,7 +11814,7 @@
 </p:sld>
 </file>
 
-<file path=ppt/slides/slide4.xml><?xml version="1.0" encoding="utf-8"?>
+<file path=ppt/slides/slide5.xml><?xml version="1.0" encoding="utf-8"?>
 <p:sld xmlns:a="http://schemas.openxmlformats.org/drawingml/2006/main" xmlns:r="http://schemas.openxmlformats.org/officeDocument/2006/relationships" xmlns:p="http://schemas.openxmlformats.org/presentationml/2006/main">
   <p:cSld>
     <p:spTree>
@@ -11954,7 +12324,7 @@
 </p:sld>
 </file>
 
-<file path=ppt/slides/slide5.xml><?xml version="1.0" encoding="utf-8"?>
+<file path=ppt/slides/slide6.xml><?xml version="1.0" encoding="utf-8"?>
 <p:sld xmlns:a="http://schemas.openxmlformats.org/drawingml/2006/main" xmlns:r="http://schemas.openxmlformats.org/officeDocument/2006/relationships" xmlns:p="http://schemas.openxmlformats.org/presentationml/2006/main">
   <p:cSld>
     <p:spTree>
@@ -11999,8 +12369,8 @@
           </a:p>
         </p:txBody>
       </p:sp>
-      <mc:AlternateContent xmlns:mc="http://schemas.openxmlformats.org/markup-compatibility/2006">
-        <mc:Choice xmlns:a14="http://schemas.microsoft.com/office/drawing/2010/main" Requires="a14">
+      <mc:AlternateContent xmlns:mc="http://schemas.openxmlformats.org/markup-compatibility/2006" xmlns:a14="http://schemas.microsoft.com/office/drawing/2010/main">
+        <mc:Choice Requires="a14">
           <p:sp>
             <p:nvSpPr>
               <p:cNvPr id="8" name="Content Placeholder 7">
@@ -12239,7 +12609,7 @@
             </p:txBody>
           </p:sp>
         </mc:Choice>
-        <mc:Fallback>
+        <mc:Fallback xmlns="">
           <p:sp>
             <p:nvSpPr>
               <p:cNvPr id="8" name="Content Placeholder 7">
@@ -12536,7 +12906,7 @@
 </p:sld>
 </file>
 
-<file path=ppt/slides/slide6.xml><?xml version="1.0" encoding="utf-8"?>
+<file path=ppt/slides/slide7.xml><?xml version="1.0" encoding="utf-8"?>
 <p:sld xmlns:a="http://schemas.openxmlformats.org/drawingml/2006/main" xmlns:r="http://schemas.openxmlformats.org/officeDocument/2006/relationships" xmlns:p="http://schemas.openxmlformats.org/presentationml/2006/main">
   <p:cSld>
     <p:spTree>
@@ -12622,7 +12992,7 @@
 </p:sld>
 </file>
 
-<file path=ppt/slides/slide7.xml><?xml version="1.0" encoding="utf-8"?>
+<file path=ppt/slides/slide8.xml><?xml version="1.0" encoding="utf-8"?>
 <p:sld xmlns:a="http://schemas.openxmlformats.org/drawingml/2006/main" xmlns:r="http://schemas.openxmlformats.org/officeDocument/2006/relationships" xmlns:p="http://schemas.openxmlformats.org/presentationml/2006/main">
   <p:cSld>
     <p:spTree>
@@ -12699,8 +13069,8 @@
           </a:p>
         </p:txBody>
       </p:sp>
-      <mc:AlternateContent xmlns:mc="http://schemas.openxmlformats.org/markup-compatibility/2006">
-        <mc:Choice xmlns:a14="http://schemas.microsoft.com/office/drawing/2010/main" Requires="a14">
+      <mc:AlternateContent xmlns:mc="http://schemas.openxmlformats.org/markup-compatibility/2006" xmlns:a14="http://schemas.microsoft.com/office/drawing/2010/main">
+        <mc:Choice Requires="a14">
           <p:sp>
             <p:nvSpPr>
               <p:cNvPr id="3" name="Content Placeholder 2">
@@ -13100,7 +13470,7 @@
             </p:txBody>
           </p:sp>
         </mc:Choice>
-        <mc:Fallback>
+        <mc:Fallback xmlns="">
           <p:sp>
             <p:nvSpPr>
               <p:cNvPr id="3" name="Content Placeholder 2">
@@ -13157,7 +13527,7 @@
 </p:sld>
 </file>
 
-<file path=ppt/slides/slide8.xml><?xml version="1.0" encoding="utf-8"?>
+<file path=ppt/slides/slide9.xml><?xml version="1.0" encoding="utf-8"?>
 <p:sld xmlns:a="http://schemas.openxmlformats.org/drawingml/2006/main" xmlns:r="http://schemas.openxmlformats.org/officeDocument/2006/relationships" xmlns:p="http://schemas.openxmlformats.org/presentationml/2006/main">
   <p:cSld>
     <p:spTree>
@@ -13489,201 +13859,6 @@
     <p:extLst>
       <p:ext uri="{BB962C8B-B14F-4D97-AF65-F5344CB8AC3E}">
         <p14:creationId xmlns:p14="http://schemas.microsoft.com/office/powerpoint/2010/main" val="1019483300"/>
-      </p:ext>
-    </p:extLst>
-  </p:cSld>
-  <p:clrMapOvr>
-    <a:masterClrMapping/>
-  </p:clrMapOvr>
-</p:sld>
-</file>
-
-<file path=ppt/slides/slide9.xml><?xml version="1.0" encoding="utf-8"?>
-<p:sld xmlns:a="http://schemas.openxmlformats.org/drawingml/2006/main" xmlns:r="http://schemas.openxmlformats.org/officeDocument/2006/relationships" xmlns:p="http://schemas.openxmlformats.org/presentationml/2006/main">
-  <p:cSld>
-    <p:spTree>
-      <p:nvGrpSpPr>
-        <p:cNvPr id="1" name=""/>
-        <p:cNvGrpSpPr/>
-        <p:nvPr/>
-      </p:nvGrpSpPr>
-      <p:grpSpPr>
-        <a:xfrm>
-          <a:off x="0" y="0"/>
-          <a:ext cx="0" cy="0"/>
-          <a:chOff x="0" y="0"/>
-          <a:chExt cx="0" cy="0"/>
-        </a:xfrm>
-      </p:grpSpPr>
-      <p:sp>
-        <p:nvSpPr>
-          <p:cNvPr id="5" name="Title 4">
-            <a:extLst>
-              <a:ext uri="{FF2B5EF4-FFF2-40B4-BE49-F238E27FC236}">
-                <a16:creationId xmlns:a16="http://schemas.microsoft.com/office/drawing/2014/main" id="{A5C8AC25-EC4C-3842-F311-7347DBC1A71C}"/>
-              </a:ext>
-            </a:extLst>
-          </p:cNvPr>
-          <p:cNvSpPr>
-            <a:spLocks noGrp="1"/>
-          </p:cNvSpPr>
-          <p:nvPr>
-            <p:ph type="title"/>
-          </p:nvPr>
-        </p:nvSpPr>
-        <p:spPr>
-          <a:xfrm>
-            <a:off x="838200" y="365126"/>
-            <a:ext cx="10776774" cy="759072"/>
-          </a:xfrm>
-        </p:spPr>
-        <p:txBody>
-          <a:bodyPr/>
-          <a:lstStyle/>
-          <a:p>
-            <a:r>
-              <a:rPr lang="en-US" dirty="0"/>
-              <a:t>The Effect of Planning</a:t>
-            </a:r>
-          </a:p>
-        </p:txBody>
-      </p:sp>
-      <p:pic>
-        <p:nvPicPr>
-          <p:cNvPr id="4" name="Picture 3">
-            <a:extLst>
-              <a:ext uri="{FF2B5EF4-FFF2-40B4-BE49-F238E27FC236}">
-                <a16:creationId xmlns:a16="http://schemas.microsoft.com/office/drawing/2014/main" id="{25CE6196-0C58-18A7-BA50-D3B376B607E3}"/>
-              </a:ext>
-            </a:extLst>
-          </p:cNvPr>
-          <p:cNvPicPr>
-            <a:picLocks noChangeAspect="1"/>
-          </p:cNvPicPr>
-          <p:nvPr/>
-        </p:nvPicPr>
-        <p:blipFill>
-          <a:blip r:embed="rId2"/>
-          <a:stretch>
-            <a:fillRect/>
-          </a:stretch>
-        </p:blipFill>
-        <p:spPr>
-          <a:xfrm>
-            <a:off x="-408370" y="1660797"/>
-            <a:ext cx="7086022" cy="4108300"/>
-          </a:xfrm>
-          <a:prstGeom prst="rect">
-            <a:avLst/>
-          </a:prstGeom>
-        </p:spPr>
-      </p:pic>
-      <p:sp>
-        <p:nvSpPr>
-          <p:cNvPr id="6" name="Content Placeholder 5">
-            <a:extLst>
-              <a:ext uri="{FF2B5EF4-FFF2-40B4-BE49-F238E27FC236}">
-                <a16:creationId xmlns:a16="http://schemas.microsoft.com/office/drawing/2014/main" id="{5C0268D5-3842-005A-9D87-7A037B2EC858}"/>
-              </a:ext>
-            </a:extLst>
-          </p:cNvPr>
-          <p:cNvSpPr>
-            <a:spLocks noGrp="1"/>
-          </p:cNvSpPr>
-          <p:nvPr>
-            <p:ph idx="1"/>
-          </p:nvPr>
-        </p:nvSpPr>
-        <p:spPr>
-          <a:xfrm>
-            <a:off x="6096000" y="1396030"/>
-            <a:ext cx="5623420" cy="4870545"/>
-          </a:xfrm>
-        </p:spPr>
-        <p:txBody>
-          <a:bodyPr>
-            <a:normAutofit fontScale="77500" lnSpcReduction="20000"/>
-          </a:bodyPr>
-          <a:lstStyle/>
-          <a:p>
-            <a:r>
-              <a:rPr lang="en-US" b="1" dirty="0"/>
-              <a:t>Benefit</a:t>
-            </a:r>
-            <a:r>
-              <a:rPr lang="en-US" dirty="0"/>
-              <a:t>: Adding planning speeds learning by reusing sampled experience.</a:t>
-            </a:r>
-          </a:p>
-          <a:p>
-            <a:endParaRPr lang="en-US" dirty="0"/>
-          </a:p>
-          <a:p>
-            <a:r>
-              <a:rPr lang="en-US" b="1" dirty="0"/>
-              <a:t>Issues</a:t>
-            </a:r>
-            <a:r>
-              <a:rPr lang="en-US" dirty="0"/>
-              <a:t>: Planning is a problem if the model is wrong:</a:t>
-            </a:r>
-          </a:p>
-          <a:p>
-            <a:pPr lvl="1"/>
-            <a:r>
-              <a:rPr lang="en-US" dirty="0"/>
-              <a:t>Based on an insufficient number of samples.</a:t>
-            </a:r>
-          </a:p>
-          <a:p>
-            <a:pPr lvl="1"/>
-            <a:r>
-              <a:rPr lang="en-US" dirty="0"/>
-              <a:t>Function approximation not great.</a:t>
-            </a:r>
-          </a:p>
-          <a:p>
-            <a:pPr lvl="1"/>
-            <a:r>
-              <a:rPr lang="en-US" dirty="0"/>
-              <a:t>Environment changes</a:t>
-            </a:r>
-          </a:p>
-          <a:p>
-            <a:r>
-              <a:rPr lang="en-US" dirty="0"/>
-              <a:t>Dyna quickly corrects too optimistic predictions since they will be selected for the next real action.</a:t>
-            </a:r>
-          </a:p>
-          <a:p>
-            <a:endParaRPr lang="en-US" dirty="0"/>
-          </a:p>
-          <a:p>
-            <a:r>
-              <a:rPr lang="en-US" dirty="0"/>
-              <a:t>For changing environments:</a:t>
-            </a:r>
-          </a:p>
-          <a:p>
-            <a:pPr lvl="1"/>
-            <a:r>
-              <a:rPr lang="en-US" dirty="0"/>
-              <a:t>Keep exploring.</a:t>
-            </a:r>
-          </a:p>
-          <a:p>
-            <a:pPr lvl="1"/>
-            <a:r>
-              <a:rPr lang="en-US" dirty="0"/>
-              <a:t>Keep track of long action/state combinations that were not tried.</a:t>
-            </a:r>
-          </a:p>
-        </p:txBody>
-      </p:sp>
-    </p:spTree>
-    <p:extLst>
-      <p:ext uri="{BB962C8B-B14F-4D97-AF65-F5344CB8AC3E}">
-        <p14:creationId xmlns:p14="http://schemas.microsoft.com/office/powerpoint/2010/main" val="3636997415"/>
       </p:ext>
     </p:extLst>
   </p:cSld>

--- a/slides/Lecture_Chapter08.pptx
+++ b/slides/Lecture_Chapter08.pptx
@@ -27,7 +27,8 @@
     <p:sldId id="405" r:id="rId21"/>
     <p:sldId id="406" r:id="rId22"/>
     <p:sldId id="407" r:id="rId23"/>
-    <p:sldId id="408" r:id="rId24"/>
+    <p:sldId id="479" r:id="rId24"/>
+    <p:sldId id="408" r:id="rId25"/>
   </p:sldIdLst>
   <p:sldSz cx="12192000" cy="6858000"/>
   <p:notesSz cx="6858000" cy="9144000"/>
@@ -169,6 +170,7 @@
             <p14:sldId id="405"/>
             <p14:sldId id="406"/>
             <p14:sldId id="407"/>
+            <p14:sldId id="479"/>
             <p14:sldId id="408"/>
           </p14:sldIdLst>
         </p14:section>
@@ -328,7 +330,7 @@
           <a:p>
             <a:fld id="{3E22BF2E-04DA-469E-97C5-BB68A0368813}" type="datetimeFigureOut">
               <a:rPr lang="en-US" smtClean="0"/>
-              <a:t>2/6/2026</a:t>
+              <a:t>2/7/2026</a:t>
             </a:fld>
             <a:endParaRPr lang="en-US"/>
           </a:p>
@@ -526,7 +528,7 @@
           <a:p>
             <a:fld id="{3E22BF2E-04DA-469E-97C5-BB68A0368813}" type="datetimeFigureOut">
               <a:rPr lang="en-US" smtClean="0"/>
-              <a:t>2/6/2026</a:t>
+              <a:t>2/7/2026</a:t>
             </a:fld>
             <a:endParaRPr lang="en-US"/>
           </a:p>
@@ -734,7 +736,7 @@
           <a:p>
             <a:fld id="{3E22BF2E-04DA-469E-97C5-BB68A0368813}" type="datetimeFigureOut">
               <a:rPr lang="en-US" smtClean="0"/>
-              <a:t>2/6/2026</a:t>
+              <a:t>2/7/2026</a:t>
             </a:fld>
             <a:endParaRPr lang="en-US"/>
           </a:p>
@@ -942,7 +944,7 @@
           <a:p>
             <a:fld id="{3E22BF2E-04DA-469E-97C5-BB68A0368813}" type="datetimeFigureOut">
               <a:rPr lang="en-US" smtClean="0"/>
-              <a:t>2/6/2026</a:t>
+              <a:t>2/7/2026</a:t>
             </a:fld>
             <a:endParaRPr lang="en-US"/>
           </a:p>
@@ -1217,7 +1219,7 @@
           <a:p>
             <a:fld id="{3E22BF2E-04DA-469E-97C5-BB68A0368813}" type="datetimeFigureOut">
               <a:rPr lang="en-US" smtClean="0"/>
-              <a:t>2/6/2026</a:t>
+              <a:t>2/7/2026</a:t>
             </a:fld>
             <a:endParaRPr lang="en-US"/>
           </a:p>
@@ -1482,7 +1484,7 @@
           <a:p>
             <a:fld id="{3E22BF2E-04DA-469E-97C5-BB68A0368813}" type="datetimeFigureOut">
               <a:rPr lang="en-US" smtClean="0"/>
-              <a:t>2/6/2026</a:t>
+              <a:t>2/7/2026</a:t>
             </a:fld>
             <a:endParaRPr lang="en-US"/>
           </a:p>
@@ -1894,7 +1896,7 @@
           <a:p>
             <a:fld id="{3E22BF2E-04DA-469E-97C5-BB68A0368813}" type="datetimeFigureOut">
               <a:rPr lang="en-US" smtClean="0"/>
-              <a:t>2/6/2026</a:t>
+              <a:t>2/7/2026</a:t>
             </a:fld>
             <a:endParaRPr lang="en-US"/>
           </a:p>
@@ -2035,7 +2037,7 @@
           <a:p>
             <a:fld id="{3E22BF2E-04DA-469E-97C5-BB68A0368813}" type="datetimeFigureOut">
               <a:rPr lang="en-US" smtClean="0"/>
-              <a:t>2/6/2026</a:t>
+              <a:t>2/7/2026</a:t>
             </a:fld>
             <a:endParaRPr lang="en-US"/>
           </a:p>
@@ -2148,7 +2150,7 @@
           <a:p>
             <a:fld id="{3E22BF2E-04DA-469E-97C5-BB68A0368813}" type="datetimeFigureOut">
               <a:rPr lang="en-US" smtClean="0"/>
-              <a:t>2/6/2026</a:t>
+              <a:t>2/7/2026</a:t>
             </a:fld>
             <a:endParaRPr lang="en-US"/>
           </a:p>
@@ -2459,7 +2461,7 @@
           <a:p>
             <a:fld id="{3E22BF2E-04DA-469E-97C5-BB68A0368813}" type="datetimeFigureOut">
               <a:rPr lang="en-US" smtClean="0"/>
-              <a:t>2/6/2026</a:t>
+              <a:t>2/7/2026</a:t>
             </a:fld>
             <a:endParaRPr lang="en-US"/>
           </a:p>
@@ -2747,7 +2749,7 @@
           <a:p>
             <a:fld id="{3E22BF2E-04DA-469E-97C5-BB68A0368813}" type="datetimeFigureOut">
               <a:rPr lang="en-US" smtClean="0"/>
-              <a:t>2/6/2026</a:t>
+              <a:t>2/7/2026</a:t>
             </a:fld>
             <a:endParaRPr lang="en-US"/>
           </a:p>
@@ -2988,7 +2990,7 @@
           <a:p>
             <a:fld id="{3E22BF2E-04DA-469E-97C5-BB68A0368813}" type="datetimeFigureOut">
               <a:rPr lang="en-US" smtClean="0"/>
-              <a:t>2/6/2026</a:t>
+              <a:t>2/7/2026</a:t>
             </a:fld>
             <a:endParaRPr lang="en-US"/>
           </a:p>
@@ -8243,6 +8245,158 @@
           <p:cNvPr id="2" name="Title 1">
             <a:extLst>
               <a:ext uri="{FF2B5EF4-FFF2-40B4-BE49-F238E27FC236}">
+                <a16:creationId xmlns:a16="http://schemas.microsoft.com/office/drawing/2014/main" id="{2057D7FF-0D60-8343-A797-3671E686ED24}"/>
+              </a:ext>
+            </a:extLst>
+          </p:cNvPr>
+          <p:cNvSpPr>
+            <a:spLocks noGrp="1"/>
+          </p:cNvSpPr>
+          <p:nvPr>
+            <p:ph type="title"/>
+          </p:nvPr>
+        </p:nvSpPr>
+        <p:spPr/>
+        <p:txBody>
+          <a:bodyPr/>
+          <a:lstStyle/>
+          <a:p>
+            <a:r>
+              <a:rPr lang="en-US" dirty="0"/>
+              <a:t>Relationship With Reflex Agents</a:t>
+            </a:r>
+          </a:p>
+        </p:txBody>
+      </p:sp>
+      <p:sp>
+        <p:nvSpPr>
+          <p:cNvPr id="3" name="Content Placeholder 2">
+            <a:extLst>
+              <a:ext uri="{FF2B5EF4-FFF2-40B4-BE49-F238E27FC236}">
+                <a16:creationId xmlns:a16="http://schemas.microsoft.com/office/drawing/2014/main" id="{9D419333-8620-3B90-7232-099721165507}"/>
+              </a:ext>
+            </a:extLst>
+          </p:cNvPr>
+          <p:cNvSpPr>
+            <a:spLocks noGrp="1"/>
+          </p:cNvSpPr>
+          <p:nvPr>
+            <p:ph idx="1"/>
+          </p:nvPr>
+        </p:nvSpPr>
+        <p:spPr/>
+        <p:txBody>
+          <a:bodyPr>
+            <a:normAutofit lnSpcReduction="10000"/>
+          </a:bodyPr>
+          <a:lstStyle/>
+          <a:p>
+            <a:r>
+              <a:rPr lang="en-US" dirty="0"/>
+              <a:t>Tabular methods create a policy that defines the action for each state.</a:t>
+            </a:r>
+          </a:p>
+          <a:p>
+            <a:r>
+              <a:rPr lang="en-US" dirty="0"/>
+              <a:t>We can implement this policy by a set of rules, one for each state.</a:t>
+            </a:r>
+          </a:p>
+          <a:p>
+            <a:r>
+              <a:rPr lang="en-US" dirty="0"/>
+              <a:t>This means that </a:t>
+            </a:r>
+            <a:r>
+              <a:rPr lang="en-US" b="1" dirty="0"/>
+              <a:t>tabular RL learns a reflex agent.</a:t>
+            </a:r>
+          </a:p>
+          <a:p>
+            <a:endParaRPr lang="en-US" b="1" dirty="0"/>
+          </a:p>
+          <a:p>
+            <a:pPr marL="0" indent="0">
+              <a:buNone/>
+            </a:pPr>
+            <a:r>
+              <a:rPr lang="en-US" b="1" dirty="0"/>
+              <a:t>Cases:</a:t>
+            </a:r>
+          </a:p>
+          <a:p>
+            <a:pPr marL="514350" indent="-514350">
+              <a:buFont typeface="+mj-lt"/>
+              <a:buAutoNum type="alphaLcParenR"/>
+            </a:pPr>
+            <a:r>
+              <a:rPr lang="en-US" b="1" dirty="0"/>
+              <a:t>Fully observable case </a:t>
+            </a:r>
+            <a:r>
+              <a:rPr lang="en-US" dirty="0"/>
+              <a:t>(MDPs): Learn a </a:t>
+            </a:r>
+            <a:r>
+              <a:rPr lang="en-US" b="1" dirty="0"/>
+              <a:t>simple reflex agent.</a:t>
+            </a:r>
+          </a:p>
+          <a:p>
+            <a:pPr marL="514350" indent="-514350">
+              <a:buFont typeface="+mj-lt"/>
+              <a:buAutoNum type="alphaLcParenR"/>
+            </a:pPr>
+            <a:r>
+              <a:rPr lang="en-US" b="1" dirty="0"/>
+              <a:t>Partially observable case</a:t>
+            </a:r>
+            <a:r>
+              <a:rPr lang="en-US" dirty="0"/>
+              <a:t>: The agent constantly updates its agent state to approximate the environment state. The agent stores the agent state and uses it to decide on actions. It learns a </a:t>
+            </a:r>
+            <a:r>
+              <a:rPr lang="en-US" b="1" dirty="0"/>
+              <a:t>model-based reflex agent.</a:t>
+            </a:r>
+          </a:p>
+        </p:txBody>
+      </p:sp>
+    </p:spTree>
+    <p:extLst>
+      <p:ext uri="{BB962C8B-B14F-4D97-AF65-F5344CB8AC3E}">
+        <p14:creationId xmlns:p14="http://schemas.microsoft.com/office/powerpoint/2010/main" val="3439201098"/>
+      </p:ext>
+    </p:extLst>
+  </p:cSld>
+  <p:clrMapOvr>
+    <a:masterClrMapping/>
+  </p:clrMapOvr>
+</p:sld>
+</file>
+
+<file path=ppt/slides/slide24.xml><?xml version="1.0" encoding="utf-8"?>
+<p:sld xmlns:a="http://schemas.openxmlformats.org/drawingml/2006/main" xmlns:r="http://schemas.openxmlformats.org/officeDocument/2006/relationships" xmlns:p="http://schemas.openxmlformats.org/presentationml/2006/main">
+  <p:cSld>
+    <p:spTree>
+      <p:nvGrpSpPr>
+        <p:cNvPr id="1" name=""/>
+        <p:cNvGrpSpPr/>
+        <p:nvPr/>
+      </p:nvGrpSpPr>
+      <p:grpSpPr>
+        <a:xfrm>
+          <a:off x="0" y="0"/>
+          <a:ext cx="0" cy="0"/>
+          <a:chOff x="0" y="0"/>
+          <a:chExt cx="0" cy="0"/>
+        </a:xfrm>
+      </p:grpSpPr>
+      <p:sp>
+        <p:nvSpPr>
+          <p:cNvPr id="2" name="Title 1">
+            <a:extLst>
+              <a:ext uri="{FF2B5EF4-FFF2-40B4-BE49-F238E27FC236}">
                 <a16:creationId xmlns:a16="http://schemas.microsoft.com/office/drawing/2014/main" id="{3F0A6DFC-1DF7-340A-8A49-67E7A508EC3C}"/>
               </a:ext>
             </a:extLst>

--- a/slides/Lecture_Chapter08.pptx
+++ b/slides/Lecture_Chapter08.pptx
@@ -7,7 +7,7 @@
   <p:sldIdLst>
     <p:sldId id="256" r:id="rId2"/>
     <p:sldId id="313" r:id="rId3"/>
-    <p:sldId id="478" r:id="rId4"/>
+    <p:sldId id="480" r:id="rId4"/>
     <p:sldId id="393" r:id="rId5"/>
     <p:sldId id="385" r:id="rId6"/>
     <p:sldId id="386" r:id="rId7"/>
@@ -134,7 +134,7 @@
           <p14:sldIdLst>
             <p14:sldId id="256"/>
             <p14:sldId id="313"/>
-            <p14:sldId id="478"/>
+            <p14:sldId id="480"/>
           </p14:sldIdLst>
         </p14:section>
         <p14:section name="Introduction" id="{175B7E81-9252-44C4-987D-BA1F14A88A5B}">
@@ -330,7 +330,7 @@
           <a:p>
             <a:fld id="{3E22BF2E-04DA-469E-97C5-BB68A0368813}" type="datetimeFigureOut">
               <a:rPr lang="en-US" smtClean="0"/>
-              <a:t>2/7/2026</a:t>
+              <a:t>2/23/2026</a:t>
             </a:fld>
             <a:endParaRPr lang="en-US"/>
           </a:p>
@@ -528,7 +528,7 @@
           <a:p>
             <a:fld id="{3E22BF2E-04DA-469E-97C5-BB68A0368813}" type="datetimeFigureOut">
               <a:rPr lang="en-US" smtClean="0"/>
-              <a:t>2/7/2026</a:t>
+              <a:t>2/23/2026</a:t>
             </a:fld>
             <a:endParaRPr lang="en-US"/>
           </a:p>
@@ -736,7 +736,7 @@
           <a:p>
             <a:fld id="{3E22BF2E-04DA-469E-97C5-BB68A0368813}" type="datetimeFigureOut">
               <a:rPr lang="en-US" smtClean="0"/>
-              <a:t>2/7/2026</a:t>
+              <a:t>2/23/2026</a:t>
             </a:fld>
             <a:endParaRPr lang="en-US"/>
           </a:p>
@@ -944,7 +944,7 @@
           <a:p>
             <a:fld id="{3E22BF2E-04DA-469E-97C5-BB68A0368813}" type="datetimeFigureOut">
               <a:rPr lang="en-US" smtClean="0"/>
-              <a:t>2/7/2026</a:t>
+              <a:t>2/23/2026</a:t>
             </a:fld>
             <a:endParaRPr lang="en-US"/>
           </a:p>
@@ -1219,7 +1219,7 @@
           <a:p>
             <a:fld id="{3E22BF2E-04DA-469E-97C5-BB68A0368813}" type="datetimeFigureOut">
               <a:rPr lang="en-US" smtClean="0"/>
-              <a:t>2/7/2026</a:t>
+              <a:t>2/23/2026</a:t>
             </a:fld>
             <a:endParaRPr lang="en-US"/>
           </a:p>
@@ -1484,7 +1484,7 @@
           <a:p>
             <a:fld id="{3E22BF2E-04DA-469E-97C5-BB68A0368813}" type="datetimeFigureOut">
               <a:rPr lang="en-US" smtClean="0"/>
-              <a:t>2/7/2026</a:t>
+              <a:t>2/23/2026</a:t>
             </a:fld>
             <a:endParaRPr lang="en-US"/>
           </a:p>
@@ -1896,7 +1896,7 @@
           <a:p>
             <a:fld id="{3E22BF2E-04DA-469E-97C5-BB68A0368813}" type="datetimeFigureOut">
               <a:rPr lang="en-US" smtClean="0"/>
-              <a:t>2/7/2026</a:t>
+              <a:t>2/23/2026</a:t>
             </a:fld>
             <a:endParaRPr lang="en-US"/>
           </a:p>
@@ -2037,7 +2037,7 @@
           <a:p>
             <a:fld id="{3E22BF2E-04DA-469E-97C5-BB68A0368813}" type="datetimeFigureOut">
               <a:rPr lang="en-US" smtClean="0"/>
-              <a:t>2/7/2026</a:t>
+              <a:t>2/23/2026</a:t>
             </a:fld>
             <a:endParaRPr lang="en-US"/>
           </a:p>
@@ -2150,7 +2150,7 @@
           <a:p>
             <a:fld id="{3E22BF2E-04DA-469E-97C5-BB68A0368813}" type="datetimeFigureOut">
               <a:rPr lang="en-US" smtClean="0"/>
-              <a:t>2/7/2026</a:t>
+              <a:t>2/23/2026</a:t>
             </a:fld>
             <a:endParaRPr lang="en-US"/>
           </a:p>
@@ -2461,7 +2461,7 @@
           <a:p>
             <a:fld id="{3E22BF2E-04DA-469E-97C5-BB68A0368813}" type="datetimeFigureOut">
               <a:rPr lang="en-US" smtClean="0"/>
-              <a:t>2/7/2026</a:t>
+              <a:t>2/23/2026</a:t>
             </a:fld>
             <a:endParaRPr lang="en-US"/>
           </a:p>
@@ -2749,7 +2749,7 @@
           <a:p>
             <a:fld id="{3E22BF2E-04DA-469E-97C5-BB68A0368813}" type="datetimeFigureOut">
               <a:rPr lang="en-US" smtClean="0"/>
-              <a:t>2/7/2026</a:t>
+              <a:t>2/23/2026</a:t>
             </a:fld>
             <a:endParaRPr lang="en-US"/>
           </a:p>
@@ -2990,7 +2990,7 @@
           <a:p>
             <a:fld id="{3E22BF2E-04DA-469E-97C5-BB68A0368813}" type="datetimeFigureOut">
               <a:rPr lang="en-US" smtClean="0"/>
-              <a:t>2/7/2026</a:t>
+              <a:t>2/23/2026</a:t>
             </a:fld>
             <a:endParaRPr lang="en-US"/>
           </a:p>
@@ -4107,108 +4107,198 @@
           </a:prstGeom>
         </p:spPr>
       </p:pic>
-      <p:sp>
-        <p:nvSpPr>
-          <p:cNvPr id="6" name="Content Placeholder 5">
+      <mc:AlternateContent xmlns:mc="http://schemas.openxmlformats.org/markup-compatibility/2006" xmlns:a14="http://schemas.microsoft.com/office/drawing/2010/main">
+        <mc:Choice Requires="a14">
+          <p:sp>
+            <p:nvSpPr>
+              <p:cNvPr id="6" name="Content Placeholder 5">
+                <a:extLst>
+                  <a:ext uri="{FF2B5EF4-FFF2-40B4-BE49-F238E27FC236}">
+                    <a16:creationId xmlns:a16="http://schemas.microsoft.com/office/drawing/2014/main" id="{5C0268D5-3842-005A-9D87-7A037B2EC858}"/>
+                  </a:ext>
+                </a:extLst>
+              </p:cNvPr>
+              <p:cNvSpPr>
+                <a:spLocks noGrp="1"/>
+              </p:cNvSpPr>
+              <p:nvPr>
+                <p:ph idx="1"/>
+              </p:nvPr>
+            </p:nvSpPr>
+            <p:spPr>
+              <a:xfrm>
+                <a:off x="6096000" y="2237014"/>
+                <a:ext cx="5623420" cy="4221072"/>
+              </a:xfrm>
+            </p:spPr>
+            <p:txBody>
+              <a:bodyPr>
+                <a:normAutofit fontScale="62500" lnSpcReduction="20000"/>
+              </a:bodyPr>
+              <a:lstStyle/>
+              <a:p>
+                <a:r>
+                  <a:rPr lang="en-US" b="1" dirty="0"/>
+                  <a:t>Benefit</a:t>
+                </a:r>
+                <a:r>
+                  <a:rPr lang="en-US" dirty="0"/>
+                  <a:t>: Adding planning speeds learning by reusing sampled experience.</a:t>
+                </a:r>
+              </a:p>
+              <a:p>
+                <a:endParaRPr lang="en-US" dirty="0"/>
+              </a:p>
+              <a:p>
+                <a:r>
+                  <a:rPr lang="en-US" b="1" dirty="0"/>
+                  <a:t>Issues</a:t>
+                </a:r>
+                <a:r>
+                  <a:rPr lang="en-US" dirty="0"/>
+                  <a:t>: Planning is a problem if the model is wrong:</a:t>
+                </a:r>
+              </a:p>
+              <a:p>
+                <a:pPr lvl="1"/>
+                <a:r>
+                  <a:rPr lang="en-US" dirty="0"/>
+                  <a:t>Based on an insufficient number of samples.</a:t>
+                </a:r>
+              </a:p>
+              <a:p>
+                <a:pPr lvl="1"/>
+                <a14:m>
+                  <m:oMath xmlns:m="http://schemas.openxmlformats.org/officeDocument/2006/math">
+                    <m:r>
+                      <a:rPr lang="en-US" b="0" i="1" smtClean="0">
+                        <a:latin typeface="Cambria Math" panose="02040503050406030204" pitchFamily="18" charset="0"/>
+                      </a:rPr>
+                      <m:t>𝑝</m:t>
+                    </m:r>
+                  </m:oMath>
+                </a14:m>
+                <a:r>
+                  <a:rPr lang="en-US" dirty="0"/>
+                  <a:t>-function approximation is not great.</a:t>
+                </a:r>
+              </a:p>
+              <a:p>
+                <a:pPr lvl="1"/>
+                <a:r>
+                  <a:rPr lang="en-US" dirty="0"/>
+                  <a:t>Environment changes.</a:t>
+                </a:r>
+              </a:p>
+              <a:p>
+                <a:endParaRPr lang="en-US" dirty="0"/>
+              </a:p>
+              <a:p>
+                <a:r>
+                  <a:rPr lang="en-US" dirty="0"/>
+                  <a:t>Luckily, Dyna quickly corrects overly optimistic predictions since they will be selected for the next real action in the direct RL step.</a:t>
+                </a:r>
+              </a:p>
+              <a:p>
+                <a:endParaRPr lang="en-US" dirty="0"/>
+              </a:p>
+              <a:p>
+                <a:r>
+                  <a:rPr lang="en-US" dirty="0"/>
+                  <a:t>For changing environments:</a:t>
+                </a:r>
+              </a:p>
+              <a:p>
+                <a:pPr lvl="1"/>
+                <a:r>
+                  <a:rPr lang="en-US" dirty="0"/>
+                  <a:t>Keep exploring.</a:t>
+                </a:r>
+              </a:p>
+              <a:p>
+                <a:pPr lvl="1"/>
+                <a:r>
+                  <a:rPr lang="en-US" dirty="0"/>
+                  <a:t>Keep track of how out-of-date estimates are. I.e., for how long each action/state combination was not tried.</a:t>
+                </a:r>
+              </a:p>
+            </p:txBody>
+          </p:sp>
+        </mc:Choice>
+        <mc:Fallback xmlns="">
+          <p:sp>
+            <p:nvSpPr>
+              <p:cNvPr id="6" name="Content Placeholder 5">
+                <a:extLst>
+                  <a:ext uri="{FF2B5EF4-FFF2-40B4-BE49-F238E27FC236}">
+                    <a16:creationId xmlns:a16="http://schemas.microsoft.com/office/drawing/2014/main" id="{5C0268D5-3842-005A-9D87-7A037B2EC858}"/>
+                  </a:ext>
+                </a:extLst>
+              </p:cNvPr>
+              <p:cNvSpPr>
+                <a:spLocks noGrp="1" noRot="1" noChangeAspect="1" noMove="1" noResize="1" noEditPoints="1" noAdjustHandles="1" noChangeArrowheads="1" noChangeShapeType="1" noTextEdit="1"/>
+              </p:cNvSpPr>
+              <p:nvPr>
+                <p:ph idx="1"/>
+              </p:nvPr>
+            </p:nvSpPr>
+            <p:spPr>
+              <a:xfrm>
+                <a:off x="6096000" y="2237014"/>
+                <a:ext cx="5623420" cy="4221072"/>
+              </a:xfrm>
+              <a:blipFill>
+                <a:blip r:embed="rId3"/>
+                <a:stretch>
+                  <a:fillRect l="-651" t="-2312"/>
+                </a:stretch>
+              </a:blipFill>
+            </p:spPr>
+            <p:txBody>
+              <a:bodyPr/>
+              <a:lstStyle/>
+              <a:p>
+                <a:r>
+                  <a:rPr lang="en-US">
+                    <a:noFill/>
+                  </a:rPr>
+                  <a:t> </a:t>
+                </a:r>
+              </a:p>
+            </p:txBody>
+          </p:sp>
+        </mc:Fallback>
+      </mc:AlternateContent>
+      <p:pic>
+        <p:nvPicPr>
+          <p:cNvPr id="2" name="Picture 1">
             <a:extLst>
               <a:ext uri="{FF2B5EF4-FFF2-40B4-BE49-F238E27FC236}">
-                <a16:creationId xmlns:a16="http://schemas.microsoft.com/office/drawing/2014/main" id="{5C0268D5-3842-005A-9D87-7A037B2EC858}"/>
+                <a16:creationId xmlns:a16="http://schemas.microsoft.com/office/drawing/2014/main" id="{C1666A5B-CCA6-7A12-3D37-72BB0409CA5C}"/>
               </a:ext>
             </a:extLst>
           </p:cNvPr>
-          <p:cNvSpPr>
-            <a:spLocks noGrp="1"/>
-          </p:cNvSpPr>
-          <p:nvPr>
-            <p:ph idx="1"/>
-          </p:nvPr>
-        </p:nvSpPr>
+          <p:cNvPicPr>
+            <a:picLocks noChangeAspect="1"/>
+          </p:cNvPicPr>
+          <p:nvPr/>
+        </p:nvPicPr>
+        <p:blipFill>
+          <a:blip r:embed="rId4"/>
+          <a:stretch>
+            <a:fillRect/>
+          </a:stretch>
+        </p:blipFill>
         <p:spPr>
           <a:xfrm>
-            <a:off x="6096000" y="1396030"/>
-            <a:ext cx="5623420" cy="4870545"/>
+            <a:off x="9315449" y="185109"/>
+            <a:ext cx="2597348" cy="2051905"/>
           </a:xfrm>
+          <a:prstGeom prst="rect">
+            <a:avLst/>
+          </a:prstGeom>
         </p:spPr>
-        <p:txBody>
-          <a:bodyPr>
-            <a:normAutofit fontScale="77500" lnSpcReduction="20000"/>
-          </a:bodyPr>
-          <a:lstStyle/>
-          <a:p>
-            <a:r>
-              <a:rPr lang="en-US" b="1" dirty="0"/>
-              <a:t>Benefit</a:t>
-            </a:r>
-            <a:r>
-              <a:rPr lang="en-US" dirty="0"/>
-              <a:t>: Adding planning speeds learning by reusing sampled experience.</a:t>
-            </a:r>
-          </a:p>
-          <a:p>
-            <a:endParaRPr lang="en-US" dirty="0"/>
-          </a:p>
-          <a:p>
-            <a:r>
-              <a:rPr lang="en-US" b="1" dirty="0"/>
-              <a:t>Issues</a:t>
-            </a:r>
-            <a:r>
-              <a:rPr lang="en-US" dirty="0"/>
-              <a:t>: Planning is a problem if the model is wrong:</a:t>
-            </a:r>
-          </a:p>
-          <a:p>
-            <a:pPr lvl="1"/>
-            <a:r>
-              <a:rPr lang="en-US" dirty="0"/>
-              <a:t>Based on an insufficient number of samples.</a:t>
-            </a:r>
-          </a:p>
-          <a:p>
-            <a:pPr lvl="1"/>
-            <a:r>
-              <a:rPr lang="en-US" dirty="0"/>
-              <a:t>Function approximation not great.</a:t>
-            </a:r>
-          </a:p>
-          <a:p>
-            <a:pPr lvl="1"/>
-            <a:r>
-              <a:rPr lang="en-US" dirty="0"/>
-              <a:t>Environment changes</a:t>
-            </a:r>
-          </a:p>
-          <a:p>
-            <a:r>
-              <a:rPr lang="en-US" dirty="0"/>
-              <a:t>Dyna quickly corrects too optimistic predictions since they will be selected for the next real action.</a:t>
-            </a:r>
-          </a:p>
-          <a:p>
-            <a:endParaRPr lang="en-US" dirty="0"/>
-          </a:p>
-          <a:p>
-            <a:r>
-              <a:rPr lang="en-US" dirty="0"/>
-              <a:t>For changing environments:</a:t>
-            </a:r>
-          </a:p>
-          <a:p>
-            <a:pPr lvl="1"/>
-            <a:r>
-              <a:rPr lang="en-US" dirty="0"/>
-              <a:t>Keep exploring.</a:t>
-            </a:r>
-          </a:p>
-          <a:p>
-            <a:pPr lvl="1"/>
-            <a:r>
-              <a:rPr lang="en-US" dirty="0"/>
-              <a:t>Keep track of long action/state combinations that were not tried.</a:t>
-            </a:r>
-          </a:p>
-        </p:txBody>
-      </p:sp>
+      </p:pic>
     </p:spTree>
     <p:extLst>
       <p:ext uri="{BB962C8B-B14F-4D97-AF65-F5344CB8AC3E}">
@@ -4219,6 +4309,390 @@
   <p:clrMapOvr>
     <a:masterClrMapping/>
   </p:clrMapOvr>
+  <p:timing>
+    <p:tnLst>
+      <p:par>
+        <p:cTn id="1" dur="indefinite" restart="never" nodeType="tmRoot">
+          <p:childTnLst>
+            <p:seq concurrent="1" nextAc="seek">
+              <p:cTn id="2" dur="indefinite" nodeType="mainSeq">
+                <p:childTnLst>
+                  <p:par>
+                    <p:cTn id="3" fill="hold">
+                      <p:stCondLst>
+                        <p:cond delay="indefinite"/>
+                      </p:stCondLst>
+                      <p:childTnLst>
+                        <p:par>
+                          <p:cTn id="4" fill="hold">
+                            <p:stCondLst>
+                              <p:cond delay="0"/>
+                            </p:stCondLst>
+                            <p:childTnLst>
+                              <p:par>
+                                <p:cTn id="5" presetID="1" presetClass="entr" presetSubtype="0" fill="hold" grpId="0" nodeType="clickEffect">
+                                  <p:stCondLst>
+                                    <p:cond delay="0"/>
+                                  </p:stCondLst>
+                                  <p:childTnLst>
+                                    <p:set>
+                                      <p:cBhvr>
+                                        <p:cTn id="6" dur="1" fill="hold">
+                                          <p:stCondLst>
+                                            <p:cond delay="0"/>
+                                          </p:stCondLst>
+                                        </p:cTn>
+                                        <p:tgtEl>
+                                          <p:spTgt spid="6">
+                                            <p:txEl>
+                                              <p:pRg st="0" end="0"/>
+                                            </p:txEl>
+                                          </p:spTgt>
+                                        </p:tgtEl>
+                                        <p:attrNameLst>
+                                          <p:attrName>style.visibility</p:attrName>
+                                        </p:attrNameLst>
+                                      </p:cBhvr>
+                                      <p:to>
+                                        <p:strVal val="visible"/>
+                                      </p:to>
+                                    </p:set>
+                                  </p:childTnLst>
+                                </p:cTn>
+                              </p:par>
+                            </p:childTnLst>
+                          </p:cTn>
+                        </p:par>
+                      </p:childTnLst>
+                    </p:cTn>
+                  </p:par>
+                  <p:par>
+                    <p:cTn id="7" fill="hold">
+                      <p:stCondLst>
+                        <p:cond delay="indefinite"/>
+                      </p:stCondLst>
+                      <p:childTnLst>
+                        <p:par>
+                          <p:cTn id="8" fill="hold">
+                            <p:stCondLst>
+                              <p:cond delay="0"/>
+                            </p:stCondLst>
+                            <p:childTnLst>
+                              <p:par>
+                                <p:cTn id="9" presetID="1" presetClass="entr" presetSubtype="0" fill="hold" grpId="0" nodeType="clickEffect">
+                                  <p:stCondLst>
+                                    <p:cond delay="0"/>
+                                  </p:stCondLst>
+                                  <p:childTnLst>
+                                    <p:set>
+                                      <p:cBhvr>
+                                        <p:cTn id="10" dur="1" fill="hold">
+                                          <p:stCondLst>
+                                            <p:cond delay="0"/>
+                                          </p:stCondLst>
+                                        </p:cTn>
+                                        <p:tgtEl>
+                                          <p:spTgt spid="6">
+                                            <p:txEl>
+                                              <p:pRg st="2" end="2"/>
+                                            </p:txEl>
+                                          </p:spTgt>
+                                        </p:tgtEl>
+                                        <p:attrNameLst>
+                                          <p:attrName>style.visibility</p:attrName>
+                                        </p:attrNameLst>
+                                      </p:cBhvr>
+                                      <p:to>
+                                        <p:strVal val="visible"/>
+                                      </p:to>
+                                    </p:set>
+                                  </p:childTnLst>
+                                </p:cTn>
+                              </p:par>
+                              <p:par>
+                                <p:cTn id="11" presetID="1" presetClass="entr" presetSubtype="0" fill="hold" grpId="0" nodeType="withEffect">
+                                  <p:stCondLst>
+                                    <p:cond delay="0"/>
+                                  </p:stCondLst>
+                                  <p:childTnLst>
+                                    <p:set>
+                                      <p:cBhvr>
+                                        <p:cTn id="12" dur="1" fill="hold">
+                                          <p:stCondLst>
+                                            <p:cond delay="0"/>
+                                          </p:stCondLst>
+                                        </p:cTn>
+                                        <p:tgtEl>
+                                          <p:spTgt spid="6">
+                                            <p:txEl>
+                                              <p:pRg st="3" end="3"/>
+                                            </p:txEl>
+                                          </p:spTgt>
+                                        </p:tgtEl>
+                                        <p:attrNameLst>
+                                          <p:attrName>style.visibility</p:attrName>
+                                        </p:attrNameLst>
+                                      </p:cBhvr>
+                                      <p:to>
+                                        <p:strVal val="visible"/>
+                                      </p:to>
+                                    </p:set>
+                                  </p:childTnLst>
+                                </p:cTn>
+                              </p:par>
+                              <p:par>
+                                <p:cTn id="13" presetID="1" presetClass="entr" presetSubtype="0" fill="hold" grpId="0" nodeType="withEffect">
+                                  <p:stCondLst>
+                                    <p:cond delay="0"/>
+                                  </p:stCondLst>
+                                  <p:childTnLst>
+                                    <p:set>
+                                      <p:cBhvr>
+                                        <p:cTn id="14" dur="1" fill="hold">
+                                          <p:stCondLst>
+                                            <p:cond delay="0"/>
+                                          </p:stCondLst>
+                                        </p:cTn>
+                                        <p:tgtEl>
+                                          <p:spTgt spid="6">
+                                            <p:txEl>
+                                              <p:pRg st="4" end="4"/>
+                                            </p:txEl>
+                                          </p:spTgt>
+                                        </p:tgtEl>
+                                        <p:attrNameLst>
+                                          <p:attrName>style.visibility</p:attrName>
+                                        </p:attrNameLst>
+                                      </p:cBhvr>
+                                      <p:to>
+                                        <p:strVal val="visible"/>
+                                      </p:to>
+                                    </p:set>
+                                  </p:childTnLst>
+                                </p:cTn>
+                              </p:par>
+                              <p:par>
+                                <p:cTn id="15" presetID="1" presetClass="entr" presetSubtype="0" fill="hold" grpId="0" nodeType="withEffect">
+                                  <p:stCondLst>
+                                    <p:cond delay="0"/>
+                                  </p:stCondLst>
+                                  <p:childTnLst>
+                                    <p:set>
+                                      <p:cBhvr>
+                                        <p:cTn id="16" dur="1" fill="hold">
+                                          <p:stCondLst>
+                                            <p:cond delay="0"/>
+                                          </p:stCondLst>
+                                        </p:cTn>
+                                        <p:tgtEl>
+                                          <p:spTgt spid="6">
+                                            <p:txEl>
+                                              <p:pRg st="5" end="5"/>
+                                            </p:txEl>
+                                          </p:spTgt>
+                                        </p:tgtEl>
+                                        <p:attrNameLst>
+                                          <p:attrName>style.visibility</p:attrName>
+                                        </p:attrNameLst>
+                                      </p:cBhvr>
+                                      <p:to>
+                                        <p:strVal val="visible"/>
+                                      </p:to>
+                                    </p:set>
+                                  </p:childTnLst>
+                                </p:cTn>
+                              </p:par>
+                            </p:childTnLst>
+                          </p:cTn>
+                        </p:par>
+                      </p:childTnLst>
+                    </p:cTn>
+                  </p:par>
+                  <p:par>
+                    <p:cTn id="17" fill="hold">
+                      <p:stCondLst>
+                        <p:cond delay="indefinite"/>
+                      </p:stCondLst>
+                      <p:childTnLst>
+                        <p:par>
+                          <p:cTn id="18" fill="hold">
+                            <p:stCondLst>
+                              <p:cond delay="0"/>
+                            </p:stCondLst>
+                            <p:childTnLst>
+                              <p:par>
+                                <p:cTn id="19" presetID="1" presetClass="entr" presetSubtype="0" fill="hold" grpId="0" nodeType="clickEffect">
+                                  <p:stCondLst>
+                                    <p:cond delay="0"/>
+                                  </p:stCondLst>
+                                  <p:childTnLst>
+                                    <p:set>
+                                      <p:cBhvr>
+                                        <p:cTn id="20" dur="1" fill="hold">
+                                          <p:stCondLst>
+                                            <p:cond delay="0"/>
+                                          </p:stCondLst>
+                                        </p:cTn>
+                                        <p:tgtEl>
+                                          <p:spTgt spid="6">
+                                            <p:txEl>
+                                              <p:pRg st="7" end="7"/>
+                                            </p:txEl>
+                                          </p:spTgt>
+                                        </p:tgtEl>
+                                        <p:attrNameLst>
+                                          <p:attrName>style.visibility</p:attrName>
+                                        </p:attrNameLst>
+                                      </p:cBhvr>
+                                      <p:to>
+                                        <p:strVal val="visible"/>
+                                      </p:to>
+                                    </p:set>
+                                  </p:childTnLst>
+                                </p:cTn>
+                              </p:par>
+                            </p:childTnLst>
+                          </p:cTn>
+                        </p:par>
+                      </p:childTnLst>
+                    </p:cTn>
+                  </p:par>
+                  <p:par>
+                    <p:cTn id="21" fill="hold">
+                      <p:stCondLst>
+                        <p:cond delay="indefinite"/>
+                      </p:stCondLst>
+                      <p:childTnLst>
+                        <p:par>
+                          <p:cTn id="22" fill="hold">
+                            <p:stCondLst>
+                              <p:cond delay="0"/>
+                            </p:stCondLst>
+                            <p:childTnLst>
+                              <p:par>
+                                <p:cTn id="23" presetID="1" presetClass="entr" presetSubtype="0" fill="hold" grpId="0" nodeType="clickEffect">
+                                  <p:stCondLst>
+                                    <p:cond delay="0"/>
+                                  </p:stCondLst>
+                                  <p:childTnLst>
+                                    <p:set>
+                                      <p:cBhvr>
+                                        <p:cTn id="24" dur="1" fill="hold">
+                                          <p:stCondLst>
+                                            <p:cond delay="0"/>
+                                          </p:stCondLst>
+                                        </p:cTn>
+                                        <p:tgtEl>
+                                          <p:spTgt spid="6">
+                                            <p:txEl>
+                                              <p:pRg st="9" end="9"/>
+                                            </p:txEl>
+                                          </p:spTgt>
+                                        </p:tgtEl>
+                                        <p:attrNameLst>
+                                          <p:attrName>style.visibility</p:attrName>
+                                        </p:attrNameLst>
+                                      </p:cBhvr>
+                                      <p:to>
+                                        <p:strVal val="visible"/>
+                                      </p:to>
+                                    </p:set>
+                                  </p:childTnLst>
+                                </p:cTn>
+                              </p:par>
+                              <p:par>
+                                <p:cTn id="25" presetID="1" presetClass="entr" presetSubtype="0" fill="hold" grpId="0" nodeType="withEffect">
+                                  <p:stCondLst>
+                                    <p:cond delay="0"/>
+                                  </p:stCondLst>
+                                  <p:childTnLst>
+                                    <p:set>
+                                      <p:cBhvr>
+                                        <p:cTn id="26" dur="1" fill="hold">
+                                          <p:stCondLst>
+                                            <p:cond delay="0"/>
+                                          </p:stCondLst>
+                                        </p:cTn>
+                                        <p:tgtEl>
+                                          <p:spTgt spid="6">
+                                            <p:txEl>
+                                              <p:pRg st="10" end="10"/>
+                                            </p:txEl>
+                                          </p:spTgt>
+                                        </p:tgtEl>
+                                        <p:attrNameLst>
+                                          <p:attrName>style.visibility</p:attrName>
+                                        </p:attrNameLst>
+                                      </p:cBhvr>
+                                      <p:to>
+                                        <p:strVal val="visible"/>
+                                      </p:to>
+                                    </p:set>
+                                  </p:childTnLst>
+                                </p:cTn>
+                              </p:par>
+                              <p:par>
+                                <p:cTn id="27" presetID="1" presetClass="entr" presetSubtype="0" fill="hold" grpId="0" nodeType="withEffect">
+                                  <p:stCondLst>
+                                    <p:cond delay="0"/>
+                                  </p:stCondLst>
+                                  <p:childTnLst>
+                                    <p:set>
+                                      <p:cBhvr>
+                                        <p:cTn id="28" dur="1" fill="hold">
+                                          <p:stCondLst>
+                                            <p:cond delay="0"/>
+                                          </p:stCondLst>
+                                        </p:cTn>
+                                        <p:tgtEl>
+                                          <p:spTgt spid="6">
+                                            <p:txEl>
+                                              <p:pRg st="11" end="11"/>
+                                            </p:txEl>
+                                          </p:spTgt>
+                                        </p:tgtEl>
+                                        <p:attrNameLst>
+                                          <p:attrName>style.visibility</p:attrName>
+                                        </p:attrNameLst>
+                                      </p:cBhvr>
+                                      <p:to>
+                                        <p:strVal val="visible"/>
+                                      </p:to>
+                                    </p:set>
+                                  </p:childTnLst>
+                                </p:cTn>
+                              </p:par>
+                            </p:childTnLst>
+                          </p:cTn>
+                        </p:par>
+                      </p:childTnLst>
+                    </p:cTn>
+                  </p:par>
+                </p:childTnLst>
+              </p:cTn>
+              <p:prevCondLst>
+                <p:cond evt="onPrev" delay="0">
+                  <p:tgtEl>
+                    <p:sldTgt/>
+                  </p:tgtEl>
+                </p:cond>
+              </p:prevCondLst>
+              <p:nextCondLst>
+                <p:cond evt="onNext" delay="0">
+                  <p:tgtEl>
+                    <p:sldTgt/>
+                  </p:tgtEl>
+                </p:cond>
+              </p:nextCondLst>
+            </p:seq>
+          </p:childTnLst>
+        </p:cTn>
+      </p:par>
+    </p:tnLst>
+    <p:bldLst>
+      <p:bldP spid="6" grpId="0" build="p"/>
+    </p:bldLst>
+  </p:timing>
 </p:sld>
 </file>
 
@@ -5320,12 +5794,12 @@
             <p:spPr>
               <a:xfrm>
                 <a:off x="838200" y="1397330"/>
-                <a:ext cx="4656364" cy="4779633"/>
+                <a:ext cx="4656364" cy="4583745"/>
               </a:xfrm>
             </p:spPr>
             <p:txBody>
               <a:bodyPr>
-                <a:normAutofit fontScale="77500" lnSpcReduction="20000"/>
+                <a:normAutofit fontScale="70000" lnSpcReduction="20000"/>
               </a:bodyPr>
               <a:lstStyle/>
               <a:p>
@@ -5392,7 +5866,21 @@
                 </a:pPr>
                 <a:r>
                   <a:rPr lang="en-US" dirty="0"/>
-                  <a:t>Back values towards the current state (using max).</a:t>
+                  <a:t>Back values towards the current state (using max). Similar to </a:t>
+                </a:r>
+                <a14:m>
+                  <m:oMath xmlns:m="http://schemas.openxmlformats.org/officeDocument/2006/math">
+                    <m:r>
+                      <a:rPr lang="en-US" b="0" i="1" smtClean="0">
+                        <a:latin typeface="Cambria Math" panose="02040503050406030204" pitchFamily="18" charset="0"/>
+                      </a:rPr>
+                      <m:t>𝑛</m:t>
+                    </m:r>
+                  </m:oMath>
+                </a14:m>
+                <a:r>
+                  <a:rPr lang="en-US" dirty="0"/>
+                  <a:t>-step estimation, but it always uses the best and not the observed action.</a:t>
                 </a:r>
               </a:p>
               <a:p>
@@ -5411,13 +5899,6 @@
                   <a:rPr lang="en-US" dirty="0"/>
                   <a:t>Choose the best next action for the current state.</a:t>
                 </a:r>
-              </a:p>
-              <a:p>
-                <a:pPr marL="514350" indent="-514350">
-                  <a:buFont typeface="+mj-lt"/>
-                  <a:buAutoNum type="arabicPeriod"/>
-                </a:pPr>
-                <a:endParaRPr lang="en-US" dirty="0"/>
               </a:p>
               <a:p>
                 <a:pPr marL="514350" indent="-514350">
@@ -5449,12 +5930,12 @@
             <p:spPr>
               <a:xfrm>
                 <a:off x="838200" y="1397330"/>
-                <a:ext cx="4656364" cy="4779633"/>
+                <a:ext cx="4656364" cy="4583745"/>
               </a:xfrm>
               <a:blipFill>
                 <a:blip r:embed="rId3"/>
                 <a:stretch>
-                  <a:fillRect l="-1835" t="-2551" r="-1048"/>
+                  <a:fillRect l="-1442" t="-2261"/>
                 </a:stretch>
               </a:blipFill>
             </p:spPr>
@@ -5487,13 +5968,13 @@
         </p:nvSpPr>
         <p:spPr>
           <a:xfrm>
-            <a:off x="5758626" y="5514378"/>
-            <a:ext cx="2142906" cy="359863"/>
+            <a:off x="8214611" y="5561579"/>
+            <a:ext cx="3247086" cy="359863"/>
           </a:xfrm>
           <a:prstGeom prst="wedgeRoundRectCallout">
             <a:avLst>
-              <a:gd name="adj1" fmla="val -21943"/>
-              <a:gd name="adj2" fmla="val -383901"/>
+              <a:gd name="adj1" fmla="val 37593"/>
+              <a:gd name="adj2" fmla="val -381818"/>
               <a:gd name="adj3" fmla="val 16667"/>
             </a:avLst>
           </a:prstGeom>
@@ -5521,7 +6002,7 @@
             <a:pPr algn="ctr"/>
             <a:r>
               <a:rPr lang="en-US" dirty="0"/>
-              <a:t>2. Estimate values</a:t>
+              <a:t>2. Estimate leaf node values</a:t>
             </a:r>
           </a:p>
         </p:txBody>
@@ -5540,8 +6021,8 @@
         </p:nvSpPr>
         <p:spPr>
           <a:xfrm flipV="1">
-            <a:off x="11154283" y="2910721"/>
-            <a:ext cx="781777" cy="2102770"/>
+            <a:off x="11154283" y="2248525"/>
+            <a:ext cx="781777" cy="2764966"/>
           </a:xfrm>
           <a:prstGeom prst="downArrow">
             <a:avLst/>
@@ -5589,13 +6070,13 @@
         </p:nvSpPr>
         <p:spPr>
           <a:xfrm>
-            <a:off x="7689758" y="1206901"/>
-            <a:ext cx="2142906" cy="359863"/>
+            <a:off x="7689758" y="901563"/>
+            <a:ext cx="2938744" cy="665202"/>
           </a:xfrm>
           <a:prstGeom prst="wedgeRoundRectCallout">
             <a:avLst>
-              <a:gd name="adj1" fmla="val -41487"/>
-              <a:gd name="adj2" fmla="val 232914"/>
+              <a:gd name="adj1" fmla="val -29245"/>
+              <a:gd name="adj2" fmla="val 141648"/>
               <a:gd name="adj3" fmla="val 16667"/>
             </a:avLst>
           </a:prstGeom>
@@ -5623,7 +6104,7 @@
             <a:pPr algn="ctr"/>
             <a:r>
               <a:rPr lang="en-US" dirty="0"/>
-              <a:t>4. Pick best action</a:t>
+              <a:t>4. Pick best action leasing to largest Q-value</a:t>
             </a:r>
           </a:p>
         </p:txBody>
@@ -5642,8 +6123,8 @@
         </p:nvSpPr>
         <p:spPr>
           <a:xfrm>
-            <a:off x="3427256" y="6217173"/>
-            <a:ext cx="5723725" cy="369332"/>
+            <a:off x="3238995" y="6217463"/>
+            <a:ext cx="6593669" cy="369332"/>
           </a:xfrm>
           <a:prstGeom prst="rect">
             <a:avLst/>
@@ -5678,11 +6159,491 @@
             </a:r>
             <a:r>
               <a:rPr lang="en-US" dirty="0"/>
-              <a:t>: This is like heuristic min-max search for games.</a:t>
+              <a:t>: This is like heuristic (cut-off) min-max search for games.</a:t>
             </a:r>
           </a:p>
         </p:txBody>
       </p:sp>
+      <mc:AlternateContent xmlns:mc="http://schemas.openxmlformats.org/markup-compatibility/2006" xmlns:a14="http://schemas.microsoft.com/office/drawing/2010/main">
+        <mc:Choice Requires="a14">
+          <p:sp>
+            <p:nvSpPr>
+              <p:cNvPr id="2" name="TextBox 1">
+                <a:extLst>
+                  <a:ext uri="{FF2B5EF4-FFF2-40B4-BE49-F238E27FC236}">
+                    <a16:creationId xmlns:a16="http://schemas.microsoft.com/office/drawing/2014/main" id="{5A54AD96-0F25-00BD-1813-50A2CBD3189F}"/>
+                  </a:ext>
+                </a:extLst>
+              </p:cNvPr>
+              <p:cNvSpPr txBox="1"/>
+              <p:nvPr/>
+            </p:nvSpPr>
+            <p:spPr>
+              <a:xfrm>
+                <a:off x="8829206" y="2149381"/>
+                <a:ext cx="202368" cy="369332"/>
+              </a:xfrm>
+              <a:prstGeom prst="rect">
+                <a:avLst/>
+              </a:prstGeom>
+              <a:noFill/>
+            </p:spPr>
+            <p:txBody>
+              <a:bodyPr wrap="square" rtlCol="0">
+                <a:spAutoFit/>
+              </a:bodyPr>
+              <a:lstStyle/>
+              <a:p>
+                <a:pPr/>
+                <a14:m>
+                  <m:oMathPara xmlns:m="http://schemas.openxmlformats.org/officeDocument/2006/math">
+                    <m:oMathParaPr>
+                      <m:jc m:val="centerGroup"/>
+                    </m:oMathParaPr>
+                    <m:oMath xmlns:m="http://schemas.openxmlformats.org/officeDocument/2006/math">
+                      <m:r>
+                        <a:rPr lang="en-US" b="0" i="1" smtClean="0">
+                          <a:latin typeface="Cambria Math" panose="02040503050406030204" pitchFamily="18" charset="0"/>
+                        </a:rPr>
+                        <m:t>𝑅</m:t>
+                      </m:r>
+                    </m:oMath>
+                  </m:oMathPara>
+                </a14:m>
+                <a:endParaRPr lang="en-US" dirty="0"/>
+              </a:p>
+            </p:txBody>
+          </p:sp>
+        </mc:Choice>
+        <mc:Fallback xmlns="">
+          <p:sp>
+            <p:nvSpPr>
+              <p:cNvPr id="2" name="TextBox 1">
+                <a:extLst>
+                  <a:ext uri="{FF2B5EF4-FFF2-40B4-BE49-F238E27FC236}">
+                    <a16:creationId xmlns:a16="http://schemas.microsoft.com/office/drawing/2014/main" id="{5A54AD96-0F25-00BD-1813-50A2CBD3189F}"/>
+                  </a:ext>
+                </a:extLst>
+              </p:cNvPr>
+              <p:cNvSpPr txBox="1">
+                <a:spLocks noRot="1" noChangeAspect="1" noMove="1" noResize="1" noEditPoints="1" noAdjustHandles="1" noChangeArrowheads="1" noChangeShapeType="1" noTextEdit="1"/>
+              </p:cNvSpPr>
+              <p:nvPr/>
+            </p:nvSpPr>
+            <p:spPr>
+              <a:xfrm>
+                <a:off x="8829206" y="2149381"/>
+                <a:ext cx="202368" cy="369332"/>
+              </a:xfrm>
+              <a:prstGeom prst="rect">
+                <a:avLst/>
+              </a:prstGeom>
+              <a:blipFill>
+                <a:blip r:embed="rId4"/>
+                <a:stretch>
+                  <a:fillRect r="-55882"/>
+                </a:stretch>
+              </a:blipFill>
+            </p:spPr>
+            <p:txBody>
+              <a:bodyPr/>
+              <a:lstStyle/>
+              <a:p>
+                <a:r>
+                  <a:rPr lang="en-US">
+                    <a:noFill/>
+                  </a:rPr>
+                  <a:t> </a:t>
+                </a:r>
+              </a:p>
+            </p:txBody>
+          </p:sp>
+        </mc:Fallback>
+      </mc:AlternateContent>
+      <mc:AlternateContent xmlns:mc="http://schemas.openxmlformats.org/markup-compatibility/2006" xmlns:a14="http://schemas.microsoft.com/office/drawing/2010/main">
+        <mc:Choice Requires="a14">
+          <p:sp>
+            <p:nvSpPr>
+              <p:cNvPr id="6" name="TextBox 5">
+                <a:extLst>
+                  <a:ext uri="{FF2B5EF4-FFF2-40B4-BE49-F238E27FC236}">
+                    <a16:creationId xmlns:a16="http://schemas.microsoft.com/office/drawing/2014/main" id="{F9B57E89-CCA6-FDBE-3927-B474DEB79AEE}"/>
+                  </a:ext>
+                </a:extLst>
+              </p:cNvPr>
+              <p:cNvSpPr txBox="1"/>
+              <p:nvPr/>
+            </p:nvSpPr>
+            <p:spPr>
+              <a:xfrm>
+                <a:off x="9918491" y="2518713"/>
+                <a:ext cx="202368" cy="369332"/>
+              </a:xfrm>
+              <a:prstGeom prst="rect">
+                <a:avLst/>
+              </a:prstGeom>
+              <a:noFill/>
+            </p:spPr>
+            <p:txBody>
+              <a:bodyPr wrap="square" rtlCol="0">
+                <a:spAutoFit/>
+              </a:bodyPr>
+              <a:lstStyle/>
+              <a:p>
+                <a:pPr/>
+                <a14:m>
+                  <m:oMathPara xmlns:m="http://schemas.openxmlformats.org/officeDocument/2006/math">
+                    <m:oMathParaPr>
+                      <m:jc m:val="centerGroup"/>
+                    </m:oMathParaPr>
+                    <m:oMath xmlns:m="http://schemas.openxmlformats.org/officeDocument/2006/math">
+                      <m:r>
+                        <a:rPr lang="en-US" b="0" i="1" smtClean="0">
+                          <a:latin typeface="Cambria Math" panose="02040503050406030204" pitchFamily="18" charset="0"/>
+                        </a:rPr>
+                        <m:t>𝑅</m:t>
+                      </m:r>
+                    </m:oMath>
+                  </m:oMathPara>
+                </a14:m>
+                <a:endParaRPr lang="en-US" dirty="0"/>
+              </a:p>
+            </p:txBody>
+          </p:sp>
+        </mc:Choice>
+        <mc:Fallback xmlns="">
+          <p:sp>
+            <p:nvSpPr>
+              <p:cNvPr id="6" name="TextBox 5">
+                <a:extLst>
+                  <a:ext uri="{FF2B5EF4-FFF2-40B4-BE49-F238E27FC236}">
+                    <a16:creationId xmlns:a16="http://schemas.microsoft.com/office/drawing/2014/main" id="{F9B57E89-CCA6-FDBE-3927-B474DEB79AEE}"/>
+                  </a:ext>
+                </a:extLst>
+              </p:cNvPr>
+              <p:cNvSpPr txBox="1">
+                <a:spLocks noRot="1" noChangeAspect="1" noMove="1" noResize="1" noEditPoints="1" noAdjustHandles="1" noChangeArrowheads="1" noChangeShapeType="1" noTextEdit="1"/>
+              </p:cNvSpPr>
+              <p:nvPr/>
+            </p:nvSpPr>
+            <p:spPr>
+              <a:xfrm>
+                <a:off x="9918491" y="2518713"/>
+                <a:ext cx="202368" cy="369332"/>
+              </a:xfrm>
+              <a:prstGeom prst="rect">
+                <a:avLst/>
+              </a:prstGeom>
+              <a:blipFill>
+                <a:blip r:embed="rId5"/>
+                <a:stretch>
+                  <a:fillRect r="-60606"/>
+                </a:stretch>
+              </a:blipFill>
+            </p:spPr>
+            <p:txBody>
+              <a:bodyPr/>
+              <a:lstStyle/>
+              <a:p>
+                <a:r>
+                  <a:rPr lang="en-US">
+                    <a:noFill/>
+                  </a:rPr>
+                  <a:t> </a:t>
+                </a:r>
+              </a:p>
+            </p:txBody>
+          </p:sp>
+        </mc:Fallback>
+      </mc:AlternateContent>
+      <mc:AlternateContent xmlns:mc="http://schemas.openxmlformats.org/markup-compatibility/2006" xmlns:a14="http://schemas.microsoft.com/office/drawing/2010/main">
+        <mc:Choice Requires="a14">
+          <p:sp>
+            <p:nvSpPr>
+              <p:cNvPr id="9" name="TextBox 8">
+                <a:extLst>
+                  <a:ext uri="{FF2B5EF4-FFF2-40B4-BE49-F238E27FC236}">
+                    <a16:creationId xmlns:a16="http://schemas.microsoft.com/office/drawing/2014/main" id="{433EA472-B1A1-B839-4937-338ED139E14A}"/>
+                  </a:ext>
+                </a:extLst>
+              </p:cNvPr>
+              <p:cNvSpPr txBox="1"/>
+              <p:nvPr/>
+            </p:nvSpPr>
+            <p:spPr>
+              <a:xfrm>
+                <a:off x="10628502" y="2910721"/>
+                <a:ext cx="202368" cy="369332"/>
+              </a:xfrm>
+              <a:prstGeom prst="rect">
+                <a:avLst/>
+              </a:prstGeom>
+              <a:noFill/>
+            </p:spPr>
+            <p:txBody>
+              <a:bodyPr wrap="square" rtlCol="0">
+                <a:spAutoFit/>
+              </a:bodyPr>
+              <a:lstStyle/>
+              <a:p>
+                <a:pPr/>
+                <a14:m>
+                  <m:oMathPara xmlns:m="http://schemas.openxmlformats.org/officeDocument/2006/math">
+                    <m:oMathParaPr>
+                      <m:jc m:val="centerGroup"/>
+                    </m:oMathParaPr>
+                    <m:oMath xmlns:m="http://schemas.openxmlformats.org/officeDocument/2006/math">
+                      <m:r>
+                        <a:rPr lang="en-US" b="0" i="1" smtClean="0">
+                          <a:latin typeface="Cambria Math" panose="02040503050406030204" pitchFamily="18" charset="0"/>
+                        </a:rPr>
+                        <m:t>𝑅</m:t>
+                      </m:r>
+                    </m:oMath>
+                  </m:oMathPara>
+                </a14:m>
+                <a:endParaRPr lang="en-US" dirty="0"/>
+              </a:p>
+            </p:txBody>
+          </p:sp>
+        </mc:Choice>
+        <mc:Fallback xmlns="">
+          <p:sp>
+            <p:nvSpPr>
+              <p:cNvPr id="9" name="TextBox 8">
+                <a:extLst>
+                  <a:ext uri="{FF2B5EF4-FFF2-40B4-BE49-F238E27FC236}">
+                    <a16:creationId xmlns:a16="http://schemas.microsoft.com/office/drawing/2014/main" id="{433EA472-B1A1-B839-4937-338ED139E14A}"/>
+                  </a:ext>
+                </a:extLst>
+              </p:cNvPr>
+              <p:cNvSpPr txBox="1">
+                <a:spLocks noRot="1" noChangeAspect="1" noMove="1" noResize="1" noEditPoints="1" noAdjustHandles="1" noChangeArrowheads="1" noChangeShapeType="1" noTextEdit="1"/>
+              </p:cNvSpPr>
+              <p:nvPr/>
+            </p:nvSpPr>
+            <p:spPr>
+              <a:xfrm>
+                <a:off x="10628502" y="2910721"/>
+                <a:ext cx="202368" cy="369332"/>
+              </a:xfrm>
+              <a:prstGeom prst="rect">
+                <a:avLst/>
+              </a:prstGeom>
+              <a:blipFill>
+                <a:blip r:embed="rId6"/>
+                <a:stretch>
+                  <a:fillRect r="-57576"/>
+                </a:stretch>
+              </a:blipFill>
+            </p:spPr>
+            <p:txBody>
+              <a:bodyPr/>
+              <a:lstStyle/>
+              <a:p>
+                <a:r>
+                  <a:rPr lang="en-US">
+                    <a:noFill/>
+                  </a:rPr>
+                  <a:t> </a:t>
+                </a:r>
+              </a:p>
+            </p:txBody>
+          </p:sp>
+        </mc:Fallback>
+      </mc:AlternateContent>
+      <mc:AlternateContent xmlns:mc="http://schemas.openxmlformats.org/markup-compatibility/2006" xmlns:a14="http://schemas.microsoft.com/office/drawing/2010/main">
+        <mc:Choice Requires="a14">
+          <p:sp>
+            <p:nvSpPr>
+              <p:cNvPr id="12" name="TextBox 11">
+                <a:extLst>
+                  <a:ext uri="{FF2B5EF4-FFF2-40B4-BE49-F238E27FC236}">
+                    <a16:creationId xmlns:a16="http://schemas.microsoft.com/office/drawing/2014/main" id="{F654F0F7-FADF-FB82-93D5-74148073B8B6}"/>
+                  </a:ext>
+                </a:extLst>
+              </p:cNvPr>
+              <p:cNvSpPr txBox="1"/>
+              <p:nvPr/>
+            </p:nvSpPr>
+            <p:spPr>
+              <a:xfrm>
+                <a:off x="10951915" y="3363020"/>
+                <a:ext cx="202368" cy="369332"/>
+              </a:xfrm>
+              <a:prstGeom prst="rect">
+                <a:avLst/>
+              </a:prstGeom>
+              <a:noFill/>
+            </p:spPr>
+            <p:txBody>
+              <a:bodyPr wrap="square" rtlCol="0">
+                <a:spAutoFit/>
+              </a:bodyPr>
+              <a:lstStyle/>
+              <a:p>
+                <a:pPr/>
+                <a14:m>
+                  <m:oMathPara xmlns:m="http://schemas.openxmlformats.org/officeDocument/2006/math">
+                    <m:oMathParaPr>
+                      <m:jc m:val="centerGroup"/>
+                    </m:oMathParaPr>
+                    <m:oMath xmlns:m="http://schemas.openxmlformats.org/officeDocument/2006/math">
+                      <m:r>
+                        <a:rPr lang="en-US" b="0" i="1" smtClean="0">
+                          <a:latin typeface="Cambria Math" panose="02040503050406030204" pitchFamily="18" charset="0"/>
+                        </a:rPr>
+                        <m:t>𝑅</m:t>
+                      </m:r>
+                    </m:oMath>
+                  </m:oMathPara>
+                </a14:m>
+                <a:endParaRPr lang="en-US" dirty="0"/>
+              </a:p>
+            </p:txBody>
+          </p:sp>
+        </mc:Choice>
+        <mc:Fallback xmlns="">
+          <p:sp>
+            <p:nvSpPr>
+              <p:cNvPr id="12" name="TextBox 11">
+                <a:extLst>
+                  <a:ext uri="{FF2B5EF4-FFF2-40B4-BE49-F238E27FC236}">
+                    <a16:creationId xmlns:a16="http://schemas.microsoft.com/office/drawing/2014/main" id="{F654F0F7-FADF-FB82-93D5-74148073B8B6}"/>
+                  </a:ext>
+                </a:extLst>
+              </p:cNvPr>
+              <p:cNvSpPr txBox="1">
+                <a:spLocks noRot="1" noChangeAspect="1" noMove="1" noResize="1" noEditPoints="1" noAdjustHandles="1" noChangeArrowheads="1" noChangeShapeType="1" noTextEdit="1"/>
+              </p:cNvSpPr>
+              <p:nvPr/>
+            </p:nvSpPr>
+            <p:spPr>
+              <a:xfrm>
+                <a:off x="10951915" y="3363020"/>
+                <a:ext cx="202368" cy="369332"/>
+              </a:xfrm>
+              <a:prstGeom prst="rect">
+                <a:avLst/>
+              </a:prstGeom>
+              <a:blipFill>
+                <a:blip r:embed="rId7"/>
+                <a:stretch>
+                  <a:fillRect r="-57576"/>
+                </a:stretch>
+              </a:blipFill>
+            </p:spPr>
+            <p:txBody>
+              <a:bodyPr/>
+              <a:lstStyle/>
+              <a:p>
+                <a:r>
+                  <a:rPr lang="en-US">
+                    <a:noFill/>
+                  </a:rPr>
+                  <a:t> </a:t>
+                </a:r>
+              </a:p>
+            </p:txBody>
+          </p:sp>
+        </mc:Fallback>
+      </mc:AlternateContent>
+      <mc:AlternateContent xmlns:mc="http://schemas.openxmlformats.org/markup-compatibility/2006" xmlns:a14="http://schemas.microsoft.com/office/drawing/2010/main">
+        <mc:Choice Requires="a14">
+          <p:sp>
+            <p:nvSpPr>
+              <p:cNvPr id="13" name="TextBox 12">
+                <a:extLst>
+                  <a:ext uri="{FF2B5EF4-FFF2-40B4-BE49-F238E27FC236}">
+                    <a16:creationId xmlns:a16="http://schemas.microsoft.com/office/drawing/2014/main" id="{A2AB9A23-FBD3-DB90-9801-00E1D6F3D56C}"/>
+                  </a:ext>
+                </a:extLst>
+              </p:cNvPr>
+              <p:cNvSpPr txBox="1"/>
+              <p:nvPr/>
+            </p:nvSpPr>
+            <p:spPr>
+              <a:xfrm>
+                <a:off x="11053099" y="4057069"/>
+                <a:ext cx="202368" cy="369332"/>
+              </a:xfrm>
+              <a:prstGeom prst="rect">
+                <a:avLst/>
+              </a:prstGeom>
+              <a:noFill/>
+            </p:spPr>
+            <p:txBody>
+              <a:bodyPr wrap="square" rtlCol="0">
+                <a:spAutoFit/>
+              </a:bodyPr>
+              <a:lstStyle/>
+              <a:p>
+                <a:pPr/>
+                <a14:m>
+                  <m:oMathPara xmlns:m="http://schemas.openxmlformats.org/officeDocument/2006/math">
+                    <m:oMathParaPr>
+                      <m:jc m:val="centerGroup"/>
+                    </m:oMathParaPr>
+                    <m:oMath xmlns:m="http://schemas.openxmlformats.org/officeDocument/2006/math">
+                      <m:r>
+                        <a:rPr lang="en-US" b="0" i="1" smtClean="0">
+                          <a:latin typeface="Cambria Math" panose="02040503050406030204" pitchFamily="18" charset="0"/>
+                        </a:rPr>
+                        <m:t>𝑄</m:t>
+                      </m:r>
+                    </m:oMath>
+                  </m:oMathPara>
+                </a14:m>
+                <a:endParaRPr lang="en-US" dirty="0"/>
+              </a:p>
+            </p:txBody>
+          </p:sp>
+        </mc:Choice>
+        <mc:Fallback xmlns="">
+          <p:sp>
+            <p:nvSpPr>
+              <p:cNvPr id="13" name="TextBox 12">
+                <a:extLst>
+                  <a:ext uri="{FF2B5EF4-FFF2-40B4-BE49-F238E27FC236}">
+                    <a16:creationId xmlns:a16="http://schemas.microsoft.com/office/drawing/2014/main" id="{A2AB9A23-FBD3-DB90-9801-00E1D6F3D56C}"/>
+                  </a:ext>
+                </a:extLst>
+              </p:cNvPr>
+              <p:cNvSpPr txBox="1">
+                <a:spLocks noRot="1" noChangeAspect="1" noMove="1" noResize="1" noEditPoints="1" noAdjustHandles="1" noChangeArrowheads="1" noChangeShapeType="1" noTextEdit="1"/>
+              </p:cNvSpPr>
+              <p:nvPr/>
+            </p:nvSpPr>
+            <p:spPr>
+              <a:xfrm>
+                <a:off x="11053099" y="4057069"/>
+                <a:ext cx="202368" cy="369332"/>
+              </a:xfrm>
+              <a:prstGeom prst="rect">
+                <a:avLst/>
+              </a:prstGeom>
+              <a:blipFill>
+                <a:blip r:embed="rId8"/>
+                <a:stretch>
+                  <a:fillRect l="-6061" r="-75758" b="-10000"/>
+                </a:stretch>
+              </a:blipFill>
+            </p:spPr>
+            <p:txBody>
+              <a:bodyPr/>
+              <a:lstStyle/>
+              <a:p>
+                <a:r>
+                  <a:rPr lang="en-US">
+                    <a:noFill/>
+                  </a:rPr>
+                  <a:t> </a:t>
+                </a:r>
+              </a:p>
+            </p:txBody>
+          </p:sp>
+        </mc:Fallback>
+      </mc:AlternateContent>
     </p:spTree>
     <p:extLst>
       <p:ext uri="{BB962C8B-B14F-4D97-AF65-F5344CB8AC3E}">
@@ -5693,6 +6654,189 @@
   <p:clrMapOvr>
     <a:masterClrMapping/>
   </p:clrMapOvr>
+  <p:timing>
+    <p:tnLst>
+      <p:par>
+        <p:cTn id="1" dur="indefinite" restart="never" nodeType="tmRoot">
+          <p:childTnLst>
+            <p:seq concurrent="1" nextAc="seek">
+              <p:cTn id="2" dur="indefinite" nodeType="mainSeq">
+                <p:childTnLst>
+                  <p:par>
+                    <p:cTn id="3" fill="hold">
+                      <p:stCondLst>
+                        <p:cond delay="indefinite"/>
+                        <p:cond evt="onBegin" delay="0">
+                          <p:tn val="2"/>
+                        </p:cond>
+                      </p:stCondLst>
+                      <p:childTnLst>
+                        <p:par>
+                          <p:cTn id="4" fill="hold">
+                            <p:stCondLst>
+                              <p:cond delay="0"/>
+                            </p:stCondLst>
+                            <p:childTnLst>
+                              <p:par>
+                                <p:cTn id="5" presetID="1" presetClass="entr" presetSubtype="0" fill="hold" grpId="0" nodeType="withEffect">
+                                  <p:stCondLst>
+                                    <p:cond delay="0"/>
+                                  </p:stCondLst>
+                                  <p:childTnLst>
+                                    <p:set>
+                                      <p:cBhvr>
+                                        <p:cTn id="6" dur="1" fill="hold">
+                                          <p:stCondLst>
+                                            <p:cond delay="0"/>
+                                          </p:stCondLst>
+                                        </p:cTn>
+                                        <p:tgtEl>
+                                          <p:spTgt spid="8"/>
+                                        </p:tgtEl>
+                                        <p:attrNameLst>
+                                          <p:attrName>style.visibility</p:attrName>
+                                        </p:attrNameLst>
+                                      </p:cBhvr>
+                                      <p:to>
+                                        <p:strVal val="visible"/>
+                                      </p:to>
+                                    </p:set>
+                                  </p:childTnLst>
+                                </p:cTn>
+                              </p:par>
+                              <p:par>
+                                <p:cTn id="7" presetID="1" presetClass="entr" presetSubtype="0" fill="hold" grpId="0" nodeType="withEffect">
+                                  <p:stCondLst>
+                                    <p:cond delay="0"/>
+                                  </p:stCondLst>
+                                  <p:childTnLst>
+                                    <p:set>
+                                      <p:cBhvr>
+                                        <p:cTn id="8" dur="1" fill="hold">
+                                          <p:stCondLst>
+                                            <p:cond delay="0"/>
+                                          </p:stCondLst>
+                                        </p:cTn>
+                                        <p:tgtEl>
+                                          <p:spTgt spid="10"/>
+                                        </p:tgtEl>
+                                        <p:attrNameLst>
+                                          <p:attrName>style.visibility</p:attrName>
+                                        </p:attrNameLst>
+                                      </p:cBhvr>
+                                      <p:to>
+                                        <p:strVal val="visible"/>
+                                      </p:to>
+                                    </p:set>
+                                  </p:childTnLst>
+                                </p:cTn>
+                              </p:par>
+                              <p:par>
+                                <p:cTn id="9" presetID="1" presetClass="entr" presetSubtype="0" fill="hold" grpId="0" nodeType="withEffect">
+                                  <p:stCondLst>
+                                    <p:cond delay="0"/>
+                                  </p:stCondLst>
+                                  <p:childTnLst>
+                                    <p:set>
+                                      <p:cBhvr>
+                                        <p:cTn id="10" dur="1" fill="hold">
+                                          <p:stCondLst>
+                                            <p:cond delay="0"/>
+                                          </p:stCondLst>
+                                        </p:cTn>
+                                        <p:tgtEl>
+                                          <p:spTgt spid="11"/>
+                                        </p:tgtEl>
+                                        <p:attrNameLst>
+                                          <p:attrName>style.visibility</p:attrName>
+                                        </p:attrNameLst>
+                                      </p:cBhvr>
+                                      <p:to>
+                                        <p:strVal val="visible"/>
+                                      </p:to>
+                                    </p:set>
+                                  </p:childTnLst>
+                                </p:cTn>
+                              </p:par>
+                            </p:childTnLst>
+                          </p:cTn>
+                        </p:par>
+                      </p:childTnLst>
+                    </p:cTn>
+                  </p:par>
+                  <p:par>
+                    <p:cTn id="11" fill="hold">
+                      <p:stCondLst>
+                        <p:cond delay="indefinite"/>
+                      </p:stCondLst>
+                      <p:childTnLst>
+                        <p:par>
+                          <p:cTn id="12" fill="hold">
+                            <p:stCondLst>
+                              <p:cond delay="0"/>
+                            </p:stCondLst>
+                            <p:childTnLst>
+                              <p:par>
+                                <p:cTn id="13" presetID="1" presetClass="entr" presetSubtype="0" fill="hold" grpId="0" nodeType="clickEffect">
+                                  <p:stCondLst>
+                                    <p:cond delay="0"/>
+                                  </p:stCondLst>
+                                  <p:childTnLst>
+                                    <p:set>
+                                      <p:cBhvr>
+                                        <p:cTn id="14" dur="1" fill="hold">
+                                          <p:stCondLst>
+                                            <p:cond delay="0"/>
+                                          </p:stCondLst>
+                                        </p:cTn>
+                                        <p:tgtEl>
+                                          <p:spTgt spid="3"/>
+                                        </p:tgtEl>
+                                        <p:attrNameLst>
+                                          <p:attrName>style.visibility</p:attrName>
+                                        </p:attrNameLst>
+                                      </p:cBhvr>
+                                      <p:to>
+                                        <p:strVal val="visible"/>
+                                      </p:to>
+                                    </p:set>
+                                  </p:childTnLst>
+                                </p:cTn>
+                              </p:par>
+                            </p:childTnLst>
+                          </p:cTn>
+                        </p:par>
+                      </p:childTnLst>
+                    </p:cTn>
+                  </p:par>
+                </p:childTnLst>
+              </p:cTn>
+              <p:prevCondLst>
+                <p:cond evt="onPrev" delay="0">
+                  <p:tgtEl>
+                    <p:sldTgt/>
+                  </p:tgtEl>
+                </p:cond>
+              </p:prevCondLst>
+              <p:nextCondLst>
+                <p:cond evt="onNext" delay="0">
+                  <p:tgtEl>
+                    <p:sldTgt/>
+                  </p:tgtEl>
+                </p:cond>
+              </p:nextCondLst>
+            </p:seq>
+          </p:childTnLst>
+        </p:cTn>
+      </p:par>
+    </p:tnLst>
+    <p:bldLst>
+      <p:bldP spid="8" grpId="0" animBg="1"/>
+      <p:bldP spid="10" grpId="0" animBg="1"/>
+      <p:bldP spid="11" grpId="0" animBg="1"/>
+      <p:bldP spid="3" grpId="0" animBg="1"/>
+    </p:bldLst>
+  </p:timing>
 </p:sld>
 </file>
 
@@ -5819,8 +6963,12 @@
                   <a:buAutoNum type="arabicPeriod"/>
                 </a:pPr>
                 <a:r>
+                  <a:rPr lang="en-US" b="1" dirty="0"/>
+                  <a:t>Monte Carlo Policy Estimation</a:t>
+                </a:r>
+                <a:r>
                   <a:rPr lang="en-US" dirty="0"/>
-                  <a:t>Monte Carlo Policy Estimation: Use many simulated trajectories to approximate all state/action values </a:t>
+                  <a:t>: Use many simulated trajectories to approximate all state/action values </a:t>
                 </a:r>
                 <a14:m>
                   <m:oMath xmlns:m="http://schemas.openxmlformats.org/officeDocument/2006/math">
@@ -5906,7 +7054,7 @@
                   <a:buAutoNum type="arabicPeriod"/>
                 </a:pPr>
                 <a:r>
-                  <a:rPr lang="en-US" dirty="0"/>
+                  <a:rPr lang="en-US" b="1" dirty="0"/>
                   <a:t>Choose the best action </a:t>
                 </a:r>
                 <a14:m>
@@ -6023,7 +7171,15 @@
                 </a14:m>
                 <a:r>
                   <a:rPr lang="en-US" b="0" dirty="0"/>
-                  <a:t> according to the estimates. This is called the rollout policy.</a:t>
+                  <a:t> according to the estimates. This is called the </a:t>
+                </a:r>
+                <a:r>
+                  <a:rPr lang="en-US" b="1" dirty="0"/>
+                  <a:t>rollout policy</a:t>
+                </a:r>
+                <a:r>
+                  <a:rPr lang="en-US" b="0" dirty="0"/>
+                  <a:t>.</a:t>
                 </a:r>
               </a:p>
               <a:p>
@@ -6049,18 +7205,18 @@
               <a:p>
                 <a:r>
                   <a:rPr lang="en-US" dirty="0"/>
-                  <a:t>If the base policy is reasonable (e.g., a good heuristic), rollouts are locally optimal.</a:t>
+                  <a:t>If the base policy is reasonable (i.e., somewhat similar to the optimal policy), rollouts are locally optimal.</a:t>
                 </a:r>
               </a:p>
               <a:p>
                 <a:r>
                   <a:rPr lang="en-US" dirty="0"/>
-                  <a:t>Rollout policy is guaranteed to be at least as good as the base policy (in expectation)</a:t>
+                  <a:t>Rollout policy is guaranteed to be at least as good as the base policy (in expectation).</a:t>
                 </a:r>
               </a:p>
               <a:p>
                 <a:r>
-                  <a:rPr lang="en-US" dirty="0"/>
+                  <a:rPr lang="en-US" b="1" dirty="0"/>
                   <a:t>You get policy improvement without solving Bellman equations.</a:t>
                 </a:r>
               </a:p>
@@ -6069,7 +7225,7 @@
                   <a:buFont typeface="+mj-lt"/>
                   <a:buAutoNum type="arabicPeriod"/>
                 </a:pPr>
-                <a:endParaRPr lang="en-US" b="0" dirty="0"/>
+                <a:endParaRPr lang="en-US" b="1" dirty="0"/>
               </a:p>
               <a:p>
                 <a:pPr marL="914400" lvl="1" indent="-457200">
@@ -6138,6 +7294,178 @@
   <p:clrMapOvr>
     <a:masterClrMapping/>
   </p:clrMapOvr>
+  <p:timing>
+    <p:tnLst>
+      <p:par>
+        <p:cTn id="1" dur="indefinite" restart="never" nodeType="tmRoot">
+          <p:childTnLst>
+            <p:seq concurrent="1" nextAc="seek">
+              <p:cTn id="2" dur="indefinite" nodeType="mainSeq">
+                <p:childTnLst>
+                  <p:par>
+                    <p:cTn id="3" fill="hold">
+                      <p:stCondLst>
+                        <p:cond delay="indefinite"/>
+                      </p:stCondLst>
+                      <p:childTnLst>
+                        <p:par>
+                          <p:cTn id="4" fill="hold">
+                            <p:stCondLst>
+                              <p:cond delay="0"/>
+                            </p:stCondLst>
+                            <p:childTnLst>
+                              <p:par>
+                                <p:cTn id="5" presetID="1" presetClass="entr" presetSubtype="0" fill="hold" nodeType="clickEffect">
+                                  <p:stCondLst>
+                                    <p:cond delay="0"/>
+                                  </p:stCondLst>
+                                  <p:childTnLst>
+                                    <p:set>
+                                      <p:cBhvr>
+                                        <p:cTn id="6" dur="1" fill="hold">
+                                          <p:stCondLst>
+                                            <p:cond delay="0"/>
+                                          </p:stCondLst>
+                                        </p:cTn>
+                                        <p:tgtEl>
+                                          <p:spTgt spid="3">
+                                            <p:txEl>
+                                              <p:pRg st="5" end="5"/>
+                                            </p:txEl>
+                                          </p:spTgt>
+                                        </p:tgtEl>
+                                        <p:attrNameLst>
+                                          <p:attrName>style.visibility</p:attrName>
+                                        </p:attrNameLst>
+                                      </p:cBhvr>
+                                      <p:to>
+                                        <p:strVal val="visible"/>
+                                      </p:to>
+                                    </p:set>
+                                  </p:childTnLst>
+                                </p:cTn>
+                              </p:par>
+                              <p:par>
+                                <p:cTn id="7" presetID="1" presetClass="entr" presetSubtype="0" fill="hold" nodeType="withEffect">
+                                  <p:stCondLst>
+                                    <p:cond delay="0"/>
+                                  </p:stCondLst>
+                                  <p:childTnLst>
+                                    <p:set>
+                                      <p:cBhvr>
+                                        <p:cTn id="8" dur="1" fill="hold">
+                                          <p:stCondLst>
+                                            <p:cond delay="0"/>
+                                          </p:stCondLst>
+                                        </p:cTn>
+                                        <p:tgtEl>
+                                          <p:spTgt spid="3">
+                                            <p:txEl>
+                                              <p:pRg st="6" end="6"/>
+                                            </p:txEl>
+                                          </p:spTgt>
+                                        </p:tgtEl>
+                                        <p:attrNameLst>
+                                          <p:attrName>style.visibility</p:attrName>
+                                        </p:attrNameLst>
+                                      </p:cBhvr>
+                                      <p:to>
+                                        <p:strVal val="visible"/>
+                                      </p:to>
+                                    </p:set>
+                                  </p:childTnLst>
+                                </p:cTn>
+                              </p:par>
+                              <p:par>
+                                <p:cTn id="9" presetID="1" presetClass="entr" presetSubtype="0" fill="hold" nodeType="withEffect">
+                                  <p:stCondLst>
+                                    <p:cond delay="0"/>
+                                  </p:stCondLst>
+                                  <p:childTnLst>
+                                    <p:set>
+                                      <p:cBhvr>
+                                        <p:cTn id="10" dur="1" fill="hold">
+                                          <p:stCondLst>
+                                            <p:cond delay="0"/>
+                                          </p:stCondLst>
+                                        </p:cTn>
+                                        <p:tgtEl>
+                                          <p:spTgt spid="3">
+                                            <p:txEl>
+                                              <p:pRg st="7" end="7"/>
+                                            </p:txEl>
+                                          </p:spTgt>
+                                        </p:tgtEl>
+                                        <p:attrNameLst>
+                                          <p:attrName>style.visibility</p:attrName>
+                                        </p:attrNameLst>
+                                      </p:cBhvr>
+                                      <p:to>
+                                        <p:strVal val="visible"/>
+                                      </p:to>
+                                    </p:set>
+                                  </p:childTnLst>
+                                </p:cTn>
+                              </p:par>
+                              <p:par>
+                                <p:cTn id="11" presetID="1" presetClass="entr" presetSubtype="0" fill="hold" nodeType="withEffect">
+                                  <p:stCondLst>
+                                    <p:cond delay="0"/>
+                                  </p:stCondLst>
+                                  <p:childTnLst>
+                                    <p:set>
+                                      <p:cBhvr>
+                                        <p:cTn id="12" dur="1" fill="hold">
+                                          <p:stCondLst>
+                                            <p:cond delay="0"/>
+                                          </p:stCondLst>
+                                        </p:cTn>
+                                        <p:tgtEl>
+                                          <p:spTgt spid="3">
+                                            <p:txEl>
+                                              <p:pRg st="8" end="8"/>
+                                            </p:txEl>
+                                          </p:spTgt>
+                                        </p:tgtEl>
+                                        <p:attrNameLst>
+                                          <p:attrName>style.visibility</p:attrName>
+                                        </p:attrNameLst>
+                                      </p:cBhvr>
+                                      <p:to>
+                                        <p:strVal val="visible"/>
+                                      </p:to>
+                                    </p:set>
+                                  </p:childTnLst>
+                                </p:cTn>
+                              </p:par>
+                            </p:childTnLst>
+                          </p:cTn>
+                        </p:par>
+                      </p:childTnLst>
+                    </p:cTn>
+                  </p:par>
+                </p:childTnLst>
+              </p:cTn>
+              <p:prevCondLst>
+                <p:cond evt="onPrev" delay="0">
+                  <p:tgtEl>
+                    <p:sldTgt/>
+                  </p:tgtEl>
+                </p:cond>
+              </p:prevCondLst>
+              <p:nextCondLst>
+                <p:cond evt="onNext" delay="0">
+                  <p:tgtEl>
+                    <p:sldTgt/>
+                  </p:tgtEl>
+                </p:cond>
+              </p:nextCondLst>
+            </p:seq>
+          </p:childTnLst>
+        </p:cTn>
+      </p:par>
+    </p:tnLst>
+  </p:timing>
 </p:sld>
 </file>
 
@@ -6520,6 +7848,133 @@
   <p:clrMapOvr>
     <a:masterClrMapping/>
   </p:clrMapOvr>
+  <p:timing>
+    <p:tnLst>
+      <p:par>
+        <p:cTn id="1" dur="indefinite" restart="never" nodeType="tmRoot">
+          <p:childTnLst>
+            <p:seq concurrent="1" nextAc="seek">
+              <p:cTn id="2" dur="indefinite" nodeType="mainSeq">
+                <p:childTnLst>
+                  <p:par>
+                    <p:cTn id="3" fill="hold">
+                      <p:stCondLst>
+                        <p:cond delay="indefinite"/>
+                      </p:stCondLst>
+                      <p:childTnLst>
+                        <p:par>
+                          <p:cTn id="4" fill="hold">
+                            <p:stCondLst>
+                              <p:cond delay="0"/>
+                            </p:stCondLst>
+                            <p:childTnLst>
+                              <p:par>
+                                <p:cTn id="5" presetID="1" presetClass="entr" presetSubtype="0" fill="hold" nodeType="clickEffect">
+                                  <p:stCondLst>
+                                    <p:cond delay="0"/>
+                                  </p:stCondLst>
+                                  <p:childTnLst>
+                                    <p:set>
+                                      <p:cBhvr>
+                                        <p:cTn id="6" dur="1" fill="hold">
+                                          <p:stCondLst>
+                                            <p:cond delay="0"/>
+                                          </p:stCondLst>
+                                        </p:cTn>
+                                        <p:tgtEl>
+                                          <p:spTgt spid="3">
+                                            <p:txEl>
+                                              <p:pRg st="6" end="6"/>
+                                            </p:txEl>
+                                          </p:spTgt>
+                                        </p:tgtEl>
+                                        <p:attrNameLst>
+                                          <p:attrName>style.visibility</p:attrName>
+                                        </p:attrNameLst>
+                                      </p:cBhvr>
+                                      <p:to>
+                                        <p:strVal val="visible"/>
+                                      </p:to>
+                                    </p:set>
+                                  </p:childTnLst>
+                                </p:cTn>
+                              </p:par>
+                            </p:childTnLst>
+                          </p:cTn>
+                        </p:par>
+                      </p:childTnLst>
+                    </p:cTn>
+                  </p:par>
+                  <p:par>
+                    <p:cTn id="7" fill="hold">
+                      <p:stCondLst>
+                        <p:cond delay="indefinite"/>
+                      </p:stCondLst>
+                      <p:childTnLst>
+                        <p:par>
+                          <p:cTn id="8" fill="hold">
+                            <p:stCondLst>
+                              <p:cond delay="0"/>
+                            </p:stCondLst>
+                            <p:childTnLst>
+                              <p:par>
+                                <p:cTn id="9" presetID="1" presetClass="entr" presetSubtype="0" fill="hold" grpId="0" nodeType="clickEffect">
+                                  <p:stCondLst>
+                                    <p:cond delay="0"/>
+                                  </p:stCondLst>
+                                  <p:childTnLst>
+                                    <p:set>
+                                      <p:cBhvr>
+                                        <p:cTn id="10" dur="1" fill="hold">
+                                          <p:stCondLst>
+                                            <p:cond delay="0"/>
+                                          </p:stCondLst>
+                                        </p:cTn>
+                                        <p:tgtEl>
+                                          <p:spTgt spid="4"/>
+                                        </p:tgtEl>
+                                        <p:attrNameLst>
+                                          <p:attrName>style.visibility</p:attrName>
+                                        </p:attrNameLst>
+                                      </p:cBhvr>
+                                      <p:to>
+                                        <p:strVal val="visible"/>
+                                      </p:to>
+                                    </p:set>
+                                  </p:childTnLst>
+                                </p:cTn>
+                              </p:par>
+                            </p:childTnLst>
+                          </p:cTn>
+                        </p:par>
+                      </p:childTnLst>
+                    </p:cTn>
+                  </p:par>
+                </p:childTnLst>
+              </p:cTn>
+              <p:prevCondLst>
+                <p:cond evt="onPrev" delay="0">
+                  <p:tgtEl>
+                    <p:sldTgt/>
+                  </p:tgtEl>
+                </p:cond>
+              </p:prevCondLst>
+              <p:nextCondLst>
+                <p:cond evt="onNext" delay="0">
+                  <p:tgtEl>
+                    <p:sldTgt/>
+                  </p:tgtEl>
+                </p:cond>
+              </p:nextCondLst>
+            </p:seq>
+          </p:childTnLst>
+        </p:cTn>
+      </p:par>
+    </p:tnLst>
+    <p:bldLst>
+      <p:bldP spid="4" grpId="0" animBg="1"/>
+    </p:bldLst>
+  </p:timing>
 </p:sld>
 </file>
 
@@ -6778,51 +8233,62 @@
         </p:nvSpPr>
         <p:spPr>
           <a:xfrm>
-            <a:off x="5723164" y="2457449"/>
-            <a:ext cx="5951765" cy="4261757"/>
+            <a:off x="5723164" y="2457450"/>
+            <a:ext cx="5951765" cy="4100748"/>
           </a:xfrm>
         </p:spPr>
         <p:txBody>
           <a:bodyPr anchor="ctr">
-            <a:normAutofit/>
+            <a:normAutofit lnSpcReduction="10000"/>
           </a:bodyPr>
           <a:lstStyle/>
           <a:p>
             <a:r>
               <a:rPr lang="en-US" sz="1600" dirty="0"/>
-              <a:t>Planning requires a model of the environment. </a:t>
+              <a:t>We can have different models of the environment. </a:t>
             </a:r>
           </a:p>
           <a:p>
             <a:pPr lvl="1"/>
             <a:r>
               <a:rPr lang="en-US" sz="1600" dirty="0"/>
-              <a:t>Distribution model</a:t>
+              <a:t>A full </a:t>
+            </a:r>
+            <a:r>
+              <a:rPr lang="en-US" sz="1600" b="1" dirty="0"/>
+              <a:t>distribution model</a:t>
             </a:r>
           </a:p>
           <a:p>
             <a:pPr lvl="1"/>
             <a:r>
               <a:rPr lang="en-US" sz="1600" dirty="0"/>
-              <a:t>Sample model</a:t>
+              <a:t>A </a:t>
+            </a:r>
+            <a:r>
+              <a:rPr lang="en-US" sz="1600" b="1" dirty="0"/>
+              <a:t>sample model</a:t>
             </a:r>
           </a:p>
           <a:p>
             <a:endParaRPr lang="en-US" sz="1600" dirty="0"/>
           </a:p>
           <a:p>
+            <a:pPr lvl="1"/>
             <a:r>
               <a:rPr lang="en-US" sz="1600" dirty="0"/>
-              <a:t>DP requires a distribution model because it uses expected updates.</a:t>
-            </a:r>
-          </a:p>
-          <a:p>
+              <a:t>DP (planning) requires a distribution model because it uses expected updates.</a:t>
+            </a:r>
+          </a:p>
+          <a:p>
+            <a:pPr lvl="1"/>
             <a:r>
               <a:rPr lang="en-US" sz="1600" dirty="0"/>
-              <a:t>Model-free RL, like TD, can use a sample model to perform sample updates.</a:t>
-            </a:r>
-          </a:p>
-          <a:p>
+              <a:t>Model-free RL, like MC and TD, can use a sample model to perform sample updates.</a:t>
+            </a:r>
+          </a:p>
+          <a:p>
+            <a:pPr lvl="1"/>
             <a:r>
               <a:rPr lang="en-US" sz="1600" dirty="0"/>
               <a:t>Decision-time planning can also use a sample model. E.g., rollout algorithms sample trajectories.  </a:t>
@@ -6834,11 +8300,34 @@
           <a:p>
             <a:r>
               <a:rPr lang="en-US" sz="1600" dirty="0"/>
-              <a:t>Planning and learning are related: They try to estimate the same value function.</a:t>
-            </a:r>
-          </a:p>
-          <a:p>
-            <a:endParaRPr lang="en-US" sz="1600" dirty="0"/>
+              <a:t>Planning and learning are related and try to estimate the same value function.</a:t>
+            </a:r>
+          </a:p>
+          <a:p>
+            <a:pPr lvl="1"/>
+            <a:r>
+              <a:rPr lang="en-US" sz="1600" b="1" dirty="0"/>
+              <a:t>Learning</a:t>
+            </a:r>
+            <a:r>
+              <a:rPr lang="en-US" sz="1600" dirty="0"/>
+              <a:t>: Direct RL directly learns a value function</a:t>
+            </a:r>
+          </a:p>
+          <a:p>
+            <a:pPr lvl="1"/>
+            <a:r>
+              <a:rPr lang="en-US" sz="1600" b="1" dirty="0"/>
+              <a:t>Planning</a:t>
+            </a:r>
+            <a:r>
+              <a:rPr lang="en-US" sz="1600" dirty="0"/>
+              <a:t>: We learn a model used to estimate the value function.</a:t>
+            </a:r>
+          </a:p>
+          <a:p>
+            <a:pPr lvl="1"/>
+            <a:endParaRPr lang="en-US" sz="1200" dirty="0"/>
           </a:p>
         </p:txBody>
       </p:sp>
@@ -6852,6 +8341,258 @@
   <p:clrMapOvr>
     <a:masterClrMapping/>
   </p:clrMapOvr>
+  <p:timing>
+    <p:tnLst>
+      <p:par>
+        <p:cTn id="1" dur="indefinite" restart="never" nodeType="tmRoot">
+          <p:childTnLst>
+            <p:seq concurrent="1" nextAc="seek">
+              <p:cTn id="2" dur="indefinite" nodeType="mainSeq">
+                <p:childTnLst>
+                  <p:par>
+                    <p:cTn id="3" fill="hold">
+                      <p:stCondLst>
+                        <p:cond delay="indefinite"/>
+                      </p:stCondLst>
+                      <p:childTnLst>
+                        <p:par>
+                          <p:cTn id="4" fill="hold">
+                            <p:stCondLst>
+                              <p:cond delay="0"/>
+                            </p:stCondLst>
+                            <p:childTnLst>
+                              <p:par>
+                                <p:cTn id="5" presetID="1" presetClass="entr" presetSubtype="0" fill="hold" nodeType="clickEffect">
+                                  <p:stCondLst>
+                                    <p:cond delay="0"/>
+                                  </p:stCondLst>
+                                  <p:childTnLst>
+                                    <p:set>
+                                      <p:cBhvr>
+                                        <p:cTn id="6" dur="1" fill="hold">
+                                          <p:stCondLst>
+                                            <p:cond delay="0"/>
+                                          </p:stCondLst>
+                                        </p:cTn>
+                                        <p:tgtEl>
+                                          <p:spTgt spid="3">
+                                            <p:txEl>
+                                              <p:pRg st="4" end="4"/>
+                                            </p:txEl>
+                                          </p:spTgt>
+                                        </p:tgtEl>
+                                        <p:attrNameLst>
+                                          <p:attrName>style.visibility</p:attrName>
+                                        </p:attrNameLst>
+                                      </p:cBhvr>
+                                      <p:to>
+                                        <p:strVal val="visible"/>
+                                      </p:to>
+                                    </p:set>
+                                  </p:childTnLst>
+                                </p:cTn>
+                              </p:par>
+                              <p:par>
+                                <p:cTn id="7" presetID="1" presetClass="entr" presetSubtype="0" fill="hold" nodeType="withEffect">
+                                  <p:stCondLst>
+                                    <p:cond delay="0"/>
+                                  </p:stCondLst>
+                                  <p:childTnLst>
+                                    <p:set>
+                                      <p:cBhvr>
+                                        <p:cTn id="8" dur="1" fill="hold">
+                                          <p:stCondLst>
+                                            <p:cond delay="0"/>
+                                          </p:stCondLst>
+                                        </p:cTn>
+                                        <p:tgtEl>
+                                          <p:spTgt spid="3">
+                                            <p:txEl>
+                                              <p:pRg st="5" end="5"/>
+                                            </p:txEl>
+                                          </p:spTgt>
+                                        </p:tgtEl>
+                                        <p:attrNameLst>
+                                          <p:attrName>style.visibility</p:attrName>
+                                        </p:attrNameLst>
+                                      </p:cBhvr>
+                                      <p:to>
+                                        <p:strVal val="visible"/>
+                                      </p:to>
+                                    </p:set>
+                                  </p:childTnLst>
+                                </p:cTn>
+                              </p:par>
+                              <p:par>
+                                <p:cTn id="9" presetID="1" presetClass="entr" presetSubtype="0" fill="hold" nodeType="withEffect">
+                                  <p:stCondLst>
+                                    <p:cond delay="0"/>
+                                  </p:stCondLst>
+                                  <p:childTnLst>
+                                    <p:set>
+                                      <p:cBhvr>
+                                        <p:cTn id="10" dur="1" fill="hold">
+                                          <p:stCondLst>
+                                            <p:cond delay="0"/>
+                                          </p:stCondLst>
+                                        </p:cTn>
+                                        <p:tgtEl>
+                                          <p:spTgt spid="3">
+                                            <p:txEl>
+                                              <p:pRg st="6" end="6"/>
+                                            </p:txEl>
+                                          </p:spTgt>
+                                        </p:tgtEl>
+                                        <p:attrNameLst>
+                                          <p:attrName>style.visibility</p:attrName>
+                                        </p:attrNameLst>
+                                      </p:cBhvr>
+                                      <p:to>
+                                        <p:strVal val="visible"/>
+                                      </p:to>
+                                    </p:set>
+                                  </p:childTnLst>
+                                </p:cTn>
+                              </p:par>
+                            </p:childTnLst>
+                          </p:cTn>
+                        </p:par>
+                      </p:childTnLst>
+                    </p:cTn>
+                  </p:par>
+                  <p:par>
+                    <p:cTn id="11" fill="hold">
+                      <p:stCondLst>
+                        <p:cond delay="indefinite"/>
+                      </p:stCondLst>
+                      <p:childTnLst>
+                        <p:par>
+                          <p:cTn id="12" fill="hold">
+                            <p:stCondLst>
+                              <p:cond delay="0"/>
+                            </p:stCondLst>
+                            <p:childTnLst>
+                              <p:par>
+                                <p:cTn id="13" presetID="1" presetClass="entr" presetSubtype="0" fill="hold" nodeType="clickEffect">
+                                  <p:stCondLst>
+                                    <p:cond delay="0"/>
+                                  </p:stCondLst>
+                                  <p:childTnLst>
+                                    <p:set>
+                                      <p:cBhvr>
+                                        <p:cTn id="14" dur="1" fill="hold">
+                                          <p:stCondLst>
+                                            <p:cond delay="0"/>
+                                          </p:stCondLst>
+                                        </p:cTn>
+                                        <p:tgtEl>
+                                          <p:spTgt spid="3">
+                                            <p:txEl>
+                                              <p:pRg st="8" end="8"/>
+                                            </p:txEl>
+                                          </p:spTgt>
+                                        </p:tgtEl>
+                                        <p:attrNameLst>
+                                          <p:attrName>style.visibility</p:attrName>
+                                        </p:attrNameLst>
+                                      </p:cBhvr>
+                                      <p:to>
+                                        <p:strVal val="visible"/>
+                                      </p:to>
+                                    </p:set>
+                                  </p:childTnLst>
+                                </p:cTn>
+                              </p:par>
+                              <p:par>
+                                <p:cTn id="15" presetID="1" presetClass="entr" presetSubtype="0" fill="hold" nodeType="withEffect">
+                                  <p:stCondLst>
+                                    <p:cond delay="0"/>
+                                  </p:stCondLst>
+                                  <p:childTnLst>
+                                    <p:set>
+                                      <p:cBhvr>
+                                        <p:cTn id="16" dur="1" fill="hold">
+                                          <p:stCondLst>
+                                            <p:cond delay="0"/>
+                                          </p:stCondLst>
+                                        </p:cTn>
+                                        <p:tgtEl>
+                                          <p:spTgt spid="3">
+                                            <p:txEl>
+                                              <p:pRg st="9" end="9"/>
+                                            </p:txEl>
+                                          </p:spTgt>
+                                        </p:tgtEl>
+                                        <p:attrNameLst>
+                                          <p:attrName>style.visibility</p:attrName>
+                                        </p:attrNameLst>
+                                      </p:cBhvr>
+                                      <p:to>
+                                        <p:strVal val="visible"/>
+                                      </p:to>
+                                    </p:set>
+                                  </p:childTnLst>
+                                </p:cTn>
+                              </p:par>
+                              <p:par>
+                                <p:cTn id="17" presetID="1" presetClass="entr" presetSubtype="0" fill="hold" nodeType="withEffect">
+                                  <p:stCondLst>
+                                    <p:cond delay="0"/>
+                                  </p:stCondLst>
+                                  <p:childTnLst>
+                                    <p:set>
+                                      <p:cBhvr>
+                                        <p:cTn id="18" dur="1" fill="hold">
+                                          <p:stCondLst>
+                                            <p:cond delay="0"/>
+                                          </p:stCondLst>
+                                        </p:cTn>
+                                        <p:tgtEl>
+                                          <p:spTgt spid="3">
+                                            <p:txEl>
+                                              <p:pRg st="10" end="10"/>
+                                            </p:txEl>
+                                          </p:spTgt>
+                                        </p:tgtEl>
+                                        <p:attrNameLst>
+                                          <p:attrName>style.visibility</p:attrName>
+                                        </p:attrNameLst>
+                                      </p:cBhvr>
+                                      <p:to>
+                                        <p:strVal val="visible"/>
+                                      </p:to>
+                                    </p:set>
+                                  </p:childTnLst>
+                                </p:cTn>
+                              </p:par>
+                            </p:childTnLst>
+                          </p:cTn>
+                        </p:par>
+                      </p:childTnLst>
+                    </p:cTn>
+                  </p:par>
+                </p:childTnLst>
+              </p:cTn>
+              <p:prevCondLst>
+                <p:cond evt="onPrev" delay="0">
+                  <p:tgtEl>
+                    <p:sldTgt/>
+                  </p:tgtEl>
+                </p:cond>
+              </p:prevCondLst>
+              <p:nextCondLst>
+                <p:cond evt="onNext" delay="0">
+                  <p:tgtEl>
+                    <p:sldTgt/>
+                  </p:tgtEl>
+                </p:cond>
+              </p:nextCondLst>
+            </p:seq>
+          </p:childTnLst>
+        </p:cTn>
+      </p:par>
+    </p:tnLst>
+  </p:timing>
 </p:sld>
 </file>
 
@@ -7008,12 +8749,14 @@
         </p:nvSpPr>
         <p:spPr>
           <a:xfrm>
-            <a:off x="838200" y="1397330"/>
-            <a:ext cx="6730093" cy="4779633"/>
+            <a:off x="838200" y="1397331"/>
+            <a:ext cx="7421380" cy="4163786"/>
           </a:xfrm>
         </p:spPr>
         <p:txBody>
-          <a:bodyPr/>
+          <a:bodyPr>
+            <a:normAutofit fontScale="92500" lnSpcReduction="10000"/>
+          </a:bodyPr>
           <a:lstStyle/>
           <a:p>
             <a:pPr marL="514350" indent="-514350">
@@ -7021,8 +8764,20 @@
               <a:buAutoNum type="arabicPeriod"/>
             </a:pPr>
             <a:r>
+              <a:rPr lang="en-US" b="1" dirty="0"/>
+              <a:t>Policy Evaluation</a:t>
+            </a:r>
+            <a:r>
               <a:rPr lang="en-US" dirty="0"/>
-              <a:t>Estimate a value function.</a:t>
+              <a:t>: Estimate the value function by updates based on </a:t>
+            </a:r>
+            <a:r>
+              <a:rPr lang="en-US" b="1" dirty="0"/>
+              <a:t>backing up </a:t>
+            </a:r>
+            <a:r>
+              <a:rPr lang="en-US" dirty="0"/>
+              <a:t>values along actual or possible state trajectories.</a:t>
             </a:r>
           </a:p>
           <a:p>
@@ -7030,10 +8785,7 @@
               <a:buFont typeface="+mj-lt"/>
               <a:buAutoNum type="arabicPeriod"/>
             </a:pPr>
-            <a:r>
-              <a:rPr lang="en-US" dirty="0"/>
-              <a:t>Back up along actual or possible state trajectories.</a:t>
-            </a:r>
+            <a:endParaRPr lang="en-US" b="1" dirty="0"/>
           </a:p>
           <a:p>
             <a:pPr marL="514350" indent="-514350">
@@ -7041,12 +8793,29 @@
               <a:buAutoNum type="arabicPeriod"/>
             </a:pPr>
             <a:r>
+              <a:rPr lang="en-US" b="1" dirty="0"/>
+              <a:t>Generalized policy iteration (GPI): </a:t>
+            </a:r>
+            <a:r>
               <a:rPr lang="en-US" dirty="0"/>
-              <a:t>Generalized policy iteration (GPI): maintain an approx. value function and an approx. policy. Each is used to update the other. Converges due to the policy improvement theorem.</a:t>
+              <a:t>maintain an approx. value function and an approx. policy. Each is used to update the other. Converges due to the policy improvement theorem.</a:t>
             </a:r>
           </a:p>
           <a:p>
             <a:endParaRPr lang="en-US" dirty="0"/>
+          </a:p>
+          <a:p>
+            <a:pPr marL="0" indent="0">
+              <a:buNone/>
+            </a:pPr>
+            <a:r>
+              <a:rPr lang="en-US" b="1" dirty="0"/>
+              <a:t>Differences</a:t>
+            </a:r>
+            <a:r>
+              <a:rPr lang="en-US" dirty="0"/>
+              <a:t>: How to perform policy evaluation.</a:t>
+            </a:r>
           </a:p>
           <a:p>
             <a:endParaRPr lang="en-US" dirty="0"/>
@@ -7067,7 +8836,7 @@
         </p:nvGrpSpPr>
         <p:grpSpPr>
           <a:xfrm>
-            <a:off x="8329133" y="1064072"/>
+            <a:off x="8718878" y="951646"/>
             <a:ext cx="2751579" cy="4729856"/>
             <a:chOff x="8329133" y="558128"/>
             <a:chExt cx="2751579" cy="4729856"/>
@@ -7370,12 +9139,14 @@
         </p:nvSpPr>
         <p:spPr/>
         <p:txBody>
-          <a:bodyPr/>
+          <a:bodyPr>
+            <a:normAutofit fontScale="90000"/>
+          </a:bodyPr>
           <a:lstStyle/>
           <a:p>
             <a:r>
               <a:rPr lang="en-US" dirty="0"/>
-              <a:t>Update Depth vs. Update Width</a:t>
+              <a:t>Policy Evaluation: Update Depth vs. Update Width</a:t>
             </a:r>
           </a:p>
         </p:txBody>
@@ -7424,10 +9195,10 @@
         </p:nvGrpSpPr>
         <p:grpSpPr>
           <a:xfrm>
-            <a:off x="623171" y="1537220"/>
-            <a:ext cx="2169697" cy="3783559"/>
-            <a:chOff x="9600257" y="1526721"/>
-            <a:chExt cx="2169697" cy="3783559"/>
+            <a:off x="623171" y="1320484"/>
+            <a:ext cx="2169697" cy="4000295"/>
+            <a:chOff x="9600257" y="1309985"/>
+            <a:chExt cx="2169697" cy="4000295"/>
           </a:xfrm>
         </p:grpSpPr>
         <p:sp>
@@ -7444,8 +9215,8 @@
           </p:nvSpPr>
           <p:spPr>
             <a:xfrm>
-              <a:off x="9658670" y="1526721"/>
-              <a:ext cx="2052870" cy="369332"/>
+              <a:off x="9658670" y="1309985"/>
+              <a:ext cx="2052870" cy="646331"/>
             </a:xfrm>
             <a:prstGeom prst="rect">
               <a:avLst/>
@@ -7457,6 +9228,13 @@
               <a:spAutoFit/>
             </a:bodyPr>
             <a:lstStyle/>
+            <a:p>
+              <a:pPr algn="ctr"/>
+              <a:r>
+                <a:rPr lang="en-US" b="1" dirty="0"/>
+                <a:t>Depth</a:t>
+              </a:r>
+            </a:p>
             <a:p>
               <a:r>
                 <a:rPr lang="en-US" dirty="0"/>
@@ -7642,10 +9420,10 @@
         </p:nvGrpSpPr>
         <p:grpSpPr>
           <a:xfrm>
-            <a:off x="2938556" y="6161314"/>
-            <a:ext cx="5326628" cy="551543"/>
-            <a:chOff x="2938556" y="6161314"/>
-            <a:chExt cx="5326628" cy="551543"/>
+            <a:off x="2306541" y="6100430"/>
+            <a:ext cx="6410689" cy="646331"/>
+            <a:chOff x="2306541" y="6100430"/>
+            <a:chExt cx="6410689" cy="646331"/>
           </a:xfrm>
         </p:grpSpPr>
         <p:sp>
@@ -7662,8 +9440,8 @@
           </p:nvSpPr>
           <p:spPr>
             <a:xfrm>
-              <a:off x="2938556" y="6252419"/>
-              <a:ext cx="2074863" cy="369332"/>
+              <a:off x="2306541" y="6232272"/>
+              <a:ext cx="2815451" cy="369332"/>
             </a:xfrm>
             <a:prstGeom prst="rect">
               <a:avLst/>
@@ -7677,8 +9455,12 @@
             <a:lstStyle/>
             <a:p>
               <a:r>
+                <a:rPr lang="en-US" b="1" dirty="0"/>
+                <a:t>Width</a:t>
+              </a:r>
+              <a:r>
                 <a:rPr lang="en-US" dirty="0"/>
-                <a:t>Sampled trajectory</a:t>
+                <a:t>: Sampled trajectory</a:t>
               </a:r>
             </a:p>
           </p:txBody>
@@ -7697,8 +9479,8 @@
           </p:nvSpPr>
           <p:spPr>
             <a:xfrm>
-              <a:off x="6096000" y="6252419"/>
-              <a:ext cx="2169184" cy="369332"/>
+              <a:off x="6096000" y="6100430"/>
+              <a:ext cx="2621230" cy="646331"/>
             </a:xfrm>
             <a:prstGeom prst="rect">
               <a:avLst/>
@@ -7713,7 +9495,14 @@
             <a:p>
               <a:r>
                 <a:rPr lang="en-US" dirty="0"/>
-                <a:t>Consider all actions</a:t>
+                <a:t>Consider all actions </a:t>
+              </a:r>
+              <a:br>
+                <a:rPr lang="en-US" dirty="0"/>
+              </a:br>
+              <a:r>
+                <a:rPr lang="en-US" dirty="0"/>
+                <a:t>(use expectation or max)</a:t>
               </a:r>
             </a:p>
           </p:txBody>
@@ -7815,57 +9604,113 @@
           </a:p>
         </p:txBody>
       </p:sp>
-      <p:sp>
-        <p:nvSpPr>
-          <p:cNvPr id="15" name="Oval 14">
+      <p:grpSp>
+        <p:nvGrpSpPr>
+          <p:cNvPr id="17" name="Group 16">
             <a:extLst>
               <a:ext uri="{FF2B5EF4-FFF2-40B4-BE49-F238E27FC236}">
-                <a16:creationId xmlns:a16="http://schemas.microsoft.com/office/drawing/2014/main" id="{1A7752DC-C919-21AB-695A-0B5E14D50DAF}"/>
+                <a16:creationId xmlns:a16="http://schemas.microsoft.com/office/drawing/2014/main" id="{5119C3A0-42FD-212B-5471-F32C75AA54ED}"/>
               </a:ext>
             </a:extLst>
           </p:cNvPr>
-          <p:cNvSpPr/>
+          <p:cNvGrpSpPr/>
           <p:nvPr/>
-        </p:nvSpPr>
-        <p:spPr>
+        </p:nvGrpSpPr>
+        <p:grpSpPr>
           <a:xfrm>
-            <a:off x="5069641" y="4071507"/>
-            <a:ext cx="104702" cy="102624"/>
+            <a:off x="5227038" y="4670475"/>
+            <a:ext cx="1588797" cy="523220"/>
+            <a:chOff x="5069641" y="3855268"/>
+            <a:chExt cx="1588797" cy="523220"/>
           </a:xfrm>
-          <a:prstGeom prst="ellipse">
-            <a:avLst/>
-          </a:prstGeom>
-          <a:ln w="6350"/>
-        </p:spPr>
-        <p:style>
-          <a:lnRef idx="2">
-            <a:schemeClr val="dk1"/>
-          </a:lnRef>
-          <a:fillRef idx="1">
-            <a:schemeClr val="lt1"/>
-          </a:fillRef>
-          <a:effectRef idx="0">
-            <a:schemeClr val="dk1"/>
-          </a:effectRef>
-          <a:fontRef idx="minor">
-            <a:schemeClr val="dk1"/>
-          </a:fontRef>
-        </p:style>
-        <p:txBody>
-          <a:bodyPr rtlCol="0" anchor="ctr"/>
-          <a:lstStyle/>
-          <a:p>
-            <a:pPr algn="ctr"/>
-            <a:endParaRPr lang="en-US"/>
-          </a:p>
-        </p:txBody>
-      </p:sp>
+        </p:grpSpPr>
+        <p:sp>
+          <p:nvSpPr>
+            <p:cNvPr id="15" name="Oval 14">
+              <a:extLst>
+                <a:ext uri="{FF2B5EF4-FFF2-40B4-BE49-F238E27FC236}">
+                  <a16:creationId xmlns:a16="http://schemas.microsoft.com/office/drawing/2014/main" id="{1A7752DC-C919-21AB-695A-0B5E14D50DAF}"/>
+                </a:ext>
+              </a:extLst>
+            </p:cNvPr>
+            <p:cNvSpPr/>
+            <p:nvPr/>
+          </p:nvSpPr>
+          <p:spPr>
+            <a:xfrm>
+              <a:off x="5069641" y="4071507"/>
+              <a:ext cx="104702" cy="102624"/>
+            </a:xfrm>
+            <a:prstGeom prst="ellipse">
+              <a:avLst/>
+            </a:prstGeom>
+            <a:ln w="6350"/>
+          </p:spPr>
+          <p:style>
+            <a:lnRef idx="2">
+              <a:schemeClr val="dk1"/>
+            </a:lnRef>
+            <a:fillRef idx="1">
+              <a:schemeClr val="lt1"/>
+            </a:fillRef>
+            <a:effectRef idx="0">
+              <a:schemeClr val="dk1"/>
+            </a:effectRef>
+            <a:fontRef idx="minor">
+              <a:schemeClr val="dk1"/>
+            </a:fontRef>
+          </p:style>
+          <p:txBody>
+            <a:bodyPr rtlCol="0" anchor="ctr"/>
+            <a:lstStyle/>
+            <a:p>
+              <a:pPr algn="ctr"/>
+              <a:endParaRPr lang="en-US"/>
+            </a:p>
+          </p:txBody>
+        </p:sp>
+        <p:sp>
+          <p:nvSpPr>
+            <p:cNvPr id="16" name="TextBox 15">
+              <a:extLst>
+                <a:ext uri="{FF2B5EF4-FFF2-40B4-BE49-F238E27FC236}">
+                  <a16:creationId xmlns:a16="http://schemas.microsoft.com/office/drawing/2014/main" id="{A2938DCA-3D73-EEA6-5D71-9C1852C94B98}"/>
+                </a:ext>
+              </a:extLst>
+            </p:cNvPr>
+            <p:cNvSpPr txBox="1"/>
+            <p:nvPr/>
+          </p:nvSpPr>
+          <p:spPr>
+            <a:xfrm>
+              <a:off x="5127161" y="3855268"/>
+              <a:ext cx="1531277" cy="523220"/>
+            </a:xfrm>
+            <a:prstGeom prst="rect">
+              <a:avLst/>
+            </a:prstGeom>
+            <a:noFill/>
+          </p:spPr>
+          <p:txBody>
+            <a:bodyPr wrap="square" rtlCol="0">
+              <a:spAutoFit/>
+            </a:bodyPr>
+            <a:lstStyle/>
+            <a:p>
+              <a:r>
+                <a:rPr lang="en-US" sz="1400" dirty="0"/>
+                <a:t>Rollout Algorithms</a:t>
+              </a:r>
+            </a:p>
+          </p:txBody>
+        </p:sp>
+      </p:grpSp>
       <p:sp>
         <p:nvSpPr>
-          <p:cNvPr id="16" name="TextBox 15">
+          <p:cNvPr id="18" name="TextBox 17">
             <a:extLst>
               <a:ext uri="{FF2B5EF4-FFF2-40B4-BE49-F238E27FC236}">
-                <a16:creationId xmlns:a16="http://schemas.microsoft.com/office/drawing/2014/main" id="{A2938DCA-3D73-EEA6-5D71-9C1852C94B98}"/>
+                <a16:creationId xmlns:a16="http://schemas.microsoft.com/office/drawing/2014/main" id="{4E74D7B6-C23A-AF2E-4548-1F2E9AF97501}"/>
               </a:ext>
             </a:extLst>
           </p:cNvPr>
@@ -7874,8 +9719,8 @@
         </p:nvSpPr>
         <p:spPr>
           <a:xfrm>
-            <a:off x="5127161" y="3855268"/>
-            <a:ext cx="1531277" cy="523220"/>
+            <a:off x="4235081" y="1626887"/>
+            <a:ext cx="1531277" cy="307777"/>
           </a:xfrm>
           <a:prstGeom prst="rect">
             <a:avLst/>
@@ -7890,11 +9735,147 @@
           <a:p>
             <a:r>
               <a:rPr lang="en-US" sz="1400" dirty="0"/>
-              <a:t>Rollout Algorithms</a:t>
+              <a:t>one-step Sarsa</a:t>
             </a:r>
           </a:p>
         </p:txBody>
       </p:sp>
+      <p:sp>
+        <p:nvSpPr>
+          <p:cNvPr id="19" name="TextBox 18">
+            <a:extLst>
+              <a:ext uri="{FF2B5EF4-FFF2-40B4-BE49-F238E27FC236}">
+                <a16:creationId xmlns:a16="http://schemas.microsoft.com/office/drawing/2014/main" id="{5779370B-E9C9-008B-B236-A85F259625FE}"/>
+              </a:ext>
+            </a:extLst>
+          </p:cNvPr>
+          <p:cNvSpPr txBox="1"/>
+          <p:nvPr/>
+        </p:nvSpPr>
+        <p:spPr>
+          <a:xfrm>
+            <a:off x="8438052" y="1580720"/>
+            <a:ext cx="2564728" cy="307777"/>
+          </a:xfrm>
+          <a:prstGeom prst="rect">
+            <a:avLst/>
+          </a:prstGeom>
+          <a:noFill/>
+        </p:spPr>
+        <p:txBody>
+          <a:bodyPr wrap="square" rtlCol="0">
+            <a:spAutoFit/>
+          </a:bodyPr>
+          <a:lstStyle/>
+          <a:p>
+            <a:r>
+              <a:rPr lang="en-US" sz="1400" dirty="0"/>
+              <a:t>+ Q-Learning, Expected Sarsa</a:t>
+            </a:r>
+          </a:p>
+        </p:txBody>
+      </p:sp>
+      <p:grpSp>
+        <p:nvGrpSpPr>
+          <p:cNvPr id="22" name="Group 21">
+            <a:extLst>
+              <a:ext uri="{FF2B5EF4-FFF2-40B4-BE49-F238E27FC236}">
+                <a16:creationId xmlns:a16="http://schemas.microsoft.com/office/drawing/2014/main" id="{AFABC249-B9C3-B83D-2555-FEAEA52E10A6}"/>
+              </a:ext>
+            </a:extLst>
+          </p:cNvPr>
+          <p:cNvGrpSpPr/>
+          <p:nvPr/>
+        </p:nvGrpSpPr>
+        <p:grpSpPr>
+          <a:xfrm>
+            <a:off x="4130378" y="3100944"/>
+            <a:ext cx="1583628" cy="307777"/>
+            <a:chOff x="4130378" y="3100944"/>
+            <a:chExt cx="1583628" cy="307777"/>
+          </a:xfrm>
+        </p:grpSpPr>
+        <p:sp>
+          <p:nvSpPr>
+            <p:cNvPr id="20" name="Oval 19">
+              <a:extLst>
+                <a:ext uri="{FF2B5EF4-FFF2-40B4-BE49-F238E27FC236}">
+                  <a16:creationId xmlns:a16="http://schemas.microsoft.com/office/drawing/2014/main" id="{A5FC1DEF-060E-DB48-CC65-B77A6C34CC20}"/>
+                </a:ext>
+              </a:extLst>
+            </p:cNvPr>
+            <p:cNvSpPr/>
+            <p:nvPr/>
+          </p:nvSpPr>
+          <p:spPr>
+            <a:xfrm>
+              <a:off x="4130378" y="3203521"/>
+              <a:ext cx="104702" cy="102624"/>
+            </a:xfrm>
+            <a:prstGeom prst="ellipse">
+              <a:avLst/>
+            </a:prstGeom>
+            <a:ln w="6350"/>
+          </p:spPr>
+          <p:style>
+            <a:lnRef idx="2">
+              <a:schemeClr val="dk1"/>
+            </a:lnRef>
+            <a:fillRef idx="1">
+              <a:schemeClr val="lt1"/>
+            </a:fillRef>
+            <a:effectRef idx="0">
+              <a:schemeClr val="dk1"/>
+            </a:effectRef>
+            <a:fontRef idx="minor">
+              <a:schemeClr val="dk1"/>
+            </a:fontRef>
+          </p:style>
+          <p:txBody>
+            <a:bodyPr rtlCol="0" anchor="ctr"/>
+            <a:lstStyle/>
+            <a:p>
+              <a:pPr algn="ctr"/>
+              <a:endParaRPr lang="en-US"/>
+            </a:p>
+          </p:txBody>
+        </p:sp>
+        <p:sp>
+          <p:nvSpPr>
+            <p:cNvPr id="21" name="TextBox 20">
+              <a:extLst>
+                <a:ext uri="{FF2B5EF4-FFF2-40B4-BE49-F238E27FC236}">
+                  <a16:creationId xmlns:a16="http://schemas.microsoft.com/office/drawing/2014/main" id="{F85C0057-A551-8186-D2E1-FC4CE09F09CD}"/>
+                </a:ext>
+              </a:extLst>
+            </p:cNvPr>
+            <p:cNvSpPr txBox="1"/>
+            <p:nvPr/>
+          </p:nvSpPr>
+          <p:spPr>
+            <a:xfrm>
+              <a:off x="4182729" y="3100944"/>
+              <a:ext cx="1531277" cy="307777"/>
+            </a:xfrm>
+            <a:prstGeom prst="rect">
+              <a:avLst/>
+            </a:prstGeom>
+            <a:noFill/>
+          </p:spPr>
+          <p:txBody>
+            <a:bodyPr wrap="square" rtlCol="0">
+              <a:spAutoFit/>
+            </a:bodyPr>
+            <a:lstStyle/>
+            <a:p>
+              <a:r>
+                <a:rPr lang="en-US" sz="1400" dirty="0"/>
+                <a:t>n-step Sarsa</a:t>
+              </a:r>
+            </a:p>
+          </p:txBody>
+        </p:sp>
+      </p:grpSp>
     </p:spTree>
     <p:extLst>
       <p:ext uri="{BB962C8B-B14F-4D97-AF65-F5344CB8AC3E}">
@@ -7905,6 +9886,356 @@
   <p:clrMapOvr>
     <a:masterClrMapping/>
   </p:clrMapOvr>
+  <p:timing>
+    <p:tnLst>
+      <p:par>
+        <p:cTn id="1" dur="indefinite" restart="never" nodeType="tmRoot">
+          <p:childTnLst>
+            <p:seq concurrent="1" nextAc="seek">
+              <p:cTn id="2" dur="indefinite" nodeType="mainSeq">
+                <p:childTnLst>
+                  <p:par>
+                    <p:cTn id="3" fill="hold">
+                      <p:stCondLst>
+                        <p:cond delay="indefinite"/>
+                      </p:stCondLst>
+                      <p:childTnLst>
+                        <p:par>
+                          <p:cTn id="4" fill="hold">
+                            <p:stCondLst>
+                              <p:cond delay="0"/>
+                            </p:stCondLst>
+                            <p:childTnLst>
+                              <p:par>
+                                <p:cTn id="5" presetID="1" presetClass="entr" presetSubtype="0" fill="hold" nodeType="clickEffect">
+                                  <p:stCondLst>
+                                    <p:cond delay="0"/>
+                                  </p:stCondLst>
+                                  <p:childTnLst>
+                                    <p:set>
+                                      <p:cBhvr>
+                                        <p:cTn id="6" dur="1" fill="hold">
+                                          <p:stCondLst>
+                                            <p:cond delay="0"/>
+                                          </p:stCondLst>
+                                        </p:cTn>
+                                        <p:tgtEl>
+                                          <p:spTgt spid="10"/>
+                                        </p:tgtEl>
+                                        <p:attrNameLst>
+                                          <p:attrName>style.visibility</p:attrName>
+                                        </p:attrNameLst>
+                                      </p:cBhvr>
+                                      <p:to>
+                                        <p:strVal val="visible"/>
+                                      </p:to>
+                                    </p:set>
+                                  </p:childTnLst>
+                                </p:cTn>
+                              </p:par>
+                            </p:childTnLst>
+                          </p:cTn>
+                        </p:par>
+                      </p:childTnLst>
+                    </p:cTn>
+                  </p:par>
+                  <p:par>
+                    <p:cTn id="7" fill="hold">
+                      <p:stCondLst>
+                        <p:cond delay="indefinite"/>
+                      </p:stCondLst>
+                      <p:childTnLst>
+                        <p:par>
+                          <p:cTn id="8" fill="hold">
+                            <p:stCondLst>
+                              <p:cond delay="0"/>
+                            </p:stCondLst>
+                            <p:childTnLst>
+                              <p:par>
+                                <p:cTn id="9" presetID="1" presetClass="entr" presetSubtype="0" fill="hold" nodeType="clickEffect">
+                                  <p:stCondLst>
+                                    <p:cond delay="0"/>
+                                  </p:stCondLst>
+                                  <p:childTnLst>
+                                    <p:set>
+                                      <p:cBhvr>
+                                        <p:cTn id="10" dur="1" fill="hold">
+                                          <p:stCondLst>
+                                            <p:cond delay="0"/>
+                                          </p:stCondLst>
+                                        </p:cTn>
+                                        <p:tgtEl>
+                                          <p:spTgt spid="14"/>
+                                        </p:tgtEl>
+                                        <p:attrNameLst>
+                                          <p:attrName>style.visibility</p:attrName>
+                                        </p:attrNameLst>
+                                      </p:cBhvr>
+                                      <p:to>
+                                        <p:strVal val="visible"/>
+                                      </p:to>
+                                    </p:set>
+                                  </p:childTnLst>
+                                </p:cTn>
+                              </p:par>
+                            </p:childTnLst>
+                          </p:cTn>
+                        </p:par>
+                      </p:childTnLst>
+                    </p:cTn>
+                  </p:par>
+                  <p:par>
+                    <p:cTn id="11" fill="hold">
+                      <p:stCondLst>
+                        <p:cond delay="indefinite"/>
+                      </p:stCondLst>
+                      <p:childTnLst>
+                        <p:par>
+                          <p:cTn id="12" fill="hold">
+                            <p:stCondLst>
+                              <p:cond delay="0"/>
+                            </p:stCondLst>
+                            <p:childTnLst>
+                              <p:par>
+                                <p:cTn id="13" presetID="1" presetClass="entr" presetSubtype="0" fill="hold" grpId="0" nodeType="clickEffect">
+                                  <p:stCondLst>
+                                    <p:cond delay="0"/>
+                                  </p:stCondLst>
+                                  <p:childTnLst>
+                                    <p:set>
+                                      <p:cBhvr>
+                                        <p:cTn id="14" dur="1" fill="hold">
+                                          <p:stCondLst>
+                                            <p:cond delay="0"/>
+                                          </p:stCondLst>
+                                        </p:cTn>
+                                        <p:tgtEl>
+                                          <p:spTgt spid="3"/>
+                                        </p:tgtEl>
+                                        <p:attrNameLst>
+                                          <p:attrName>style.visibility</p:attrName>
+                                        </p:attrNameLst>
+                                      </p:cBhvr>
+                                      <p:to>
+                                        <p:strVal val="visible"/>
+                                      </p:to>
+                                    </p:set>
+                                  </p:childTnLst>
+                                </p:cTn>
+                              </p:par>
+                            </p:childTnLst>
+                          </p:cTn>
+                        </p:par>
+                      </p:childTnLst>
+                    </p:cTn>
+                  </p:par>
+                  <p:par>
+                    <p:cTn id="15" fill="hold">
+                      <p:stCondLst>
+                        <p:cond delay="indefinite"/>
+                      </p:stCondLst>
+                      <p:childTnLst>
+                        <p:par>
+                          <p:cTn id="16" fill="hold">
+                            <p:stCondLst>
+                              <p:cond delay="0"/>
+                            </p:stCondLst>
+                            <p:childTnLst>
+                              <p:par>
+                                <p:cTn id="17" presetID="1" presetClass="entr" presetSubtype="0" fill="hold" grpId="0" nodeType="clickEffect">
+                                  <p:stCondLst>
+                                    <p:cond delay="0"/>
+                                  </p:stCondLst>
+                                  <p:childTnLst>
+                                    <p:set>
+                                      <p:cBhvr>
+                                        <p:cTn id="18" dur="1" fill="hold">
+                                          <p:stCondLst>
+                                            <p:cond delay="0"/>
+                                          </p:stCondLst>
+                                        </p:cTn>
+                                        <p:tgtEl>
+                                          <p:spTgt spid="18"/>
+                                        </p:tgtEl>
+                                        <p:attrNameLst>
+                                          <p:attrName>style.visibility</p:attrName>
+                                        </p:attrNameLst>
+                                      </p:cBhvr>
+                                      <p:to>
+                                        <p:strVal val="visible"/>
+                                      </p:to>
+                                    </p:set>
+                                  </p:childTnLst>
+                                </p:cTn>
+                              </p:par>
+                            </p:childTnLst>
+                          </p:cTn>
+                        </p:par>
+                      </p:childTnLst>
+                    </p:cTn>
+                  </p:par>
+                  <p:par>
+                    <p:cTn id="19" fill="hold">
+                      <p:stCondLst>
+                        <p:cond delay="indefinite"/>
+                      </p:stCondLst>
+                      <p:childTnLst>
+                        <p:par>
+                          <p:cTn id="20" fill="hold">
+                            <p:stCondLst>
+                              <p:cond delay="0"/>
+                            </p:stCondLst>
+                            <p:childTnLst>
+                              <p:par>
+                                <p:cTn id="21" presetID="1" presetClass="entr" presetSubtype="0" fill="hold" grpId="0" nodeType="clickEffect">
+                                  <p:stCondLst>
+                                    <p:cond delay="0"/>
+                                  </p:stCondLst>
+                                  <p:childTnLst>
+                                    <p:set>
+                                      <p:cBhvr>
+                                        <p:cTn id="22" dur="1" fill="hold">
+                                          <p:stCondLst>
+                                            <p:cond delay="0"/>
+                                          </p:stCondLst>
+                                        </p:cTn>
+                                        <p:tgtEl>
+                                          <p:spTgt spid="19"/>
+                                        </p:tgtEl>
+                                        <p:attrNameLst>
+                                          <p:attrName>style.visibility</p:attrName>
+                                        </p:attrNameLst>
+                                      </p:cBhvr>
+                                      <p:to>
+                                        <p:strVal val="visible"/>
+                                      </p:to>
+                                    </p:set>
+                                  </p:childTnLst>
+                                </p:cTn>
+                              </p:par>
+                            </p:childTnLst>
+                          </p:cTn>
+                        </p:par>
+                      </p:childTnLst>
+                    </p:cTn>
+                  </p:par>
+                  <p:par>
+                    <p:cTn id="23" fill="hold">
+                      <p:stCondLst>
+                        <p:cond delay="indefinite"/>
+                      </p:stCondLst>
+                      <p:childTnLst>
+                        <p:par>
+                          <p:cTn id="24" fill="hold">
+                            <p:stCondLst>
+                              <p:cond delay="0"/>
+                            </p:stCondLst>
+                            <p:childTnLst>
+                              <p:par>
+                                <p:cTn id="25" presetID="1" presetClass="entr" presetSubtype="0" fill="hold" nodeType="clickEffect">
+                                  <p:stCondLst>
+                                    <p:cond delay="0"/>
+                                  </p:stCondLst>
+                                  <p:childTnLst>
+                                    <p:set>
+                                      <p:cBhvr>
+                                        <p:cTn id="26" dur="1" fill="hold">
+                                          <p:stCondLst>
+                                            <p:cond delay="0"/>
+                                          </p:stCondLst>
+                                        </p:cTn>
+                                        <p:tgtEl>
+                                          <p:spTgt spid="22"/>
+                                        </p:tgtEl>
+                                        <p:attrNameLst>
+                                          <p:attrName>style.visibility</p:attrName>
+                                        </p:attrNameLst>
+                                      </p:cBhvr>
+                                      <p:to>
+                                        <p:strVal val="visible"/>
+                                      </p:to>
+                                    </p:set>
+                                  </p:childTnLst>
+                                </p:cTn>
+                              </p:par>
+                            </p:childTnLst>
+                          </p:cTn>
+                        </p:par>
+                      </p:childTnLst>
+                    </p:cTn>
+                  </p:par>
+                  <p:par>
+                    <p:cTn id="27" fill="hold">
+                      <p:stCondLst>
+                        <p:cond delay="indefinite"/>
+                      </p:stCondLst>
+                      <p:childTnLst>
+                        <p:par>
+                          <p:cTn id="28" fill="hold">
+                            <p:stCondLst>
+                              <p:cond delay="0"/>
+                            </p:stCondLst>
+                            <p:childTnLst>
+                              <p:par>
+                                <p:cTn id="29" presetID="1" presetClass="entr" presetSubtype="0" fill="hold" nodeType="clickEffect">
+                                  <p:stCondLst>
+                                    <p:cond delay="0"/>
+                                  </p:stCondLst>
+                                  <p:childTnLst>
+                                    <p:set>
+                                      <p:cBhvr>
+                                        <p:cTn id="30" dur="1" fill="hold">
+                                          <p:stCondLst>
+                                            <p:cond delay="0"/>
+                                          </p:stCondLst>
+                                        </p:cTn>
+                                        <p:tgtEl>
+                                          <p:spTgt spid="17"/>
+                                        </p:tgtEl>
+                                        <p:attrNameLst>
+                                          <p:attrName>style.visibility</p:attrName>
+                                        </p:attrNameLst>
+                                      </p:cBhvr>
+                                      <p:to>
+                                        <p:strVal val="visible"/>
+                                      </p:to>
+                                    </p:set>
+                                  </p:childTnLst>
+                                </p:cTn>
+                              </p:par>
+                            </p:childTnLst>
+                          </p:cTn>
+                        </p:par>
+                      </p:childTnLst>
+                    </p:cTn>
+                  </p:par>
+                </p:childTnLst>
+              </p:cTn>
+              <p:prevCondLst>
+                <p:cond evt="onPrev" delay="0">
+                  <p:tgtEl>
+                    <p:sldTgt/>
+                  </p:tgtEl>
+                </p:cond>
+              </p:prevCondLst>
+              <p:nextCondLst>
+                <p:cond evt="onNext" delay="0">
+                  <p:tgtEl>
+                    <p:sldTgt/>
+                  </p:tgtEl>
+                </p:cond>
+              </p:nextCondLst>
+            </p:seq>
+          </p:childTnLst>
+        </p:cTn>
+      </p:par>
+    </p:tnLst>
+    <p:bldLst>
+      <p:bldP spid="3" grpId="0" animBg="1"/>
+      <p:bldP spid="18" grpId="0"/>
+      <p:bldP spid="19" grpId="0"/>
+    </p:bldLst>
+  </p:timing>
 </p:sld>
 </file>
 
@@ -7985,7 +10316,7 @@
             </a:r>
             <a:r>
               <a:rPr lang="en-US" dirty="0"/>
-              <a:t>: Learn the policy the agent is following.</a:t>
+              <a:t>: Evaluate or learn a policy that is used to sample data.</a:t>
             </a:r>
           </a:p>
           <a:p>
@@ -8001,53 +10332,66 @@
             </a:r>
             <a:r>
               <a:rPr lang="en-US" dirty="0"/>
-              <a:t>: Learn a target policy that is different from the followed behavior policy.</a:t>
-            </a:r>
-          </a:p>
-          <a:p>
-            <a:endParaRPr lang="en-US" dirty="0"/>
-          </a:p>
-          <a:p>
-            <a:endParaRPr lang="en-US" dirty="0"/>
+              <a:t>: Evaluate or learn a target policy different from the behavior policy.</a:t>
+            </a:r>
           </a:p>
           <a:p>
             <a:pPr marL="0" indent="0">
               <a:buNone/>
             </a:pPr>
-            <a:r>
-              <a:rPr lang="en-US" b="1" dirty="0"/>
-              <a:t>Off-Policy is useful because</a:t>
-            </a:r>
-            <a:r>
-              <a:rPr lang="en-US" dirty="0"/>
-              <a:t>:</a:t>
-            </a:r>
-          </a:p>
-          <a:p>
-            <a:pPr lvl="1"/>
-            <a:r>
-              <a:rPr lang="en-US" dirty="0"/>
-              <a:t>Learn optimal policies while exploring</a:t>
-            </a:r>
-          </a:p>
-          <a:p>
-            <a:pPr lvl="1"/>
-            <a:r>
-              <a:rPr lang="en-US" dirty="0"/>
-              <a:t>Reuse of data: sample efficiency, offline, and batch RL</a:t>
-            </a:r>
-          </a:p>
-          <a:p>
-            <a:pPr lvl="1"/>
-            <a:r>
-              <a:rPr lang="en-US" dirty="0"/>
-              <a:t>Safe learning and exploration</a:t>
-            </a:r>
+            <a:endParaRPr lang="en-US" dirty="0"/>
           </a:p>
           <a:p>
             <a:pPr marL="0" indent="0">
               <a:buNone/>
             </a:pPr>
+            <a:endParaRPr lang="en-US" dirty="0"/>
+          </a:p>
+          <a:p>
+            <a:pPr marL="0" indent="0">
+              <a:buNone/>
+            </a:pPr>
+            <a:r>
+              <a:rPr lang="en-US" b="1" dirty="0"/>
+              <a:t>Off-Policy is useful because</a:t>
+            </a:r>
+            <a:r>
+              <a:rPr lang="en-US" dirty="0"/>
+              <a:t>:</a:t>
+            </a:r>
+          </a:p>
+          <a:p>
+            <a:pPr lvl="1"/>
+            <a:r>
+              <a:rPr lang="en-US" b="1" dirty="0"/>
+              <a:t>Learn optimal policies </a:t>
+            </a:r>
+            <a:r>
+              <a:rPr lang="en-US" dirty="0"/>
+              <a:t>while using exploring behavior.</a:t>
+            </a:r>
+          </a:p>
+          <a:p>
+            <a:pPr lvl="1"/>
+            <a:r>
+              <a:rPr lang="en-US" b="1" dirty="0"/>
+              <a:t>Reuse of data</a:t>
+            </a:r>
+            <a:r>
+              <a:rPr lang="en-US" dirty="0"/>
+              <a:t>: sample efficiency, offline, and batch RL</a:t>
+            </a:r>
+          </a:p>
+          <a:p>
+            <a:pPr marL="0" indent="0">
+              <a:buNone/>
+            </a:pPr>
+            <a:endParaRPr lang="en-US" b="1" dirty="0"/>
+          </a:p>
+          <a:p>
+            <a:pPr marL="0" indent="0">
+              <a:buNone/>
+            </a:pPr>
             <a:r>
               <a:rPr lang="en-US" b="1" dirty="0"/>
               <a:t>Off-Policy learning is harder because:</a:t>
@@ -8056,8 +10400,12 @@
           <a:p>
             <a:pPr lvl="1"/>
             <a:r>
+              <a:rPr lang="en-US" b="1" dirty="0"/>
+              <a:t>Requires distributional correction</a:t>
+            </a:r>
+            <a:r>
               <a:rPr lang="en-US" dirty="0"/>
-              <a:t>Requires distributional correction: E.g., importance sampling</a:t>
+              <a:t>: E.g., importance sampling</a:t>
             </a:r>
           </a:p>
           <a:p>
@@ -8070,8 +10418,12 @@
           <a:p>
             <a:pPr lvl="1"/>
             <a:r>
+              <a:rPr lang="en-US" b="1" dirty="0"/>
+              <a:t>Instability with non-linear function approximation </a:t>
+            </a:r>
+            <a:r>
               <a:rPr lang="en-US" dirty="0"/>
-              <a:t>Instability with non-linear function approximation (deep RL)</a:t>
+              <a:t>(deep RL)</a:t>
             </a:r>
           </a:p>
         </p:txBody>
@@ -8086,6 +10438,289 @@
   <p:clrMapOvr>
     <a:masterClrMapping/>
   </p:clrMapOvr>
+  <p:timing>
+    <p:tnLst>
+      <p:par>
+        <p:cTn id="1" dur="indefinite" restart="never" nodeType="tmRoot">
+          <p:childTnLst>
+            <p:seq concurrent="1" nextAc="seek">
+              <p:cTn id="2" dur="indefinite" nodeType="mainSeq">
+                <p:childTnLst>
+                  <p:par>
+                    <p:cTn id="3" fill="hold">
+                      <p:stCondLst>
+                        <p:cond delay="indefinite"/>
+                      </p:stCondLst>
+                      <p:childTnLst>
+                        <p:par>
+                          <p:cTn id="4" fill="hold">
+                            <p:stCondLst>
+                              <p:cond delay="0"/>
+                            </p:stCondLst>
+                            <p:childTnLst>
+                              <p:par>
+                                <p:cTn id="5" presetID="1" presetClass="entr" presetSubtype="0" fill="hold" nodeType="clickEffect">
+                                  <p:stCondLst>
+                                    <p:cond delay="0"/>
+                                  </p:stCondLst>
+                                  <p:childTnLst>
+                                    <p:set>
+                                      <p:cBhvr>
+                                        <p:cTn id="6" dur="1" fill="hold">
+                                          <p:stCondLst>
+                                            <p:cond delay="0"/>
+                                          </p:stCondLst>
+                                        </p:cTn>
+                                        <p:tgtEl>
+                                          <p:spTgt spid="3">
+                                            <p:txEl>
+                                              <p:pRg st="5" end="5"/>
+                                            </p:txEl>
+                                          </p:spTgt>
+                                        </p:tgtEl>
+                                        <p:attrNameLst>
+                                          <p:attrName>style.visibility</p:attrName>
+                                        </p:attrNameLst>
+                                      </p:cBhvr>
+                                      <p:to>
+                                        <p:strVal val="visible"/>
+                                      </p:to>
+                                    </p:set>
+                                  </p:childTnLst>
+                                </p:cTn>
+                              </p:par>
+                              <p:par>
+                                <p:cTn id="7" presetID="1" presetClass="entr" presetSubtype="0" fill="hold" nodeType="withEffect">
+                                  <p:stCondLst>
+                                    <p:cond delay="0"/>
+                                  </p:stCondLst>
+                                  <p:childTnLst>
+                                    <p:set>
+                                      <p:cBhvr>
+                                        <p:cTn id="8" dur="1" fill="hold">
+                                          <p:stCondLst>
+                                            <p:cond delay="0"/>
+                                          </p:stCondLst>
+                                        </p:cTn>
+                                        <p:tgtEl>
+                                          <p:spTgt spid="3">
+                                            <p:txEl>
+                                              <p:pRg st="6" end="6"/>
+                                            </p:txEl>
+                                          </p:spTgt>
+                                        </p:tgtEl>
+                                        <p:attrNameLst>
+                                          <p:attrName>style.visibility</p:attrName>
+                                        </p:attrNameLst>
+                                      </p:cBhvr>
+                                      <p:to>
+                                        <p:strVal val="visible"/>
+                                      </p:to>
+                                    </p:set>
+                                  </p:childTnLst>
+                                </p:cTn>
+                              </p:par>
+                              <p:par>
+                                <p:cTn id="9" presetID="1" presetClass="entr" presetSubtype="0" fill="hold" nodeType="withEffect">
+                                  <p:stCondLst>
+                                    <p:cond delay="0"/>
+                                  </p:stCondLst>
+                                  <p:childTnLst>
+                                    <p:set>
+                                      <p:cBhvr>
+                                        <p:cTn id="10" dur="1" fill="hold">
+                                          <p:stCondLst>
+                                            <p:cond delay="0"/>
+                                          </p:stCondLst>
+                                        </p:cTn>
+                                        <p:tgtEl>
+                                          <p:spTgt spid="3">
+                                            <p:txEl>
+                                              <p:pRg st="7" end="7"/>
+                                            </p:txEl>
+                                          </p:spTgt>
+                                        </p:tgtEl>
+                                        <p:attrNameLst>
+                                          <p:attrName>style.visibility</p:attrName>
+                                        </p:attrNameLst>
+                                      </p:cBhvr>
+                                      <p:to>
+                                        <p:strVal val="visible"/>
+                                      </p:to>
+                                    </p:set>
+                                  </p:childTnLst>
+                                </p:cTn>
+                              </p:par>
+                            </p:childTnLst>
+                          </p:cTn>
+                        </p:par>
+                      </p:childTnLst>
+                    </p:cTn>
+                  </p:par>
+                  <p:par>
+                    <p:cTn id="11" fill="hold">
+                      <p:stCondLst>
+                        <p:cond delay="indefinite"/>
+                      </p:stCondLst>
+                      <p:childTnLst>
+                        <p:par>
+                          <p:cTn id="12" fill="hold">
+                            <p:stCondLst>
+                              <p:cond delay="0"/>
+                            </p:stCondLst>
+                            <p:childTnLst>
+                              <p:par>
+                                <p:cTn id="13" presetID="1" presetClass="entr" presetSubtype="0" fill="hold" nodeType="clickEffect">
+                                  <p:stCondLst>
+                                    <p:cond delay="0"/>
+                                  </p:stCondLst>
+                                  <p:childTnLst>
+                                    <p:set>
+                                      <p:cBhvr>
+                                        <p:cTn id="14" dur="1" fill="hold">
+                                          <p:stCondLst>
+                                            <p:cond delay="0"/>
+                                          </p:stCondLst>
+                                        </p:cTn>
+                                        <p:tgtEl>
+                                          <p:spTgt spid="3">
+                                            <p:txEl>
+                                              <p:pRg st="9" end="9"/>
+                                            </p:txEl>
+                                          </p:spTgt>
+                                        </p:tgtEl>
+                                        <p:attrNameLst>
+                                          <p:attrName>style.visibility</p:attrName>
+                                        </p:attrNameLst>
+                                      </p:cBhvr>
+                                      <p:to>
+                                        <p:strVal val="visible"/>
+                                      </p:to>
+                                    </p:set>
+                                  </p:childTnLst>
+                                </p:cTn>
+                              </p:par>
+                              <p:par>
+                                <p:cTn id="15" presetID="1" presetClass="entr" presetSubtype="0" fill="hold" nodeType="withEffect">
+                                  <p:stCondLst>
+                                    <p:cond delay="0"/>
+                                  </p:stCondLst>
+                                  <p:childTnLst>
+                                    <p:set>
+                                      <p:cBhvr>
+                                        <p:cTn id="16" dur="1" fill="hold">
+                                          <p:stCondLst>
+                                            <p:cond delay="0"/>
+                                          </p:stCondLst>
+                                        </p:cTn>
+                                        <p:tgtEl>
+                                          <p:spTgt spid="3">
+                                            <p:txEl>
+                                              <p:pRg st="10" end="10"/>
+                                            </p:txEl>
+                                          </p:spTgt>
+                                        </p:tgtEl>
+                                        <p:attrNameLst>
+                                          <p:attrName>style.visibility</p:attrName>
+                                        </p:attrNameLst>
+                                      </p:cBhvr>
+                                      <p:to>
+                                        <p:strVal val="visible"/>
+                                      </p:to>
+                                    </p:set>
+                                  </p:childTnLst>
+                                </p:cTn>
+                              </p:par>
+                              <p:par>
+                                <p:cTn id="17" presetID="1" presetClass="entr" presetSubtype="0" fill="hold" nodeType="withEffect">
+                                  <p:stCondLst>
+                                    <p:cond delay="0"/>
+                                  </p:stCondLst>
+                                  <p:childTnLst>
+                                    <p:set>
+                                      <p:cBhvr>
+                                        <p:cTn id="18" dur="1" fill="hold">
+                                          <p:stCondLst>
+                                            <p:cond delay="0"/>
+                                          </p:stCondLst>
+                                        </p:cTn>
+                                        <p:tgtEl>
+                                          <p:spTgt spid="3">
+                                            <p:txEl>
+                                              <p:pRg st="11" end="11"/>
+                                            </p:txEl>
+                                          </p:spTgt>
+                                        </p:tgtEl>
+                                        <p:attrNameLst>
+                                          <p:attrName>style.visibility</p:attrName>
+                                        </p:attrNameLst>
+                                      </p:cBhvr>
+                                      <p:to>
+                                        <p:strVal val="visible"/>
+                                      </p:to>
+                                    </p:set>
+                                  </p:childTnLst>
+                                </p:cTn>
+                              </p:par>
+                              <p:par>
+                                <p:cTn id="19" presetID="1" presetClass="entr" presetSubtype="0" fill="hold" nodeType="withEffect">
+                                  <p:stCondLst>
+                                    <p:cond delay="0"/>
+                                  </p:stCondLst>
+                                  <p:childTnLst>
+                                    <p:set>
+                                      <p:cBhvr>
+                                        <p:cTn id="20" dur="1" fill="hold">
+                                          <p:stCondLst>
+                                            <p:cond delay="0"/>
+                                          </p:stCondLst>
+                                        </p:cTn>
+                                        <p:tgtEl>
+                                          <p:spTgt spid="3">
+                                            <p:txEl>
+                                              <p:pRg st="12" end="12"/>
+                                            </p:txEl>
+                                          </p:spTgt>
+                                        </p:tgtEl>
+                                        <p:attrNameLst>
+                                          <p:attrName>style.visibility</p:attrName>
+                                        </p:attrNameLst>
+                                      </p:cBhvr>
+                                      <p:to>
+                                        <p:strVal val="visible"/>
+                                      </p:to>
+                                    </p:set>
+                                  </p:childTnLst>
+                                </p:cTn>
+                              </p:par>
+                            </p:childTnLst>
+                          </p:cTn>
+                        </p:par>
+                      </p:childTnLst>
+                    </p:cTn>
+                  </p:par>
+                </p:childTnLst>
+              </p:cTn>
+              <p:prevCondLst>
+                <p:cond evt="onPrev" delay="0">
+                  <p:tgtEl>
+                    <p:sldTgt/>
+                  </p:tgtEl>
+                </p:cond>
+              </p:prevCondLst>
+              <p:nextCondLst>
+                <p:cond evt="onNext" delay="0">
+                  <p:tgtEl>
+                    <p:sldTgt/>
+                  </p:tgtEl>
+                </p:cond>
+              </p:nextCondLst>
+            </p:seq>
+          </p:childTnLst>
+        </p:cTn>
+      </p:par>
+    </p:tnLst>
+  </p:timing>
 </p:sld>
 </file>
 
@@ -8179,7 +10814,7 @@
             </a:r>
             <a:r>
               <a:rPr lang="en-US" dirty="0"/>
-              <a:t>: This is a trade-off. Many methods need exploration for convergence.</a:t>
+              <a:t>: This is a trade-off. Many methods need exploration (covering behavior policies) for convergence.</a:t>
             </a:r>
           </a:p>
           <a:p>
@@ -8220,6 +10855,281 @@
   <p:clrMapOvr>
     <a:masterClrMapping/>
   </p:clrMapOvr>
+  <p:timing>
+    <p:tnLst>
+      <p:par>
+        <p:cTn id="1" dur="indefinite" restart="never" nodeType="tmRoot">
+          <p:childTnLst>
+            <p:seq concurrent="1" nextAc="seek">
+              <p:cTn id="2" dur="indefinite" nodeType="mainSeq">
+                <p:childTnLst>
+                  <p:par>
+                    <p:cTn id="3" fill="hold">
+                      <p:stCondLst>
+                        <p:cond delay="indefinite"/>
+                      </p:stCondLst>
+                      <p:childTnLst>
+                        <p:par>
+                          <p:cTn id="4" fill="hold">
+                            <p:stCondLst>
+                              <p:cond delay="0"/>
+                            </p:stCondLst>
+                            <p:childTnLst>
+                              <p:par>
+                                <p:cTn id="5" presetID="1" presetClass="entr" presetSubtype="0" fill="hold" nodeType="clickEffect">
+                                  <p:stCondLst>
+                                    <p:cond delay="0"/>
+                                  </p:stCondLst>
+                                  <p:childTnLst>
+                                    <p:set>
+                                      <p:cBhvr>
+                                        <p:cTn id="6" dur="1" fill="hold">
+                                          <p:stCondLst>
+                                            <p:cond delay="0"/>
+                                          </p:stCondLst>
+                                        </p:cTn>
+                                        <p:tgtEl>
+                                          <p:spTgt spid="3">
+                                            <p:txEl>
+                                              <p:pRg st="0" end="0"/>
+                                            </p:txEl>
+                                          </p:spTgt>
+                                        </p:tgtEl>
+                                        <p:attrNameLst>
+                                          <p:attrName>style.visibility</p:attrName>
+                                        </p:attrNameLst>
+                                      </p:cBhvr>
+                                      <p:to>
+                                        <p:strVal val="visible"/>
+                                      </p:to>
+                                    </p:set>
+                                  </p:childTnLst>
+                                </p:cTn>
+                              </p:par>
+                            </p:childTnLst>
+                          </p:cTn>
+                        </p:par>
+                      </p:childTnLst>
+                    </p:cTn>
+                  </p:par>
+                  <p:par>
+                    <p:cTn id="7" fill="hold">
+                      <p:stCondLst>
+                        <p:cond delay="indefinite"/>
+                      </p:stCondLst>
+                      <p:childTnLst>
+                        <p:par>
+                          <p:cTn id="8" fill="hold">
+                            <p:stCondLst>
+                              <p:cond delay="0"/>
+                            </p:stCondLst>
+                            <p:childTnLst>
+                              <p:par>
+                                <p:cTn id="9" presetID="1" presetClass="entr" presetSubtype="0" fill="hold" nodeType="clickEffect">
+                                  <p:stCondLst>
+                                    <p:cond delay="0"/>
+                                  </p:stCondLst>
+                                  <p:childTnLst>
+                                    <p:set>
+                                      <p:cBhvr>
+                                        <p:cTn id="10" dur="1" fill="hold">
+                                          <p:stCondLst>
+                                            <p:cond delay="0"/>
+                                          </p:stCondLst>
+                                        </p:cTn>
+                                        <p:tgtEl>
+                                          <p:spTgt spid="3">
+                                            <p:txEl>
+                                              <p:pRg st="1" end="1"/>
+                                            </p:txEl>
+                                          </p:spTgt>
+                                        </p:tgtEl>
+                                        <p:attrNameLst>
+                                          <p:attrName>style.visibility</p:attrName>
+                                        </p:attrNameLst>
+                                      </p:cBhvr>
+                                      <p:to>
+                                        <p:strVal val="visible"/>
+                                      </p:to>
+                                    </p:set>
+                                  </p:childTnLst>
+                                </p:cTn>
+                              </p:par>
+                            </p:childTnLst>
+                          </p:cTn>
+                        </p:par>
+                      </p:childTnLst>
+                    </p:cTn>
+                  </p:par>
+                  <p:par>
+                    <p:cTn id="11" fill="hold">
+                      <p:stCondLst>
+                        <p:cond delay="indefinite"/>
+                      </p:stCondLst>
+                      <p:childTnLst>
+                        <p:par>
+                          <p:cTn id="12" fill="hold">
+                            <p:stCondLst>
+                              <p:cond delay="0"/>
+                            </p:stCondLst>
+                            <p:childTnLst>
+                              <p:par>
+                                <p:cTn id="13" presetID="1" presetClass="entr" presetSubtype="0" fill="hold" nodeType="clickEffect">
+                                  <p:stCondLst>
+                                    <p:cond delay="0"/>
+                                  </p:stCondLst>
+                                  <p:childTnLst>
+                                    <p:set>
+                                      <p:cBhvr>
+                                        <p:cTn id="14" dur="1" fill="hold">
+                                          <p:stCondLst>
+                                            <p:cond delay="0"/>
+                                          </p:stCondLst>
+                                        </p:cTn>
+                                        <p:tgtEl>
+                                          <p:spTgt spid="3">
+                                            <p:txEl>
+                                              <p:pRg st="2" end="2"/>
+                                            </p:txEl>
+                                          </p:spTgt>
+                                        </p:tgtEl>
+                                        <p:attrNameLst>
+                                          <p:attrName>style.visibility</p:attrName>
+                                        </p:attrNameLst>
+                                      </p:cBhvr>
+                                      <p:to>
+                                        <p:strVal val="visible"/>
+                                      </p:to>
+                                    </p:set>
+                                  </p:childTnLst>
+                                </p:cTn>
+                              </p:par>
+                            </p:childTnLst>
+                          </p:cTn>
+                        </p:par>
+                      </p:childTnLst>
+                    </p:cTn>
+                  </p:par>
+                  <p:par>
+                    <p:cTn id="15" fill="hold">
+                      <p:stCondLst>
+                        <p:cond delay="indefinite"/>
+                      </p:stCondLst>
+                      <p:childTnLst>
+                        <p:par>
+                          <p:cTn id="16" fill="hold">
+                            <p:stCondLst>
+                              <p:cond delay="0"/>
+                            </p:stCondLst>
+                            <p:childTnLst>
+                              <p:par>
+                                <p:cTn id="17" presetID="1" presetClass="entr" presetSubtype="0" fill="hold" nodeType="clickEffect">
+                                  <p:stCondLst>
+                                    <p:cond delay="0"/>
+                                  </p:stCondLst>
+                                  <p:childTnLst>
+                                    <p:set>
+                                      <p:cBhvr>
+                                        <p:cTn id="18" dur="1" fill="hold">
+                                          <p:stCondLst>
+                                            <p:cond delay="0"/>
+                                          </p:stCondLst>
+                                        </p:cTn>
+                                        <p:tgtEl>
+                                          <p:spTgt spid="3">
+                                            <p:txEl>
+                                              <p:pRg st="3" end="3"/>
+                                            </p:txEl>
+                                          </p:spTgt>
+                                        </p:tgtEl>
+                                        <p:attrNameLst>
+                                          <p:attrName>style.visibility</p:attrName>
+                                        </p:attrNameLst>
+                                      </p:cBhvr>
+                                      <p:to>
+                                        <p:strVal val="visible"/>
+                                      </p:to>
+                                    </p:set>
+                                  </p:childTnLst>
+                                </p:cTn>
+                              </p:par>
+                            </p:childTnLst>
+                          </p:cTn>
+                        </p:par>
+                      </p:childTnLst>
+                    </p:cTn>
+                  </p:par>
+                  <p:par>
+                    <p:cTn id="19" fill="hold">
+                      <p:stCondLst>
+                        <p:cond delay="indefinite"/>
+                      </p:stCondLst>
+                      <p:childTnLst>
+                        <p:par>
+                          <p:cTn id="20" fill="hold">
+                            <p:stCondLst>
+                              <p:cond delay="0"/>
+                            </p:stCondLst>
+                            <p:childTnLst>
+                              <p:par>
+                                <p:cTn id="21" presetID="1" presetClass="entr" presetSubtype="0" fill="hold" nodeType="clickEffect">
+                                  <p:stCondLst>
+                                    <p:cond delay="0"/>
+                                  </p:stCondLst>
+                                  <p:childTnLst>
+                                    <p:set>
+                                      <p:cBhvr>
+                                        <p:cTn id="22" dur="1" fill="hold">
+                                          <p:stCondLst>
+                                            <p:cond delay="0"/>
+                                          </p:stCondLst>
+                                        </p:cTn>
+                                        <p:tgtEl>
+                                          <p:spTgt spid="3">
+                                            <p:txEl>
+                                              <p:pRg st="4" end="4"/>
+                                            </p:txEl>
+                                          </p:spTgt>
+                                        </p:tgtEl>
+                                        <p:attrNameLst>
+                                          <p:attrName>style.visibility</p:attrName>
+                                        </p:attrNameLst>
+                                      </p:cBhvr>
+                                      <p:to>
+                                        <p:strVal val="visible"/>
+                                      </p:to>
+                                    </p:set>
+                                  </p:childTnLst>
+                                </p:cTn>
+                              </p:par>
+                            </p:childTnLst>
+                          </p:cTn>
+                        </p:par>
+                      </p:childTnLst>
+                    </p:cTn>
+                  </p:par>
+                </p:childTnLst>
+              </p:cTn>
+              <p:prevCondLst>
+                <p:cond evt="onPrev" delay="0">
+                  <p:tgtEl>
+                    <p:sldTgt/>
+                  </p:tgtEl>
+                </p:cond>
+              </p:prevCondLst>
+              <p:nextCondLst>
+                <p:cond evt="onNext" delay="0">
+                  <p:tgtEl>
+                    <p:sldTgt/>
+                  </p:tgtEl>
+                </p:cond>
+              </p:nextCondLst>
+            </p:seq>
+          </p:childTnLst>
+        </p:cTn>
+      </p:par>
+    </p:tnLst>
+  </p:timing>
 </p:sld>
 </file>
 
@@ -8284,10 +11194,15 @@
             <p:ph idx="1"/>
           </p:nvPr>
         </p:nvSpPr>
-        <p:spPr/>
+        <p:spPr>
+          <a:xfrm>
+            <a:off x="838201" y="1397330"/>
+            <a:ext cx="6252148" cy="4779633"/>
+          </a:xfrm>
+        </p:spPr>
         <p:txBody>
           <a:bodyPr>
-            <a:normAutofit lnSpcReduction="10000"/>
+            <a:normAutofit fontScale="62500" lnSpcReduction="20000"/>
           </a:bodyPr>
           <a:lstStyle/>
           <a:p>
@@ -8305,11 +11220,25 @@
           <a:p>
             <a:r>
               <a:rPr lang="en-US" dirty="0"/>
-              <a:t>This means that </a:t>
+              <a:t>This means that tabular RL implements a </a:t>
             </a:r>
             <a:r>
               <a:rPr lang="en-US" b="1" dirty="0"/>
-              <a:t>tabular RL learns a reflex agent.</a:t>
+              <a:t>reflex agent.</a:t>
+            </a:r>
+          </a:p>
+          <a:p>
+            <a:r>
+              <a:rPr lang="en-US" dirty="0"/>
+              <a:t>If the rewards express utility, then optimizing the reflexes for maximizing the utility produces a </a:t>
+            </a:r>
+            <a:r>
+              <a:rPr lang="en-US" b="1" dirty="0"/>
+              <a:t>utility-based agent</a:t>
+            </a:r>
+            <a:r>
+              <a:rPr lang="en-US" dirty="0"/>
+              <a:t>.</a:t>
             </a:r>
           </a:p>
           <a:p>
@@ -8331,15 +11260,21 @@
             </a:pPr>
             <a:r>
               <a:rPr lang="en-US" b="1" dirty="0"/>
-              <a:t>Fully observable case </a:t>
-            </a:r>
+              <a:t>Fully observable case:</a:t>
+            </a:r>
+          </a:p>
+          <a:p>
+            <a:pPr lvl="1"/>
             <a:r>
               <a:rPr lang="en-US" dirty="0"/>
-              <a:t>(MDPs): Learn a </a:t>
-            </a:r>
-            <a:r>
-              <a:rPr lang="en-US" b="1" dirty="0"/>
-              <a:t>simple reflex agent.</a:t>
+              <a:t>DP uses the MDP for planning to create a simple reflex agent.</a:t>
+            </a:r>
+          </a:p>
+          <a:p>
+            <a:pPr lvl="1"/>
+            <a:r>
+              <a:rPr lang="en-US" dirty="0"/>
+              <a:t>Model-free RL implements a learning simple reflex agent.</a:t>
             </a:r>
           </a:p>
           <a:p>
@@ -8362,6 +11297,410 @@
           </a:p>
         </p:txBody>
       </p:sp>
+      <p:grpSp>
+        <p:nvGrpSpPr>
+          <p:cNvPr id="17" name="Group 16">
+            <a:extLst>
+              <a:ext uri="{FF2B5EF4-FFF2-40B4-BE49-F238E27FC236}">
+                <a16:creationId xmlns:a16="http://schemas.microsoft.com/office/drawing/2014/main" id="{828640CF-BEAF-75A2-FCE5-1B24B83B017E}"/>
+              </a:ext>
+            </a:extLst>
+          </p:cNvPr>
+          <p:cNvGrpSpPr/>
+          <p:nvPr/>
+        </p:nvGrpSpPr>
+        <p:grpSpPr>
+          <a:xfrm>
+            <a:off x="7009998" y="1397330"/>
+            <a:ext cx="4712275" cy="4015134"/>
+            <a:chOff x="7009998" y="1397330"/>
+            <a:chExt cx="4712275" cy="4015134"/>
+          </a:xfrm>
+        </p:grpSpPr>
+        <p:pic>
+          <p:nvPicPr>
+            <p:cNvPr id="4" name="Picture 3" descr="A figure showing that a learning agent adds a critic component, a learning element and a problem generator to the agent design.">
+              <a:extLst>
+                <a:ext uri="{FF2B5EF4-FFF2-40B4-BE49-F238E27FC236}">
+                  <a16:creationId xmlns:a16="http://schemas.microsoft.com/office/drawing/2014/main" id="{05C53980-2E3E-DE8E-EA48-72A467EC0A2C}"/>
+                </a:ext>
+              </a:extLst>
+            </p:cNvPr>
+            <p:cNvPicPr>
+              <a:picLocks noChangeAspect="1"/>
+            </p:cNvPicPr>
+            <p:nvPr/>
+          </p:nvPicPr>
+          <p:blipFill>
+            <a:blip r:embed="rId2"/>
+            <a:stretch>
+              <a:fillRect/>
+            </a:stretch>
+          </p:blipFill>
+          <p:spPr>
+            <a:xfrm>
+              <a:off x="7617457" y="2265575"/>
+              <a:ext cx="4104816" cy="2831695"/>
+            </a:xfrm>
+            <a:prstGeom prst="rect">
+              <a:avLst/>
+            </a:prstGeom>
+          </p:spPr>
+        </p:pic>
+        <p:sp>
+          <p:nvSpPr>
+            <p:cNvPr id="5" name="TextBox 4">
+              <a:extLst>
+                <a:ext uri="{FF2B5EF4-FFF2-40B4-BE49-F238E27FC236}">
+                  <a16:creationId xmlns:a16="http://schemas.microsoft.com/office/drawing/2014/main" id="{1A1BA4D4-3742-5A38-083A-C33F0C5E6303}"/>
+                </a:ext>
+              </a:extLst>
+            </p:cNvPr>
+            <p:cNvSpPr txBox="1"/>
+            <p:nvPr/>
+          </p:nvSpPr>
+          <p:spPr>
+            <a:xfrm>
+              <a:off x="8190166" y="1397330"/>
+              <a:ext cx="2416029" cy="646331"/>
+            </a:xfrm>
+            <a:prstGeom prst="rect">
+              <a:avLst/>
+            </a:prstGeom>
+            <a:noFill/>
+          </p:spPr>
+          <p:txBody>
+            <a:bodyPr wrap="square" rtlCol="0">
+              <a:spAutoFit/>
+            </a:bodyPr>
+            <a:lstStyle/>
+            <a:p>
+              <a:pPr algn="ctr"/>
+              <a:r>
+                <a:rPr lang="en-US" b="1" dirty="0"/>
+                <a:t>Model-free RL as</a:t>
+              </a:r>
+              <a:br>
+                <a:rPr lang="en-US" b="1" dirty="0"/>
+              </a:br>
+              <a:r>
+                <a:rPr lang="en-US" b="1" dirty="0"/>
+                <a:t> A Learning Agent</a:t>
+              </a:r>
+            </a:p>
+          </p:txBody>
+        </p:sp>
+        <p:sp>
+          <p:nvSpPr>
+            <p:cNvPr id="6" name="TextBox 5">
+              <a:extLst>
+                <a:ext uri="{FF2B5EF4-FFF2-40B4-BE49-F238E27FC236}">
+                  <a16:creationId xmlns:a16="http://schemas.microsoft.com/office/drawing/2014/main" id="{0534C613-BC3B-EC8F-625C-71F00396A41C}"/>
+                </a:ext>
+              </a:extLst>
+            </p:cNvPr>
+            <p:cNvSpPr txBox="1"/>
+            <p:nvPr/>
+          </p:nvSpPr>
+          <p:spPr>
+            <a:xfrm>
+              <a:off x="7524925" y="5135465"/>
+              <a:ext cx="4197348" cy="276999"/>
+            </a:xfrm>
+            <a:prstGeom prst="rect">
+              <a:avLst/>
+            </a:prstGeom>
+            <a:noFill/>
+          </p:spPr>
+          <p:txBody>
+            <a:bodyPr wrap="square" rtlCol="0">
+              <a:spAutoFit/>
+            </a:bodyPr>
+            <a:lstStyle/>
+            <a:p>
+              <a:pPr algn="ctr"/>
+              <a:r>
+                <a:rPr lang="en-US" sz="1200" dirty="0"/>
+                <a:t>Source: Artificial Intelligence: A Modern Approach, Chapter 2</a:t>
+              </a:r>
+            </a:p>
+          </p:txBody>
+        </p:sp>
+        <p:sp>
+          <p:nvSpPr>
+            <p:cNvPr id="12" name="TextBox 11">
+              <a:extLst>
+                <a:ext uri="{FF2B5EF4-FFF2-40B4-BE49-F238E27FC236}">
+                  <a16:creationId xmlns:a16="http://schemas.microsoft.com/office/drawing/2014/main" id="{7C4E5284-07B1-796A-FB24-F08E93A0FA77}"/>
+                </a:ext>
+              </a:extLst>
+            </p:cNvPr>
+            <p:cNvSpPr txBox="1"/>
+            <p:nvPr/>
+          </p:nvSpPr>
+          <p:spPr>
+            <a:xfrm>
+              <a:off x="8579825" y="2982110"/>
+              <a:ext cx="886376" cy="523220"/>
+            </a:xfrm>
+            <a:prstGeom prst="rect">
+              <a:avLst/>
+            </a:prstGeom>
+            <a:noFill/>
+          </p:spPr>
+          <p:txBody>
+            <a:bodyPr wrap="square" rtlCol="0">
+              <a:spAutoFit/>
+            </a:bodyPr>
+            <a:lstStyle/>
+            <a:p>
+              <a:r>
+                <a:rPr lang="en-US" sz="1400" b="1" dirty="0">
+                  <a:solidFill>
+                    <a:schemeClr val="accent3"/>
+                  </a:solidFill>
+                </a:rPr>
+                <a:t>E.g., </a:t>
+              </a:r>
+              <a:br>
+                <a:rPr lang="en-US" sz="1400" b="1" dirty="0">
+                  <a:solidFill>
+                    <a:schemeClr val="accent3"/>
+                  </a:solidFill>
+                </a:rPr>
+              </a:br>
+              <a:r>
+                <a:rPr lang="en-US" sz="1400" b="1" dirty="0">
+                  <a:solidFill>
+                    <a:schemeClr val="accent3"/>
+                  </a:solidFill>
+                </a:rPr>
+                <a:t>TD error</a:t>
+              </a:r>
+            </a:p>
+          </p:txBody>
+        </p:sp>
+        <p:sp>
+          <p:nvSpPr>
+            <p:cNvPr id="13" name="Speech Bubble: Rectangle with Corners Rounded 12">
+              <a:extLst>
+                <a:ext uri="{FF2B5EF4-FFF2-40B4-BE49-F238E27FC236}">
+                  <a16:creationId xmlns:a16="http://schemas.microsoft.com/office/drawing/2014/main" id="{1F1274E2-37F3-8CF3-654F-938B43186448}"/>
+                </a:ext>
+              </a:extLst>
+            </p:cNvPr>
+            <p:cNvSpPr/>
+            <p:nvPr/>
+          </p:nvSpPr>
+          <p:spPr>
+            <a:xfrm>
+              <a:off x="10298852" y="3243720"/>
+              <a:ext cx="750728" cy="251537"/>
+            </a:xfrm>
+            <a:prstGeom prst="wedgeRoundRectCallout">
+              <a:avLst>
+                <a:gd name="adj1" fmla="val -34810"/>
+                <a:gd name="adj2" fmla="val 104216"/>
+                <a:gd name="adj3" fmla="val 16667"/>
+              </a:avLst>
+            </a:prstGeom>
+          </p:spPr>
+          <p:style>
+            <a:lnRef idx="2">
+              <a:schemeClr val="accent3">
+                <a:shade val="15000"/>
+              </a:schemeClr>
+            </a:lnRef>
+            <a:fillRef idx="1">
+              <a:schemeClr val="accent3"/>
+            </a:fillRef>
+            <a:effectRef idx="0">
+              <a:schemeClr val="accent3"/>
+            </a:effectRef>
+            <a:fontRef idx="minor">
+              <a:schemeClr val="lt1"/>
+            </a:fontRef>
+          </p:style>
+          <p:txBody>
+            <a:bodyPr rtlCol="0" anchor="ctr"/>
+            <a:lstStyle/>
+            <a:p>
+              <a:pPr algn="ctr"/>
+              <a:r>
+                <a:rPr lang="en-US" sz="1400" dirty="0"/>
+                <a:t>policy</a:t>
+              </a:r>
+            </a:p>
+          </p:txBody>
+        </p:sp>
+        <p:sp>
+          <p:nvSpPr>
+            <p:cNvPr id="14" name="Speech Bubble: Rectangle with Corners Rounded 13">
+              <a:extLst>
+                <a:ext uri="{FF2B5EF4-FFF2-40B4-BE49-F238E27FC236}">
+                  <a16:creationId xmlns:a16="http://schemas.microsoft.com/office/drawing/2014/main" id="{E4C0C03E-F032-E997-1EFB-5027E8BCCECE}"/>
+                </a:ext>
+              </a:extLst>
+            </p:cNvPr>
+            <p:cNvSpPr/>
+            <p:nvPr/>
+          </p:nvSpPr>
+          <p:spPr>
+            <a:xfrm>
+              <a:off x="9398181" y="2146936"/>
+              <a:ext cx="1651399" cy="266841"/>
+            </a:xfrm>
+            <a:prstGeom prst="wedgeRoundRectCallout">
+              <a:avLst>
+                <a:gd name="adj1" fmla="val -60680"/>
+                <a:gd name="adj2" fmla="val 31187"/>
+                <a:gd name="adj3" fmla="val 16667"/>
+              </a:avLst>
+            </a:prstGeom>
+          </p:spPr>
+          <p:style>
+            <a:lnRef idx="2">
+              <a:schemeClr val="accent3">
+                <a:shade val="15000"/>
+              </a:schemeClr>
+            </a:lnRef>
+            <a:fillRef idx="1">
+              <a:schemeClr val="accent3"/>
+            </a:fillRef>
+            <a:effectRef idx="0">
+              <a:schemeClr val="accent3"/>
+            </a:effectRef>
+            <a:fontRef idx="minor">
+              <a:schemeClr val="lt1"/>
+            </a:fontRef>
+          </p:style>
+          <p:txBody>
+            <a:bodyPr rtlCol="0" anchor="ctr"/>
+            <a:lstStyle/>
+            <a:p>
+              <a:pPr algn="ctr"/>
+              <a:r>
+                <a:rPr lang="en-US" sz="1400" dirty="0"/>
+                <a:t>Expected return</a:t>
+              </a:r>
+            </a:p>
+          </p:txBody>
+        </p:sp>
+        <p:sp>
+          <p:nvSpPr>
+            <p:cNvPr id="15" name="Speech Bubble: Rectangle with Corners Rounded 14">
+              <a:extLst>
+                <a:ext uri="{FF2B5EF4-FFF2-40B4-BE49-F238E27FC236}">
+                  <a16:creationId xmlns:a16="http://schemas.microsoft.com/office/drawing/2014/main" id="{21CB411E-164D-2FED-70AE-F42BEED7AEE3}"/>
+                </a:ext>
+              </a:extLst>
+            </p:cNvPr>
+            <p:cNvSpPr/>
+            <p:nvPr/>
+          </p:nvSpPr>
+          <p:spPr>
+            <a:xfrm>
+              <a:off x="7009998" y="3843711"/>
+              <a:ext cx="1122387" cy="421489"/>
+            </a:xfrm>
+            <a:prstGeom prst="wedgeRoundRectCallout">
+              <a:avLst>
+                <a:gd name="adj1" fmla="val 66862"/>
+                <a:gd name="adj2" fmla="val -70173"/>
+                <a:gd name="adj3" fmla="val 16667"/>
+              </a:avLst>
+            </a:prstGeom>
+          </p:spPr>
+          <p:style>
+            <a:lnRef idx="2">
+              <a:schemeClr val="accent3">
+                <a:shade val="15000"/>
+              </a:schemeClr>
+            </a:lnRef>
+            <a:fillRef idx="1">
+              <a:schemeClr val="accent3"/>
+            </a:fillRef>
+            <a:effectRef idx="0">
+              <a:schemeClr val="accent3"/>
+            </a:effectRef>
+            <a:fontRef idx="minor">
+              <a:schemeClr val="lt1"/>
+            </a:fontRef>
+          </p:style>
+          <p:txBody>
+            <a:bodyPr rtlCol="0" anchor="ctr"/>
+            <a:lstStyle/>
+            <a:p>
+              <a:pPr algn="ctr"/>
+              <a:r>
+                <a:rPr lang="en-US" sz="1400" dirty="0"/>
+                <a:t>Update value </a:t>
+              </a:r>
+              <a:r>
+                <a:rPr lang="en-US" sz="1400" dirty="0" err="1"/>
+                <a:t>func</a:t>
+              </a:r>
+              <a:r>
+                <a:rPr lang="en-US" sz="1400" dirty="0"/>
+                <a:t>.</a:t>
+              </a:r>
+            </a:p>
+          </p:txBody>
+        </p:sp>
+        <p:sp>
+          <p:nvSpPr>
+            <p:cNvPr id="16" name="Speech Bubble: Rectangle with Corners Rounded 15">
+              <a:extLst>
+                <a:ext uri="{FF2B5EF4-FFF2-40B4-BE49-F238E27FC236}">
+                  <a16:creationId xmlns:a16="http://schemas.microsoft.com/office/drawing/2014/main" id="{743276A6-B236-4944-FAFA-86936D5013EA}"/>
+                </a:ext>
+              </a:extLst>
+            </p:cNvPr>
+            <p:cNvSpPr/>
+            <p:nvPr/>
+          </p:nvSpPr>
+          <p:spPr>
+            <a:xfrm>
+              <a:off x="7009998" y="4303395"/>
+              <a:ext cx="1122387" cy="421489"/>
+            </a:xfrm>
+            <a:prstGeom prst="wedgeRoundRectCallout">
+              <a:avLst>
+                <a:gd name="adj1" fmla="val 68197"/>
+                <a:gd name="adj2" fmla="val 956"/>
+                <a:gd name="adj3" fmla="val 16667"/>
+              </a:avLst>
+            </a:prstGeom>
+          </p:spPr>
+          <p:style>
+            <a:lnRef idx="2">
+              <a:schemeClr val="accent3">
+                <a:shade val="15000"/>
+              </a:schemeClr>
+            </a:lnRef>
+            <a:fillRef idx="1">
+              <a:schemeClr val="accent3"/>
+            </a:fillRef>
+            <a:effectRef idx="0">
+              <a:schemeClr val="accent3"/>
+            </a:effectRef>
+            <a:fontRef idx="minor">
+              <a:schemeClr val="lt1"/>
+            </a:fontRef>
+          </p:style>
+          <p:txBody>
+            <a:bodyPr rtlCol="0" anchor="ctr"/>
+            <a:lstStyle/>
+            <a:p>
+              <a:pPr algn="ctr"/>
+              <a:r>
+                <a:rPr lang="en-US" sz="1400" dirty="0"/>
+                <a:t>Exploring behavior</a:t>
+              </a:r>
+            </a:p>
+          </p:txBody>
+        </p:sp>
+      </p:grpSp>
     </p:spTree>
     <p:extLst>
       <p:ext uri="{BB962C8B-B14F-4D97-AF65-F5344CB8AC3E}">
@@ -8372,6 +11711,254 @@
   <p:clrMapOvr>
     <a:masterClrMapping/>
   </p:clrMapOvr>
+  <p:timing>
+    <p:tnLst>
+      <p:par>
+        <p:cTn id="1" dur="indefinite" restart="never" nodeType="tmRoot">
+          <p:childTnLst>
+            <p:seq concurrent="1" nextAc="seek">
+              <p:cTn id="2" dur="indefinite" nodeType="mainSeq">
+                <p:childTnLst>
+                  <p:par>
+                    <p:cTn id="3" fill="hold">
+                      <p:stCondLst>
+                        <p:cond delay="indefinite"/>
+                      </p:stCondLst>
+                      <p:childTnLst>
+                        <p:par>
+                          <p:cTn id="4" fill="hold">
+                            <p:stCondLst>
+                              <p:cond delay="0"/>
+                            </p:stCondLst>
+                            <p:childTnLst>
+                              <p:par>
+                                <p:cTn id="5" presetID="1" presetClass="entr" presetSubtype="0" fill="hold" nodeType="clickEffect">
+                                  <p:stCondLst>
+                                    <p:cond delay="0"/>
+                                  </p:stCondLst>
+                                  <p:childTnLst>
+                                    <p:set>
+                                      <p:cBhvr>
+                                        <p:cTn id="6" dur="1" fill="hold">
+                                          <p:stCondLst>
+                                            <p:cond delay="0"/>
+                                          </p:stCondLst>
+                                        </p:cTn>
+                                        <p:tgtEl>
+                                          <p:spTgt spid="3">
+                                            <p:txEl>
+                                              <p:pRg st="5" end="5"/>
+                                            </p:txEl>
+                                          </p:spTgt>
+                                        </p:tgtEl>
+                                        <p:attrNameLst>
+                                          <p:attrName>style.visibility</p:attrName>
+                                        </p:attrNameLst>
+                                      </p:cBhvr>
+                                      <p:to>
+                                        <p:strVal val="visible"/>
+                                      </p:to>
+                                    </p:set>
+                                  </p:childTnLst>
+                                </p:cTn>
+                              </p:par>
+                              <p:par>
+                                <p:cTn id="7" presetID="1" presetClass="entr" presetSubtype="0" fill="hold" nodeType="withEffect">
+                                  <p:stCondLst>
+                                    <p:cond delay="0"/>
+                                  </p:stCondLst>
+                                  <p:childTnLst>
+                                    <p:set>
+                                      <p:cBhvr>
+                                        <p:cTn id="8" dur="1" fill="hold">
+                                          <p:stCondLst>
+                                            <p:cond delay="0"/>
+                                          </p:stCondLst>
+                                        </p:cTn>
+                                        <p:tgtEl>
+                                          <p:spTgt spid="3">
+                                            <p:txEl>
+                                              <p:pRg st="6" end="6"/>
+                                            </p:txEl>
+                                          </p:spTgt>
+                                        </p:tgtEl>
+                                        <p:attrNameLst>
+                                          <p:attrName>style.visibility</p:attrName>
+                                        </p:attrNameLst>
+                                      </p:cBhvr>
+                                      <p:to>
+                                        <p:strVal val="visible"/>
+                                      </p:to>
+                                    </p:set>
+                                  </p:childTnLst>
+                                </p:cTn>
+                              </p:par>
+                              <p:par>
+                                <p:cTn id="9" presetID="1" presetClass="entr" presetSubtype="0" fill="hold" nodeType="withEffect">
+                                  <p:stCondLst>
+                                    <p:cond delay="0"/>
+                                  </p:stCondLst>
+                                  <p:childTnLst>
+                                    <p:set>
+                                      <p:cBhvr>
+                                        <p:cTn id="10" dur="1" fill="hold">
+                                          <p:stCondLst>
+                                            <p:cond delay="0"/>
+                                          </p:stCondLst>
+                                        </p:cTn>
+                                        <p:tgtEl>
+                                          <p:spTgt spid="3">
+                                            <p:txEl>
+                                              <p:pRg st="7" end="7"/>
+                                            </p:txEl>
+                                          </p:spTgt>
+                                        </p:tgtEl>
+                                        <p:attrNameLst>
+                                          <p:attrName>style.visibility</p:attrName>
+                                        </p:attrNameLst>
+                                      </p:cBhvr>
+                                      <p:to>
+                                        <p:strVal val="visible"/>
+                                      </p:to>
+                                    </p:set>
+                                  </p:childTnLst>
+                                </p:cTn>
+                              </p:par>
+                              <p:par>
+                                <p:cTn id="11" presetID="1" presetClass="entr" presetSubtype="0" fill="hold" nodeType="withEffect">
+                                  <p:stCondLst>
+                                    <p:cond delay="0"/>
+                                  </p:stCondLst>
+                                  <p:childTnLst>
+                                    <p:set>
+                                      <p:cBhvr>
+                                        <p:cTn id="12" dur="1" fill="hold">
+                                          <p:stCondLst>
+                                            <p:cond delay="0"/>
+                                          </p:stCondLst>
+                                        </p:cTn>
+                                        <p:tgtEl>
+                                          <p:spTgt spid="3">
+                                            <p:txEl>
+                                              <p:pRg st="8" end="8"/>
+                                            </p:txEl>
+                                          </p:spTgt>
+                                        </p:tgtEl>
+                                        <p:attrNameLst>
+                                          <p:attrName>style.visibility</p:attrName>
+                                        </p:attrNameLst>
+                                      </p:cBhvr>
+                                      <p:to>
+                                        <p:strVal val="visible"/>
+                                      </p:to>
+                                    </p:set>
+                                  </p:childTnLst>
+                                </p:cTn>
+                              </p:par>
+                              <p:par>
+                                <p:cTn id="13" presetID="1" presetClass="entr" presetSubtype="0" fill="hold" nodeType="withEffect">
+                                  <p:stCondLst>
+                                    <p:cond delay="0"/>
+                                  </p:stCondLst>
+                                  <p:childTnLst>
+                                    <p:set>
+                                      <p:cBhvr>
+                                        <p:cTn id="14" dur="1" fill="hold">
+                                          <p:stCondLst>
+                                            <p:cond delay="0"/>
+                                          </p:stCondLst>
+                                        </p:cTn>
+                                        <p:tgtEl>
+                                          <p:spTgt spid="17"/>
+                                        </p:tgtEl>
+                                        <p:attrNameLst>
+                                          <p:attrName>style.visibility</p:attrName>
+                                        </p:attrNameLst>
+                                      </p:cBhvr>
+                                      <p:to>
+                                        <p:strVal val="visible"/>
+                                      </p:to>
+                                    </p:set>
+                                  </p:childTnLst>
+                                </p:cTn>
+                              </p:par>
+                            </p:childTnLst>
+                          </p:cTn>
+                        </p:par>
+                      </p:childTnLst>
+                    </p:cTn>
+                  </p:par>
+                  <p:par>
+                    <p:cTn id="15" fill="hold">
+                      <p:stCondLst>
+                        <p:cond delay="indefinite"/>
+                      </p:stCondLst>
+                      <p:childTnLst>
+                        <p:par>
+                          <p:cTn id="16" fill="hold">
+                            <p:stCondLst>
+                              <p:cond delay="0"/>
+                            </p:stCondLst>
+                            <p:childTnLst>
+                              <p:par>
+                                <p:cTn id="17" presetID="1" presetClass="entr" presetSubtype="0" fill="hold" nodeType="clickEffect">
+                                  <p:stCondLst>
+                                    <p:cond delay="0"/>
+                                  </p:stCondLst>
+                                  <p:childTnLst>
+                                    <p:set>
+                                      <p:cBhvr>
+                                        <p:cTn id="18" dur="1" fill="hold">
+                                          <p:stCondLst>
+                                            <p:cond delay="0"/>
+                                          </p:stCondLst>
+                                        </p:cTn>
+                                        <p:tgtEl>
+                                          <p:spTgt spid="3">
+                                            <p:txEl>
+                                              <p:pRg st="9" end="9"/>
+                                            </p:txEl>
+                                          </p:spTgt>
+                                        </p:tgtEl>
+                                        <p:attrNameLst>
+                                          <p:attrName>style.visibility</p:attrName>
+                                        </p:attrNameLst>
+                                      </p:cBhvr>
+                                      <p:to>
+                                        <p:strVal val="visible"/>
+                                      </p:to>
+                                    </p:set>
+                                  </p:childTnLst>
+                                </p:cTn>
+                              </p:par>
+                            </p:childTnLst>
+                          </p:cTn>
+                        </p:par>
+                      </p:childTnLst>
+                    </p:cTn>
+                  </p:par>
+                </p:childTnLst>
+              </p:cTn>
+              <p:prevCondLst>
+                <p:cond evt="onPrev" delay="0">
+                  <p:tgtEl>
+                    <p:sldTgt/>
+                  </p:tgtEl>
+                </p:cond>
+              </p:prevCondLst>
+              <p:nextCondLst>
+                <p:cond evt="onNext" delay="0">
+                  <p:tgtEl>
+                    <p:sldTgt/>
+                  </p:tgtEl>
+                </p:cond>
+              </p:nextCondLst>
+            </p:seq>
+          </p:childTnLst>
+        </p:cTn>
+      </p:par>
+    </p:tnLst>
+  </p:timing>
 </p:sld>
 </file>
 
@@ -8454,7 +12041,7 @@
                 </a:pPr>
                 <a:r>
                   <a:rPr lang="en-US" dirty="0"/>
-                  <a:t>Tables need much </a:t>
+                  <a:t>Tables need a lot of </a:t>
                 </a:r>
                 <a:r>
                   <a:rPr lang="en-US" b="1" dirty="0"/>
@@ -8467,10 +12054,10 @@
                 <a14:m>
                   <m:oMath xmlns:m="http://schemas.openxmlformats.org/officeDocument/2006/math">
                     <m:r>
-                      <a:rPr lang="en-US" i="1" dirty="0" smtClean="0">
-                        <a:latin typeface="Cambria Math" panose="02040503050406030204" pitchFamily="18" charset="0"/>
-                      </a:rPr>
-                      <m:t>𝑞</m:t>
+                      <a:rPr lang="en-US" b="0" i="1" dirty="0" smtClean="0">
+                        <a:latin typeface="Cambria Math" panose="02040503050406030204" pitchFamily="18" charset="0"/>
+                      </a:rPr>
+                      <m:t>𝑄</m:t>
                     </m:r>
                   </m:oMath>
                 </a14:m>
@@ -8619,10 +12206,10 @@
                 <a14:m>
                   <m:oMath xmlns:m="http://schemas.openxmlformats.org/officeDocument/2006/math">
                     <m:r>
-                      <a:rPr lang="en-US" i="1" dirty="0">
-                        <a:latin typeface="Cambria Math" panose="02040503050406030204" pitchFamily="18" charset="0"/>
-                      </a:rPr>
-                      <m:t>𝑞</m:t>
+                      <a:rPr lang="en-US" b="0" i="1" dirty="0" smtClean="0">
+                        <a:latin typeface="Cambria Math" panose="02040503050406030204" pitchFamily="18" charset="0"/>
+                      </a:rPr>
+                      <m:t>𝑄</m:t>
                     </m:r>
                   </m:oMath>
                 </a14:m>
@@ -8668,7 +12255,7 @@
                 </a:pPr>
                 <a:r>
                   <a:rPr lang="en-US" dirty="0"/>
-                  <a:t>Next, we will talk about </a:t>
+                  <a:t>In the next part of this course, we will talk about </a:t>
                 </a:r>
                 <a:r>
                   <a:rPr lang="en-US" b="1" dirty="0"/>
@@ -8732,6 +12319,235 @@
   <p:clrMapOvr>
     <a:masterClrMapping/>
   </p:clrMapOvr>
+  <p:timing>
+    <p:tnLst>
+      <p:par>
+        <p:cTn id="1" dur="indefinite" restart="never" nodeType="tmRoot">
+          <p:childTnLst>
+            <p:seq concurrent="1" nextAc="seek">
+              <p:cTn id="2" dur="indefinite" nodeType="mainSeq">
+                <p:childTnLst>
+                  <p:par>
+                    <p:cTn id="3" fill="hold">
+                      <p:stCondLst>
+                        <p:cond delay="indefinite"/>
+                      </p:stCondLst>
+                      <p:childTnLst>
+                        <p:par>
+                          <p:cTn id="4" fill="hold">
+                            <p:stCondLst>
+                              <p:cond delay="0"/>
+                            </p:stCondLst>
+                            <p:childTnLst>
+                              <p:par>
+                                <p:cTn id="5" presetID="1" presetClass="entr" presetSubtype="0" fill="hold" grpId="0" nodeType="clickEffect">
+                                  <p:stCondLst>
+                                    <p:cond delay="0"/>
+                                  </p:stCondLst>
+                                  <p:childTnLst>
+                                    <p:set>
+                                      <p:cBhvr>
+                                        <p:cTn id="6" dur="1" fill="hold">
+                                          <p:stCondLst>
+                                            <p:cond delay="0"/>
+                                          </p:stCondLst>
+                                        </p:cTn>
+                                        <p:tgtEl>
+                                          <p:spTgt spid="3">
+                                            <p:txEl>
+                                              <p:pRg st="0" end="0"/>
+                                            </p:txEl>
+                                          </p:spTgt>
+                                        </p:tgtEl>
+                                        <p:attrNameLst>
+                                          <p:attrName>style.visibility</p:attrName>
+                                        </p:attrNameLst>
+                                      </p:cBhvr>
+                                      <p:to>
+                                        <p:strVal val="visible"/>
+                                      </p:to>
+                                    </p:set>
+                                  </p:childTnLst>
+                                </p:cTn>
+                              </p:par>
+                            </p:childTnLst>
+                          </p:cTn>
+                        </p:par>
+                      </p:childTnLst>
+                    </p:cTn>
+                  </p:par>
+                  <p:par>
+                    <p:cTn id="7" fill="hold">
+                      <p:stCondLst>
+                        <p:cond delay="indefinite"/>
+                      </p:stCondLst>
+                      <p:childTnLst>
+                        <p:par>
+                          <p:cTn id="8" fill="hold">
+                            <p:stCondLst>
+                              <p:cond delay="0"/>
+                            </p:stCondLst>
+                            <p:childTnLst>
+                              <p:par>
+                                <p:cTn id="9" presetID="1" presetClass="entr" presetSubtype="0" fill="hold" grpId="0" nodeType="clickEffect">
+                                  <p:stCondLst>
+                                    <p:cond delay="0"/>
+                                  </p:stCondLst>
+                                  <p:childTnLst>
+                                    <p:set>
+                                      <p:cBhvr>
+                                        <p:cTn id="10" dur="1" fill="hold">
+                                          <p:stCondLst>
+                                            <p:cond delay="0"/>
+                                          </p:stCondLst>
+                                        </p:cTn>
+                                        <p:tgtEl>
+                                          <p:spTgt spid="3">
+                                            <p:txEl>
+                                              <p:pRg st="2" end="2"/>
+                                            </p:txEl>
+                                          </p:spTgt>
+                                        </p:tgtEl>
+                                        <p:attrNameLst>
+                                          <p:attrName>style.visibility</p:attrName>
+                                        </p:attrNameLst>
+                                      </p:cBhvr>
+                                      <p:to>
+                                        <p:strVal val="visible"/>
+                                      </p:to>
+                                    </p:set>
+                                  </p:childTnLst>
+                                </p:cTn>
+                              </p:par>
+                            </p:childTnLst>
+                          </p:cTn>
+                        </p:par>
+                      </p:childTnLst>
+                    </p:cTn>
+                  </p:par>
+                  <p:par>
+                    <p:cTn id="11" fill="hold">
+                      <p:stCondLst>
+                        <p:cond delay="indefinite"/>
+                      </p:stCondLst>
+                      <p:childTnLst>
+                        <p:par>
+                          <p:cTn id="12" fill="hold">
+                            <p:stCondLst>
+                              <p:cond delay="0"/>
+                            </p:stCondLst>
+                            <p:childTnLst>
+                              <p:par>
+                                <p:cTn id="13" presetID="1" presetClass="entr" presetSubtype="0" fill="hold" grpId="0" nodeType="clickEffect">
+                                  <p:stCondLst>
+                                    <p:cond delay="0"/>
+                                  </p:stCondLst>
+                                  <p:childTnLst>
+                                    <p:set>
+                                      <p:cBhvr>
+                                        <p:cTn id="14" dur="1" fill="hold">
+                                          <p:stCondLst>
+                                            <p:cond delay="0"/>
+                                          </p:stCondLst>
+                                        </p:cTn>
+                                        <p:tgtEl>
+                                          <p:spTgt spid="3">
+                                            <p:txEl>
+                                              <p:pRg st="4" end="4"/>
+                                            </p:txEl>
+                                          </p:spTgt>
+                                        </p:tgtEl>
+                                        <p:attrNameLst>
+                                          <p:attrName>style.visibility</p:attrName>
+                                        </p:attrNameLst>
+                                      </p:cBhvr>
+                                      <p:to>
+                                        <p:strVal val="visible"/>
+                                      </p:to>
+                                    </p:set>
+                                  </p:childTnLst>
+                                </p:cTn>
+                              </p:par>
+                            </p:childTnLst>
+                          </p:cTn>
+                        </p:par>
+                      </p:childTnLst>
+                    </p:cTn>
+                  </p:par>
+                  <p:par>
+                    <p:cTn id="15" fill="hold">
+                      <p:stCondLst>
+                        <p:cond delay="indefinite"/>
+                      </p:stCondLst>
+                      <p:childTnLst>
+                        <p:par>
+                          <p:cTn id="16" fill="hold">
+                            <p:stCondLst>
+                              <p:cond delay="0"/>
+                            </p:stCondLst>
+                            <p:childTnLst>
+                              <p:par>
+                                <p:cTn id="17" presetID="1" presetClass="entr" presetSubtype="0" fill="hold" grpId="0" nodeType="clickEffect">
+                                  <p:stCondLst>
+                                    <p:cond delay="0"/>
+                                  </p:stCondLst>
+                                  <p:childTnLst>
+                                    <p:set>
+                                      <p:cBhvr>
+                                        <p:cTn id="18" dur="1" fill="hold">
+                                          <p:stCondLst>
+                                            <p:cond delay="0"/>
+                                          </p:stCondLst>
+                                        </p:cTn>
+                                        <p:tgtEl>
+                                          <p:spTgt spid="3">
+                                            <p:txEl>
+                                              <p:pRg st="7" end="7"/>
+                                            </p:txEl>
+                                          </p:spTgt>
+                                        </p:tgtEl>
+                                        <p:attrNameLst>
+                                          <p:attrName>style.visibility</p:attrName>
+                                        </p:attrNameLst>
+                                      </p:cBhvr>
+                                      <p:to>
+                                        <p:strVal val="visible"/>
+                                      </p:to>
+                                    </p:set>
+                                  </p:childTnLst>
+                                </p:cTn>
+                              </p:par>
+                            </p:childTnLst>
+                          </p:cTn>
+                        </p:par>
+                      </p:childTnLst>
+                    </p:cTn>
+                  </p:par>
+                </p:childTnLst>
+              </p:cTn>
+              <p:prevCondLst>
+                <p:cond evt="onPrev" delay="0">
+                  <p:tgtEl>
+                    <p:sldTgt/>
+                  </p:tgtEl>
+                </p:cond>
+              </p:prevCondLst>
+              <p:nextCondLst>
+                <p:cond evt="onNext" delay="0">
+                  <p:tgtEl>
+                    <p:sldTgt/>
+                  </p:tgtEl>
+                </p:cond>
+              </p:nextCondLst>
+            </p:seq>
+          </p:childTnLst>
+        </p:cTn>
+      </p:par>
+    </p:tnLst>
+    <p:bldLst>
+      <p:bldP spid="3" grpId="0" build="p"/>
+    </p:bldLst>
+  </p:timing>
 </p:sld>
 </file>
 
@@ -8800,7 +12616,7 @@
             </p:nvSpPr>
             <p:spPr>
               <a:xfrm>
-                <a:off x="822819" y="3658891"/>
+                <a:off x="822819" y="3700831"/>
                 <a:ext cx="5273179" cy="1902124"/>
               </a:xfrm>
             </p:spPr>
@@ -9784,7 +13600,7 @@
             </p:nvSpPr>
             <p:spPr>
               <a:xfrm>
-                <a:off x="822819" y="3658891"/>
+                <a:off x="822819" y="3700831"/>
                 <a:ext cx="5273179" cy="1902124"/>
               </a:xfrm>
               <a:blipFill>
@@ -11866,10 +15682,425 @@
           </p:sp>
         </mc:Fallback>
       </mc:AlternateContent>
+      <mc:AlternateContent xmlns:mc="http://schemas.openxmlformats.org/markup-compatibility/2006" xmlns:a14="http://schemas.microsoft.com/office/drawing/2010/main">
+        <mc:Choice Requires="a14">
+          <p:sp>
+            <p:nvSpPr>
+              <p:cNvPr id="4" name="Content Placeholder 2">
+                <a:extLst>
+                  <a:ext uri="{FF2B5EF4-FFF2-40B4-BE49-F238E27FC236}">
+                    <a16:creationId xmlns:a16="http://schemas.microsoft.com/office/drawing/2014/main" id="{4C5E539A-F9A7-F959-ACD3-4ADE5900F587}"/>
+                  </a:ext>
+                </a:extLst>
+              </p:cNvPr>
+              <p:cNvSpPr txBox="1">
+                <a:spLocks/>
+              </p:cNvSpPr>
+              <p:nvPr/>
+            </p:nvSpPr>
+            <p:spPr>
+              <a:xfrm>
+                <a:off x="6267338" y="4947712"/>
+                <a:ext cx="5273179" cy="646331"/>
+              </a:xfrm>
+              <a:prstGeom prst="rect">
+                <a:avLst/>
+              </a:prstGeom>
+            </p:spPr>
+            <p:style>
+              <a:lnRef idx="2">
+                <a:schemeClr val="accent2"/>
+              </a:lnRef>
+              <a:fillRef idx="1">
+                <a:schemeClr val="lt1"/>
+              </a:fillRef>
+              <a:effectRef idx="0">
+                <a:schemeClr val="accent2"/>
+              </a:effectRef>
+              <a:fontRef idx="minor">
+                <a:schemeClr val="dk1"/>
+              </a:fontRef>
+            </p:style>
+            <p:txBody>
+              <a:bodyPr vert="horz" lIns="91440" tIns="45720" rIns="91440" bIns="45720" rtlCol="0">
+                <a:spAutoFit/>
+              </a:bodyPr>
+              <a:lstStyle>
+                <a:lvl1pPr marL="228600" indent="-228600" algn="l" defTabSz="914400" rtl="0" eaLnBrk="1" latinLnBrk="0" hangingPunct="1">
+                  <a:lnSpc>
+                    <a:spcPct val="90000"/>
+                  </a:lnSpc>
+                  <a:spcBef>
+                    <a:spcPts val="1000"/>
+                  </a:spcBef>
+                  <a:buFont typeface="Arial" panose="020B0604020202020204" pitchFamily="34" charset="0"/>
+                  <a:buChar char="•"/>
+                  <a:defRPr sz="2800" kern="1200">
+                    <a:solidFill>
+                      <a:schemeClr val="dk1"/>
+                    </a:solidFill>
+                    <a:latin typeface="+mn-lt"/>
+                    <a:ea typeface="+mn-ea"/>
+                    <a:cs typeface="+mn-cs"/>
+                  </a:defRPr>
+                </a:lvl1pPr>
+                <a:lvl2pPr marL="685800" indent="-228600" algn="l" defTabSz="914400" rtl="0" eaLnBrk="1" latinLnBrk="0" hangingPunct="1">
+                  <a:lnSpc>
+                    <a:spcPct val="90000"/>
+                  </a:lnSpc>
+                  <a:spcBef>
+                    <a:spcPts val="500"/>
+                  </a:spcBef>
+                  <a:buFont typeface="Arial" panose="020B0604020202020204" pitchFamily="34" charset="0"/>
+                  <a:buChar char="•"/>
+                  <a:defRPr sz="2400" kern="1200">
+                    <a:solidFill>
+                      <a:schemeClr val="dk1"/>
+                    </a:solidFill>
+                    <a:latin typeface="+mn-lt"/>
+                    <a:ea typeface="+mn-ea"/>
+                    <a:cs typeface="+mn-cs"/>
+                  </a:defRPr>
+                </a:lvl2pPr>
+                <a:lvl3pPr marL="1143000" indent="-228600" algn="l" defTabSz="914400" rtl="0" eaLnBrk="1" latinLnBrk="0" hangingPunct="1">
+                  <a:lnSpc>
+                    <a:spcPct val="90000"/>
+                  </a:lnSpc>
+                  <a:spcBef>
+                    <a:spcPts val="500"/>
+                  </a:spcBef>
+                  <a:buFont typeface="Arial" panose="020B0604020202020204" pitchFamily="34" charset="0"/>
+                  <a:buChar char="•"/>
+                  <a:defRPr sz="2000" kern="1200">
+                    <a:solidFill>
+                      <a:schemeClr val="dk1"/>
+                    </a:solidFill>
+                    <a:latin typeface="+mn-lt"/>
+                    <a:ea typeface="+mn-ea"/>
+                    <a:cs typeface="+mn-cs"/>
+                  </a:defRPr>
+                </a:lvl3pPr>
+                <a:lvl4pPr marL="1600200" indent="-228600" algn="l" defTabSz="914400" rtl="0" eaLnBrk="1" latinLnBrk="0" hangingPunct="1">
+                  <a:lnSpc>
+                    <a:spcPct val="90000"/>
+                  </a:lnSpc>
+                  <a:spcBef>
+                    <a:spcPts val="500"/>
+                  </a:spcBef>
+                  <a:buFont typeface="Arial" panose="020B0604020202020204" pitchFamily="34" charset="0"/>
+                  <a:buChar char="•"/>
+                  <a:defRPr sz="1800" kern="1200">
+                    <a:solidFill>
+                      <a:schemeClr val="dk1"/>
+                    </a:solidFill>
+                    <a:latin typeface="+mn-lt"/>
+                    <a:ea typeface="+mn-ea"/>
+                    <a:cs typeface="+mn-cs"/>
+                  </a:defRPr>
+                </a:lvl4pPr>
+                <a:lvl5pPr marL="2057400" indent="-228600" algn="l" defTabSz="914400" rtl="0" eaLnBrk="1" latinLnBrk="0" hangingPunct="1">
+                  <a:lnSpc>
+                    <a:spcPct val="90000"/>
+                  </a:lnSpc>
+                  <a:spcBef>
+                    <a:spcPts val="500"/>
+                  </a:spcBef>
+                  <a:buFont typeface="Arial" panose="020B0604020202020204" pitchFamily="34" charset="0"/>
+                  <a:buChar char="•"/>
+                  <a:defRPr sz="1800" kern="1200">
+                    <a:solidFill>
+                      <a:schemeClr val="dk1"/>
+                    </a:solidFill>
+                    <a:latin typeface="+mn-lt"/>
+                    <a:ea typeface="+mn-ea"/>
+                    <a:cs typeface="+mn-cs"/>
+                  </a:defRPr>
+                </a:lvl5pPr>
+                <a:lvl6pPr marL="2514600" indent="-228600" algn="l" defTabSz="914400" rtl="0" eaLnBrk="1" latinLnBrk="0" hangingPunct="1">
+                  <a:lnSpc>
+                    <a:spcPct val="90000"/>
+                  </a:lnSpc>
+                  <a:spcBef>
+                    <a:spcPts val="500"/>
+                  </a:spcBef>
+                  <a:buFont typeface="Arial" panose="020B0604020202020204" pitchFamily="34" charset="0"/>
+                  <a:buChar char="•"/>
+                  <a:defRPr sz="1800" kern="1200">
+                    <a:solidFill>
+                      <a:schemeClr val="dk1"/>
+                    </a:solidFill>
+                    <a:latin typeface="+mn-lt"/>
+                    <a:ea typeface="+mn-ea"/>
+                    <a:cs typeface="+mn-cs"/>
+                  </a:defRPr>
+                </a:lvl6pPr>
+                <a:lvl7pPr marL="2971800" indent="-228600" algn="l" defTabSz="914400" rtl="0" eaLnBrk="1" latinLnBrk="0" hangingPunct="1">
+                  <a:lnSpc>
+                    <a:spcPct val="90000"/>
+                  </a:lnSpc>
+                  <a:spcBef>
+                    <a:spcPts val="500"/>
+                  </a:spcBef>
+                  <a:buFont typeface="Arial" panose="020B0604020202020204" pitchFamily="34" charset="0"/>
+                  <a:buChar char="•"/>
+                  <a:defRPr sz="1800" kern="1200">
+                    <a:solidFill>
+                      <a:schemeClr val="dk1"/>
+                    </a:solidFill>
+                    <a:latin typeface="+mn-lt"/>
+                    <a:ea typeface="+mn-ea"/>
+                    <a:cs typeface="+mn-cs"/>
+                  </a:defRPr>
+                </a:lvl7pPr>
+                <a:lvl8pPr marL="3429000" indent="-228600" algn="l" defTabSz="914400" rtl="0" eaLnBrk="1" latinLnBrk="0" hangingPunct="1">
+                  <a:lnSpc>
+                    <a:spcPct val="90000"/>
+                  </a:lnSpc>
+                  <a:spcBef>
+                    <a:spcPts val="500"/>
+                  </a:spcBef>
+                  <a:buFont typeface="Arial" panose="020B0604020202020204" pitchFamily="34" charset="0"/>
+                  <a:buChar char="•"/>
+                  <a:defRPr sz="1800" kern="1200">
+                    <a:solidFill>
+                      <a:schemeClr val="dk1"/>
+                    </a:solidFill>
+                    <a:latin typeface="+mn-lt"/>
+                    <a:ea typeface="+mn-ea"/>
+                    <a:cs typeface="+mn-cs"/>
+                  </a:defRPr>
+                </a:lvl8pPr>
+                <a:lvl9pPr marL="3886200" indent="-228600" algn="l" defTabSz="914400" rtl="0" eaLnBrk="1" latinLnBrk="0" hangingPunct="1">
+                  <a:lnSpc>
+                    <a:spcPct val="90000"/>
+                  </a:lnSpc>
+                  <a:spcBef>
+                    <a:spcPts val="500"/>
+                  </a:spcBef>
+                  <a:buFont typeface="Arial" panose="020B0604020202020204" pitchFamily="34" charset="0"/>
+                  <a:buChar char="•"/>
+                  <a:defRPr sz="1800" kern="1200">
+                    <a:solidFill>
+                      <a:schemeClr val="dk1"/>
+                    </a:solidFill>
+                    <a:latin typeface="+mn-lt"/>
+                    <a:ea typeface="+mn-ea"/>
+                    <a:cs typeface="+mn-cs"/>
+                  </a:defRPr>
+                </a:lvl9pPr>
+              </a:lstStyle>
+              <a:p>
+                <a:pPr marL="0" indent="0">
+                  <a:lnSpc>
+                    <a:spcPct val="100000"/>
+                  </a:lnSpc>
+                  <a:spcBef>
+                    <a:spcPts val="0"/>
+                  </a:spcBef>
+                  <a:buFont typeface="Arial" panose="020B0604020202020204" pitchFamily="34" charset="0"/>
+                  <a:buNone/>
+                </a:pPr>
+                <a:r>
+                  <a:rPr lang="en-US" sz="1200" b="1" dirty="0"/>
+                  <a:t>Temporal Difference Learning</a:t>
+                </a:r>
+                <a:endParaRPr lang="en-US" sz="1200" i="1" dirty="0">
+                  <a:latin typeface="Cambria Math" panose="02040503050406030204" pitchFamily="18" charset="0"/>
+                </a:endParaRPr>
+              </a:p>
+              <a:p>
+                <a:pPr marL="0" indent="0">
+                  <a:lnSpc>
+                    <a:spcPct val="100000"/>
+                  </a:lnSpc>
+                  <a:spcBef>
+                    <a:spcPts val="0"/>
+                  </a:spcBef>
+                  <a:buNone/>
+                </a:pPr>
+                <a14:m>
+                  <m:oMath xmlns:m="http://schemas.openxmlformats.org/officeDocument/2006/math">
+                    <m:sSub>
+                      <m:sSubPr>
+                        <m:ctrlPr>
+                          <a:rPr lang="en-US" sz="1200" i="1" dirty="0">
+                            <a:solidFill>
+                              <a:schemeClr val="tx1"/>
+                            </a:solidFill>
+                            <a:latin typeface="Cambria Math" panose="02040503050406030204" pitchFamily="18" charset="0"/>
+                          </a:rPr>
+                        </m:ctrlPr>
+                      </m:sSubPr>
+                      <m:e>
+                        <m:r>
+                          <a:rPr lang="en-US" sz="1200" i="1" dirty="0">
+                            <a:solidFill>
+                              <a:schemeClr val="tx1"/>
+                            </a:solidFill>
+                            <a:latin typeface="Cambria Math" panose="02040503050406030204" pitchFamily="18" charset="0"/>
+                          </a:rPr>
+                          <m:t>𝑈</m:t>
+                        </m:r>
+                      </m:e>
+                      <m:sub>
+                        <m:r>
+                          <a:rPr lang="en-US" sz="1200" i="1" dirty="0">
+                            <a:solidFill>
+                              <a:schemeClr val="tx1"/>
+                            </a:solidFill>
+                            <a:latin typeface="Cambria Math" panose="02040503050406030204" pitchFamily="18" charset="0"/>
+                          </a:rPr>
+                          <m:t>𝑡</m:t>
+                        </m:r>
+                      </m:sub>
+                    </m:sSub>
+                  </m:oMath>
+                </a14:m>
+                <a:r>
+                  <a:rPr lang="en-US" sz="1200" dirty="0">
+                    <a:solidFill>
+                      <a:schemeClr val="tx1"/>
+                    </a:solidFill>
+                  </a:rPr>
+                  <a:t>	target for estimate at time</a:t>
+                </a:r>
+                <a14:m>
+                  <m:oMath xmlns:m="http://schemas.openxmlformats.org/officeDocument/2006/math">
+                    <m:r>
+                      <a:rPr lang="en-US" sz="1200" i="1" dirty="0">
+                        <a:solidFill>
+                          <a:schemeClr val="tx1"/>
+                        </a:solidFill>
+                        <a:latin typeface="Cambria Math" panose="02040503050406030204" pitchFamily="18" charset="0"/>
+                      </a:rPr>
+                      <m:t> </m:t>
+                    </m:r>
+                    <m:r>
+                      <a:rPr lang="en-US" sz="1200" i="1" dirty="0">
+                        <a:solidFill>
+                          <a:schemeClr val="tx1"/>
+                        </a:solidFill>
+                        <a:latin typeface="Cambria Math" panose="02040503050406030204" pitchFamily="18" charset="0"/>
+                      </a:rPr>
+                      <m:t>𝑡</m:t>
+                    </m:r>
+                  </m:oMath>
+                </a14:m>
+                <a:endParaRPr lang="en-US" sz="1200" dirty="0">
+                  <a:solidFill>
+                    <a:schemeClr val="tx1"/>
+                  </a:solidFill>
+                </a:endParaRPr>
+              </a:p>
+              <a:p>
+                <a:pPr marL="0" indent="0">
+                  <a:lnSpc>
+                    <a:spcPct val="100000"/>
+                  </a:lnSpc>
+                  <a:spcBef>
+                    <a:spcPts val="0"/>
+                  </a:spcBef>
+                  <a:buNone/>
+                </a:pPr>
+                <a14:m>
+                  <m:oMath xmlns:m="http://schemas.openxmlformats.org/officeDocument/2006/math">
+                    <m:sSub>
+                      <m:sSubPr>
+                        <m:ctrlPr>
+                          <a:rPr lang="en-US" sz="1200" i="1" dirty="0">
+                            <a:solidFill>
+                              <a:schemeClr val="tx1"/>
+                            </a:solidFill>
+                            <a:latin typeface="Cambria Math" panose="02040503050406030204" pitchFamily="18" charset="0"/>
+                          </a:rPr>
+                        </m:ctrlPr>
+                      </m:sSubPr>
+                      <m:e>
+                        <m:r>
+                          <a:rPr lang="en-US" sz="1200" b="0" i="1" dirty="0" smtClean="0">
+                            <a:solidFill>
+                              <a:schemeClr val="tx1"/>
+                            </a:solidFill>
+                            <a:latin typeface="Cambria Math" panose="02040503050406030204" pitchFamily="18" charset="0"/>
+                          </a:rPr>
+                          <m:t>𝛿</m:t>
+                        </m:r>
+                      </m:e>
+                      <m:sub>
+                        <m:r>
+                          <a:rPr lang="en-US" sz="1200" i="1" dirty="0">
+                            <a:solidFill>
+                              <a:schemeClr val="tx1"/>
+                            </a:solidFill>
+                            <a:latin typeface="Cambria Math" panose="02040503050406030204" pitchFamily="18" charset="0"/>
+                          </a:rPr>
+                          <m:t>𝑡</m:t>
+                        </m:r>
+                      </m:sub>
+                    </m:sSub>
+                  </m:oMath>
+                </a14:m>
+                <a:r>
+                  <a:rPr lang="en-US" sz="1200" dirty="0">
+                    <a:solidFill>
+                      <a:schemeClr val="tx1"/>
+                    </a:solidFill>
+                  </a:rPr>
+                  <a:t>	TD error</a:t>
+                </a:r>
+              </a:p>
+            </p:txBody>
+          </p:sp>
+        </mc:Choice>
+        <mc:Fallback xmlns="">
+          <p:sp>
+            <p:nvSpPr>
+              <p:cNvPr id="4" name="Content Placeholder 2">
+                <a:extLst>
+                  <a:ext uri="{FF2B5EF4-FFF2-40B4-BE49-F238E27FC236}">
+                    <a16:creationId xmlns:a16="http://schemas.microsoft.com/office/drawing/2014/main" id="{4C5E539A-F9A7-F959-ACD3-4ADE5900F587}"/>
+                  </a:ext>
+                </a:extLst>
+              </p:cNvPr>
+              <p:cNvSpPr txBox="1">
+                <a:spLocks noRot="1" noChangeAspect="1" noMove="1" noResize="1" noEditPoints="1" noAdjustHandles="1" noChangeArrowheads="1" noChangeShapeType="1" noTextEdit="1"/>
+              </p:cNvSpPr>
+              <p:nvPr/>
+            </p:nvSpPr>
+            <p:spPr>
+              <a:xfrm>
+                <a:off x="6267338" y="4947712"/>
+                <a:ext cx="5273179" cy="646331"/>
+              </a:xfrm>
+              <a:prstGeom prst="rect">
+                <a:avLst/>
+              </a:prstGeom>
+              <a:blipFill>
+                <a:blip r:embed="rId5"/>
+                <a:stretch>
+                  <a:fillRect b="-4587"/>
+                </a:stretch>
+              </a:blipFill>
+            </p:spPr>
+            <p:txBody>
+              <a:bodyPr/>
+              <a:lstStyle/>
+              <a:p>
+                <a:r>
+                  <a:rPr lang="en-US">
+                    <a:noFill/>
+                  </a:rPr>
+                  <a:t> </a:t>
+                </a:r>
+              </a:p>
+            </p:txBody>
+          </p:sp>
+        </mc:Fallback>
+      </mc:AlternateContent>
     </p:spTree>
     <p:extLst>
       <p:ext uri="{BB962C8B-B14F-4D97-AF65-F5344CB8AC3E}">
-        <p14:creationId xmlns:p14="http://schemas.microsoft.com/office/powerpoint/2010/main" val="3945362088"/>
+        <p14:creationId xmlns:p14="http://schemas.microsoft.com/office/powerpoint/2010/main" val="920694018"/>
       </p:ext>
     </p:extLst>
   </p:cSld>
@@ -12265,8 +16496,8 @@
         </p:nvSpPr>
         <p:spPr>
           <a:xfrm>
-            <a:off x="839788" y="4013588"/>
-            <a:ext cx="10515600" cy="2029588"/>
+            <a:off x="839788" y="4788384"/>
+            <a:ext cx="10515600" cy="1254791"/>
           </a:xfrm>
           <a:prstGeom prst="rect">
             <a:avLst/>
@@ -12274,7 +16505,7 @@
         </p:spPr>
         <p:txBody>
           <a:bodyPr vert="horz" lIns="91440" tIns="45720" rIns="91440" bIns="45720" rtlCol="0">
-            <a:normAutofit/>
+            <a:normAutofit fontScale="92500" lnSpcReduction="20000"/>
           </a:bodyPr>
           <a:lstStyle>
             <a:lvl1pPr marL="228600" indent="-228600" algn="l" defTabSz="914400" rtl="0" eaLnBrk="1" latinLnBrk="0" hangingPunct="1">
@@ -12446,25 +16677,184 @@
             </a:pPr>
             <a:r>
               <a:rPr lang="en-US" dirty="0"/>
-              <a:t>All methods:</a:t>
+              <a:t>All methods do the following:</a:t>
             </a:r>
           </a:p>
           <a:p>
             <a:pPr lvl="1"/>
             <a:r>
+              <a:rPr lang="en-US" b="1" dirty="0"/>
+              <a:t>Policy evaluation </a:t>
+            </a:r>
+            <a:r>
               <a:rPr lang="en-US" dirty="0"/>
-              <a:t>Compute a value function/policy.</a:t>
+              <a:t>(prediction): Compute a value function/policy.</a:t>
             </a:r>
           </a:p>
           <a:p>
             <a:pPr lvl="1"/>
             <a:r>
+              <a:rPr lang="en-US" b="1" dirty="0"/>
+              <a:t>Look ahead </a:t>
+            </a:r>
+            <a:r>
               <a:rPr lang="en-US" dirty="0"/>
-              <a:t>Look ahead to future events and compute a backed-up value to update an approximate value function.</a:t>
+              <a:t>to future events (rewards, states, actions) and compute a backed-up value to update an approximate value function.</a:t>
             </a:r>
           </a:p>
         </p:txBody>
       </p:sp>
+      <p:grpSp>
+        <p:nvGrpSpPr>
+          <p:cNvPr id="13" name="Group 12">
+            <a:extLst>
+              <a:ext uri="{FF2B5EF4-FFF2-40B4-BE49-F238E27FC236}">
+                <a16:creationId xmlns:a16="http://schemas.microsoft.com/office/drawing/2014/main" id="{E82F68D9-8E69-A250-D35E-1231A1F5B17C}"/>
+              </a:ext>
+            </a:extLst>
+          </p:cNvPr>
+          <p:cNvGrpSpPr/>
+          <p:nvPr/>
+        </p:nvGrpSpPr>
+        <p:grpSpPr>
+          <a:xfrm>
+            <a:off x="3118262" y="3594779"/>
+            <a:ext cx="5758626" cy="806207"/>
+            <a:chOff x="3118262" y="3594779"/>
+            <a:chExt cx="5758626" cy="806207"/>
+          </a:xfrm>
+        </p:grpSpPr>
+        <p:sp>
+          <p:nvSpPr>
+            <p:cNvPr id="8" name="TextBox 7">
+              <a:extLst>
+                <a:ext uri="{FF2B5EF4-FFF2-40B4-BE49-F238E27FC236}">
+                  <a16:creationId xmlns:a16="http://schemas.microsoft.com/office/drawing/2014/main" id="{E4675E7B-A0EA-C8F4-0666-CCA5988ACAC1}"/>
+                </a:ext>
+              </a:extLst>
+            </p:cNvPr>
+            <p:cNvSpPr txBox="1"/>
+            <p:nvPr/>
+          </p:nvSpPr>
+          <p:spPr>
+            <a:xfrm>
+              <a:off x="3118262" y="4031654"/>
+              <a:ext cx="5758626" cy="369332"/>
+            </a:xfrm>
+            <a:prstGeom prst="rect">
+              <a:avLst/>
+            </a:prstGeom>
+          </p:spPr>
+          <p:style>
+            <a:lnRef idx="2">
+              <a:schemeClr val="accent5">
+                <a:shade val="15000"/>
+              </a:schemeClr>
+            </a:lnRef>
+            <a:fillRef idx="1">
+              <a:schemeClr val="accent5"/>
+            </a:fillRef>
+            <a:effectRef idx="0">
+              <a:schemeClr val="accent5"/>
+            </a:effectRef>
+            <a:fontRef idx="minor">
+              <a:schemeClr val="lt1"/>
+            </a:fontRef>
+          </p:style>
+          <p:txBody>
+            <a:bodyPr wrap="square" rtlCol="0">
+              <a:spAutoFit/>
+            </a:bodyPr>
+            <a:lstStyle/>
+            <a:p>
+              <a:r>
+                <a:rPr lang="en-US" dirty="0"/>
+                <a:t>+ use the MDP as a simulation model for Model-free RL</a:t>
+              </a:r>
+            </a:p>
+          </p:txBody>
+        </p:sp>
+        <p:cxnSp>
+          <p:nvCxnSpPr>
+            <p:cNvPr id="10" name="Straight Arrow Connector 9">
+              <a:extLst>
+                <a:ext uri="{FF2B5EF4-FFF2-40B4-BE49-F238E27FC236}">
+                  <a16:creationId xmlns:a16="http://schemas.microsoft.com/office/drawing/2014/main" id="{2347AD2C-46E6-E6D8-9F53-949CED70E983}"/>
+                </a:ext>
+              </a:extLst>
+            </p:cNvPr>
+            <p:cNvCxnSpPr/>
+            <p:nvPr/>
+          </p:nvCxnSpPr>
+          <p:spPr>
+            <a:xfrm>
+              <a:off x="3762302" y="3594779"/>
+              <a:ext cx="711976" cy="383908"/>
+            </a:xfrm>
+            <a:prstGeom prst="straightConnector1">
+              <a:avLst/>
+            </a:prstGeom>
+            <a:ln>
+              <a:tailEnd type="triangle"/>
+            </a:ln>
+          </p:spPr>
+          <p:style>
+            <a:lnRef idx="2">
+              <a:schemeClr val="accent5"/>
+            </a:lnRef>
+            <a:fillRef idx="0">
+              <a:schemeClr val="accent5"/>
+            </a:fillRef>
+            <a:effectRef idx="1">
+              <a:schemeClr val="accent5"/>
+            </a:effectRef>
+            <a:fontRef idx="minor">
+              <a:schemeClr val="tx1"/>
+            </a:fontRef>
+          </p:style>
+        </p:cxnSp>
+        <p:cxnSp>
+          <p:nvCxnSpPr>
+            <p:cNvPr id="11" name="Straight Arrow Connector 10">
+              <a:extLst>
+                <a:ext uri="{FF2B5EF4-FFF2-40B4-BE49-F238E27FC236}">
+                  <a16:creationId xmlns:a16="http://schemas.microsoft.com/office/drawing/2014/main" id="{3C91D920-DB4A-1FD1-3DF5-018FDCA5C225}"/>
+                </a:ext>
+              </a:extLst>
+            </p:cNvPr>
+            <p:cNvCxnSpPr>
+              <a:cxnSpLocks/>
+            </p:cNvCxnSpPr>
+            <p:nvPr/>
+          </p:nvCxnSpPr>
+          <p:spPr>
+            <a:xfrm flipV="1">
+              <a:off x="7005748" y="3660782"/>
+              <a:ext cx="777122" cy="310924"/>
+            </a:xfrm>
+            <a:prstGeom prst="straightConnector1">
+              <a:avLst/>
+            </a:prstGeom>
+            <a:ln>
+              <a:tailEnd type="triangle"/>
+            </a:ln>
+          </p:spPr>
+          <p:style>
+            <a:lnRef idx="2">
+              <a:schemeClr val="accent5"/>
+            </a:lnRef>
+            <a:fillRef idx="0">
+              <a:schemeClr val="accent5"/>
+            </a:fillRef>
+            <a:effectRef idx="1">
+              <a:schemeClr val="accent5"/>
+            </a:effectRef>
+            <a:fontRef idx="minor">
+              <a:schemeClr val="tx1"/>
+            </a:fontRef>
+          </p:style>
+        </p:cxnSp>
+      </p:grpSp>
     </p:spTree>
     <p:extLst>
       <p:ext uri="{BB962C8B-B14F-4D97-AF65-F5344CB8AC3E}">
@@ -12475,6 +16865,129 @@
   <p:clrMapOvr>
     <a:masterClrMapping/>
   </p:clrMapOvr>
+  <p:timing>
+    <p:tnLst>
+      <p:par>
+        <p:cTn id="1" dur="indefinite" restart="never" nodeType="tmRoot">
+          <p:childTnLst>
+            <p:seq concurrent="1" nextAc="seek">
+              <p:cTn id="2" dur="indefinite" nodeType="mainSeq">
+                <p:childTnLst>
+                  <p:par>
+                    <p:cTn id="3" fill="hold">
+                      <p:stCondLst>
+                        <p:cond delay="indefinite"/>
+                      </p:stCondLst>
+                      <p:childTnLst>
+                        <p:par>
+                          <p:cTn id="4" fill="hold">
+                            <p:stCondLst>
+                              <p:cond delay="0"/>
+                            </p:stCondLst>
+                            <p:childTnLst>
+                              <p:par>
+                                <p:cTn id="5" presetID="1" presetClass="entr" presetSubtype="0" fill="hold" nodeType="clickEffect">
+                                  <p:stCondLst>
+                                    <p:cond delay="0"/>
+                                  </p:stCondLst>
+                                  <p:childTnLst>
+                                    <p:set>
+                                      <p:cBhvr>
+                                        <p:cTn id="6" dur="1" fill="hold">
+                                          <p:stCondLst>
+                                            <p:cond delay="0"/>
+                                          </p:stCondLst>
+                                        </p:cTn>
+                                        <p:tgtEl>
+                                          <p:spTgt spid="13"/>
+                                        </p:tgtEl>
+                                        <p:attrNameLst>
+                                          <p:attrName>style.visibility</p:attrName>
+                                        </p:attrNameLst>
+                                      </p:cBhvr>
+                                      <p:to>
+                                        <p:strVal val="visible"/>
+                                      </p:to>
+                                    </p:set>
+                                  </p:childTnLst>
+                                </p:cTn>
+                              </p:par>
+                            </p:childTnLst>
+                          </p:cTn>
+                        </p:par>
+                      </p:childTnLst>
+                    </p:cTn>
+                  </p:par>
+                  <p:par>
+                    <p:cTn id="7" fill="hold">
+                      <p:stCondLst>
+                        <p:cond delay="indefinite"/>
+                      </p:stCondLst>
+                      <p:childTnLst>
+                        <p:par>
+                          <p:cTn id="8" fill="hold">
+                            <p:stCondLst>
+                              <p:cond delay="0"/>
+                            </p:stCondLst>
+                            <p:childTnLst>
+                              <p:par>
+                                <p:cTn id="9" presetID="1" presetClass="entr" presetSubtype="0" fill="hold" grpId="0" nodeType="clickEffect">
+                                  <p:stCondLst>
+                                    <p:cond delay="0"/>
+                                  </p:stCondLst>
+                                  <p:childTnLst>
+                                    <p:set>
+                                      <p:cBhvr>
+                                        <p:cTn id="10" dur="1" fill="hold">
+                                          <p:stCondLst>
+                                            <p:cond delay="0"/>
+                                          </p:stCondLst>
+                                        </p:cTn>
+                                        <p:tgtEl>
+                                          <p:spTgt spid="7"/>
+                                        </p:tgtEl>
+                                        <p:attrNameLst>
+                                          <p:attrName>style.visibility</p:attrName>
+                                        </p:attrNameLst>
+                                      </p:cBhvr>
+                                      <p:to>
+                                        <p:strVal val="visible"/>
+                                      </p:to>
+                                    </p:set>
+                                  </p:childTnLst>
+                                </p:cTn>
+                              </p:par>
+                            </p:childTnLst>
+                          </p:cTn>
+                        </p:par>
+                      </p:childTnLst>
+                    </p:cTn>
+                  </p:par>
+                </p:childTnLst>
+              </p:cTn>
+              <p:prevCondLst>
+                <p:cond evt="onPrev" delay="0">
+                  <p:tgtEl>
+                    <p:sldTgt/>
+                  </p:tgtEl>
+                </p:cond>
+              </p:prevCondLst>
+              <p:nextCondLst>
+                <p:cond evt="onNext" delay="0">
+                  <p:tgtEl>
+                    <p:sldTgt/>
+                  </p:tgtEl>
+                </p:cond>
+              </p:nextCondLst>
+            </p:seq>
+          </p:childTnLst>
+        </p:cTn>
+      </p:par>
+    </p:tnLst>
+    <p:bldLst>
+      <p:bldP spid="7" grpId="0"/>
+    </p:bldLst>
+  </p:timing>
 </p:sld>
 </file>
 
@@ -12724,7 +17237,15 @@
                 <a:pPr lvl="2"/>
                 <a:r>
                   <a:rPr lang="en-US" dirty="0"/>
-                  <a:t>Can be used for MC and TD methods for learning. This is called trajectory sampling.</a:t>
+                  <a:t>Can be used for MC and TD methods for learning. This is called </a:t>
+                </a:r>
+                <a:r>
+                  <a:rPr lang="en-US" b="1" dirty="0"/>
+                  <a:t>trajectory sampling</a:t>
+                </a:r>
+                <a:r>
+                  <a:rPr lang="en-US" dirty="0"/>
+                  <a:t>.</a:t>
                 </a:r>
               </a:p>
               <a:p>
@@ -12750,14 +17271,14 @@
                 <a:pPr lvl="1"/>
                 <a:r>
                   <a:rPr lang="en-US" dirty="0"/>
-                  <a:t>The real environment can be seen as a physical model with sequential sampling access.</a:t>
+                  <a:t>The real environment can be seen as a physically represented model with sequential sampling access.</a:t>
                 </a:r>
               </a:p>
               <a:p>
                 <a:pPr lvl="1"/>
                 <a:r>
                   <a:rPr lang="en-US" dirty="0"/>
-                  <a:t>Model-free methods often use sample models when accessing the real environment is slow or expensive. </a:t>
+                  <a:t>Model-free methods often use sample models when accessing the real environment is slow, expensive or dangerous. </a:t>
                 </a:r>
               </a:p>
             </p:txBody>
@@ -13243,13 +17764,13 @@
             </p:nvSpPr>
             <p:spPr>
               <a:xfrm>
-                <a:off x="838199" y="1397331"/>
-                <a:ext cx="6895810" cy="4717283"/>
+                <a:off x="838199" y="1397332"/>
+                <a:ext cx="6895810" cy="4486938"/>
               </a:xfrm>
             </p:spPr>
             <p:txBody>
               <a:bodyPr>
-                <a:normAutofit fontScale="92500" lnSpcReduction="20000"/>
+                <a:normAutofit fontScale="85000" lnSpcReduction="20000"/>
               </a:bodyPr>
               <a:lstStyle/>
               <a:p>
@@ -13266,7 +17787,15 @@
                 <a:pPr lvl="1"/>
                 <a:r>
                   <a:rPr lang="en-US" dirty="0"/>
-                  <a:t>Use the experience directly to improve the value function/policy. E.g., via one-step Q-learning.</a:t>
+                  <a:t>Use sampled experience directly to </a:t>
+                </a:r>
+                <a:r>
+                  <a:rPr lang="en-US" b="1" dirty="0"/>
+                  <a:t>improve the value function/policy</a:t>
+                </a:r>
+                <a:r>
+                  <a:rPr lang="en-US" dirty="0"/>
+                  <a:t>. E.g., via one-step Q-learning.</a:t>
                 </a:r>
               </a:p>
               <a:p>
@@ -13286,7 +17815,15 @@
                 <a:pPr lvl="1"/>
                 <a:r>
                   <a:rPr lang="en-US" dirty="0"/>
-                  <a:t>Real experience is also used to learn a model. E.g., by recording for each </a:t>
+                  <a:t>Real experience is also used to </a:t>
+                </a:r>
+                <a:r>
+                  <a:rPr lang="en-US" b="1" dirty="0"/>
+                  <a:t>learn a model</a:t>
+                </a:r>
+                <a:r>
+                  <a:rPr lang="en-US" dirty="0"/>
+                  <a:t>. E.g., by recording for each </a:t>
                 </a:r>
                 <a:br>
                   <a:rPr lang="en-US" b="0" i="1" dirty="0">
@@ -13601,7 +18138,15 @@
                 <a:pPr lvl="1"/>
                 <a:r>
                   <a:rPr lang="en-US" dirty="0"/>
-                  <a:t>The model can be used for planning to improve the value function/policy. E.g., by sampling from the model to update the Q-values. </a:t>
+                  <a:t>The model can be used for </a:t>
+                </a:r>
+                <a:r>
+                  <a:rPr lang="en-US" b="1" dirty="0"/>
+                  <a:t>planning</a:t>
+                </a:r>
+                <a:r>
+                  <a:rPr lang="en-US" dirty="0"/>
+                  <a:t> to improve the value function/policy. E.g., by sampling from the model to update the Q-values. </a:t>
                 </a:r>
               </a:p>
               <a:p>
@@ -13618,7 +18163,7 @@
                 </a:r>
                 <a:r>
                   <a:rPr lang="en-US" dirty="0"/>
-                  <a:t>: Makes the approach much more sample efficient. Experience is not just used once but retained in the model.</a:t>
+                  <a:t>: Model learning and planning makes the approach much more sample efficient. Experience is not just used once but retained in the model.</a:t>
                 </a:r>
               </a:p>
             </p:txBody>
@@ -13643,13 +18188,13 @@
             </p:nvSpPr>
             <p:spPr>
               <a:xfrm>
-                <a:off x="838199" y="1397331"/>
-                <a:ext cx="6895810" cy="4717283"/>
+                <a:off x="838199" y="1397332"/>
+                <a:ext cx="6895810" cy="4486938"/>
               </a:xfrm>
               <a:blipFill>
                 <a:blip r:embed="rId3"/>
                 <a:stretch>
-                  <a:fillRect l="-1502" t="-3230"/>
+                  <a:fillRect l="-1325" t="-2989" r="-1590" b="-2582"/>
                 </a:stretch>
               </a:blipFill>
             </p:spPr>
@@ -13678,6 +18223,279 @@
   <p:clrMapOvr>
     <a:masterClrMapping/>
   </p:clrMapOvr>
+  <p:timing>
+    <p:tnLst>
+      <p:par>
+        <p:cTn id="1" dur="indefinite" restart="never" nodeType="tmRoot">
+          <p:childTnLst>
+            <p:seq concurrent="1" nextAc="seek">
+              <p:cTn id="2" dur="indefinite" nodeType="mainSeq">
+                <p:childTnLst>
+                  <p:par>
+                    <p:cTn id="3" fill="hold">
+                      <p:stCondLst>
+                        <p:cond delay="indefinite"/>
+                      </p:stCondLst>
+                      <p:childTnLst>
+                        <p:par>
+                          <p:cTn id="4" fill="hold">
+                            <p:stCondLst>
+                              <p:cond delay="0"/>
+                            </p:stCondLst>
+                            <p:childTnLst>
+                              <p:par>
+                                <p:cTn id="5" presetID="1" presetClass="entr" presetSubtype="0" fill="hold" grpId="0" nodeType="clickEffect">
+                                  <p:stCondLst>
+                                    <p:cond delay="0"/>
+                                  </p:stCondLst>
+                                  <p:childTnLst>
+                                    <p:set>
+                                      <p:cBhvr>
+                                        <p:cTn id="6" dur="1" fill="hold">
+                                          <p:stCondLst>
+                                            <p:cond delay="0"/>
+                                          </p:stCondLst>
+                                        </p:cTn>
+                                        <p:tgtEl>
+                                          <p:spTgt spid="3">
+                                            <p:txEl>
+                                              <p:pRg st="0" end="0"/>
+                                            </p:txEl>
+                                          </p:spTgt>
+                                        </p:tgtEl>
+                                        <p:attrNameLst>
+                                          <p:attrName>style.visibility</p:attrName>
+                                        </p:attrNameLst>
+                                      </p:cBhvr>
+                                      <p:to>
+                                        <p:strVal val="visible"/>
+                                      </p:to>
+                                    </p:set>
+                                  </p:childTnLst>
+                                </p:cTn>
+                              </p:par>
+                              <p:par>
+                                <p:cTn id="7" presetID="1" presetClass="entr" presetSubtype="0" fill="hold" grpId="0" nodeType="withEffect">
+                                  <p:stCondLst>
+                                    <p:cond delay="0"/>
+                                  </p:stCondLst>
+                                  <p:childTnLst>
+                                    <p:set>
+                                      <p:cBhvr>
+                                        <p:cTn id="8" dur="1" fill="hold">
+                                          <p:stCondLst>
+                                            <p:cond delay="0"/>
+                                          </p:stCondLst>
+                                        </p:cTn>
+                                        <p:tgtEl>
+                                          <p:spTgt spid="3">
+                                            <p:txEl>
+                                              <p:pRg st="1" end="1"/>
+                                            </p:txEl>
+                                          </p:spTgt>
+                                        </p:tgtEl>
+                                        <p:attrNameLst>
+                                          <p:attrName>style.visibility</p:attrName>
+                                        </p:attrNameLst>
+                                      </p:cBhvr>
+                                      <p:to>
+                                        <p:strVal val="visible"/>
+                                      </p:to>
+                                    </p:set>
+                                  </p:childTnLst>
+                                </p:cTn>
+                              </p:par>
+                            </p:childTnLst>
+                          </p:cTn>
+                        </p:par>
+                      </p:childTnLst>
+                    </p:cTn>
+                  </p:par>
+                  <p:par>
+                    <p:cTn id="9" fill="hold">
+                      <p:stCondLst>
+                        <p:cond delay="indefinite"/>
+                      </p:stCondLst>
+                      <p:childTnLst>
+                        <p:par>
+                          <p:cTn id="10" fill="hold">
+                            <p:stCondLst>
+                              <p:cond delay="0"/>
+                            </p:stCondLst>
+                            <p:childTnLst>
+                              <p:par>
+                                <p:cTn id="11" presetID="1" presetClass="entr" presetSubtype="0" fill="hold" grpId="0" nodeType="clickEffect">
+                                  <p:stCondLst>
+                                    <p:cond delay="0"/>
+                                  </p:stCondLst>
+                                  <p:childTnLst>
+                                    <p:set>
+                                      <p:cBhvr>
+                                        <p:cTn id="12" dur="1" fill="hold">
+                                          <p:stCondLst>
+                                            <p:cond delay="0"/>
+                                          </p:stCondLst>
+                                        </p:cTn>
+                                        <p:tgtEl>
+                                          <p:spTgt spid="3">
+                                            <p:txEl>
+                                              <p:pRg st="3" end="3"/>
+                                            </p:txEl>
+                                          </p:spTgt>
+                                        </p:tgtEl>
+                                        <p:attrNameLst>
+                                          <p:attrName>style.visibility</p:attrName>
+                                        </p:attrNameLst>
+                                      </p:cBhvr>
+                                      <p:to>
+                                        <p:strVal val="visible"/>
+                                      </p:to>
+                                    </p:set>
+                                  </p:childTnLst>
+                                </p:cTn>
+                              </p:par>
+                              <p:par>
+                                <p:cTn id="13" presetID="1" presetClass="entr" presetSubtype="0" fill="hold" grpId="0" nodeType="withEffect">
+                                  <p:stCondLst>
+                                    <p:cond delay="0"/>
+                                  </p:stCondLst>
+                                  <p:childTnLst>
+                                    <p:set>
+                                      <p:cBhvr>
+                                        <p:cTn id="14" dur="1" fill="hold">
+                                          <p:stCondLst>
+                                            <p:cond delay="0"/>
+                                          </p:stCondLst>
+                                        </p:cTn>
+                                        <p:tgtEl>
+                                          <p:spTgt spid="3">
+                                            <p:txEl>
+                                              <p:pRg st="4" end="4"/>
+                                            </p:txEl>
+                                          </p:spTgt>
+                                        </p:tgtEl>
+                                        <p:attrNameLst>
+                                          <p:attrName>style.visibility</p:attrName>
+                                        </p:attrNameLst>
+                                      </p:cBhvr>
+                                      <p:to>
+                                        <p:strVal val="visible"/>
+                                      </p:to>
+                                    </p:set>
+                                  </p:childTnLst>
+                                </p:cTn>
+                              </p:par>
+                              <p:par>
+                                <p:cTn id="15" presetID="1" presetClass="entr" presetSubtype="0" fill="hold" grpId="0" nodeType="withEffect">
+                                  <p:stCondLst>
+                                    <p:cond delay="0"/>
+                                  </p:stCondLst>
+                                  <p:childTnLst>
+                                    <p:set>
+                                      <p:cBhvr>
+                                        <p:cTn id="16" dur="1" fill="hold">
+                                          <p:stCondLst>
+                                            <p:cond delay="0"/>
+                                          </p:stCondLst>
+                                        </p:cTn>
+                                        <p:tgtEl>
+                                          <p:spTgt spid="3">
+                                            <p:txEl>
+                                              <p:pRg st="5" end="5"/>
+                                            </p:txEl>
+                                          </p:spTgt>
+                                        </p:tgtEl>
+                                        <p:attrNameLst>
+                                          <p:attrName>style.visibility</p:attrName>
+                                        </p:attrNameLst>
+                                      </p:cBhvr>
+                                      <p:to>
+                                        <p:strVal val="visible"/>
+                                      </p:to>
+                                    </p:set>
+                                  </p:childTnLst>
+                                </p:cTn>
+                              </p:par>
+                            </p:childTnLst>
+                          </p:cTn>
+                        </p:par>
+                      </p:childTnLst>
+                    </p:cTn>
+                  </p:par>
+                  <p:par>
+                    <p:cTn id="17" fill="hold">
+                      <p:stCondLst>
+                        <p:cond delay="indefinite"/>
+                      </p:stCondLst>
+                      <p:childTnLst>
+                        <p:par>
+                          <p:cTn id="18" fill="hold">
+                            <p:stCondLst>
+                              <p:cond delay="0"/>
+                            </p:stCondLst>
+                            <p:childTnLst>
+                              <p:par>
+                                <p:cTn id="19" presetID="1" presetClass="entr" presetSubtype="0" fill="hold" grpId="0" nodeType="clickEffect">
+                                  <p:stCondLst>
+                                    <p:cond delay="0"/>
+                                  </p:stCondLst>
+                                  <p:childTnLst>
+                                    <p:set>
+                                      <p:cBhvr>
+                                        <p:cTn id="20" dur="1" fill="hold">
+                                          <p:stCondLst>
+                                            <p:cond delay="0"/>
+                                          </p:stCondLst>
+                                        </p:cTn>
+                                        <p:tgtEl>
+                                          <p:spTgt spid="3">
+                                            <p:txEl>
+                                              <p:pRg st="7" end="7"/>
+                                            </p:txEl>
+                                          </p:spTgt>
+                                        </p:tgtEl>
+                                        <p:attrNameLst>
+                                          <p:attrName>style.visibility</p:attrName>
+                                        </p:attrNameLst>
+                                      </p:cBhvr>
+                                      <p:to>
+                                        <p:strVal val="visible"/>
+                                      </p:to>
+                                    </p:set>
+                                  </p:childTnLst>
+                                </p:cTn>
+                              </p:par>
+                            </p:childTnLst>
+                          </p:cTn>
+                        </p:par>
+                      </p:childTnLst>
+                    </p:cTn>
+                  </p:par>
+                </p:childTnLst>
+              </p:cTn>
+              <p:prevCondLst>
+                <p:cond evt="onPrev" delay="0">
+                  <p:tgtEl>
+                    <p:sldTgt/>
+                  </p:tgtEl>
+                </p:cond>
+              </p:prevCondLst>
+              <p:nextCondLst>
+                <p:cond evt="onNext" delay="0">
+                  <p:tgtEl>
+                    <p:sldTgt/>
+                  </p:tgtEl>
+                </p:cond>
+              </p:nextCondLst>
+            </p:seq>
+          </p:childTnLst>
+        </p:cTn>
+      </p:par>
+    </p:tnLst>
+    <p:bldLst>
+      <p:bldP spid="3" grpId="0" build="p"/>
+    </p:bldLst>
+  </p:timing>
 </p:sld>
 </file>
 
@@ -13773,9 +18591,9 @@
         <p:grpSpPr>
           <a:xfrm>
             <a:off x="693614" y="2680969"/>
-            <a:ext cx="7922078" cy="3558916"/>
+            <a:ext cx="10270766" cy="3558915"/>
             <a:chOff x="1027761" y="1690688"/>
-            <a:chExt cx="9799864" cy="4550975"/>
+            <a:chExt cx="12705267" cy="4550975"/>
           </a:xfrm>
         </p:grpSpPr>
         <p:pic>
@@ -13822,13 +18640,13 @@
           </p:nvSpPr>
           <p:spPr>
             <a:xfrm>
-              <a:off x="8899695" y="3652068"/>
-              <a:ext cx="1577515" cy="314107"/>
+              <a:off x="8995399" y="3502535"/>
+              <a:ext cx="2745523" cy="271041"/>
             </a:xfrm>
             <a:prstGeom prst="wedgeRoundRectCallout">
               <a:avLst>
-                <a:gd name="adj1" fmla="val -88975"/>
-                <a:gd name="adj2" fmla="val 67702"/>
+                <a:gd name="adj1" fmla="val -76395"/>
+                <a:gd name="adj2" fmla="val 143446"/>
                 <a:gd name="adj3" fmla="val 16667"/>
               </a:avLst>
             </a:prstGeom>
@@ -13856,7 +18674,7 @@
               <a:pPr algn="ctr"/>
               <a:r>
                 <a:rPr lang="en-US" sz="1600" dirty="0"/>
-                <a:t>Direct RL</a:t>
+                <a:t>Direct RL: Q-Learning</a:t>
               </a:r>
             </a:p>
           </p:txBody>
@@ -13919,8 +18737,8 @@
           </p:nvSpPr>
           <p:spPr>
             <a:xfrm>
-              <a:off x="9274609" y="5078516"/>
-              <a:ext cx="1308546" cy="432927"/>
+              <a:off x="9233616" y="5066294"/>
+              <a:ext cx="4499412" cy="432927"/>
             </a:xfrm>
             <a:prstGeom prst="rect">
               <a:avLst/>
@@ -13950,65 +18768,201 @@
             <a:p>
               <a:r>
                 <a:rPr lang="en-US" sz="1600" dirty="0"/>
-                <a:t>Planning</a:t>
+                <a:t>Improve Q using the model (Planning)</a:t>
               </a:r>
             </a:p>
           </p:txBody>
         </p:sp>
       </p:grpSp>
-      <p:sp>
-        <p:nvSpPr>
-          <p:cNvPr id="3" name="Speech Bubble: Rectangle with Corners Rounded 2">
-            <a:extLst>
-              <a:ext uri="{FF2B5EF4-FFF2-40B4-BE49-F238E27FC236}">
-                <a16:creationId xmlns:a16="http://schemas.microsoft.com/office/drawing/2014/main" id="{8DF5D581-CEB0-AD06-59A9-C85B97349AB2}"/>
-              </a:ext>
-            </a:extLst>
-          </p:cNvPr>
-          <p:cNvSpPr/>
-          <p:nvPr/>
-        </p:nvSpPr>
-        <p:spPr>
-          <a:xfrm>
-            <a:off x="7134546" y="4567465"/>
-            <a:ext cx="2011202" cy="239484"/>
-          </a:xfrm>
-          <a:prstGeom prst="wedgeRoundRectCallout">
-            <a:avLst>
-              <a:gd name="adj1" fmla="val -65028"/>
-              <a:gd name="adj2" fmla="val 12324"/>
-              <a:gd name="adj3" fmla="val 16667"/>
-            </a:avLst>
-          </a:prstGeom>
-        </p:spPr>
-        <p:style>
-          <a:lnRef idx="2">
-            <a:schemeClr val="accent1">
-              <a:shade val="15000"/>
-            </a:schemeClr>
-          </a:lnRef>
-          <a:fillRef idx="1">
-            <a:schemeClr val="accent1"/>
-          </a:fillRef>
-          <a:effectRef idx="0">
-            <a:schemeClr val="accent1"/>
-          </a:effectRef>
-          <a:fontRef idx="minor">
-            <a:schemeClr val="lt1"/>
-          </a:fontRef>
-        </p:style>
-        <p:txBody>
-          <a:bodyPr rtlCol="0" anchor="ctr"/>
-          <a:lstStyle/>
-          <a:p>
-            <a:pPr algn="ctr"/>
-            <a:r>
-              <a:rPr lang="en-US" sz="1600" dirty="0"/>
-              <a:t>Model learning</a:t>
-            </a:r>
-          </a:p>
-        </p:txBody>
-      </p:sp>
+      <mc:AlternateContent xmlns:mc="http://schemas.openxmlformats.org/markup-compatibility/2006" xmlns:a14="http://schemas.microsoft.com/office/drawing/2010/main">
+        <mc:Choice Requires="a14">
+          <p:sp>
+            <p:nvSpPr>
+              <p:cNvPr id="3" name="Speech Bubble: Rectangle with Corners Rounded 2">
+                <a:extLst>
+                  <a:ext uri="{FF2B5EF4-FFF2-40B4-BE49-F238E27FC236}">
+                    <a16:creationId xmlns:a16="http://schemas.microsoft.com/office/drawing/2014/main" id="{8DF5D581-CEB0-AD06-59A9-C85B97349AB2}"/>
+                  </a:ext>
+                </a:extLst>
+              </p:cNvPr>
+              <p:cNvSpPr/>
+              <p:nvPr/>
+            </p:nvSpPr>
+            <p:spPr>
+              <a:xfrm>
+                <a:off x="7134545" y="4567464"/>
+                <a:ext cx="3419445" cy="338553"/>
+              </a:xfrm>
+              <a:prstGeom prst="wedgeRoundRectCallout">
+                <a:avLst>
+                  <a:gd name="adj1" fmla="val -57067"/>
+                  <a:gd name="adj2" fmla="val -4170"/>
+                  <a:gd name="adj3" fmla="val 16667"/>
+                </a:avLst>
+              </a:prstGeom>
+            </p:spPr>
+            <p:style>
+              <a:lnRef idx="2">
+                <a:schemeClr val="accent1">
+                  <a:shade val="15000"/>
+                </a:schemeClr>
+              </a:lnRef>
+              <a:fillRef idx="1">
+                <a:schemeClr val="accent1"/>
+              </a:fillRef>
+              <a:effectRef idx="0">
+                <a:schemeClr val="accent1"/>
+              </a:effectRef>
+              <a:fontRef idx="minor">
+                <a:schemeClr val="lt1"/>
+              </a:fontRef>
+            </p:style>
+            <p:txBody>
+              <a:bodyPr rtlCol="0" anchor="ctr"/>
+              <a:lstStyle/>
+              <a:p>
+                <a:pPr algn="ctr"/>
+                <a:r>
+                  <a:rPr lang="en-US" sz="1600" dirty="0"/>
+                  <a:t>Model learning: learn </a:t>
+                </a:r>
+                <a14:m>
+                  <m:oMath xmlns:m="http://schemas.openxmlformats.org/officeDocument/2006/math">
+                    <m:r>
+                      <a:rPr lang="en-US" sz="1600" b="0" i="1" smtClean="0">
+                        <a:latin typeface="Cambria Math" panose="02040503050406030204" pitchFamily="18" charset="0"/>
+                      </a:rPr>
+                      <m:t>𝑝</m:t>
+                    </m:r>
+                    <m:r>
+                      <a:rPr lang="en-US" sz="1600" b="0" i="1" smtClean="0">
+                        <a:latin typeface="Cambria Math" panose="02040503050406030204" pitchFamily="18" charset="0"/>
+                      </a:rPr>
+                      <m:t>(</m:t>
+                    </m:r>
+                    <m:sSup>
+                      <m:sSupPr>
+                        <m:ctrlPr>
+                          <a:rPr lang="en-US" sz="1600" b="0" i="1" smtClean="0">
+                            <a:latin typeface="Cambria Math" panose="02040503050406030204" pitchFamily="18" charset="0"/>
+                          </a:rPr>
+                        </m:ctrlPr>
+                      </m:sSupPr>
+                      <m:e>
+                        <m:r>
+                          <a:rPr lang="en-US" sz="1600" b="0" i="1" smtClean="0">
+                            <a:latin typeface="Cambria Math" panose="02040503050406030204" pitchFamily="18" charset="0"/>
+                          </a:rPr>
+                          <m:t>𝑠</m:t>
+                        </m:r>
+                      </m:e>
+                      <m:sup>
+                        <m:r>
+                          <a:rPr lang="en-US" sz="1600" b="0" i="1" smtClean="0">
+                            <a:latin typeface="Cambria Math" panose="02040503050406030204" pitchFamily="18" charset="0"/>
+                          </a:rPr>
+                          <m:t>′</m:t>
+                        </m:r>
+                      </m:sup>
+                    </m:sSup>
+                    <m:r>
+                      <a:rPr lang="en-US" sz="1600" b="0" i="1" smtClean="0">
+                        <a:latin typeface="Cambria Math" panose="02040503050406030204" pitchFamily="18" charset="0"/>
+                      </a:rPr>
+                      <m:t>,</m:t>
+                    </m:r>
+                    <m:r>
+                      <a:rPr lang="en-US" sz="1600" b="0" i="1" smtClean="0">
+                        <a:latin typeface="Cambria Math" panose="02040503050406030204" pitchFamily="18" charset="0"/>
+                      </a:rPr>
+                      <m:t>𝑟</m:t>
+                    </m:r>
+                    <m:r>
+                      <a:rPr lang="en-US" sz="1600" b="0" i="1" smtClean="0">
+                        <a:latin typeface="Cambria Math" panose="02040503050406030204" pitchFamily="18" charset="0"/>
+                      </a:rPr>
+                      <m:t>|</m:t>
+                    </m:r>
+                    <m:r>
+                      <a:rPr lang="en-US" sz="1600" b="0" i="1" smtClean="0">
+                        <a:latin typeface="Cambria Math" panose="02040503050406030204" pitchFamily="18" charset="0"/>
+                      </a:rPr>
+                      <m:t>𝑠</m:t>
+                    </m:r>
+                    <m:r>
+                      <a:rPr lang="en-US" sz="1600" b="0" i="1" smtClean="0">
+                        <a:latin typeface="Cambria Math" panose="02040503050406030204" pitchFamily="18" charset="0"/>
+                      </a:rPr>
+                      <m:t>,</m:t>
+                    </m:r>
+                    <m:r>
+                      <a:rPr lang="en-US" sz="1600" b="0" i="1" smtClean="0">
+                        <a:latin typeface="Cambria Math" panose="02040503050406030204" pitchFamily="18" charset="0"/>
+                      </a:rPr>
+                      <m:t>𝑎</m:t>
+                    </m:r>
+                    <m:r>
+                      <a:rPr lang="en-US" sz="1600" b="0" i="1" smtClean="0">
+                        <a:latin typeface="Cambria Math" panose="02040503050406030204" pitchFamily="18" charset="0"/>
+                      </a:rPr>
+                      <m:t>)</m:t>
+                    </m:r>
+                  </m:oMath>
+                </a14:m>
+                <a:endParaRPr lang="en-US" sz="1600" dirty="0"/>
+              </a:p>
+            </p:txBody>
+          </p:sp>
+        </mc:Choice>
+        <mc:Fallback xmlns="">
+          <p:sp>
+            <p:nvSpPr>
+              <p:cNvPr id="3" name="Speech Bubble: Rectangle with Corners Rounded 2">
+                <a:extLst>
+                  <a:ext uri="{FF2B5EF4-FFF2-40B4-BE49-F238E27FC236}">
+                    <a16:creationId xmlns:a16="http://schemas.microsoft.com/office/drawing/2014/main" id="{8DF5D581-CEB0-AD06-59A9-C85B97349AB2}"/>
+                  </a:ext>
+                </a:extLst>
+              </p:cNvPr>
+              <p:cNvSpPr>
+                <a:spLocks noRot="1" noChangeAspect="1" noMove="1" noResize="1" noEditPoints="1" noAdjustHandles="1" noChangeArrowheads="1" noChangeShapeType="1" noTextEdit="1"/>
+              </p:cNvSpPr>
+              <p:nvPr/>
+            </p:nvSpPr>
+            <p:spPr>
+              <a:xfrm>
+                <a:off x="7134545" y="4567464"/>
+                <a:ext cx="3419445" cy="338553"/>
+              </a:xfrm>
+              <a:prstGeom prst="wedgeRoundRectCallout">
+                <a:avLst>
+                  <a:gd name="adj1" fmla="val -57067"/>
+                  <a:gd name="adj2" fmla="val -4170"/>
+                  <a:gd name="adj3" fmla="val 16667"/>
+                </a:avLst>
+              </a:prstGeom>
+              <a:blipFill>
+                <a:blip r:embed="rId4"/>
+                <a:stretch>
+                  <a:fillRect t="-1695" b="-18644"/>
+                </a:stretch>
+              </a:blipFill>
+            </p:spPr>
+            <p:txBody>
+              <a:bodyPr/>
+              <a:lstStyle/>
+              <a:p>
+                <a:r>
+                  <a:rPr lang="en-US">
+                    <a:noFill/>
+                  </a:rPr>
+                  <a:t> </a:t>
+                </a:r>
+              </a:p>
+            </p:txBody>
+          </p:sp>
+        </mc:Fallback>
+      </mc:AlternateContent>
     </p:spTree>
     <p:extLst>
       <p:ext uri="{BB962C8B-B14F-4D97-AF65-F5344CB8AC3E}">

--- a/slides/Lecture_Chapter08.pptx
+++ b/slides/Lecture_Chapter08.pptx
@@ -330,7 +330,7 @@
           <a:p>
             <a:fld id="{3E22BF2E-04DA-469E-97C5-BB68A0368813}" type="datetimeFigureOut">
               <a:rPr lang="en-US" smtClean="0"/>
-              <a:t>2/23/2026</a:t>
+              <a:t>3/4/2026</a:t>
             </a:fld>
             <a:endParaRPr lang="en-US"/>
           </a:p>
@@ -528,7 +528,7 @@
           <a:p>
             <a:fld id="{3E22BF2E-04DA-469E-97C5-BB68A0368813}" type="datetimeFigureOut">
               <a:rPr lang="en-US" smtClean="0"/>
-              <a:t>2/23/2026</a:t>
+              <a:t>3/4/2026</a:t>
             </a:fld>
             <a:endParaRPr lang="en-US"/>
           </a:p>
@@ -736,7 +736,7 @@
           <a:p>
             <a:fld id="{3E22BF2E-04DA-469E-97C5-BB68A0368813}" type="datetimeFigureOut">
               <a:rPr lang="en-US" smtClean="0"/>
-              <a:t>2/23/2026</a:t>
+              <a:t>3/4/2026</a:t>
             </a:fld>
             <a:endParaRPr lang="en-US"/>
           </a:p>
@@ -944,7 +944,7 @@
           <a:p>
             <a:fld id="{3E22BF2E-04DA-469E-97C5-BB68A0368813}" type="datetimeFigureOut">
               <a:rPr lang="en-US" smtClean="0"/>
-              <a:t>2/23/2026</a:t>
+              <a:t>3/4/2026</a:t>
             </a:fld>
             <a:endParaRPr lang="en-US"/>
           </a:p>
@@ -1219,7 +1219,7 @@
           <a:p>
             <a:fld id="{3E22BF2E-04DA-469E-97C5-BB68A0368813}" type="datetimeFigureOut">
               <a:rPr lang="en-US" smtClean="0"/>
-              <a:t>2/23/2026</a:t>
+              <a:t>3/4/2026</a:t>
             </a:fld>
             <a:endParaRPr lang="en-US"/>
           </a:p>
@@ -1484,7 +1484,7 @@
           <a:p>
             <a:fld id="{3E22BF2E-04DA-469E-97C5-BB68A0368813}" type="datetimeFigureOut">
               <a:rPr lang="en-US" smtClean="0"/>
-              <a:t>2/23/2026</a:t>
+              <a:t>3/4/2026</a:t>
             </a:fld>
             <a:endParaRPr lang="en-US"/>
           </a:p>
@@ -1896,7 +1896,7 @@
           <a:p>
             <a:fld id="{3E22BF2E-04DA-469E-97C5-BB68A0368813}" type="datetimeFigureOut">
               <a:rPr lang="en-US" smtClean="0"/>
-              <a:t>2/23/2026</a:t>
+              <a:t>3/4/2026</a:t>
             </a:fld>
             <a:endParaRPr lang="en-US"/>
           </a:p>
@@ -2037,7 +2037,7 @@
           <a:p>
             <a:fld id="{3E22BF2E-04DA-469E-97C5-BB68A0368813}" type="datetimeFigureOut">
               <a:rPr lang="en-US" smtClean="0"/>
-              <a:t>2/23/2026</a:t>
+              <a:t>3/4/2026</a:t>
             </a:fld>
             <a:endParaRPr lang="en-US"/>
           </a:p>
@@ -2150,7 +2150,7 @@
           <a:p>
             <a:fld id="{3E22BF2E-04DA-469E-97C5-BB68A0368813}" type="datetimeFigureOut">
               <a:rPr lang="en-US" smtClean="0"/>
-              <a:t>2/23/2026</a:t>
+              <a:t>3/4/2026</a:t>
             </a:fld>
             <a:endParaRPr lang="en-US"/>
           </a:p>
@@ -2461,7 +2461,7 @@
           <a:p>
             <a:fld id="{3E22BF2E-04DA-469E-97C5-BB68A0368813}" type="datetimeFigureOut">
               <a:rPr lang="en-US" smtClean="0"/>
-              <a:t>2/23/2026</a:t>
+              <a:t>3/4/2026</a:t>
             </a:fld>
             <a:endParaRPr lang="en-US"/>
           </a:p>
@@ -2749,7 +2749,7 @@
           <a:p>
             <a:fld id="{3E22BF2E-04DA-469E-97C5-BB68A0368813}" type="datetimeFigureOut">
               <a:rPr lang="en-US" smtClean="0"/>
-              <a:t>2/23/2026</a:t>
+              <a:t>3/4/2026</a:t>
             </a:fld>
             <a:endParaRPr lang="en-US"/>
           </a:p>
@@ -2990,7 +2990,7 @@
           <a:p>
             <a:fld id="{3E22BF2E-04DA-469E-97C5-BB68A0368813}" type="datetimeFigureOut">
               <a:rPr lang="en-US" smtClean="0"/>
-              <a:t>2/23/2026</a:t>
+              <a:t>3/4/2026</a:t>
             </a:fld>
             <a:endParaRPr lang="en-US"/>
           </a:p>
@@ -9720,7 +9720,7 @@
         <p:spPr>
           <a:xfrm>
             <a:off x="4235081" y="1626887"/>
-            <a:ext cx="1531277" cy="307777"/>
+            <a:ext cx="1531277" cy="523220"/>
           </a:xfrm>
           <a:prstGeom prst="rect">
             <a:avLst/>
@@ -9735,7 +9735,14 @@
           <a:p>
             <a:r>
               <a:rPr lang="en-US" sz="1400" dirty="0"/>
-              <a:t>one-step Sarsa</a:t>
+              <a:t>one-step Sarsa,</a:t>
+            </a:r>
+            <a:br>
+              <a:rPr lang="en-US" sz="1400" dirty="0"/>
+            </a:br>
+            <a:r>
+              <a:rPr lang="en-US" sz="1400" dirty="0"/>
+              <a:t>Q-Learning</a:t>
             </a:r>
           </a:p>
         </p:txBody>
@@ -9770,7 +9777,7 @@
           <a:p>
             <a:r>
               <a:rPr lang="en-US" sz="1400" dirty="0"/>
-              <a:t>+ Q-Learning, Expected Sarsa</a:t>
+              <a:t>+ Expected Sarsa</a:t>
             </a:r>
           </a:p>
         </p:txBody>
@@ -9876,6 +9883,212 @@
           </p:txBody>
         </p:sp>
       </p:grpSp>
+      <p:sp>
+        <p:nvSpPr>
+          <p:cNvPr id="24" name="Arrow: Down 23">
+            <a:extLst>
+              <a:ext uri="{FF2B5EF4-FFF2-40B4-BE49-F238E27FC236}">
+                <a16:creationId xmlns:a16="http://schemas.microsoft.com/office/drawing/2014/main" id="{9460DE18-4C9A-6BA3-92A8-156AF432C6B4}"/>
+              </a:ext>
+            </a:extLst>
+          </p:cNvPr>
+          <p:cNvSpPr/>
+          <p:nvPr/>
+        </p:nvSpPr>
+        <p:spPr>
+          <a:xfrm flipV="1">
+            <a:off x="2651452" y="2053157"/>
+            <a:ext cx="679509" cy="2852096"/>
+          </a:xfrm>
+          <a:prstGeom prst="downArrow">
+            <a:avLst/>
+          </a:prstGeom>
+        </p:spPr>
+        <p:style>
+          <a:lnRef idx="2">
+            <a:schemeClr val="accent3">
+              <a:shade val="15000"/>
+            </a:schemeClr>
+          </a:lnRef>
+          <a:fillRef idx="1">
+            <a:schemeClr val="accent3"/>
+          </a:fillRef>
+          <a:effectRef idx="0">
+            <a:schemeClr val="accent3"/>
+          </a:effectRef>
+          <a:fontRef idx="minor">
+            <a:schemeClr val="lt1"/>
+          </a:fontRef>
+        </p:style>
+        <p:txBody>
+          <a:bodyPr vert="vert" rtlCol="0" anchor="ctr"/>
+          <a:lstStyle/>
+          <a:p>
+            <a:pPr algn="ctr"/>
+            <a:r>
+              <a:rPr lang="en-US" dirty="0"/>
+              <a:t>Bias increases</a:t>
+            </a:r>
+          </a:p>
+        </p:txBody>
+      </p:sp>
+      <p:sp>
+        <p:nvSpPr>
+          <p:cNvPr id="26" name="Arrow: Right 25">
+            <a:extLst>
+              <a:ext uri="{FF2B5EF4-FFF2-40B4-BE49-F238E27FC236}">
+                <a16:creationId xmlns:a16="http://schemas.microsoft.com/office/drawing/2014/main" id="{9F10ED61-9697-A761-C38E-9B0931805EDB}"/>
+              </a:ext>
+            </a:extLst>
+          </p:cNvPr>
+          <p:cNvSpPr/>
+          <p:nvPr/>
+        </p:nvSpPr>
+        <p:spPr>
+          <a:xfrm flipH="1">
+            <a:off x="4369599" y="5513480"/>
+            <a:ext cx="2327944" cy="586950"/>
+          </a:xfrm>
+          <a:prstGeom prst="rightArrow">
+            <a:avLst/>
+          </a:prstGeom>
+        </p:spPr>
+        <p:style>
+          <a:lnRef idx="2">
+            <a:schemeClr val="accent3">
+              <a:shade val="15000"/>
+            </a:schemeClr>
+          </a:lnRef>
+          <a:fillRef idx="1">
+            <a:schemeClr val="accent3"/>
+          </a:fillRef>
+          <a:effectRef idx="0">
+            <a:schemeClr val="accent3"/>
+          </a:effectRef>
+          <a:fontRef idx="minor">
+            <a:schemeClr val="lt1"/>
+          </a:fontRef>
+        </p:style>
+        <p:txBody>
+          <a:bodyPr rtlCol="0" anchor="ctr"/>
+          <a:lstStyle/>
+          <a:p>
+            <a:pPr algn="ctr"/>
+            <a:r>
+              <a:rPr lang="en-US" dirty="0"/>
+              <a:t>Variance increases</a:t>
+            </a:r>
+          </a:p>
+        </p:txBody>
+      </p:sp>
+      <p:grpSp>
+        <p:nvGrpSpPr>
+          <p:cNvPr id="27" name="Group 26">
+            <a:extLst>
+              <a:ext uri="{FF2B5EF4-FFF2-40B4-BE49-F238E27FC236}">
+                <a16:creationId xmlns:a16="http://schemas.microsoft.com/office/drawing/2014/main" id="{7D1DE593-0B34-D530-BE33-148CB1599F39}"/>
+              </a:ext>
+            </a:extLst>
+          </p:cNvPr>
+          <p:cNvGrpSpPr/>
+          <p:nvPr/>
+        </p:nvGrpSpPr>
+        <p:grpSpPr>
+          <a:xfrm>
+            <a:off x="5227038" y="3517291"/>
+            <a:ext cx="1588797" cy="523220"/>
+            <a:chOff x="5069641" y="3855268"/>
+            <a:chExt cx="1588797" cy="523220"/>
+          </a:xfrm>
+        </p:grpSpPr>
+        <p:sp>
+          <p:nvSpPr>
+            <p:cNvPr id="28" name="Oval 27">
+              <a:extLst>
+                <a:ext uri="{FF2B5EF4-FFF2-40B4-BE49-F238E27FC236}">
+                  <a16:creationId xmlns:a16="http://schemas.microsoft.com/office/drawing/2014/main" id="{A9F37B31-30DD-6438-F97B-1D7F20C6B9DE}"/>
+                </a:ext>
+              </a:extLst>
+            </p:cNvPr>
+            <p:cNvSpPr/>
+            <p:nvPr/>
+          </p:nvSpPr>
+          <p:spPr>
+            <a:xfrm>
+              <a:off x="5069641" y="4071507"/>
+              <a:ext cx="104702" cy="102624"/>
+            </a:xfrm>
+            <a:prstGeom prst="ellipse">
+              <a:avLst/>
+            </a:prstGeom>
+            <a:ln w="6350"/>
+          </p:spPr>
+          <p:style>
+            <a:lnRef idx="2">
+              <a:schemeClr val="dk1"/>
+            </a:lnRef>
+            <a:fillRef idx="1">
+              <a:schemeClr val="lt1"/>
+            </a:fillRef>
+            <a:effectRef idx="0">
+              <a:schemeClr val="dk1"/>
+            </a:effectRef>
+            <a:fontRef idx="minor">
+              <a:schemeClr val="dk1"/>
+            </a:fontRef>
+          </p:style>
+          <p:txBody>
+            <a:bodyPr rtlCol="0" anchor="ctr"/>
+            <a:lstStyle/>
+            <a:p>
+              <a:pPr algn="ctr"/>
+              <a:endParaRPr lang="en-US"/>
+            </a:p>
+          </p:txBody>
+        </p:sp>
+        <p:sp>
+          <p:nvSpPr>
+            <p:cNvPr id="29" name="TextBox 28">
+              <a:extLst>
+                <a:ext uri="{FF2B5EF4-FFF2-40B4-BE49-F238E27FC236}">
+                  <a16:creationId xmlns:a16="http://schemas.microsoft.com/office/drawing/2014/main" id="{D5F71844-0FD3-56FF-0936-594357BEDB8D}"/>
+                </a:ext>
+              </a:extLst>
+            </p:cNvPr>
+            <p:cNvSpPr txBox="1"/>
+            <p:nvPr/>
+          </p:nvSpPr>
+          <p:spPr>
+            <a:xfrm>
+              <a:off x="5127161" y="3855268"/>
+              <a:ext cx="1531277" cy="523220"/>
+            </a:xfrm>
+            <a:prstGeom prst="rect">
+              <a:avLst/>
+            </a:prstGeom>
+            <a:noFill/>
+          </p:spPr>
+          <p:txBody>
+            <a:bodyPr wrap="square" rtlCol="0">
+              <a:spAutoFit/>
+            </a:bodyPr>
+            <a:lstStyle/>
+            <a:p>
+              <a:r>
+                <a:rPr lang="en-US" sz="1400" dirty="0"/>
+                <a:t>Heuristic</a:t>
+              </a:r>
+              <a:br>
+                <a:rPr lang="en-US" sz="1400" dirty="0"/>
+              </a:br>
+              <a:r>
+                <a:rPr lang="en-US" sz="1400" dirty="0"/>
+                <a:t>Search</a:t>
+              </a:r>
+            </a:p>
+          </p:txBody>
+        </p:sp>
+      </p:grpSp>
     </p:spTree>
     <p:extLst>
       <p:ext uri="{BB962C8B-B14F-4D97-AF65-F5344CB8AC3E}">
@@ -9952,7 +10165,7 @@
                             </p:stCondLst>
                             <p:childTnLst>
                               <p:par>
-                                <p:cTn id="9" presetID="1" presetClass="entr" presetSubtype="0" fill="hold" nodeType="clickEffect">
+                                <p:cTn id="9" presetID="1" presetClass="entr" presetSubtype="0" fill="hold" grpId="0" nodeType="clickEffect">
                                   <p:stCondLst>
                                     <p:cond delay="0"/>
                                   </p:stCondLst>
@@ -9965,7 +10178,7 @@
                                           </p:stCondLst>
                                         </p:cTn>
                                         <p:tgtEl>
-                                          <p:spTgt spid="14"/>
+                                          <p:spTgt spid="24"/>
                                         </p:tgtEl>
                                         <p:attrNameLst>
                                           <p:attrName>style.visibility</p:attrName>
@@ -9997,7 +10210,7 @@
                             </p:stCondLst>
                             <p:childTnLst>
                               <p:par>
-                                <p:cTn id="13" presetID="1" presetClass="entr" presetSubtype="0" fill="hold" grpId="0" nodeType="clickEffect">
+                                <p:cTn id="13" presetID="1" presetClass="entr" presetSubtype="0" fill="hold" nodeType="clickEffect">
                                   <p:stCondLst>
                                     <p:cond delay="0"/>
                                   </p:stCondLst>
@@ -10010,7 +10223,7 @@
                                           </p:stCondLst>
                                         </p:cTn>
                                         <p:tgtEl>
-                                          <p:spTgt spid="3"/>
+                                          <p:spTgt spid="14"/>
                                         </p:tgtEl>
                                         <p:attrNameLst>
                                           <p:attrName>style.visibility</p:attrName>
@@ -10055,7 +10268,7 @@
                                           </p:stCondLst>
                                         </p:cTn>
                                         <p:tgtEl>
-                                          <p:spTgt spid="18"/>
+                                          <p:spTgt spid="26"/>
                                         </p:tgtEl>
                                         <p:attrNameLst>
                                           <p:attrName>style.visibility</p:attrName>
@@ -10100,7 +10313,7 @@
                                           </p:stCondLst>
                                         </p:cTn>
                                         <p:tgtEl>
-                                          <p:spTgt spid="19"/>
+                                          <p:spTgt spid="3"/>
                                         </p:tgtEl>
                                         <p:attrNameLst>
                                           <p:attrName>style.visibility</p:attrName>
@@ -10132,7 +10345,7 @@
                             </p:stCondLst>
                             <p:childTnLst>
                               <p:par>
-                                <p:cTn id="25" presetID="1" presetClass="entr" presetSubtype="0" fill="hold" nodeType="clickEffect">
+                                <p:cTn id="25" presetID="1" presetClass="entr" presetSubtype="0" fill="hold" grpId="0" nodeType="clickEffect">
                                   <p:stCondLst>
                                     <p:cond delay="0"/>
                                   </p:stCondLst>
@@ -10145,7 +10358,7 @@
                                           </p:stCondLst>
                                         </p:cTn>
                                         <p:tgtEl>
-                                          <p:spTgt spid="22"/>
+                                          <p:spTgt spid="18"/>
                                         </p:tgtEl>
                                         <p:attrNameLst>
                                           <p:attrName>style.visibility</p:attrName>
@@ -10177,7 +10390,7 @@
                             </p:stCondLst>
                             <p:childTnLst>
                               <p:par>
-                                <p:cTn id="29" presetID="1" presetClass="entr" presetSubtype="0" fill="hold" nodeType="clickEffect">
+                                <p:cTn id="29" presetID="1" presetClass="entr" presetSubtype="0" fill="hold" grpId="0" nodeType="clickEffect">
                                   <p:stCondLst>
                                     <p:cond delay="0"/>
                                   </p:stCondLst>
@@ -10185,6 +10398,141 @@
                                     <p:set>
                                       <p:cBhvr>
                                         <p:cTn id="30" dur="1" fill="hold">
+                                          <p:stCondLst>
+                                            <p:cond delay="0"/>
+                                          </p:stCondLst>
+                                        </p:cTn>
+                                        <p:tgtEl>
+                                          <p:spTgt spid="19"/>
+                                        </p:tgtEl>
+                                        <p:attrNameLst>
+                                          <p:attrName>style.visibility</p:attrName>
+                                        </p:attrNameLst>
+                                      </p:cBhvr>
+                                      <p:to>
+                                        <p:strVal val="visible"/>
+                                      </p:to>
+                                    </p:set>
+                                  </p:childTnLst>
+                                </p:cTn>
+                              </p:par>
+                            </p:childTnLst>
+                          </p:cTn>
+                        </p:par>
+                      </p:childTnLst>
+                    </p:cTn>
+                  </p:par>
+                  <p:par>
+                    <p:cTn id="31" fill="hold">
+                      <p:stCondLst>
+                        <p:cond delay="indefinite"/>
+                      </p:stCondLst>
+                      <p:childTnLst>
+                        <p:par>
+                          <p:cTn id="32" fill="hold">
+                            <p:stCondLst>
+                              <p:cond delay="0"/>
+                            </p:stCondLst>
+                            <p:childTnLst>
+                              <p:par>
+                                <p:cTn id="33" presetID="1" presetClass="entr" presetSubtype="0" fill="hold" nodeType="clickEffect">
+                                  <p:stCondLst>
+                                    <p:cond delay="0"/>
+                                  </p:stCondLst>
+                                  <p:childTnLst>
+                                    <p:set>
+                                      <p:cBhvr>
+                                        <p:cTn id="34" dur="1" fill="hold">
+                                          <p:stCondLst>
+                                            <p:cond delay="0"/>
+                                          </p:stCondLst>
+                                        </p:cTn>
+                                        <p:tgtEl>
+                                          <p:spTgt spid="22"/>
+                                        </p:tgtEl>
+                                        <p:attrNameLst>
+                                          <p:attrName>style.visibility</p:attrName>
+                                        </p:attrNameLst>
+                                      </p:cBhvr>
+                                      <p:to>
+                                        <p:strVal val="visible"/>
+                                      </p:to>
+                                    </p:set>
+                                  </p:childTnLst>
+                                </p:cTn>
+                              </p:par>
+                            </p:childTnLst>
+                          </p:cTn>
+                        </p:par>
+                      </p:childTnLst>
+                    </p:cTn>
+                  </p:par>
+                  <p:par>
+                    <p:cTn id="35" fill="hold">
+                      <p:stCondLst>
+                        <p:cond delay="indefinite"/>
+                      </p:stCondLst>
+                      <p:childTnLst>
+                        <p:par>
+                          <p:cTn id="36" fill="hold">
+                            <p:stCondLst>
+                              <p:cond delay="0"/>
+                            </p:stCondLst>
+                            <p:childTnLst>
+                              <p:par>
+                                <p:cTn id="37" presetID="1" presetClass="entr" presetSubtype="0" fill="hold" nodeType="clickEffect">
+                                  <p:stCondLst>
+                                    <p:cond delay="0"/>
+                                  </p:stCondLst>
+                                  <p:childTnLst>
+                                    <p:set>
+                                      <p:cBhvr>
+                                        <p:cTn id="38" dur="1" fill="hold">
+                                          <p:stCondLst>
+                                            <p:cond delay="0"/>
+                                          </p:stCondLst>
+                                        </p:cTn>
+                                        <p:tgtEl>
+                                          <p:spTgt spid="27"/>
+                                        </p:tgtEl>
+                                        <p:attrNameLst>
+                                          <p:attrName>style.visibility</p:attrName>
+                                        </p:attrNameLst>
+                                      </p:cBhvr>
+                                      <p:to>
+                                        <p:strVal val="visible"/>
+                                      </p:to>
+                                    </p:set>
+                                  </p:childTnLst>
+                                </p:cTn>
+                              </p:par>
+                            </p:childTnLst>
+                          </p:cTn>
+                        </p:par>
+                      </p:childTnLst>
+                    </p:cTn>
+                  </p:par>
+                  <p:par>
+                    <p:cTn id="39" fill="hold">
+                      <p:stCondLst>
+                        <p:cond delay="indefinite"/>
+                      </p:stCondLst>
+                      <p:childTnLst>
+                        <p:par>
+                          <p:cTn id="40" fill="hold">
+                            <p:stCondLst>
+                              <p:cond delay="0"/>
+                            </p:stCondLst>
+                            <p:childTnLst>
+                              <p:par>
+                                <p:cTn id="41" presetID="1" presetClass="entr" presetSubtype="0" fill="hold" nodeType="clickEffect">
+                                  <p:stCondLst>
+                                    <p:cond delay="0"/>
+                                  </p:stCondLst>
+                                  <p:childTnLst>
+                                    <p:set>
+                                      <p:cBhvr>
+                                        <p:cTn id="42" dur="1" fill="hold">
                                           <p:stCondLst>
                                             <p:cond delay="0"/>
                                           </p:stCondLst>
@@ -10234,6 +10582,8 @@
       <p:bldP spid="3" grpId="0" animBg="1"/>
       <p:bldP spid="18" grpId="0"/>
       <p:bldP spid="19" grpId="0"/>
+      <p:bldP spid="24" grpId="0" animBg="1"/>
+      <p:bldP spid="26" grpId="0" animBg="1"/>
     </p:bldLst>
   </p:timing>
 </p:sld>
@@ -10303,7 +10653,7 @@
         <p:spPr/>
         <p:txBody>
           <a:bodyPr>
-            <a:normAutofit fontScale="85000" lnSpcReduction="20000"/>
+            <a:normAutofit fontScale="77500" lnSpcReduction="20000"/>
           </a:bodyPr>
           <a:lstStyle/>
           <a:p>
@@ -10375,11 +10725,11 @@
             <a:pPr lvl="1"/>
             <a:r>
               <a:rPr lang="en-US" b="1" dirty="0"/>
-              <a:t>Reuse of data</a:t>
+              <a:t>Reuse of data is possible</a:t>
             </a:r>
             <a:r>
               <a:rPr lang="en-US" dirty="0"/>
-              <a:t>: sample efficiency, offline, and batch RL</a:t>
+              <a:t>: offline, and batch RL on existing training data leads to better sample efficiency.</a:t>
             </a:r>
           </a:p>
           <a:p>
@@ -10405,25 +10755,33 @@
             </a:r>
             <a:r>
               <a:rPr lang="en-US" dirty="0"/>
-              <a:t>: E.g., importance sampling</a:t>
+              <a:t>: E.g., importance sampling which is not able to use all data when the behavioral policy is very different from the target policy.</a:t>
             </a:r>
           </a:p>
           <a:p>
             <a:pPr lvl="1"/>
             <a:r>
               <a:rPr lang="en-US" dirty="0"/>
-              <a:t>May suffer from high variance (due to importance sampling)</a:t>
+              <a:t>May suffer from </a:t>
+            </a:r>
+            <a:r>
+              <a:rPr lang="en-US" b="1" dirty="0"/>
+              <a:t>high variance </a:t>
+            </a:r>
+            <a:r>
+              <a:rPr lang="en-US" dirty="0"/>
+              <a:t>caused by importance sampling.</a:t>
             </a:r>
           </a:p>
           <a:p>
             <a:pPr lvl="1"/>
             <a:r>
               <a:rPr lang="en-US" b="1" dirty="0"/>
-              <a:t>Instability with non-linear function approximation </a:t>
+              <a:t>Instability with non-linear function approximation: </a:t>
             </a:r>
             <a:r>
               <a:rPr lang="en-US" dirty="0"/>
-              <a:t>(deep RL)</a:t>
+              <a:t>This is a major issue for deep RL</a:t>
             </a:r>
           </a:p>
         </p:txBody>
@@ -10769,82 +11127,184 @@
           </a:p>
         </p:txBody>
       </p:sp>
-      <p:sp>
-        <p:nvSpPr>
-          <p:cNvPr id="3" name="Content Placeholder 2">
-            <a:extLst>
-              <a:ext uri="{FF2B5EF4-FFF2-40B4-BE49-F238E27FC236}">
-                <a16:creationId xmlns:a16="http://schemas.microsoft.com/office/drawing/2014/main" id="{8CB60D31-9CD5-1596-21BF-AD897227AFBE}"/>
-              </a:ext>
-            </a:extLst>
-          </p:cNvPr>
-          <p:cNvSpPr>
-            <a:spLocks noGrp="1"/>
-          </p:cNvSpPr>
-          <p:nvPr>
-            <p:ph idx="1"/>
-          </p:nvPr>
-        </p:nvSpPr>
-        <p:spPr/>
-        <p:txBody>
-          <a:bodyPr>
-            <a:normAutofit/>
-          </a:bodyPr>
-          <a:lstStyle/>
-          <a:p>
-            <a:r>
-              <a:rPr lang="en-US" b="1" dirty="0"/>
-              <a:t>Definition of return</a:t>
-            </a:r>
-            <a:r>
-              <a:rPr lang="en-US" dirty="0"/>
-              <a:t>: Episodic vs. continuing task; discounted vs. undiscounted.</a:t>
-            </a:r>
-          </a:p>
-          <a:p>
-            <a:r>
-              <a:rPr lang="en-US" b="1" dirty="0"/>
-              <a:t>Action values vs. state values</a:t>
-            </a:r>
-          </a:p>
-          <a:p>
-            <a:r>
-              <a:rPr lang="en-US" b="1" dirty="0"/>
-              <a:t>Exploration vs Exploitation</a:t>
-            </a:r>
-            <a:r>
-              <a:rPr lang="en-US" dirty="0"/>
-              <a:t>: This is a trade-off. Many methods need exploration (covering behavior policies) for convergence.</a:t>
-            </a:r>
-          </a:p>
-          <a:p>
-            <a:r>
-              <a:rPr lang="en-US" b="1" dirty="0"/>
-              <a:t>Synchronous vs. Asynchronous</a:t>
-            </a:r>
-            <a:r>
-              <a:rPr lang="en-US" dirty="0"/>
-              <a:t>: Are all states updated at once or one by one in some order?</a:t>
-            </a:r>
-          </a:p>
-          <a:p>
-            <a:r>
-              <a:rPr lang="en-US" b="1" dirty="0"/>
-              <a:t>Real vs. Simulated</a:t>
-            </a:r>
-            <a:r>
-              <a:rPr lang="en-US" dirty="0"/>
-              <a:t>: Are real experiences, simulations, or both used for updates?</a:t>
-            </a:r>
-          </a:p>
-          <a:p>
-            <a:endParaRPr lang="en-US" dirty="0"/>
-          </a:p>
-          <a:p>
-            <a:endParaRPr lang="en-US" dirty="0"/>
-          </a:p>
-        </p:txBody>
-      </p:sp>
+      <mc:AlternateContent xmlns:mc="http://schemas.openxmlformats.org/markup-compatibility/2006">
+        <mc:Choice xmlns:a14="http://schemas.microsoft.com/office/drawing/2010/main" Requires="a14">
+          <p:sp>
+            <p:nvSpPr>
+              <p:cNvPr id="3" name="Content Placeholder 2">
+                <a:extLst>
+                  <a:ext uri="{FF2B5EF4-FFF2-40B4-BE49-F238E27FC236}">
+                    <a16:creationId xmlns:a16="http://schemas.microsoft.com/office/drawing/2014/main" id="{8CB60D31-9CD5-1596-21BF-AD897227AFBE}"/>
+                  </a:ext>
+                </a:extLst>
+              </p:cNvPr>
+              <p:cNvSpPr>
+                <a:spLocks noGrp="1"/>
+              </p:cNvSpPr>
+              <p:nvPr>
+                <p:ph idx="1"/>
+              </p:nvPr>
+            </p:nvSpPr>
+            <p:spPr/>
+            <p:txBody>
+              <a:bodyPr>
+                <a:normAutofit fontScale="77500" lnSpcReduction="20000"/>
+              </a:bodyPr>
+              <a:lstStyle/>
+              <a:p>
+                <a:r>
+                  <a:rPr lang="en-US" b="1" dirty="0"/>
+                  <a:t>Definition of return</a:t>
+                </a:r>
+                <a:r>
+                  <a:rPr lang="en-US" dirty="0"/>
+                  <a:t>: </a:t>
+                </a:r>
+              </a:p>
+              <a:p>
+                <a:pPr lvl="1"/>
+                <a:r>
+                  <a:rPr lang="en-US" dirty="0"/>
+                  <a:t>Episodic vs. continuing task</a:t>
+                </a:r>
+              </a:p>
+              <a:p>
+                <a:pPr lvl="1"/>
+                <a:r>
+                  <a:rPr lang="en-US" dirty="0"/>
+                  <a:t>Discounted vs. undiscounted</a:t>
+                </a:r>
+              </a:p>
+              <a:p>
+                <a:endParaRPr lang="en-US" b="1" dirty="0"/>
+              </a:p>
+              <a:p>
+                <a:r>
+                  <a:rPr lang="en-US" b="1" dirty="0"/>
+                  <a:t>Action values </a:t>
+                </a:r>
+                <a14:m>
+                  <m:oMath xmlns:m="http://schemas.openxmlformats.org/officeDocument/2006/math">
+                    <m:r>
+                      <a:rPr lang="en-US" i="1" dirty="0" smtClean="0">
+                        <a:latin typeface="Cambria Math" panose="02040503050406030204" pitchFamily="18" charset="0"/>
+                      </a:rPr>
+                      <m:t>𝑞</m:t>
+                    </m:r>
+                  </m:oMath>
+                </a14:m>
+                <a:r>
+                  <a:rPr lang="en-US" b="1" dirty="0"/>
+                  <a:t> vs. state </a:t>
+                </a:r>
+                <a:r>
+                  <a:rPr lang="en-US" b="1" dirty="0" err="1"/>
+                  <a:t>values</a:t>
+                </a:r>
+                <a:r>
+                  <a:rPr lang="en-US" b="1" dirty="0"/>
+                  <a:t> </a:t>
+                </a:r>
+                <a14:m>
+                  <m:oMath xmlns:m="http://schemas.openxmlformats.org/officeDocument/2006/math">
+                    <m:r>
+                      <a:rPr lang="en-US" b="0" i="1" smtClean="0">
+                        <a:latin typeface="Cambria Math" panose="02040503050406030204" pitchFamily="18" charset="0"/>
+                      </a:rPr>
+                      <m:t>𝑣</m:t>
+                    </m:r>
+                  </m:oMath>
+                </a14:m>
+                <a:endParaRPr lang="en-US" dirty="0"/>
+              </a:p>
+              <a:p>
+                <a:endParaRPr lang="en-US" b="1" dirty="0"/>
+              </a:p>
+              <a:p>
+                <a:r>
+                  <a:rPr lang="en-US" b="1" dirty="0"/>
+                  <a:t>Exploration vs. exploitation</a:t>
+                </a:r>
+                <a:r>
+                  <a:rPr lang="en-US" dirty="0"/>
+                  <a:t>: This is a trade-off. Many methods need exploration (covering behavior policies) for convergence. This is related to on s. off-policy learning.</a:t>
+                </a:r>
+              </a:p>
+              <a:p>
+                <a:endParaRPr lang="en-US" b="1" dirty="0"/>
+              </a:p>
+              <a:p>
+                <a:r>
+                  <a:rPr lang="en-US" b="1" dirty="0"/>
+                  <a:t>Synchronous vs. asynchronous updates</a:t>
+                </a:r>
+                <a:r>
+                  <a:rPr lang="en-US" dirty="0"/>
+                  <a:t>: Are all states updated at once or one by one in some order?</a:t>
+                </a:r>
+              </a:p>
+              <a:p>
+                <a:endParaRPr lang="en-US" b="1" dirty="0"/>
+              </a:p>
+              <a:p>
+                <a:r>
+                  <a:rPr lang="en-US" b="1" dirty="0"/>
+                  <a:t>Real vs. simulated experience</a:t>
+                </a:r>
+                <a:r>
+                  <a:rPr lang="en-US" dirty="0"/>
+                  <a:t>: Are real experiences, simulations, or both used for updates?</a:t>
+                </a:r>
+              </a:p>
+              <a:p>
+                <a:endParaRPr lang="en-US" dirty="0"/>
+              </a:p>
+              <a:p>
+                <a:endParaRPr lang="en-US" dirty="0"/>
+              </a:p>
+            </p:txBody>
+          </p:sp>
+        </mc:Choice>
+        <mc:Fallback>
+          <p:sp>
+            <p:nvSpPr>
+              <p:cNvPr id="3" name="Content Placeholder 2">
+                <a:extLst>
+                  <a:ext uri="{FF2B5EF4-FFF2-40B4-BE49-F238E27FC236}">
+                    <a16:creationId xmlns:a16="http://schemas.microsoft.com/office/drawing/2014/main" id="{8CB60D31-9CD5-1596-21BF-AD897227AFBE}"/>
+                  </a:ext>
+                </a:extLst>
+              </p:cNvPr>
+              <p:cNvSpPr>
+                <a:spLocks noGrp="1" noRot="1" noChangeAspect="1" noMove="1" noResize="1" noEditPoints="1" noAdjustHandles="1" noChangeArrowheads="1" noChangeShapeType="1" noTextEdit="1"/>
+              </p:cNvSpPr>
+              <p:nvPr>
+                <p:ph idx="1"/>
+              </p:nvPr>
+            </p:nvSpPr>
+            <p:spPr>
+              <a:blipFill>
+                <a:blip r:embed="rId2"/>
+                <a:stretch>
+                  <a:fillRect l="-696" t="-2551" b="-1276"/>
+                </a:stretch>
+              </a:blipFill>
+            </p:spPr>
+            <p:txBody>
+              <a:bodyPr/>
+              <a:lstStyle/>
+              <a:p>
+                <a:r>
+                  <a:rPr lang="en-US">
+                    <a:noFill/>
+                  </a:rPr>
+                  <a:t> </a:t>
+                </a:r>
+              </a:p>
+            </p:txBody>
+          </p:sp>
+        </mc:Fallback>
+      </mc:AlternateContent>
     </p:spTree>
     <p:extLst>
       <p:ext uri="{BB962C8B-B14F-4D97-AF65-F5344CB8AC3E}">
@@ -11038,7 +11498,7 @@
                                         <p:tgtEl>
                                           <p:spTgt spid="3">
                                             <p:txEl>
-                                              <p:pRg st="3" end="3"/>
+                                              <p:pRg st="4" end="4"/>
                                             </p:txEl>
                                           </p:spTgt>
                                         </p:tgtEl>
@@ -11087,7 +11547,105 @@
                                         <p:tgtEl>
                                           <p:spTgt spid="3">
                                             <p:txEl>
-                                              <p:pRg st="4" end="4"/>
+                                              <p:pRg st="6" end="6"/>
+                                            </p:txEl>
+                                          </p:spTgt>
+                                        </p:tgtEl>
+                                        <p:attrNameLst>
+                                          <p:attrName>style.visibility</p:attrName>
+                                        </p:attrNameLst>
+                                      </p:cBhvr>
+                                      <p:to>
+                                        <p:strVal val="visible"/>
+                                      </p:to>
+                                    </p:set>
+                                  </p:childTnLst>
+                                </p:cTn>
+                              </p:par>
+                            </p:childTnLst>
+                          </p:cTn>
+                        </p:par>
+                      </p:childTnLst>
+                    </p:cTn>
+                  </p:par>
+                  <p:par>
+                    <p:cTn id="23" fill="hold">
+                      <p:stCondLst>
+                        <p:cond delay="indefinite"/>
+                      </p:stCondLst>
+                      <p:childTnLst>
+                        <p:par>
+                          <p:cTn id="24" fill="hold">
+                            <p:stCondLst>
+                              <p:cond delay="0"/>
+                            </p:stCondLst>
+                            <p:childTnLst>
+                              <p:par>
+                                <p:cTn id="25" presetID="1" presetClass="entr" presetSubtype="0" fill="hold" nodeType="clickEffect">
+                                  <p:stCondLst>
+                                    <p:cond delay="0"/>
+                                  </p:stCondLst>
+                                  <p:childTnLst>
+                                    <p:set>
+                                      <p:cBhvr>
+                                        <p:cTn id="26" dur="1" fill="hold">
+                                          <p:stCondLst>
+                                            <p:cond delay="0"/>
+                                          </p:stCondLst>
+                                        </p:cTn>
+                                        <p:tgtEl>
+                                          <p:spTgt spid="3">
+                                            <p:txEl>
+                                              <p:pRg st="8" end="8"/>
+                                            </p:txEl>
+                                          </p:spTgt>
+                                        </p:tgtEl>
+                                        <p:attrNameLst>
+                                          <p:attrName>style.visibility</p:attrName>
+                                        </p:attrNameLst>
+                                      </p:cBhvr>
+                                      <p:to>
+                                        <p:strVal val="visible"/>
+                                      </p:to>
+                                    </p:set>
+                                  </p:childTnLst>
+                                </p:cTn>
+                              </p:par>
+                            </p:childTnLst>
+                          </p:cTn>
+                        </p:par>
+                      </p:childTnLst>
+                    </p:cTn>
+                  </p:par>
+                  <p:par>
+                    <p:cTn id="27" fill="hold">
+                      <p:stCondLst>
+                        <p:cond delay="indefinite"/>
+                      </p:stCondLst>
+                      <p:childTnLst>
+                        <p:par>
+                          <p:cTn id="28" fill="hold">
+                            <p:stCondLst>
+                              <p:cond delay="0"/>
+                            </p:stCondLst>
+                            <p:childTnLst>
+                              <p:par>
+                                <p:cTn id="29" presetID="1" presetClass="entr" presetSubtype="0" fill="hold" nodeType="clickEffect">
+                                  <p:stCondLst>
+                                    <p:cond delay="0"/>
+                                  </p:stCondLst>
+                                  <p:childTnLst>
+                                    <p:set>
+                                      <p:cBhvr>
+                                        <p:cTn id="30" dur="1" fill="hold">
+                                          <p:stCondLst>
+                                            <p:cond delay="0"/>
+                                          </p:stCondLst>
+                                        </p:cTn>
+                                        <p:tgtEl>
+                                          <p:spTgt spid="3">
+                                            <p:txEl>
+                                              <p:pRg st="10" end="10"/>
                                             </p:txEl>
                                           </p:spTgt>
                                         </p:tgtEl>
@@ -11202,7 +11760,7 @@
         </p:spPr>
         <p:txBody>
           <a:bodyPr>
-            <a:normAutofit fontScale="62500" lnSpcReduction="20000"/>
+            <a:normAutofit fontScale="55000" lnSpcReduction="20000"/>
           </a:bodyPr>
           <a:lstStyle/>
           <a:p>
@@ -11220,7 +11778,29 @@
           <a:p>
             <a:r>
               <a:rPr lang="en-US" dirty="0"/>
-              <a:t>This means that tabular RL implements a </a:t>
+              <a:t>The agent is </a:t>
+            </a:r>
+            <a:r>
+              <a:rPr lang="en-US" b="1" dirty="0"/>
+              <a:t>learning</a:t>
+            </a:r>
+            <a:r>
+              <a:rPr lang="en-US" dirty="0"/>
+              <a:t> because it improves the policy over time.</a:t>
+            </a:r>
+          </a:p>
+          <a:p>
+            <a:r>
+              <a:rPr lang="en-US" dirty="0"/>
+              <a:t>For episodic tasks, tabular RL implements a </a:t>
+            </a:r>
+            <a:r>
+              <a:rPr lang="en-US" b="1" dirty="0"/>
+              <a:t>learning</a:t>
+            </a:r>
+            <a:r>
+              <a:rPr lang="en-US" dirty="0"/>
+              <a:t> </a:t>
             </a:r>
             <a:r>
               <a:rPr lang="en-US" b="1" dirty="0"/>
@@ -11230,7 +11810,15 @@
           <a:p>
             <a:r>
               <a:rPr lang="en-US" dirty="0"/>
-              <a:t>If the rewards express utility, then optimizing the reflexes for maximizing the utility produces a </a:t>
+              <a:t>For continuous tasks, where the rewards express utility, we get a </a:t>
+            </a:r>
+            <a:r>
+              <a:rPr lang="en-US" b="1" dirty="0"/>
+              <a:t>learning</a:t>
+            </a:r>
+            <a:r>
+              <a:rPr lang="en-US" dirty="0"/>
+              <a:t> </a:t>
             </a:r>
             <a:r>
               <a:rPr lang="en-US" b="1" dirty="0"/>
@@ -11267,14 +11855,30 @@
             <a:pPr lvl="1"/>
             <a:r>
               <a:rPr lang="en-US" dirty="0"/>
-              <a:t>DP uses the MDP for planning to create a simple reflex agent.</a:t>
+              <a:t>DP uses the MDP for </a:t>
+            </a:r>
+            <a:r>
+              <a:rPr lang="en-US" b="1" dirty="0"/>
+              <a:t>planning</a:t>
+            </a:r>
+            <a:r>
+              <a:rPr lang="en-US" dirty="0"/>
+              <a:t> to create the optimal simple reflex agent.</a:t>
             </a:r>
           </a:p>
           <a:p>
             <a:pPr lvl="1"/>
             <a:r>
               <a:rPr lang="en-US" dirty="0"/>
-              <a:t>Model-free RL implements a learning simple reflex agent.</a:t>
+              <a:t>Model-free RL </a:t>
+            </a:r>
+            <a:r>
+              <a:rPr lang="en-US" b="1" dirty="0"/>
+              <a:t>learns</a:t>
+            </a:r>
+            <a:r>
+              <a:rPr lang="en-US" dirty="0"/>
+              <a:t> a simple reflex agent.</a:t>
             </a:r>
           </a:p>
           <a:p>
@@ -11747,7 +12351,7 @@
                                         <p:tgtEl>
                                           <p:spTgt spid="3">
                                             <p:txEl>
-                                              <p:pRg st="5" end="5"/>
+                                              <p:pRg st="6" end="6"/>
                                             </p:txEl>
                                           </p:spTgt>
                                         </p:tgtEl>
@@ -11778,7 +12382,7 @@
                                         <p:tgtEl>
                                           <p:spTgt spid="3">
                                             <p:txEl>
-                                              <p:pRg st="6" end="6"/>
+                                              <p:pRg st="7" end="7"/>
                                             </p:txEl>
                                           </p:spTgt>
                                         </p:tgtEl>
@@ -11809,7 +12413,7 @@
                                         <p:tgtEl>
                                           <p:spTgt spid="3">
                                             <p:txEl>
-                                              <p:pRg st="7" end="7"/>
+                                              <p:pRg st="8" end="8"/>
                                             </p:txEl>
                                           </p:spTgt>
                                         </p:tgtEl>
@@ -11840,7 +12444,7 @@
                                         <p:tgtEl>
                                           <p:spTgt spid="3">
                                             <p:txEl>
-                                              <p:pRg st="8" end="8"/>
+                                              <p:pRg st="9" end="9"/>
                                             </p:txEl>
                                           </p:spTgt>
                                         </p:tgtEl>
@@ -11916,7 +12520,7 @@
                                         <p:tgtEl>
                                           <p:spTgt spid="3">
                                             <p:txEl>
-                                              <p:pRg st="9" end="9"/>
+                                              <p:pRg st="10" end="10"/>
                                             </p:txEl>
                                           </p:spTgt>
                                         </p:tgtEl>
@@ -12007,8 +12611,8 @@
           </a:p>
         </p:txBody>
       </p:sp>
-      <mc:AlternateContent xmlns:mc="http://schemas.openxmlformats.org/markup-compatibility/2006" xmlns:a14="http://schemas.microsoft.com/office/drawing/2010/main">
-        <mc:Choice Requires="a14">
+      <mc:AlternateContent xmlns:mc="http://schemas.openxmlformats.org/markup-compatibility/2006">
+        <mc:Choice xmlns:a14="http://schemas.microsoft.com/office/drawing/2010/main" Requires="a14">
           <p:sp>
             <p:nvSpPr>
               <p:cNvPr id="3" name="Content Placeholder 2">
@@ -12168,27 +12772,6 @@
                   <a:buFont typeface="+mj-lt"/>
                   <a:buAutoNum type="arabicPeriod"/>
                 </a:pPr>
-                <a:r>
-                  <a:rPr lang="en-US" dirty="0"/>
-                  <a:t>We need a lot of </a:t>
-                </a:r>
-                <a:r>
-                  <a:rPr lang="en-US" b="1" dirty="0"/>
-                  <a:t>data </a:t>
-                </a:r>
-                <a:r>
-                  <a:rPr lang="en-US" dirty="0"/>
-                  <a:t>to estimate all entries.</a:t>
-                </a:r>
-              </a:p>
-              <a:p>
-                <a:pPr marL="514350" indent="-514350">
-                  <a:spcBef>
-                    <a:spcPts val="0"/>
-                  </a:spcBef>
-                  <a:buFont typeface="+mj-lt"/>
-                  <a:buAutoNum type="arabicPeriod"/>
-                </a:pPr>
                 <a:endParaRPr lang="en-US" dirty="0"/>
               </a:p>
               <a:p>
@@ -12223,16 +12806,23 @@
                 </a:r>
                 <a:r>
                   <a:rPr lang="en-US" dirty="0"/>
-                  <a:t>.</a:t>
+                  <a:t> since each table entry is independent. We </a:t>
+                </a:r>
+                <a:r>
+                  <a:rPr lang="en-US" b="1" dirty="0"/>
+                  <a:t>need a lot of data </a:t>
+                </a:r>
+                <a:r>
+                  <a:rPr lang="en-US" dirty="0"/>
+                  <a:t>to estimate all entries.</a:t>
                 </a:r>
               </a:p>
               <a:p>
-                <a:pPr marL="514350" indent="-514350">
+                <a:pPr marL="0" indent="0">
                   <a:spcBef>
                     <a:spcPts val="0"/>
                   </a:spcBef>
-                  <a:buFont typeface="+mj-lt"/>
-                  <a:buAutoNum type="arabicPeriod"/>
+                  <a:buNone/>
                 </a:pPr>
                 <a:endParaRPr lang="en-US" dirty="0"/>
               </a:p>
@@ -12269,7 +12859,7 @@
             </p:txBody>
           </p:sp>
         </mc:Choice>
-        <mc:Fallback xmlns="">
+        <mc:Fallback>
           <p:sp>
             <p:nvSpPr>
               <p:cNvPr id="3" name="Content Placeholder 2">
@@ -12404,7 +12994,7 @@
                                         <p:tgtEl>
                                           <p:spTgt spid="3">
                                             <p:txEl>
-                                              <p:pRg st="2" end="2"/>
+                                              <p:pRg st="3" end="3"/>
                                             </p:txEl>
                                           </p:spTgt>
                                         </p:tgtEl>
@@ -12453,56 +13043,7 @@
                                         <p:tgtEl>
                                           <p:spTgt spid="3">
                                             <p:txEl>
-                                              <p:pRg st="4" end="4"/>
-                                            </p:txEl>
-                                          </p:spTgt>
-                                        </p:tgtEl>
-                                        <p:attrNameLst>
-                                          <p:attrName>style.visibility</p:attrName>
-                                        </p:attrNameLst>
-                                      </p:cBhvr>
-                                      <p:to>
-                                        <p:strVal val="visible"/>
-                                      </p:to>
-                                    </p:set>
-                                  </p:childTnLst>
-                                </p:cTn>
-                              </p:par>
-                            </p:childTnLst>
-                          </p:cTn>
-                        </p:par>
-                      </p:childTnLst>
-                    </p:cTn>
-                  </p:par>
-                  <p:par>
-                    <p:cTn id="15" fill="hold">
-                      <p:stCondLst>
-                        <p:cond delay="indefinite"/>
-                      </p:stCondLst>
-                      <p:childTnLst>
-                        <p:par>
-                          <p:cTn id="16" fill="hold">
-                            <p:stCondLst>
-                              <p:cond delay="0"/>
-                            </p:stCondLst>
-                            <p:childTnLst>
-                              <p:par>
-                                <p:cTn id="17" presetID="1" presetClass="entr" presetSubtype="0" fill="hold" grpId="0" nodeType="clickEffect">
-                                  <p:stCondLst>
-                                    <p:cond delay="0"/>
-                                  </p:stCondLst>
-                                  <p:childTnLst>
-                                    <p:set>
-                                      <p:cBhvr>
-                                        <p:cTn id="18" dur="1" fill="hold">
-                                          <p:stCondLst>
-                                            <p:cond delay="0"/>
-                                          </p:stCondLst>
-                                        </p:cTn>
-                                        <p:tgtEl>
-                                          <p:spTgt spid="3">
-                                            <p:txEl>
-                                              <p:pRg st="7" end="7"/>
+                                              <p:pRg st="6" end="6"/>
                                             </p:txEl>
                                           </p:spTgt>
                                         </p:tgtEl>

--- a/slides/Lecture_Chapter08.pptx
+++ b/slides/Lecture_Chapter08.pptx
@@ -330,7 +330,7 @@
           <a:p>
             <a:fld id="{3E22BF2E-04DA-469E-97C5-BB68A0368813}" type="datetimeFigureOut">
               <a:rPr lang="en-US" smtClean="0"/>
-              <a:t>3/4/2026</a:t>
+              <a:t>3/23/2026</a:t>
             </a:fld>
             <a:endParaRPr lang="en-US"/>
           </a:p>
@@ -528,7 +528,7 @@
           <a:p>
             <a:fld id="{3E22BF2E-04DA-469E-97C5-BB68A0368813}" type="datetimeFigureOut">
               <a:rPr lang="en-US" smtClean="0"/>
-              <a:t>3/4/2026</a:t>
+              <a:t>3/23/2026</a:t>
             </a:fld>
             <a:endParaRPr lang="en-US"/>
           </a:p>
@@ -736,7 +736,7 @@
           <a:p>
             <a:fld id="{3E22BF2E-04DA-469E-97C5-BB68A0368813}" type="datetimeFigureOut">
               <a:rPr lang="en-US" smtClean="0"/>
-              <a:t>3/4/2026</a:t>
+              <a:t>3/23/2026</a:t>
             </a:fld>
             <a:endParaRPr lang="en-US"/>
           </a:p>
@@ -944,7 +944,7 @@
           <a:p>
             <a:fld id="{3E22BF2E-04DA-469E-97C5-BB68A0368813}" type="datetimeFigureOut">
               <a:rPr lang="en-US" smtClean="0"/>
-              <a:t>3/4/2026</a:t>
+              <a:t>3/23/2026</a:t>
             </a:fld>
             <a:endParaRPr lang="en-US"/>
           </a:p>
@@ -1219,7 +1219,7 @@
           <a:p>
             <a:fld id="{3E22BF2E-04DA-469E-97C5-BB68A0368813}" type="datetimeFigureOut">
               <a:rPr lang="en-US" smtClean="0"/>
-              <a:t>3/4/2026</a:t>
+              <a:t>3/23/2026</a:t>
             </a:fld>
             <a:endParaRPr lang="en-US"/>
           </a:p>
@@ -1484,7 +1484,7 @@
           <a:p>
             <a:fld id="{3E22BF2E-04DA-469E-97C5-BB68A0368813}" type="datetimeFigureOut">
               <a:rPr lang="en-US" smtClean="0"/>
-              <a:t>3/4/2026</a:t>
+              <a:t>3/23/2026</a:t>
             </a:fld>
             <a:endParaRPr lang="en-US"/>
           </a:p>
@@ -1896,7 +1896,7 @@
           <a:p>
             <a:fld id="{3E22BF2E-04DA-469E-97C5-BB68A0368813}" type="datetimeFigureOut">
               <a:rPr lang="en-US" smtClean="0"/>
-              <a:t>3/4/2026</a:t>
+              <a:t>3/23/2026</a:t>
             </a:fld>
             <a:endParaRPr lang="en-US"/>
           </a:p>
@@ -2037,7 +2037,7 @@
           <a:p>
             <a:fld id="{3E22BF2E-04DA-469E-97C5-BB68A0368813}" type="datetimeFigureOut">
               <a:rPr lang="en-US" smtClean="0"/>
-              <a:t>3/4/2026</a:t>
+              <a:t>3/23/2026</a:t>
             </a:fld>
             <a:endParaRPr lang="en-US"/>
           </a:p>
@@ -2150,7 +2150,7 @@
           <a:p>
             <a:fld id="{3E22BF2E-04DA-469E-97C5-BB68A0368813}" type="datetimeFigureOut">
               <a:rPr lang="en-US" smtClean="0"/>
-              <a:t>3/4/2026</a:t>
+              <a:t>3/23/2026</a:t>
             </a:fld>
             <a:endParaRPr lang="en-US"/>
           </a:p>
@@ -2461,7 +2461,7 @@
           <a:p>
             <a:fld id="{3E22BF2E-04DA-469E-97C5-BB68A0368813}" type="datetimeFigureOut">
               <a:rPr lang="en-US" smtClean="0"/>
-              <a:t>3/4/2026</a:t>
+              <a:t>3/23/2026</a:t>
             </a:fld>
             <a:endParaRPr lang="en-US"/>
           </a:p>
@@ -2749,7 +2749,7 @@
           <a:p>
             <a:fld id="{3E22BF2E-04DA-469E-97C5-BB68A0368813}" type="datetimeFigureOut">
               <a:rPr lang="en-US" smtClean="0"/>
-              <a:t>3/4/2026</a:t>
+              <a:t>3/23/2026</a:t>
             </a:fld>
             <a:endParaRPr lang="en-US"/>
           </a:p>
@@ -2990,7 +2990,7 @@
           <a:p>
             <a:fld id="{3E22BF2E-04DA-469E-97C5-BB68A0368813}" type="datetimeFigureOut">
               <a:rPr lang="en-US" smtClean="0"/>
-              <a:t>3/4/2026</a:t>
+              <a:t>3/23/2026</a:t>
             </a:fld>
             <a:endParaRPr lang="en-US"/>
           </a:p>
@@ -9568,7 +9568,7 @@
         </p:nvSpPr>
         <p:spPr>
           <a:xfrm>
-            <a:off x="9089814" y="2793168"/>
+            <a:off x="8986196" y="4797303"/>
             <a:ext cx="2275530" cy="923330"/>
           </a:xfrm>
           <a:prstGeom prst="rect">
@@ -9618,7 +9618,7 @@
         </p:nvGrpSpPr>
         <p:grpSpPr>
           <a:xfrm>
-            <a:off x="5227038" y="4670475"/>
+            <a:off x="5227038" y="4647030"/>
             <a:ext cx="1588797" cy="523220"/>
             <a:chOff x="5069641" y="3855268"/>
             <a:chExt cx="1588797" cy="523220"/>
@@ -9719,7 +9719,7 @@
         </p:nvSpPr>
         <p:spPr>
           <a:xfrm>
-            <a:off x="4235081" y="1626887"/>
+            <a:off x="4235080" y="1683811"/>
             <a:ext cx="1531277" cy="523220"/>
           </a:xfrm>
           <a:prstGeom prst="rect">
@@ -9735,7 +9735,7 @@
           <a:p>
             <a:r>
               <a:rPr lang="en-US" sz="1400" dirty="0"/>
-              <a:t>one-step Sarsa,</a:t>
+              <a:t>one-step Sarsa</a:t>
             </a:r>
             <a:br>
               <a:rPr lang="en-US" sz="1400" dirty="0"/>
@@ -10089,6 +10089,106 @@
           </p:txBody>
         </p:sp>
       </p:grpSp>
+      <p:sp>
+        <p:nvSpPr>
+          <p:cNvPr id="23" name="TextBox 22">
+            <a:extLst>
+              <a:ext uri="{FF2B5EF4-FFF2-40B4-BE49-F238E27FC236}">
+                <a16:creationId xmlns:a16="http://schemas.microsoft.com/office/drawing/2014/main" id="{E0808173-01FB-4745-DD56-A2D88A5FE9FD}"/>
+              </a:ext>
+            </a:extLst>
+          </p:cNvPr>
+          <p:cNvSpPr txBox="1"/>
+          <p:nvPr/>
+        </p:nvSpPr>
+        <p:spPr>
+          <a:xfrm>
+            <a:off x="8986196" y="2360586"/>
+            <a:ext cx="2275530" cy="1200329"/>
+          </a:xfrm>
+          <a:prstGeom prst="rect">
+            <a:avLst/>
+          </a:prstGeom>
+        </p:spPr>
+        <p:style>
+          <a:lnRef idx="2">
+            <a:schemeClr val="accent3">
+              <a:shade val="15000"/>
+            </a:schemeClr>
+          </a:lnRef>
+          <a:fillRef idx="1">
+            <a:schemeClr val="accent3"/>
+          </a:fillRef>
+          <a:effectRef idx="0">
+            <a:schemeClr val="accent3"/>
+          </a:effectRef>
+          <a:fontRef idx="minor">
+            <a:schemeClr val="lt1"/>
+          </a:fontRef>
+        </p:style>
+        <p:txBody>
+          <a:bodyPr wrap="square" rtlCol="0">
+            <a:spAutoFit/>
+          </a:bodyPr>
+          <a:lstStyle/>
+          <a:p>
+            <a:r>
+              <a:rPr lang="en-US" dirty="0"/>
+              <a:t>Bias decreases the closer we get to the optimal value function.</a:t>
+            </a:r>
+          </a:p>
+        </p:txBody>
+      </p:sp>
+      <p:sp>
+        <p:nvSpPr>
+          <p:cNvPr id="25" name="TextBox 24">
+            <a:extLst>
+              <a:ext uri="{FF2B5EF4-FFF2-40B4-BE49-F238E27FC236}">
+                <a16:creationId xmlns:a16="http://schemas.microsoft.com/office/drawing/2014/main" id="{09B2548B-E9B6-44AE-AA51-21FD905A4927}"/>
+              </a:ext>
+            </a:extLst>
+          </p:cNvPr>
+          <p:cNvSpPr txBox="1"/>
+          <p:nvPr/>
+        </p:nvSpPr>
+        <p:spPr>
+          <a:xfrm>
+            <a:off x="8986196" y="3724748"/>
+            <a:ext cx="2275530" cy="646331"/>
+          </a:xfrm>
+          <a:prstGeom prst="rect">
+            <a:avLst/>
+          </a:prstGeom>
+        </p:spPr>
+        <p:style>
+          <a:lnRef idx="2">
+            <a:schemeClr val="accent3">
+              <a:shade val="15000"/>
+            </a:schemeClr>
+          </a:lnRef>
+          <a:fillRef idx="1">
+            <a:schemeClr val="accent3"/>
+          </a:fillRef>
+          <a:effectRef idx="0">
+            <a:schemeClr val="accent3"/>
+          </a:effectRef>
+          <a:fontRef idx="minor">
+            <a:schemeClr val="lt1"/>
+          </a:fontRef>
+        </p:style>
+        <p:txBody>
+          <a:bodyPr wrap="square" rtlCol="0">
+            <a:spAutoFit/>
+          </a:bodyPr>
+          <a:lstStyle/>
+          <a:p>
+            <a:r>
+              <a:rPr lang="en-US" dirty="0"/>
+              <a:t>Variance decreases with sample size.</a:t>
+            </a:r>
+          </a:p>
+        </p:txBody>
+      </p:sp>
     </p:spTree>
     <p:extLst>
       <p:ext uri="{BB962C8B-B14F-4D97-AF65-F5344CB8AC3E}">
@@ -10191,6 +10291,33 @@
                                   </p:childTnLst>
                                 </p:cTn>
                               </p:par>
+                              <p:par>
+                                <p:cTn id="11" presetID="1" presetClass="entr" presetSubtype="0" fill="hold" grpId="0" nodeType="withEffect">
+                                  <p:stCondLst>
+                                    <p:cond delay="0"/>
+                                  </p:stCondLst>
+                                  <p:childTnLst>
+                                    <p:set>
+                                      <p:cBhvr>
+                                        <p:cTn id="12" dur="1" fill="hold">
+                                          <p:stCondLst>
+                                            <p:cond delay="0"/>
+                                          </p:stCondLst>
+                                        </p:cTn>
+                                        <p:tgtEl>
+                                          <p:spTgt spid="23"/>
+                                        </p:tgtEl>
+                                        <p:attrNameLst>
+                                          <p:attrName>style.visibility</p:attrName>
+                                        </p:attrNameLst>
+                                      </p:cBhvr>
+                                      <p:to>
+                                        <p:strVal val="visible"/>
+                                      </p:to>
+                                    </p:set>
+                                  </p:childTnLst>
+                                </p:cTn>
+                              </p:par>
                             </p:childTnLst>
                           </p:cTn>
                         </p:par>
@@ -10198,26 +10325,26 @@
                     </p:cTn>
                   </p:par>
                   <p:par>
-                    <p:cTn id="11" fill="hold">
+                    <p:cTn id="13" fill="hold">
                       <p:stCondLst>
                         <p:cond delay="indefinite"/>
                       </p:stCondLst>
                       <p:childTnLst>
                         <p:par>
-                          <p:cTn id="12" fill="hold">
+                          <p:cTn id="14" fill="hold">
                             <p:stCondLst>
                               <p:cond delay="0"/>
                             </p:stCondLst>
                             <p:childTnLst>
                               <p:par>
-                                <p:cTn id="13" presetID="1" presetClass="entr" presetSubtype="0" fill="hold" nodeType="clickEffect">
+                                <p:cTn id="15" presetID="1" presetClass="entr" presetSubtype="0" fill="hold" nodeType="clickEffect">
                                   <p:stCondLst>
                                     <p:cond delay="0"/>
                                   </p:stCondLst>
                                   <p:childTnLst>
                                     <p:set>
                                       <p:cBhvr>
-                                        <p:cTn id="14" dur="1" fill="hold">
+                                        <p:cTn id="16" dur="1" fill="hold">
                                           <p:stCondLst>
                                             <p:cond delay="0"/>
                                           </p:stCondLst>
@@ -10243,26 +10370,26 @@
                     </p:cTn>
                   </p:par>
                   <p:par>
-                    <p:cTn id="15" fill="hold">
+                    <p:cTn id="17" fill="hold">
                       <p:stCondLst>
                         <p:cond delay="indefinite"/>
                       </p:stCondLst>
                       <p:childTnLst>
                         <p:par>
-                          <p:cTn id="16" fill="hold">
+                          <p:cTn id="18" fill="hold">
                             <p:stCondLst>
                               <p:cond delay="0"/>
                             </p:stCondLst>
                             <p:childTnLst>
                               <p:par>
-                                <p:cTn id="17" presetID="1" presetClass="entr" presetSubtype="0" fill="hold" grpId="0" nodeType="clickEffect">
+                                <p:cTn id="19" presetID="1" presetClass="entr" presetSubtype="0" fill="hold" grpId="0" nodeType="clickEffect">
                                   <p:stCondLst>
                                     <p:cond delay="0"/>
                                   </p:stCondLst>
                                   <p:childTnLst>
                                     <p:set>
                                       <p:cBhvr>
-                                        <p:cTn id="18" dur="1" fill="hold">
+                                        <p:cTn id="20" dur="1" fill="hold">
                                           <p:stCondLst>
                                             <p:cond delay="0"/>
                                           </p:stCondLst>
@@ -10281,26 +10408,8 @@
                                   </p:childTnLst>
                                 </p:cTn>
                               </p:par>
-                            </p:childTnLst>
-                          </p:cTn>
-                        </p:par>
-                      </p:childTnLst>
-                    </p:cTn>
-                  </p:par>
-                  <p:par>
-                    <p:cTn id="19" fill="hold">
-                      <p:stCondLst>
-                        <p:cond delay="indefinite"/>
-                      </p:stCondLst>
-                      <p:childTnLst>
-                        <p:par>
-                          <p:cTn id="20" fill="hold">
-                            <p:stCondLst>
-                              <p:cond delay="0"/>
-                            </p:stCondLst>
-                            <p:childTnLst>
                               <p:par>
-                                <p:cTn id="21" presetID="1" presetClass="entr" presetSubtype="0" fill="hold" grpId="0" nodeType="clickEffect">
+                                <p:cTn id="21" presetID="1" presetClass="entr" presetSubtype="0" fill="hold" grpId="0" nodeType="withEffect">
                                   <p:stCondLst>
                                     <p:cond delay="0"/>
                                   </p:stCondLst>
@@ -10313,7 +10422,7 @@
                                           </p:stCondLst>
                                         </p:cTn>
                                         <p:tgtEl>
-                                          <p:spTgt spid="3"/>
+                                          <p:spTgt spid="25"/>
                                         </p:tgtEl>
                                         <p:attrNameLst>
                                           <p:attrName>style.visibility</p:attrName>
@@ -10358,7 +10467,7 @@
                                           </p:stCondLst>
                                         </p:cTn>
                                         <p:tgtEl>
-                                          <p:spTgt spid="18"/>
+                                          <p:spTgt spid="3"/>
                                         </p:tgtEl>
                                         <p:attrNameLst>
                                           <p:attrName>style.visibility</p:attrName>
@@ -10403,7 +10512,7 @@
                                           </p:stCondLst>
                                         </p:cTn>
                                         <p:tgtEl>
-                                          <p:spTgt spid="19"/>
+                                          <p:spTgt spid="18"/>
                                         </p:tgtEl>
                                         <p:attrNameLst>
                                           <p:attrName>style.visibility</p:attrName>
@@ -10435,7 +10544,7 @@
                             </p:stCondLst>
                             <p:childTnLst>
                               <p:par>
-                                <p:cTn id="33" presetID="1" presetClass="entr" presetSubtype="0" fill="hold" nodeType="clickEffect">
+                                <p:cTn id="33" presetID="1" presetClass="entr" presetSubtype="0" fill="hold" grpId="0" nodeType="clickEffect">
                                   <p:stCondLst>
                                     <p:cond delay="0"/>
                                   </p:stCondLst>
@@ -10448,7 +10557,7 @@
                                           </p:stCondLst>
                                         </p:cTn>
                                         <p:tgtEl>
-                                          <p:spTgt spid="22"/>
+                                          <p:spTgt spid="19"/>
                                         </p:tgtEl>
                                         <p:attrNameLst>
                                           <p:attrName>style.visibility</p:attrName>
@@ -10493,7 +10602,7 @@
                                           </p:stCondLst>
                                         </p:cTn>
                                         <p:tgtEl>
-                                          <p:spTgt spid="27"/>
+                                          <p:spTgt spid="22"/>
                                         </p:tgtEl>
                                         <p:attrNameLst>
                                           <p:attrName>style.visibility</p:attrName>
@@ -10533,6 +10642,51 @@
                                     <p:set>
                                       <p:cBhvr>
                                         <p:cTn id="42" dur="1" fill="hold">
+                                          <p:stCondLst>
+                                            <p:cond delay="0"/>
+                                          </p:stCondLst>
+                                        </p:cTn>
+                                        <p:tgtEl>
+                                          <p:spTgt spid="27"/>
+                                        </p:tgtEl>
+                                        <p:attrNameLst>
+                                          <p:attrName>style.visibility</p:attrName>
+                                        </p:attrNameLst>
+                                      </p:cBhvr>
+                                      <p:to>
+                                        <p:strVal val="visible"/>
+                                      </p:to>
+                                    </p:set>
+                                  </p:childTnLst>
+                                </p:cTn>
+                              </p:par>
+                            </p:childTnLst>
+                          </p:cTn>
+                        </p:par>
+                      </p:childTnLst>
+                    </p:cTn>
+                  </p:par>
+                  <p:par>
+                    <p:cTn id="43" fill="hold">
+                      <p:stCondLst>
+                        <p:cond delay="indefinite"/>
+                      </p:stCondLst>
+                      <p:childTnLst>
+                        <p:par>
+                          <p:cTn id="44" fill="hold">
+                            <p:stCondLst>
+                              <p:cond delay="0"/>
+                            </p:stCondLst>
+                            <p:childTnLst>
+                              <p:par>
+                                <p:cTn id="45" presetID="1" presetClass="entr" presetSubtype="0" fill="hold" nodeType="clickEffect">
+                                  <p:stCondLst>
+                                    <p:cond delay="0"/>
+                                  </p:stCondLst>
+                                  <p:childTnLst>
+                                    <p:set>
+                                      <p:cBhvr>
+                                        <p:cTn id="46" dur="1" fill="hold">
                                           <p:stCondLst>
                                             <p:cond delay="0"/>
                                           </p:stCondLst>
@@ -10584,6 +10738,8 @@
       <p:bldP spid="19" grpId="0"/>
       <p:bldP spid="24" grpId="0" animBg="1"/>
       <p:bldP spid="26" grpId="0" animBg="1"/>
+      <p:bldP spid="23" grpId="0" animBg="1"/>
+      <p:bldP spid="25" grpId="0" animBg="1"/>
     </p:bldLst>
   </p:timing>
 </p:sld>
@@ -11127,8 +11283,8 @@
           </a:p>
         </p:txBody>
       </p:sp>
-      <mc:AlternateContent xmlns:mc="http://schemas.openxmlformats.org/markup-compatibility/2006">
-        <mc:Choice xmlns:a14="http://schemas.microsoft.com/office/drawing/2010/main" Requires="a14">
+      <mc:AlternateContent xmlns:mc="http://schemas.openxmlformats.org/markup-compatibility/2006" xmlns:a14="http://schemas.microsoft.com/office/drawing/2010/main">
+        <mc:Choice Requires="a14">
           <p:sp>
             <p:nvSpPr>
               <p:cNvPr id="3" name="Content Placeholder 2">
@@ -11265,7 +11421,7 @@
             </p:txBody>
           </p:sp>
         </mc:Choice>
-        <mc:Fallback>
+        <mc:Fallback xmlns="">
           <p:sp>
             <p:nvSpPr>
               <p:cNvPr id="3" name="Content Placeholder 2">
@@ -12611,8 +12767,8 @@
           </a:p>
         </p:txBody>
       </p:sp>
-      <mc:AlternateContent xmlns:mc="http://schemas.openxmlformats.org/markup-compatibility/2006">
-        <mc:Choice xmlns:a14="http://schemas.microsoft.com/office/drawing/2010/main" Requires="a14">
+      <mc:AlternateContent xmlns:mc="http://schemas.openxmlformats.org/markup-compatibility/2006" xmlns:a14="http://schemas.microsoft.com/office/drawing/2010/main">
+        <mc:Choice Requires="a14">
           <p:sp>
             <p:nvSpPr>
               <p:cNvPr id="3" name="Content Placeholder 2">
@@ -12859,7 +13015,7 @@
             </p:txBody>
           </p:sp>
         </mc:Choice>
-        <mc:Fallback>
+        <mc:Fallback xmlns="">
           <p:sp>
             <p:nvSpPr>
               <p:cNvPr id="3" name="Content Placeholder 2">

--- a/slides/Lecture_Chapter08.pptx
+++ b/slides/Lecture_Chapter08.pptx
@@ -330,7 +330,7 @@
           <a:p>
             <a:fld id="{3E22BF2E-04DA-469E-97C5-BB68A0368813}" type="datetimeFigureOut">
               <a:rPr lang="en-US" smtClean="0"/>
-              <a:t>3/23/2026</a:t>
+              <a:t>3/30/2026</a:t>
             </a:fld>
             <a:endParaRPr lang="en-US"/>
           </a:p>
@@ -528,7 +528,7 @@
           <a:p>
             <a:fld id="{3E22BF2E-04DA-469E-97C5-BB68A0368813}" type="datetimeFigureOut">
               <a:rPr lang="en-US" smtClean="0"/>
-              <a:t>3/23/2026</a:t>
+              <a:t>3/30/2026</a:t>
             </a:fld>
             <a:endParaRPr lang="en-US"/>
           </a:p>
@@ -736,7 +736,7 @@
           <a:p>
             <a:fld id="{3E22BF2E-04DA-469E-97C5-BB68A0368813}" type="datetimeFigureOut">
               <a:rPr lang="en-US" smtClean="0"/>
-              <a:t>3/23/2026</a:t>
+              <a:t>3/30/2026</a:t>
             </a:fld>
             <a:endParaRPr lang="en-US"/>
           </a:p>
@@ -944,7 +944,7 @@
           <a:p>
             <a:fld id="{3E22BF2E-04DA-469E-97C5-BB68A0368813}" type="datetimeFigureOut">
               <a:rPr lang="en-US" smtClean="0"/>
-              <a:t>3/23/2026</a:t>
+              <a:t>3/30/2026</a:t>
             </a:fld>
             <a:endParaRPr lang="en-US"/>
           </a:p>
@@ -1219,7 +1219,7 @@
           <a:p>
             <a:fld id="{3E22BF2E-04DA-469E-97C5-BB68A0368813}" type="datetimeFigureOut">
               <a:rPr lang="en-US" smtClean="0"/>
-              <a:t>3/23/2026</a:t>
+              <a:t>3/30/2026</a:t>
             </a:fld>
             <a:endParaRPr lang="en-US"/>
           </a:p>
@@ -1484,7 +1484,7 @@
           <a:p>
             <a:fld id="{3E22BF2E-04DA-469E-97C5-BB68A0368813}" type="datetimeFigureOut">
               <a:rPr lang="en-US" smtClean="0"/>
-              <a:t>3/23/2026</a:t>
+              <a:t>3/30/2026</a:t>
             </a:fld>
             <a:endParaRPr lang="en-US"/>
           </a:p>
@@ -1896,7 +1896,7 @@
           <a:p>
             <a:fld id="{3E22BF2E-04DA-469E-97C5-BB68A0368813}" type="datetimeFigureOut">
               <a:rPr lang="en-US" smtClean="0"/>
-              <a:t>3/23/2026</a:t>
+              <a:t>3/30/2026</a:t>
             </a:fld>
             <a:endParaRPr lang="en-US"/>
           </a:p>
@@ -2037,7 +2037,7 @@
           <a:p>
             <a:fld id="{3E22BF2E-04DA-469E-97C5-BB68A0368813}" type="datetimeFigureOut">
               <a:rPr lang="en-US" smtClean="0"/>
-              <a:t>3/23/2026</a:t>
+              <a:t>3/30/2026</a:t>
             </a:fld>
             <a:endParaRPr lang="en-US"/>
           </a:p>
@@ -2150,7 +2150,7 @@
           <a:p>
             <a:fld id="{3E22BF2E-04DA-469E-97C5-BB68A0368813}" type="datetimeFigureOut">
               <a:rPr lang="en-US" smtClean="0"/>
-              <a:t>3/23/2026</a:t>
+              <a:t>3/30/2026</a:t>
             </a:fld>
             <a:endParaRPr lang="en-US"/>
           </a:p>
@@ -2461,7 +2461,7 @@
           <a:p>
             <a:fld id="{3E22BF2E-04DA-469E-97C5-BB68A0368813}" type="datetimeFigureOut">
               <a:rPr lang="en-US" smtClean="0"/>
-              <a:t>3/23/2026</a:t>
+              <a:t>3/30/2026</a:t>
             </a:fld>
             <a:endParaRPr lang="en-US"/>
           </a:p>
@@ -2749,7 +2749,7 @@
           <a:p>
             <a:fld id="{3E22BF2E-04DA-469E-97C5-BB68A0368813}" type="datetimeFigureOut">
               <a:rPr lang="en-US" smtClean="0"/>
-              <a:t>3/23/2026</a:t>
+              <a:t>3/30/2026</a:t>
             </a:fld>
             <a:endParaRPr lang="en-US"/>
           </a:p>
@@ -2990,7 +2990,7 @@
           <a:p>
             <a:fld id="{3E22BF2E-04DA-469E-97C5-BB68A0368813}" type="datetimeFigureOut">
               <a:rPr lang="en-US" smtClean="0"/>
-              <a:t>3/23/2026</a:t>
+              <a:t>3/30/2026</a:t>
             </a:fld>
             <a:endParaRPr lang="en-US"/>
           </a:p>
@@ -4014,6 +4014,87 @@
           </a:extLst>
         </p:spPr>
       </p:pic>
+      <p:grpSp>
+        <p:nvGrpSpPr>
+          <p:cNvPr id="7" name="Group 6">
+            <a:extLst>
+              <a:ext uri="{FF2B5EF4-FFF2-40B4-BE49-F238E27FC236}">
+                <a16:creationId xmlns:a16="http://schemas.microsoft.com/office/drawing/2014/main" id="{DA1C6744-BD97-2C10-F393-A0B726F71E7A}"/>
+              </a:ext>
+            </a:extLst>
+          </p:cNvPr>
+          <p:cNvGrpSpPr/>
+          <p:nvPr/>
+        </p:nvGrpSpPr>
+        <p:grpSpPr>
+          <a:xfrm>
+            <a:off x="10961015" y="4868822"/>
+            <a:ext cx="1037459" cy="1303078"/>
+            <a:chOff x="5248582" y="2401735"/>
+            <a:chExt cx="1694835" cy="2054530"/>
+          </a:xfrm>
+        </p:grpSpPr>
+        <p:pic>
+          <p:nvPicPr>
+            <p:cNvPr id="8" name="Picture 7">
+              <a:extLst>
+                <a:ext uri="{FF2B5EF4-FFF2-40B4-BE49-F238E27FC236}">
+                  <a16:creationId xmlns:a16="http://schemas.microsoft.com/office/drawing/2014/main" id="{2F5FC233-1ACF-0EE9-5B1F-F0A29270EECF}"/>
+                </a:ext>
+              </a:extLst>
+            </p:cNvPr>
+            <p:cNvPicPr>
+              <a:picLocks noChangeAspect="1"/>
+            </p:cNvPicPr>
+            <p:nvPr/>
+          </p:nvPicPr>
+          <p:blipFill>
+            <a:blip r:embed="rId6"/>
+            <a:stretch>
+              <a:fillRect/>
+            </a:stretch>
+          </p:blipFill>
+          <p:spPr>
+            <a:xfrm>
+              <a:off x="5248582" y="2401735"/>
+              <a:ext cx="1694835" cy="2054530"/>
+            </a:xfrm>
+            <a:prstGeom prst="rect">
+              <a:avLst/>
+            </a:prstGeom>
+          </p:spPr>
+        </p:pic>
+        <p:pic>
+          <p:nvPicPr>
+            <p:cNvPr id="9" name="Picture 8">
+              <a:extLst>
+                <a:ext uri="{FF2B5EF4-FFF2-40B4-BE49-F238E27FC236}">
+                  <a16:creationId xmlns:a16="http://schemas.microsoft.com/office/drawing/2014/main" id="{26CB3135-CE78-1137-FBA3-29AA8592D8FA}"/>
+                </a:ext>
+              </a:extLst>
+            </p:cNvPr>
+            <p:cNvPicPr>
+              <a:picLocks noChangeAspect="1"/>
+            </p:cNvPicPr>
+            <p:nvPr/>
+          </p:nvPicPr>
+          <p:blipFill>
+            <a:blip r:embed="rId7"/>
+            <a:stretch>
+              <a:fillRect/>
+            </a:stretch>
+          </p:blipFill>
+          <p:spPr>
+            <a:xfrm>
+              <a:off x="5315643" y="2435129"/>
+              <a:ext cx="1560711" cy="1560711"/>
+            </a:xfrm>
+            <a:prstGeom prst="rect">
+              <a:avLst/>
+            </a:prstGeom>
+          </p:spPr>
+        </p:pic>
+      </p:grpSp>
     </p:spTree>
     <p:extLst>
       <p:ext uri="{BB962C8B-B14F-4D97-AF65-F5344CB8AC3E}">
